--- a/vi/files/slides/Session_8_VN.pptx
+++ b/vi/files/slides/Session_8_VN.pptx
@@ -1354,7 +1354,7 @@
           <a:p>
             <a:r>
               <a:rPr lang="en-US" sz="1400" b="0" dirty="0"/>
-              <a:t>THỰC HÀNH BẢN THẢO 2 (0:30-1:00). Cấp độ 2. Các nhóm thêm Đặt vấn đề, Bàn luận, Tóm tắt và Tiêu đề vào phần Phương pháp + Kết quả hôm qua.</a:t>
+              <a:t>THỰC HÀNH BẢN THẢO 2 (0:30-1:00). Bộ dữ liệu khóa học. Các nhóm thêm Đặt vấn đề, Bàn luận, Tóm tắt và Tiêu đề vào phần Phương pháp + Kết quả hôm qua.</a:t>
             </a:r>
           </a:p>
           <a:p>
@@ -5353,7 +5353,13 @@
           <a:p>
             <a:r>
               <a:rPr lang="en-US" sz="1400" b="0" dirty="0"/>
-              <a:t>Học phần nâng cao (tùy chọn, xem Advanced_Modules/): tự phân tích dữ liệu của mình bằng R, phân tích gộp, mô hình dự báo và học máy, nghiên cứu độ chính xác chẩn đoán.</a:t>
+              <a:t>Cấp độ 2 (thực hành, cho những ai muốn tự phân tích): dự án R có thể tái lập, quản lý dữ liệu, hồi quy tuyến tính và logistic chuyên sâu, dữ liệu thiếu, bảng và hình đạt chuẩn công bố. Điều kiện: đã học khóa này và khóa miễn phí Phân tích dữ liệu lâm sàng với R của Neudata.</a:t>
+            </a:r>
+          </a:p>
+          <a:p>
+            <a:r>
+              <a:rPr lang="en-US" sz="1400" b="0" dirty="0"/>
+              <a:t>Cấp độ 3 (theo yêu cầu): phương pháp nâng cao cho dữ liệu phức tạp - phân tích gộp, mô hình dự báo và học máy, độ chính xác chẩn đoán, phân tích sống còn nâng cao, mô hình dọc và đa tầng. Xem Course_Levels/.</a:t>
             </a:r>
           </a:p>
           <a:p>
@@ -30117,7 +30123,7 @@
                 <a:latin typeface="Segoe UI"/>
                 <a:cs typeface="Segoe UI"/>
               </a:rPr>
-              <a:t>Bạn muốn học chủ đề nâng cao nào tiếp theo?</a:t>
+              <a:t>Bạn có quan tâm đến Cấp độ 2 (thực hành R)?</a:t>
             </a:r>
           </a:p>
         </p:txBody>
@@ -31462,7 +31468,7 @@
                 <a:latin typeface="Segoe UI"/>
                 <a:cs typeface="Segoe UI"/>
               </a:rPr>
-              <a:t>Khóa R miễn phí: tự chạy phân tích</a:t>
+              <a:t>Cấp độ 2: thực hành phân tích bằng R</a:t>
             </a:r>
           </a:p>
           <a:p>
@@ -31483,7 +31489,7 @@
                 <a:latin typeface="Segoe UI"/>
                 <a:cs typeface="Segoe UI"/>
               </a:rPr>
-              <a:t>Các học phần nâng cao tùy chọn</a:t>
+              <a:t>Cấp độ 3: phương pháp nâng cao</a:t>
             </a:r>
           </a:p>
         </p:txBody>

--- a/vi/files/slides/Session_8_VN.pptx
+++ b/vi/files/slides/Session_8_VN.pptx
@@ -742,7 +742,7 @@
           <a:p>
             <a:r>
               <a:rPr lang="en-US" sz="1400" b="0" dirty="0"/>
-              <a:t>BUỔI 8 (0:00). Cuối tuần 4, Chủ Nhật - buổi cuối cùng. Hôm nay bản thảo FLUID-ICU trở thành bản nháp hoàn chỉnh, chúng ta theo một bài báo từ lúc nộp đến khi đăng, luyện phản biện, và mỗi nhóm trình bày đề cương của mình.</a:t>
+              <a:t>BUỔI 8 (0:00). Tuần 8, Thứ Bảy - buổi cuối cùng. Hôm nay bản thảo FLUID-ICU trở thành bản nháp hoàn chỉnh, chúng ta theo một bài báo từ lúc nộp đến khi đăng, luyện phản biện, và mỗi nhóm trình bày đề cương của mình.</a:t>
             </a:r>
           </a:p>
           <a:p>
@@ -1354,7 +1354,7 @@
           <a:p>
             <a:r>
               <a:rPr lang="en-US" sz="1400" b="0" dirty="0"/>
-              <a:t>THỰC HÀNH BẢN THẢO 2 (0:30-1:00). Bộ dữ liệu khóa học. Các nhóm thêm Đặt vấn đề, Bàn luận, Tóm tắt và Tiêu đề vào phần Phương pháp + Kết quả hôm qua.</a:t>
+              <a:t>THỰC HÀNH BẢN THẢO 2 (0:30-1:00). Bộ dữ liệu khóa học. Các nhóm thêm Đặt vấn đề, Bàn luận, Tóm tắt và Tiêu đề vào phần Phương pháp + Kết quả thứ Bảy tuần trước.</a:t>
             </a:r>
           </a:p>
           <a:p>
@@ -2944,7 +2944,7 @@
           <a:p>
             <a:r>
               <a:rPr lang="en-US" sz="1400" b="0" dirty="0"/>
-              <a:t>Thứ tự theo thứ tự viết hôm qua: Đặt vấn đề, Bàn luận, rồi Tóm tắt và Tiêu đề sau cùng.</a:t>
+              <a:t>Thứ tự theo thứ tự viết thứ Bảy tuần trước: Đặt vấn đề, Bàn luận, rồi Tóm tắt và Tiêu đề sau cùng.</a:t>
             </a:r>
           </a:p>
           <a:p>
@@ -9066,7 +9066,7 @@
                 <a:latin typeface="Segoe UI"/>
                 <a:cs typeface="Segoe UI"/>
               </a:rPr>
-              <a:t>Cuối tuần 4 · Chủ Nhật</a:t>
+              <a:t>Tuần 8 · Thứ Bảy</a:t>
             </a:r>
           </a:p>
           <a:p>
@@ -30061,7 +30061,7 @@
                 <a:latin typeface="Segoe UI"/>
                 <a:cs typeface="Segoe UI"/>
               </a:rPr>
-              <a:t>Chấm điểm từng cuối tuần: nội dung, tốc độ, mức hữu ích</a:t>
+              <a:t>Chấm điểm từng buổi: nội dung, tốc độ, mức hữu ích</a:t>
             </a:r>
           </a:p>
           <a:p>

--- a/vi/files/slides/Session_8_VN.pptx
+++ b/vi/files/slides/Session_8_VN.pptx
@@ -742,7 +742,7 @@
           <a:p>
             <a:r>
               <a:rPr lang="en-US" sz="1400" b="0" dirty="0"/>
-              <a:t>BUỔI 8 (0:00). Tuần 8, Thứ Bảy - buổi cuối cùng. Hôm nay bản thảo FLUID-ICU trở thành bản nháp hoàn chỉnh, chúng ta theo một bài báo từ lúc nộp đến khi đăng, luyện phản biện, và mỗi nhóm trình bày đề cương của mình.</a:t>
+              <a:t>BUỔI 8 (0:00). Tuần 8, Thứ Bảy: buổi cuối cùng. Hôm nay bản thảo FLUID-ICU trở thành bản nháp hoàn chỉnh, chúng ta theo một bài báo từ lúc nộp đến khi đăng, luyện phản biện, và mỗi nhóm trình bày đề cương của mình.</a:t>
             </a:r>
           </a:p>
           <a:p>
@@ -847,7 +847,7 @@
           <a:p>
             <a:r>
               <a:rPr lang="en-US" sz="1400" b="0" dirty="0"/>
-              <a:t>Câu 3: không dùng 'xu hướng' - nêu ước lượng và nói KTC chạm 1.</a:t>
+              <a:t>Câu 3: không dùng 'xu hướng'. Nêu ước lượng và nói KTC chạm 1.</a:t>
             </a:r>
           </a:p>
           <a:p>
@@ -934,7 +934,7 @@
           <a:p>
             <a:r>
               <a:rPr lang="en-US" sz="1400" b="0" dirty="0"/>
-              <a:t>Ý chính: đa số tạp chí lâm sàng yêu cầu tóm tắt có cấu trúc - Đặt vấn đề, Phương pháp, Kết quả, Kết luận - khoảng 250-300 từ; thử nghiệm thêm số đăng ký. Nhiều người đọc không đọc tiếp, nên tóm tắt phải tự đứng được.</a:t>
+              <a:t>Ý chính: đa số tạp chí lâm sàng yêu cầu tóm tắt có cấu trúc (Đặt vấn đề, Phương pháp, Kết quả, Kết luận), khoảng 250-300 từ; thử nghiệm thêm số đăng ký. Nhiều người đọc không đọc tiếp, nên tóm tắt phải tự đứng được.</a:t>
             </a:r>
           </a:p>
           <a:p>
@@ -1039,7 +1039,7 @@
           <a:p>
             <a:r>
               <a:rPr lang="en-US" sz="1400" b="0" dirty="0"/>
-              <a:t>VÍ DỤ MẪU (dữ liệu MÔ PHỎNG; khoảng 120 từ - tóm tắt đầy đủ tối đa 250).</a:t>
+              <a:t>VÍ DỤ MẪU (dữ liệu MÔ PHỎNG; khoảng 120 từ, còn tóm tắt đầy đủ tối đa 250).</a:t>
             </a:r>
           </a:p>
           <a:p>
@@ -1063,13 +1063,13 @@
           <a:p>
             <a:r>
               <a:rPr lang="en-US" sz="1400" b="0" dirty="0"/>
-              <a:t>Kết luận: 'liên quan mức độ vừa phải' - khớp với KTC hiệu chỉnh 1,02 đến 2,59.</a:t>
+              <a:t>Kết luận: 'liên quan mức độ vừa phải', khớp với KTC hiệu chỉnh 1,02 đến 2,59.</a:t>
             </a:r>
           </a:p>
           <a:p>
             <a:r>
               <a:rPr lang="en-US" sz="1400" b="0" dirty="0"/>
-              <a:t>Hỏi: câu nào trong tóm tắt sẽ thay đổi nếu KTC hiệu chỉnh là 0,95 đến 2,40? Đáp án: Kết quả và Kết luận - 'không có bằng chứng rõ về liên quan sau hiệu chỉnh'.</a:t>
+              <a:t>Hỏi: câu nào trong tóm tắt sẽ thay đổi nếu KTC hiệu chỉnh là 0,95 đến 2,40? Đáp án: Kết quả và Kết luận, sẽ thành 'không có bằng chứng rõ về liên quan sau hiệu chỉnh'.</a:t>
             </a:r>
           </a:p>
         </p:txBody>
@@ -1156,7 +1156,7 @@
           <a:p>
             <a:r>
               <a:rPr lang="en-US" sz="1400" b="0" dirty="0"/>
-              <a:t>Bài 1 (chú giải #1): tiêu đề có nêu thiết kế - tốt - nhưng hơn 25 từ và có từ đánh giá. Phiên bản mô tả ngắn hơn có trên slide.</a:t>
+              <a:t>Bài 1 (chú giải #1): tiêu đề có nêu thiết kế (tốt), nhưng hơn 25 từ và có từ đánh giá. Phiên bản mô tả ngắn hơn có trên slide.</a:t>
             </a:r>
           </a:p>
           <a:p>
@@ -1174,7 +1174,7 @@
           <a:p>
             <a:r>
               <a:rPr lang="en-US" sz="1400" b="0" dirty="0"/>
-              <a:t>Hỏi: nói nghiên cứu của nhóm trong một dòng, bắt đầu bằng thiết kế. Đó là bản nháp tiêu đề tạm - các bạn sẽ viết nó trong hoạt động cuối phần này.</a:t>
+              <a:t>Hỏi: nói nghiên cứu của nhóm trong một dòng, bắt đầu bằng thiết kế. Đó là bản nháp tiêu đề tạm. Các bạn sẽ viết nó trong hoạt động cuối phần này.</a:t>
             </a:r>
           </a:p>
         </p:txBody>
@@ -1255,13 +1255,13 @@
           <a:p>
             <a:r>
               <a:rPr lang="en-US" sz="1400" b="0" dirty="0"/>
-              <a:t>Tài liệu tham khảo: dùng phần mềm quản lý tài liệu (Zotero, Mendeley, EndNote) và kiểm tra từng trích dẫn. Ở Bài 2, danh sách biến hiệu chỉnh dẫn tài liệu 26 - bài định nghĩa Sepsis-3 - gần như chắc chắn sai số (chú giải #22). Không bao giờ trích dẫn tài liệu do AI gợi ý mà chưa đọc.</a:t>
+              <a:t>Tài liệu tham khảo: dùng phần mềm quản lý tài liệu (Zotero, Mendeley, EndNote) và kiểm tra từng trích dẫn. Ở Bài 2, danh sách biến hiệu chỉnh dẫn tài liệu 26 (bài định nghĩa Sepsis-3), gần như chắc chắn sai số (chú giải #22). Không bao giờ trích dẫn tài liệu do AI gợi ý mà chưa đọc.</a:t>
             </a:r>
           </a:p>
           <a:p>
             <a:r>
               <a:rPr lang="en-US" sz="1400" b="0" dirty="0"/>
-              <a:t>Bảng kiểm báo cáo: điền CONSORT hoặc STROBE trong lúc viết, kèm số trang - nhiều tạp chí yêu cầu khi nộp. Cả hai bài đều không nêu tên hướng dẫn (cả hai bản tóm tắt chú giải đều chỉ ra).</a:t>
+              <a:t>Bảng kiểm báo cáo: điền CONSORT hoặc STROBE trong lúc viết, kèm số trang. Nhiều tạp chí yêu cầu khi nộp. Cả hai bài đều không nêu tên hướng dẫn (cả hai bản tóm tắt chú giải đều chỉ ra).</a:t>
             </a:r>
           </a:p>
           <a:p>
@@ -1453,7 +1453,7 @@
           <a:p>
             <a:r>
               <a:rPr lang="en-US" sz="1400" b="0" dirty="0"/>
-              <a:t>Nhóm Q4: bàn luận vì sao kết quả phân tích ca đầy đủ và quy gán khác nhau (hoặc không). Nhóm Q5: chỉ người sống sót - nói rõ ai bị thiếu.</a:t>
+              <a:t>Nhóm Q4: bàn luận vì sao kết quả phân tích ca đầy đủ và quy gán khác nhau (hoặc không). Nhóm Q5: chỉ người sống sót, nên nói rõ ai bị thiếu.</a:t>
             </a:r>
           </a:p>
           <a:p>
@@ -1546,7 +1546,7 @@
           <a:p>
             <a:r>
               <a:rPr lang="en-US" sz="1400" b="0" dirty="0"/>
-              <a:t>Trong giờ giải lao: đặt bài báo và bộ tài liệu thẩm định (Practicals/s8_exercises.md, Phần D) lên bàn - Bài 1 ở bàn 1-3, Bài 2 ở bàn 4-5. Phát bản GỐC (không chú giải).</a:t>
+              <a:t>Trong giờ giải lao: đặt bài báo và bộ tài liệu thẩm định (Practicals/s8_exercises.md, Phần D) lên bàn: Bài 1 ở bàn 1-3, Bài 2 ở bàn 4-5. Phát bản GỐC (không chú giải).</a:t>
             </a:r>
           </a:p>
           <a:p>
@@ -1558,7 +1558,7 @@
           <a:p>
             <a:r>
               <a:rPr lang="en-US" sz="1400" b="0" dirty="0"/>
-              <a:t>Thu năm bản nháp bản thảo (thư mục chung) - cần cho việc trao đổi phản biện.</a:t>
+              <a:t>Thu năm bản nháp bản thảo (thư mục chung). Các bản này cần cho việc trao đổi phản biện.</a:t>
             </a:r>
           </a:p>
         </p:txBody>
@@ -1645,13 +1645,13 @@
           <a:p>
             <a:r>
               <a:rPr lang="en-US" sz="1400" b="0" dirty="0"/>
-              <a:t>Nhịp: khoảng 2 phút mỗi slide - chỉ vào hình, nêu một ví dụ, đi tiếp. Phần thẩm định cần trọn 20 phút lúc 1:40.</a:t>
+              <a:t>Nhịp: khoảng 2 phút mỗi slide. Chỉ vào hình, nêu một ví dụ, đi tiếp. Phần thẩm định cần trọn 20 phút lúc 1:40.</a:t>
             </a:r>
           </a:p>
           <a:p>
             <a:r>
               <a:rPr lang="en-US" sz="1400" b="0" dirty="0"/>
-              <a:t>Liên hệ bản thảo: bản nháp FLUID-ICU sẽ đi đúng con đường này - bảng kiểm STROBE, chọn tạp chí, bộ hồ sơ nộp bài, phản biện.</a:t>
+              <a:t>Liên hệ bản thảo: bản nháp FLUID-ICU sẽ đi đúng con đường này: bảng kiểm STROBE, chọn tạp chí, bộ hồ sơ nộp bài, phản biện.</a:t>
             </a:r>
           </a:p>
         </p:txBody>
@@ -1744,7 +1744,7 @@
           <a:p>
             <a:r>
               <a:rPr lang="en-US" sz="1400" b="0" dirty="0"/>
-              <a:t>Ví dụ xuyên suốt: Bài 1 là RCT - CONSORT; Bài 2 là đoàn hệ - STROBE. Phát hiện thú vị từ bản chú giải: cả hai bài đều không ghi tên hướng dẫn. Bài 1 có sơ đồ CONSORT trong bài chính; Bài 2 để sơ đồ chọn bệnh trong phụ lục.</a:t>
+              <a:t>Ví dụ xuyên suốt: Bài 1 là RCT (CONSORT); Bài 2 là đoàn hệ (STROBE). Phát hiện thú vị từ bản chú giải: cả hai bài đều không ghi tên hướng dẫn. Bài 1 có sơ đồ CONSORT trong bài chính; Bài 2 để sơ đồ chọn bệnh trong phụ lục.</a:t>
             </a:r>
           </a:p>
           <a:p>
@@ -1756,7 +1756,7 @@
           <a:p>
             <a:r>
               <a:rPr lang="en-US" sz="1400" b="0" dirty="0"/>
-              <a:t>Quan niệm sai: 'hướng dẫn báo cáo chỉ cách làm nghiên cứu'. Chúng chỉ cần báo cáo gì - nhưng đọc chúng TRƯỚC khi bắt đầu là bảng kiểm thiết kế tốt nhất.</a:t>
+              <a:t>Quan niệm sai: 'hướng dẫn báo cáo chỉ cách làm nghiên cứu'. Chúng chỉ cần báo cáo gì, nhưng đọc chúng TRƯỚC khi bắt đầu là bảng kiểm thiết kế tốt nhất.</a:t>
             </a:r>
           </a:p>
           <a:p>
@@ -1948,7 +1948,7 @@
           <a:p>
             <a:r>
               <a:rPr lang="en-US" sz="1400" b="0" dirty="0"/>
-              <a:t>Tốc độ: Bài 1 từ lúc nộp đến khi được chấp nhận khoảng 7 tuần (10/9 - 31/10/2024); Bài 2 khoảng 7 tháng (15/1 - 24/8/2023). Tốc độ khác nhau và tự nó không nói lên chất lượng.</a:t>
+              <a:t>Tốc độ: Bài 1 từ lúc nộp đến khi được chấp nhận khoảng 7 tuần (10/9 đến 31/10/2024); Bài 2 khoảng 7 tháng (15/1 đến 24/8/2023). Tốc độ khác nhau và tự nó không nói lên chất lượng.</a:t>
             </a:r>
           </a:p>
           <a:p>
@@ -2035,25 +2035,25 @@
           <a:p>
             <a:r>
               <a:rPr lang="en-US" sz="1400" b="0" dirty="0"/>
-              <a:t>Tiền ấn phẩm (preprint): bản thảo đăng trên máy chủ công khai (với nghiên cứu y tế, nổi tiếng nhất là medRxiv) trước hoặc trong khi phản biện. Lợi ích: nhanh, có dấu thời gian công khai, nhận góp ý sớm. Rủi ro: chưa qua phản biện, báo chí hoặc đồng nghiệp có thể coi như đã được khẳng định. Đa số tạp chí chấp nhận bài đã đăng tiền ấn phẩm - kiểm tra chính sách trước, và cập nhật bản tiền ấn phẩm bằng trích dẫn bài đã đăng.</a:t>
+              <a:t>Tiền ấn phẩm (preprint): bản thảo đăng trên máy chủ công khai (với nghiên cứu y tế, nổi tiếng nhất là medRxiv) trước hoặc trong khi phản biện. Lợi ích: nhanh, có dấu thời gian công khai, nhận góp ý sớm. Rủi ro: chưa qua phản biện, báo chí hoặc đồng nghiệp có thể coi như đã được khẳng định. Đa số tạp chí chấp nhận bài đã đăng tiền ấn phẩm. Kiểm tra chính sách trước, và cập nhật bản tiền ấn phẩm bằng trích dẫn bài đã đăng.</a:t>
             </a:r>
           </a:p>
           <a:p>
             <a:r>
               <a:rPr lang="en-US" sz="1400" b="0" dirty="0"/>
-              <a:t>Truy cập mở: gold OA là tạp chí cho đọc miễn phí và thường thu phí xử lý bài (APC) - cả hai bài của chúng ta đều là gold OA (chú giải #2). Green OA là tự lưu bản thảo được chấp nhận vào kho lưu trữ, thường sau một thời gian cấm. Hỏi về miễn giảm và thỏa thuận của cơ sở.</a:t>
+              <a:t>Truy cập mở: gold OA là tạp chí cho đọc miễn phí và thường thu phí xử lý bài (APC). Cả hai bài của chúng ta đều là gold OA (chú giải #2). Green OA là tự lưu bản thảo được chấp nhận vào kho lưu trữ, thường sau một thời gian cấm. Hỏi về miễn giảm và thỏa thuận của cơ sở.</a:t>
             </a:r>
           </a:p>
           <a:p>
             <a:r>
               <a:rPr lang="en-US" sz="1400" b="0" dirty="0"/>
-              <a:t>Giấy phép: Bài 2 là CC BY (ai cũng được tái sử dụng và chỉnh sửa nếu ghi nguồn); Bài 1 là CC BY-NC-ND (được chia sẻ, không được chỉnh sửa hay dùng thương mại) - điều này cũng quan trọng khi muốn dùng lại hình trong giảng dạy.</a:t>
+              <a:t>Giấy phép: Bài 2 là CC BY (ai cũng được tái sử dụng và chỉnh sửa nếu ghi nguồn); Bài 1 là CC BY-NC-ND (được chia sẻ, không được chỉnh sửa hay dùng thương mại). Điều này cũng quan trọng khi muốn dùng lại hình trong giảng dạy.</a:t>
             </a:r>
           </a:p>
           <a:p>
             <a:r>
               <a:rPr lang="en-US" sz="1400" b="0" dirty="0"/>
-              <a:t>Hỏi: bạn muốn vẽ lại sơ đồ chọn bệnh của Bài 1 để đưa vào slide giảng dạy. Có được không? Đáp án: chỉnh sửa không nằm trong CC BY-NC-ND - hãy xin phép hoặc trích dẫn và dẫn liên kết.</a:t>
+              <a:t>Hỏi: bạn muốn vẽ lại sơ đồ chọn bệnh của Bài 1 để đưa vào slide giảng dạy. Có được không? Đáp án: chỉnh sửa không nằm trong CC BY-NC-ND, nên hãy xin phép hoặc trích dẫn và dẫn liên kết.</a:t>
             </a:r>
           </a:p>
         </p:txBody>
@@ -2146,13 +2146,13 @@
           <a:p>
             <a:r>
               <a:rPr lang="en-US" sz="1400" b="0" dirty="0"/>
-              <a:t>Kiểm tra: Think.Check.Submit (bảng kiểm miễn phí), DOAJ cho tạp chí truy cập mở, NLM Catalog để xem tạp chí có thật sự trong MEDLINE - và hỏi thủ thư bệnh viện.</a:t>
+              <a:t>Kiểm tra: Think.Check.Submit (bảng kiểm miễn phí), DOAJ cho tạp chí truy cập mở, NLM Catalog để xem tạp chí có thật sự trong MEDLINE. Hỏi thêm thủ thư bệnh viện.</a:t>
             </a:r>
           </a:p>
           <a:p>
             <a:r>
               <a:rPr lang="en-US" sz="1400" b="0" dirty="0"/>
-              <a:t>Hỏi: tháng vừa rồi bao nhiêu người nhận được email kiểu này? Thường rất nhiều - ai đã từng đăng một bài đều nhận.</a:t>
+              <a:t>Hỏi: tháng vừa rồi bao nhiêu người nhận được email kiểu này? Thường rất nhiều: ai đã từng đăng một bài đều nhận.</a:t>
             </a:r>
           </a:p>
           <a:p>
@@ -2245,7 +2245,7 @@
           <a:p>
             <a:r>
               <a:rPr lang="en-US" sz="1400" b="0" dirty="0"/>
-              <a:t>Giữ trong 3 phút: trang chủ EQUATOR - ô tìm kiếm - trang CONSORT 2025 - bảng kiểm và sơ đồ; rồi STROBE. Sau đó tìm tên một tạp chí trên DOAJ, và trên NLM Catalog với bộ lọc 'currently indexed in MEDLINE'. Kết thúc bằng bảng kiểm Think.Check.Submit.</a:t>
+              <a:t>Giữ trong 3 phút: trang chủ EQUATOR, ô tìm kiếm, trang CONSORT 2025, bảng kiểm và sơ đồ; rồi STROBE. Sau đó tìm tên một tạp chí trên DOAJ, và trên NLM Catalog với bộ lọc 'currently indexed in MEDLINE'. Kết thúc bằng bảng kiểm Think.Check.Submit.</a:t>
             </a:r>
           </a:p>
           <a:p>
@@ -2257,7 +2257,7 @@
           <a:p>
             <a:r>
               <a:rPr lang="en-US" sz="1400" b="0" dirty="0"/>
-              <a:t>Kết: đề nghị mỗi nhóm kiểm tra tạp chí dự kiến và hướng dẫn báo cáo trong kế hoạch công bố (Xây dựng đề cương 7) và cho bản thảo FLUID-ICU (STROBE) - 30 giây, rồi tiếp tục với bộ hồ sơ nộp bài.</a:t>
+              <a:t>Kết: đề nghị mỗi nhóm kiểm tra tạp chí dự kiến và hướng dẫn báo cáo trong kế hoạch công bố (Xây dựng đề cương 7) và cho bản thảo FLUID-ICU (STROBE). Dành 30 giây, rồi tiếp tục với bộ hồ sơ nộp bài.</a:t>
             </a:r>
           </a:p>
         </p:txBody>
@@ -2344,13 +2344,13 @@
           <a:p>
             <a:r>
               <a:rPr lang="en-US" sz="1400" b="0" dirty="0"/>
-              <a:t>Thư gửi biên tập: một trang - vì sao chọn tạp chí này, điểm mới, bài chưa được nộp nơi khác, và bản tiền ấn phẩm nếu có. Trang tiêu đề: tất cả tác giả, đơn vị, mã ORCID (mã định danh nhà nghiên cứu miễn phí, vĩnh viễn - mọi học viên có thể đăng ký tại orcid.org), tác giả liên hệ, số từ. Bản thảo theo định dạng của tạp chí (ẩn danh nếu tạp chí phản biện kín hai chiều). Bảng và hình đúng tệp và độ phân giải yêu cầu. Bảng kiểm báo cáo kèm số trang. Các cam kết: số phê duyệt đạo đức, chấp thuận, xung đột lợi ích, tài trợ, khả năng cung cấp dữ liệu, đóng góp tác giả (CRediT) và việc dùng AI. Số đăng ký cho thử nghiệm và tổng quan hệ thống. Gợi ý người phản biện: chuyên gia không xung đột, không phải đồng tác giả gần đây - biên tập viên quyết định có dùng hay không. Tài liệu bổ sung.</a:t>
+              <a:t>Thư gửi biên tập: một trang, nêu vì sao chọn tạp chí này, điểm mới, bài chưa được nộp nơi khác, và bản tiền ấn phẩm nếu có. Trang tiêu đề: tất cả tác giả, đơn vị, mã ORCID (mã định danh nhà nghiên cứu miễn phí, vĩnh viễn mà mọi học viên có thể đăng ký tại orcid.org), tác giả liên hệ, số từ. Bản thảo theo định dạng của tạp chí (ẩn danh nếu tạp chí phản biện kín hai chiều). Bảng và hình đúng tệp và độ phân giải yêu cầu. Bảng kiểm báo cáo kèm số trang. Các cam kết: số phê duyệt đạo đức, chấp thuận, xung đột lợi ích, tài trợ, khả năng cung cấp dữ liệu, đóng góp tác giả (CRediT) và việc dùng AI. Số đăng ký cho thử nghiệm và tổng quan hệ thống. Gợi ý người phản biện: chuyên gia không xung đột, không phải đồng tác giả gần đây. Biên tập viên quyết định có dùng hay không. Tài liệu bổ sung.</a:t>
             </a:r>
           </a:p>
           <a:p>
             <a:r>
               <a:rPr lang="en-US" sz="1400" b="0" dirty="0"/>
-              <a:t>Ví dụ xuyên suốt: Bài 1 có phần cam kết đầy đủ - đúng những gì hệ thống nộp bài hỏi, từng mục một (chú giải #48). Tóm tắt bằng hình là yêu cầu riêng của tạp chí, chỉ tìm thấy trong Hướng dẫn tác giả (#8).</a:t>
+              <a:t>Ví dụ xuyên suốt: Bài 1 có phần cam kết đầy đủ, đúng những gì hệ thống nộp bài hỏi, từng mục một (chú giải #48). Tóm tắt bằng hình là yêu cầu riêng của tạp chí, chỉ tìm thấy trong Hướng dẫn tác giả (#8).</a:t>
             </a:r>
           </a:p>
           <a:p>
@@ -2437,13 +2437,13 @@
           <a:p>
             <a:r>
               <a:rPr lang="en-US" sz="1400" b="0" dirty="0"/>
-              <a:t>Đi qua sáu trạm. Nộp bài (kèm thư giới thiệu, bảng kiểm báo cáo và các cam kết) - biên tập viên sàng lọc, nhiều bài bị từ chối ngay mà không qua phản biện ('desk rejection') vì không phù hợp hoặc báo cáo kém - hai ba người phản biện nhận xét - biên tập quyết định: chấp nhận, sửa nhỏ, sửa lớn hoặc từ chối - bạn sửa và trả lời từng ý - được chấp nhận, rồi đọc bản in thử (thật cẩn thận!) và xuất bản.</a:t>
+              <a:t>Đi qua sáu trạm. Nộp bài (kèm thư giới thiệu, bảng kiểm báo cáo và các cam kết). Biên tập viên sàng lọc, nhiều bài bị từ chối ngay mà không qua phản biện ('desk rejection') vì không phù hợp hoặc báo cáo kém. Hai ba người phản biện nhận xét. Biên tập quyết định: chấp nhận, sửa nhỏ, sửa lớn hoặc từ chối. Bạn sửa và trả lời từng ý. Được chấp nhận, rồi đọc bản in thử (thật cẩn thận!) và xuất bản.</a:t>
             </a:r>
           </a:p>
           <a:p>
             <a:r>
               <a:rPr lang="en-US" sz="1400" b="0" dirty="0"/>
-              <a:t>Ví dụ xuyên suốt: người chú giải đánh giá Bài 1 'sửa nhỏ' và Bài 2 'sửa lớn' - cả hai đã được đăng, và cả hai vẫn còn lỗi mà một người phản biện cẩn thận sẽ phát hiện (Bài 1 còn in hai lần cùng một đoạn 'Study protocol' - lỗi đọc bản in thử).</a:t>
+              <a:t>Ví dụ xuyên suốt: người chú giải đánh giá Bài 1 'sửa nhỏ' và Bài 2 'sửa lớn'. Cả hai đã được đăng, và cả hai vẫn còn lỗi mà một người phản biện cẩn thận sẽ phát hiện (Bài 1 còn in hai lần cùng một đoạn 'Study protocol', lỗi đọc bản in thử).</a:t>
             </a:r>
           </a:p>
           <a:p>
@@ -2536,7 +2536,7 @@
           <a:p>
             <a:r>
               <a:rPr lang="en-US" sz="1400" b="0" dirty="0"/>
-              <a:t>Ý chính: thư trả lời là một bảng - mỗi nhận xét của phản biện, câu trả lời của bạn, và chính xác chỗ bản thảo đã thay đổi (trang và dòng). Đánh số các nhận xét (R1.1, R1.2, R2.1 ...).</a:t>
+              <a:t>Ý chính: thư trả lời là một bảng: mỗi nhận xét của phản biện, câu trả lời của bạn, và chính xác chỗ bản thảo đã thay đổi (trang và dòng). Đánh số các nhận xét (R1.1, R1.2, R2.1 ...).</a:t>
             </a:r>
           </a:p>
           <a:p>
@@ -2548,7 +2548,7 @@
           <a:p>
             <a:r>
               <a:rPr lang="en-US" sz="1400" b="0" dirty="0"/>
-              <a:t>Ba dòng trên slide là minh họa, dựa trên những gì người chú giải cho rằng phản biện sẽ hỏi Bài 1: bỏ 'xu hướng không có ý nghĩa' (chấp nhận); giải thích khối cỡ 2 (làm rõ và thêm hạn chế); yêu cầu một kết cục chưa từng thu thập (phản hồi lịch sự - không thể thêm dữ liệu không tồn tại, nhưng có thể nêu thành hạn chế).</a:t>
+              <a:t>Ba dòng trên slide là minh họa, dựa trên những gì người chú giải cho rằng phản biện sẽ hỏi Bài 1: bỏ 'xu hướng không có ý nghĩa' (chấp nhận); giải thích khối cỡ 2 (làm rõ và thêm hạn chế); yêu cầu một kết cục chưa từng thu thập (phản hồi lịch sự: không thể thêm dữ liệu không tồn tại, nhưng có thể nêu thành hạn chế).</a:t>
             </a:r>
           </a:p>
           <a:p>
@@ -2653,19 +2653,19 @@
           <a:p>
             <a:r>
               <a:rPr lang="en-US" sz="1400" b="0" dirty="0"/>
-              <a:t>Ví dụ xuyên suốt: Bài 1 in toàn bộ đoạn 'Study protocol' hai lần - trong Phương pháp (trang 4) và lại sau phần Kết luận (trang 11) - một lỗi trùng lặp lẽ ra phải được phát hiện ở bước in thử (chú giải #45). Đơn vị công tác ở Bài 2 viết hoa không thống nhất (#42).</a:t>
+              <a:t>Ví dụ xuyên suốt: Bài 1 in toàn bộ đoạn 'Study protocol' hai lần: trong Phương pháp (trang 4) và lại sau phần Kết luận (trang 11). Đây là lỗi trùng lặp lẽ ra phải được phát hiện ở bước in thử (chú giải #45). Đơn vị công tác ở Bài 2 viết hoa không thống nhất (#42).</a:t>
             </a:r>
           </a:p>
           <a:p>
             <a:r>
               <a:rPr lang="en-US" sz="1400" b="0" dirty="0"/>
-              <a:t>Chia sẻ: đăng bài theo giấy phép và chính sách của tạp chí - kho lưu trữ của cơ sở, bản tóm tắt dễ hiểu cho người bệnh và đồng nghiệp, một buổi trình bày ngắn tại khoa, mạng xã hội. Nếu báo chí liên hệ, chỉ nói trong phạm vi thiết kế cho phép (lại là lời văn tương xứng).</a:t>
+              <a:t>Chia sẻ: đăng bài theo giấy phép và chính sách của tạp chí: kho lưu trữ của cơ sở, bản tóm tắt dễ hiểu cho người bệnh và đồng nghiệp, một buổi trình bày ngắn tại khoa, mạng xã hội. Nếu báo chí liên hệ, chỉ nói trong phạm vi thiết kế cho phép (lại là lời văn tương xứng).</a:t>
             </a:r>
           </a:p>
           <a:p>
             <a:r>
               <a:rPr lang="en-US" sz="1400" b="0" dirty="0"/>
-              <a:t>Đính chính: nếu phát hiện lỗi sau khi đăng, liên hệ tạp chí - đính chính là trung thực; rút bài dành cho lỗi nghiêm trọng hoặc sai phạm.</a:t>
+              <a:t>Đính chính: nếu phát hiện lỗi sau khi đăng, liên hệ tạp chí. Đính chính là trung thực; rút bài dành cho lỗi nghiêm trọng hoặc sai phạm.</a:t>
             </a:r>
           </a:p>
           <a:p>
@@ -2758,7 +2758,7 @@
           <a:p>
             <a:r>
               <a:rPr lang="en-US" sz="1400" b="0" dirty="0"/>
-              <a:t>Câu 1 'thường đúng' chứ không phải luôn đúng - tạp chí thật cũng mời viết bài, nhưng email tâng bốc gửi hàng loạt từ tạp chí lạ cần được kiểm tra năm dấu hiệu.</a:t>
+              <a:t>Câu 1 'thường đúng' chứ không phải luôn đúng. Tạp chí thật cũng mời viết bài, nhưng email tâng bốc gửi hàng loạt từ tạp chí lạ cần được kiểm tra năm dấu hiệu.</a:t>
             </a:r>
           </a:p>
         </p:txBody>
@@ -2851,7 +2851,7 @@
           <a:p>
             <a:r>
               <a:rPr lang="en-US" sz="1400" b="0" dirty="0"/>
-              <a:t>Vì sao lúc này: sau khóa học mỗi nhóm phản biện bản nháp FLUID-ICU của một nhóm khác bằng CHÍNH 10 câu hỏi này - đây là buổi tập dượt.</a:t>
+              <a:t>Vì sao lúc này: sau khóa học mỗi nhóm phản biện bản nháp FLUID-ICU của một nhóm khác bằng CHÍNH 10 câu hỏi này. Đây là buổi tập dượt.</a:t>
             </a:r>
           </a:p>
           <a:p>
@@ -3031,7 +3031,7 @@
           <a:p>
             <a:r>
               <a:rPr lang="en-US" sz="1400" b="0" dirty="0"/>
-              <a:t>Giải thích trong một phút. Cả hai bài cùng trả lời câu hỏi xuyên suốt của khóa - dịch truyền trong sốc nhiễm khuẩn - bằng hai thiết kế khác nhau. Nhóm 1-3 thẩm định Bài 1, thử nghiệm ngẫu nhiên (Boulet 2024, Critical Care). Nhóm 4-5 thẩm định Bài 2, đoàn hệ bắt cặp điểm xu hướng (Hyun 2023, Annals of Intensive Care).</a:t>
+              <a:t>Giải thích trong một phút. Cả hai bài cùng trả lời câu hỏi xuyên suốt của khóa (dịch truyền trong sốc nhiễm khuẩn) bằng hai thiết kế khác nhau. Nhóm 1-3 thẩm định Bài 1, thử nghiệm ngẫu nhiên (Boulet 2024, Critical Care). Nhóm 4-5 thẩm định Bài 2, đoàn hệ bắt cặp điểm xu hướng (Hyun 2023, Annals of Intensive Care).</a:t>
             </a:r>
           </a:p>
           <a:p>
@@ -3049,13 +3049,13 @@
           <a:p>
             <a:r>
               <a:rPr lang="en-US" sz="1400" b="0" dirty="0"/>
-              <a:t>Mẹo: chia việc trong nhóm - mỗi cặp nhận 3-4 câu, rồi cả nhóm thống nhất.</a:t>
+              <a:t>Mẹo: chia việc trong nhóm: mỗi cặp nhận 3-4 câu, rồi cả nhóm thống nhất.</a:t>
             </a:r>
           </a:p>
           <a:p>
             <a:r>
               <a:rPr lang="en-US" sz="1400" b="0" dirty="0"/>
-              <a:t>Liên hệ Buổi 4: 10 câu hỏi là phiên bản đơn giản của các công cụ đánh giá nguy cơ sai lệch chính thức - RoB 2 cho Bài 1, Newcastle-Ottawa (hoặc ROBINS-E mới hơn) cho Bài 2. Hôm nay không dùng các công cụ chính thức.</a:t>
+              <a:t>Liên hệ Buổi 4: 10 câu hỏi là phiên bản đơn giản của các công cụ đánh giá nguy cơ sai lệch chính thức: RoB 2 cho Bài 1, Newcastle-Ottawa (hoặc ROBINS-E mới hơn) cho Bài 2. Hôm nay không dùng các công cụ chính thức.</a:t>
             </a:r>
           </a:p>
         </p:txBody>
@@ -3136,19 +3136,19 @@
           <a:p>
             <a:r>
               <a:rPr lang="en-US" sz="1400" b="0" dirty="0"/>
-              <a:t>Bảng kiểm, phần 1. Đọc to mỗi câu một lần - không giải thích đáp án.</a:t>
+              <a:t>Bảng kiểm, phần 1. Đọc to mỗi câu một lần. Không giải thích đáp án.</a:t>
             </a:r>
           </a:p>
           <a:p>
             <a:r>
               <a:rPr lang="en-US" sz="1400" b="0" dirty="0"/>
-              <a:t>Câu 1-2 về câu hỏi và thiết kế (Buổi 1-4). Câu 3 về đối tượng nghiên cứu - giá trị ngoại suy: bệnh nhân của bạn có nằm trong nghiên cứu này không? Câu 4 về tính tương đồng ban đầu - xem Bảng 1. Câu 5 về làm mù.</a:t>
+              <a:t>Câu 1-2 về câu hỏi và thiết kế (Buổi 1-4). Câu 3 về đối tượng nghiên cứu, tức giá trị ngoại suy: bệnh nhân của bạn có nằm trong nghiên cứu này không? Câu 4 về tính tương đồng ban đầu (xem Bảng 1). Câu 5 về làm mù.</a:t>
             </a:r>
           </a:p>
           <a:p>
             <a:r>
               <a:rPr lang="en-US" sz="1400" b="0" dirty="0"/>
-              <a:t>Gợi ý: ở câu 4 hai bài dùng công cụ khác nhau - phân nhóm ngẫu nhiên và bắt cặp điểm xu hướng. Đề nghị học viên tìm câu văn nói điều đó.</a:t>
+              <a:t>Gợi ý: ở câu 4 hai bài dùng công cụ khác nhau: phân nhóm ngẫu nhiên và bắt cặp điểm xu hướng. Đề nghị học viên tìm câu văn nói điều đó.</a:t>
             </a:r>
           </a:p>
           <a:p>
@@ -3247,13 +3247,13 @@
           <a:p>
             <a:r>
               <a:rPr lang="en-US" sz="1400" b="0" dirty="0"/>
-              <a:t>Câu 9: phần hạn chế của tác giả, cộng một hạn chế họ bỏ sót - mỗi bài có một hạn chế rõ (xem hướng dẫn giảng viên).</a:t>
+              <a:t>Câu 9: phần hạn chế của tác giả, cộng một hạn chế họ bỏ sót. Mỗi bài có một hạn chế rõ (xem hướng dẫn giảng viên).</a:t>
             </a:r>
           </a:p>
           <a:p>
             <a:r>
               <a:rPr lang="en-US" sz="1400" b="0" dirty="0"/>
-              <a:t>Câu 10: nhận định lâm sàng - không có đáp án duy nhất, nhưng phải nêu lý do.</a:t>
+              <a:t>Câu 10: nhận định lâm sàng. Không có đáp án duy nhất, nhưng phải nêu lý do.</a:t>
             </a:r>
           </a:p>
         </p:txBody>
@@ -3340,7 +3340,7 @@
           <a:p>
             <a:r>
               <a:rPr lang="en-US" sz="1400" b="0" dirty="0"/>
-              <a:t>Đi quanh các bàn. Các câu gợi ý hữu ích nhất (xem thêm trong hướng dẫn giảng viên): nhóm Bài 1 - 'Ai KHÔNG được làm mù, và ai quyết định lượng dịch truyền?' (bác sĩ không bị làm mù và chính họ kê dịch tạo nên kết cục); 'Tìm p = 0,42 trong phần Bàn luận - tác giả dùng từ gì?' (trang 10, 'xu hướng không có ý nghĩa thống kê'). Nhóm Bài 2 - 'Ai quyết định bệnh nhân nào được truyền nhiều dịch hơn?' (bác sĩ - bệnh nặng hơn được truyền nhiều hơn: nhiễu do chỉ định); 'Bệnh nhân phải nằm ICU ít nhất 3 ngày - ai bị thiếu?' (tử vong sớm và chuyển khoa sớm: sai lệch người sống sót).</a:t>
+              <a:t>Đi quanh các bàn. Các câu gợi ý hữu ích nhất (xem thêm trong hướng dẫn giảng viên): nhóm Bài 1: 'Ai KHÔNG được làm mù, và ai quyết định lượng dịch truyền?' (bác sĩ không bị làm mù và chính họ kê dịch tạo nên kết cục); 'Tìm p = 0,42 trong phần Bàn luận. Tác giả dùng từ gì?' (trang 10, 'xu hướng không có ý nghĩa thống kê'). Nhóm Bài 2: 'Ai quyết định bệnh nhân nào được truyền nhiều dịch hơn?' (bác sĩ, và bệnh nặng hơn được truyền nhiều hơn: nhiễu do chỉ định); 'Bệnh nhân phải nằm ICU ít nhất 3 ngày. Ai bị thiếu?' (tử vong sớm và chuyển khoa sớm: sai lệch người sống sót).</a:t>
             </a:r>
           </a:p>
           <a:p>
@@ -3439,13 +3439,13 @@
           <a:p>
             <a:r>
               <a:rPr lang="en-US" sz="1400" b="0" dirty="0"/>
-              <a:t>Bài 1: may rủi quyết định ai nhận chiến lược hạn chế dịch, nên các yếu tố đã biết VÀ chưa biết cân bằng về trung bình - thử nghiệm ngẫu nhiên được phép kết luận nhân quả. Kết luận của bài là âm tính: chiến lược không làm giảm cân bằng dịch ngày 5 (chênh 13,2 ml/kg, KTC 95% -15,2 đến 41,6, p = 0,42). Nhưng với 48 bệnh nhân, KTC rất rộng: đây là 'không có bằng chứng về tác dụng', không phải 'bằng chứng không có tác dụng' - và chắc chắn không phải 'xu hướng'.</a:t>
+              <a:t>Bài 1: may rủi quyết định ai nhận chiến lược hạn chế dịch, nên các yếu tố đã biết VÀ chưa biết cân bằng về trung bình, nên thử nghiệm ngẫu nhiên được phép kết luận nhân quả. Kết luận của bài là âm tính: chiến lược không làm giảm cân bằng dịch ngày 5 (chênh 13,2 ml/kg, KTC 95% -15,2 đến 41,6, p = 0,42). Nhưng với 48 bệnh nhân, KTC rất rộng: đây là 'không có bằng chứng về tác dụng', không phải 'bằng chứng không có tác dụng', và chắc chắn không phải 'xu hướng'.</a:t>
             </a:r>
           </a:p>
           <a:p>
             <a:r>
               <a:rPr lang="en-US" sz="1400" b="0" dirty="0"/>
-              <a:t>Bài 2: bác sĩ quyết định lượng dịch cho từng bệnh nhân. Bắt cặp điểm xu hướng chỉ cân bằng được các yếu tố đã đo; bệnh nặng hơn được truyền nhiều hơn (nhiễu do chỉ định, Buổi 4) và mức độ nặng không bao giờ đo được đầy đủ. Vì vậy bài chỉ được nói cân bằng dịch dương ngày 2 'có liên quan với' tử vong 28 ngày cao hơn (HR 2,13, KTC 95% 1,48 đến 3,06) - không phải 'tác động' hay 'chứng tỏ' quan hệ nhân quả, dù tiêu đề dùng chữ 'Impact'.</a:t>
+              <a:t>Bài 2: bác sĩ quyết định lượng dịch cho từng bệnh nhân. Bắt cặp điểm xu hướng chỉ cân bằng được các yếu tố đã đo; bệnh nặng hơn được truyền nhiều hơn (nhiễu do chỉ định, Buổi 4) và mức độ nặng không bao giờ đo được đầy đủ. Vì vậy bài chỉ được nói cân bằng dịch dương ngày 2 'có liên quan với' tử vong 28 ngày cao hơn (HR 2,13, KTC 95% 1,48 đến 3,06), không phải 'tác động' hay 'chứng tỏ' quan hệ nhân quả, dù tiêu đề dùng chữ 'Impact'.</a:t>
             </a:r>
           </a:p>
           <a:p>
@@ -3532,19 +3532,19 @@
           <a:p>
             <a:r>
               <a:rPr lang="en-US" sz="1400" b="0" dirty="0"/>
-              <a:t>Chỉ chiếu bảng này ở CUỐI phần thảo luận chung để tổng kết - sau khi các nhóm đã nêu câu trả lời của mình, không chiếu trước.</a:t>
+              <a:t>Chỉ chiếu bảng này ở CUỐI phần thảo luận chung để tổng kết, sau khi các nhóm đã nêu câu trả lời của mình, không chiếu trước.</a:t>
             </a:r>
           </a:p>
           <a:p>
             <a:r>
               <a:rPr lang="en-US" sz="1400" b="0" dirty="0"/>
-              <a:t>Từng dòng: các nhóm được làm tương đồng thế nào; ai biết phân nhóm; tác dụng chính với KTC; hạn chế tác giả bỏ sót (Bài 1: khối hoán vị cỡ 2 khiến lần phân nhóm tiếp theo đoán được khi bác sĩ không bị làm mù - trang 3; Bài 2: yêu cầu nằm ICU ít nhất 3 ngày loại bỏ bệnh nhân tử vong hoặc rời ICU sớm - sai lệch người sống sót - trang 2); lỗi lời văn (Bài 1 trang 10; Bài 2 tiêu đề và trang 4); và kết luận mà mỗi thiết kế cho phép.</a:t>
+              <a:t>Từng dòng: các nhóm được làm tương đồng thế nào; ai biết phân nhóm; tác dụng chính với KTC; hạn chế tác giả bỏ sót (Bài 1: khối hoán vị cỡ 2 khiến lần phân nhóm tiếp theo đoán được khi bác sĩ không bị làm mù, trang 3; Bài 2: yêu cầu nằm ICU ít nhất 3 ngày loại bỏ bệnh nhân tử vong hoặc rời ICU sớm (sai lệch người sống sót), trang 2); lỗi lời văn (Bài 1 trang 10; Bài 2 tiêu đề và trang 4); và kết luận mà mỗi thiết kế cho phép.</a:t>
             </a:r>
           </a:p>
           <a:p>
             <a:r>
               <a:rPr lang="en-US" sz="1400" b="0" dirty="0"/>
-              <a:t>Cả hai đều là bài tốt, đăng trên tạp chí Q1 - và cả hai đều có lỗi sửa được. Đó là trạng thái bình thường của y văn, và vì thế thẩm định là một kỹ năng lâm sàng.</a:t>
+              <a:t>Cả hai đều là bài tốt, đăng trên tạp chí Q1, và cả hai đều có lỗi sửa được. Đó là trạng thái bình thường của y văn, và vì thế thẩm định là một kỹ năng lâm sàng.</a:t>
             </a:r>
           </a:p>
         </p:txBody>
@@ -3637,7 +3637,7 @@
           <a:p>
             <a:r>
               <a:rPr lang="en-US" sz="1400" b="0" dirty="0"/>
-              <a:t>Bốn thông điệp chính ở khung bên phải - nói to từng thông điệp trước khi kết thúc.</a:t>
+              <a:t>Bốn thông điệp chính ở khung bên phải. Nói to từng thông điệp trước khi kết thúc.</a:t>
             </a:r>
           </a:p>
           <a:p>
@@ -3649,7 +3649,7 @@
           <a:p>
             <a:r>
               <a:rPr lang="en-US" sz="1400" b="0" dirty="0"/>
-              <a:t>Chuyển tiếp: 'Giờ đến lượt các bạn được phản biện' - thông báo thứ tự trình bày.</a:t>
+              <a:t>Chuyển tiếp: 'Giờ đến lượt các bạn được phản biện.' Rồi thông báo thứ tự trình bày.</a:t>
             </a:r>
           </a:p>
         </p:txBody>
@@ -3730,7 +3730,7 @@
           <a:p>
             <a:r>
               <a:rPr lang="en-US" sz="1400" b="0" dirty="0"/>
-              <a:t>Đọc sáu thuật ngữ cùng cả lớp trước phần trình bày - mời một người giải thích bằng lời của mình trước.</a:t>
+              <a:t>Đọc sáu thuật ngữ cùng cả lớp trước phần trình bày. Mời một người giải thích bằng lời của mình trước.</a:t>
             </a:r>
           </a:p>
         </p:txBody>
@@ -3817,7 +3817,7 @@
           <a:p>
             <a:r>
               <a:rPr lang="en-US" sz="1400" b="0" dirty="0"/>
-              <a:t>Chuyển tiếp: 'Giờ đến lượt các bạn được phản biện' - thông báo thứ tự trình bày.</a:t>
+              <a:t>Chuyển tiếp: 'Giờ đến lượt các bạn được phản biện.' Rồi thông báo thứ tự trình bày.</a:t>
             </a:r>
           </a:p>
         </p:txBody>
@@ -3910,7 +3910,7 @@
           <a:p>
             <a:r>
               <a:rPr lang="en-US" sz="1400" b="0" dirty="0"/>
-              <a:t>Nhắc lớp: kỹ năng phản biện vừa dùng nay áp dụng cho đề cương của chính chúng ta - nhưng góp ý theo cách mà bạn muốn được nhận.</a:t>
+              <a:t>Nhắc lớp: kỹ năng phản biện vừa dùng nay áp dụng cho đề cương của chính chúng ta, nhưng góp ý theo cách mà bạn muốn được nhận.</a:t>
             </a:r>
           </a:p>
         </p:txBody>
@@ -3991,25 +3991,25 @@
           <a:p>
             <a:r>
               <a:rPr lang="en-US" sz="1400" b="0" dirty="0"/>
-              <a:t>Ý chính: phần đặt vấn đề là một cái phễu, không phải bài tổng quan y văn. Đoạn 1: điều đã biết (gánh nặng, cơ chế, thực hành hiện nay). Đoạn 2: điều chưa biết - khoảng trống, tốt nhất có dẫn chứng mâu thuẫn của cả hai phía. Đoạn 3: 'Vì vậy chúng tôi nhằm ...' - một câu mục tiêu khớp với kết cục chính trong phần Phương pháp.</a:t>
+              <a:t>Ý chính: phần đặt vấn đề là một cái phễu, không phải bài tổng quan y văn. Đoạn 1: điều đã biết (gánh nặng, cơ chế, thực hành hiện nay). Đoạn 2: điều chưa biết: khoảng trống, tốt nhất có dẫn chứng mâu thuẫn của cả hai phía. Đoạn 3: 'Vì vậy chúng tôi nhằm ...', một câu mục tiêu khớp với kết cục chính trong phần Phương pháp.</a:t>
             </a:r>
           </a:p>
           <a:p>
             <a:r>
               <a:rPr lang="en-US" sz="1400" b="0" dirty="0"/>
-              <a:t>Bài 1 là mẫu (chú giải #10-#12): đã biết (cân bằng dịch dương liên quan tử vong; dịch ẩn chiếm phần lớn lượng vào), chưa biết (các thử nghiệm trước chỉ nhắm dịch hồi sức), mục tiêu (mục tiêu chính = cân bằng dịch sau 5 ngày) - dưới 500 từ (trang 2-3).</a:t>
+              <a:t>Bài 1 là mẫu (chú giải #10-#12): đã biết (cân bằng dịch dương liên quan tử vong; dịch ẩn chiếm phần lớn lượng vào), chưa biết (các thử nghiệm trước chỉ nhắm dịch hồi sức), mục tiêu (mục tiêu chính = cân bằng dịch sau 5 ngày), tất cả dưới 500 từ (trang 2-3).</a:t>
             </a:r>
           </a:p>
           <a:p>
             <a:r>
               <a:rPr lang="en-US" sz="1400" b="0" dirty="0"/>
-              <a:t>Đoạn 2 của Bài 2 xác định khoảng trống bằng cách dẫn cả hai phía mâu thuẫn (#9) - nên làm theo; nhưng phần đặt vấn đề dài khoảng 550 từ và câu mục tiêu lặp lại từ nhân quả 'impact' (#3, #10).</a:t>
+              <a:t>Đoạn 2 của Bài 2 xác định khoảng trống bằng cách dẫn cả hai phía mâu thuẫn (#9). Nên làm theo. Nhưng phần đặt vấn đề dài khoảng 550 từ và câu mục tiêu lặp lại từ nhân quả 'impact' (#3, #10).</a:t>
             </a:r>
           </a:p>
           <a:p>
             <a:r>
               <a:rPr lang="en-US" sz="1400" b="0" dirty="0"/>
-              <a:t>Liên hệ Buổi 1-2: nêu vấn đề và PICO đã cho bạn cái phễu này - và slide tiếp theo là ví dụ mẫu cho bài báo FLUID-ICU.</a:t>
+              <a:t>Liên hệ Buổi 1-2: nêu vấn đề và PICO đã cho bạn cái phễu này. Slide tiếp theo là ví dụ mẫu cho bài báo FLUID-ICU.</a:t>
             </a:r>
           </a:p>
           <a:p>
@@ -4108,13 +4108,13 @@
           <a:p>
             <a:r>
               <a:rPr lang="en-US" sz="1400" b="0" dirty="0"/>
-              <a:t>Góp ý trong 2 phút (Assignment/presentation_guide.md): nhóm đồng đẳng 45 giây - hai ngôi sao và một mong muốn; giảng viên 60 giây - một điểm mạnh, cải thiện quan trọng nhất, một câu hỏi; nhóm trình bày 15 giây - 'cảm ơn', không biện hộ.</a:t>
+              <a:t>Góp ý trong 2 phút (Assignment/presentation_guide.md): nhóm đồng đẳng 45 giây (hai ngôi sao và một mong muốn); giảng viên 60 giây (một điểm mạnh, cải thiện quan trọng nhất, một câu hỏi); nhóm trình bày 15 giây ('cảm ơn', không biện hộ).</a:t>
             </a:r>
           </a:p>
           <a:p>
             <a:r>
               <a:rPr lang="en-US" sz="1400" b="0" dirty="0"/>
-              <a:t>Điểm là góp ý để nhóm hoàn thiện đề cương trước khi nộp hội đồng đạo đức.</a:t>
+              <a:t>Việc trình bày mới quyết định. Điểm là góp ý để nhóm hoàn thiện đề cương trước khi nộp hội đồng đạo đức.</a:t>
             </a:r>
           </a:p>
         </p:txBody>
@@ -4195,7 +4195,7 @@
           <a:p>
             <a:r>
               <a:rPr lang="en-US" sz="1400" b="0" dirty="0"/>
-              <a:t>Chiếu thứ tự trình bày. Giờ tính từ lúc bắt đầu buổi học (2:00 = sau hai giờ; nếu bắt đầu 08:00 thì là 10:00-10:45). 2:40-2:45: mỗi nhóm nêu câu hỏi FLUID-ICU và kết quả chính trong một câu - hoặc 5 phút này bù cho phần trình bày bị trễ.</a:t>
+              <a:t>Chiếu thứ tự trình bày. Giờ tính từ lúc bắt đầu buổi học (2:00 = sau hai giờ; nếu bắt đầu 08:00 thì là 10:00-10:45). 2:40-2:45: mỗi nhóm nêu câu hỏi FLUID-ICU và kết quả chính trong một câu, hoặc 5 phút này bù cho phần trình bày bị trễ.</a:t>
             </a:r>
           </a:p>
           <a:p>
@@ -4207,13 +4207,13 @@
           <a:p>
             <a:r>
               <a:rPr lang="en-US" sz="1400" b="0" dirty="0"/>
-              <a:t>Nhóm tiếp theo lên phía trước trong lúc nhóm trước nhận góp ý. Mọi slide đã ở sẵn trên một máy - không đổi USB.</a:t>
+              <a:t>Nhóm tiếp theo lên phía trước trong lúc nhóm trước nhận góp ý. Mọi slide đã ở sẵn trên một máy, nên không đổi USB.</a:t>
             </a:r>
           </a:p>
           <a:p>
             <a:r>
               <a:rPr lang="en-US" sz="1400" b="0" dirty="0"/>
-              <a:t>Nếu bị trễ, rút ngắn phần góp ý, không bao giờ rút ngắn bài của các nhóm cuối - như vậy không công bằng với nhóm trình bày sau cùng.</a:t>
+              <a:t>Nếu bị trễ, rút ngắn phần góp ý, không bao giờ rút ngắn bài của các nhóm cuối. Như vậy không công bằng với nhóm trình bày sau cùng.</a:t>
             </a:r>
           </a:p>
         </p:txBody>
@@ -4399,7 +4399,7 @@
           <a:p>
             <a:r>
               <a:rPr lang="en-US" sz="1400" b="0" dirty="0"/>
-              <a:t>EXTRA: các slide sau mục này là tùy chọn - dùng khi còn thời gian hoặc giới thiệu cho học viên tự học.</a:t>
+              <a:t>EXTRA: các slide sau mục này là tùy chọn. Dùng khi còn thời gian hoặc giới thiệu cho học viên tự học.</a:t>
             </a:r>
           </a:p>
         </p:txBody>
@@ -4492,13 +4492,13 @@
           <a:p>
             <a:r>
               <a:rPr lang="en-US" sz="1400" b="0" dirty="0"/>
-              <a:t>Tiêu đề (Bài 2): 'Cân bằng dịch dương tích lũy trong ba ngày đầu ICU và tử vong 28 ngày ở bệnh nhân nhiễm khuẩn huyết: nghiên cứu đoàn hệ bắt cặp điểm xu hướng' - 'liên quan', không phải 'tác động'.</a:t>
+              <a:t>Tiêu đề (Bài 2): 'Cân bằng dịch dương tích lũy trong ba ngày đầu ICU và tử vong 28 ngày ở bệnh nhân nhiễm khuẩn huyết: nghiên cứu đoàn hệ bắt cặp điểm xu hướng'. Dùng 'liên quan', không phải 'tác động'.</a:t>
             </a:r>
           </a:p>
           <a:p>
             <a:r>
               <a:rPr lang="en-US" sz="1400" b="0" dirty="0"/>
-              <a:t>Tiêu đề nhóm: kiểm tra 10-16 từ, nêu thiết kế, không có từ đánh giá. Khung tóm tắt: Kết quả là kết quả DỰ KIẾN - viết dạng trình bày, VD 'tử vong 28 ngày, RR (KTC 95%)'.</a:t>
+              <a:t>Tiêu đề nhóm: kiểm tra 10-16 từ, nêu thiết kế, không có từ đánh giá. Khung tóm tắt: Kết quả là kết quả DỰ KIẾN, nên viết dạng trình bày, VD 'tử vong 28 ngày, RR (KTC 95%)'.</a:t>
             </a:r>
           </a:p>
           <a:p>
@@ -4591,7 +4591,7 @@
           <a:p>
             <a:r>
               <a:rPr lang="en-US" sz="1400" b="0" dirty="0"/>
-              <a:t>Từ chối ngay (desk rejection): biên tập từ chối không qua phản biện - thường vì chủ đề không hợp tạp chí hoặc báo cáo kém. Chọn lại: tạp chí mà người đọc cần kết quả của bạn.</a:t>
+              <a:t>Từ chối ngay (desk rejection): biên tập từ chối không qua phản biện, thường vì chủ đề không hợp tạp chí hoặc báo cáo kém. Chọn lại: tạp chí mà người đọc cần kết quả của bạn.</a:t>
             </a:r>
           </a:p>
           <a:p>
@@ -4603,7 +4603,7 @@
           <a:p>
             <a:r>
               <a:rPr lang="en-US" sz="1400" b="0" dirty="0"/>
-              <a:t>Tạp chí tiếp theo: định dạng lại theo Hướng dẫn tác giả mới; một số nhà xuất bản đề nghị chuyển bản thảo và nhận xét sang tạp chí chị em - có thể tiết kiệm hàng tháng. Chỉ khiếu nại khi quyết định có lỗi sai rõ ràng về sự kiện.</a:t>
+              <a:t>Tạp chí tiếp theo: định dạng lại theo Hướng dẫn tác giả mới; một số nhà xuất bản đề nghị chuyển bản thảo và nhận xét sang tạp chí chị em, việc này có thể tiết kiệm hàng tháng. Chỉ khiếu nại khi quyết định có lỗi sai rõ ràng về sự kiện.</a:t>
             </a:r>
           </a:p>
           <a:p>
@@ -4696,7 +4696,7 @@
           <a:p>
             <a:r>
               <a:rPr lang="en-US" sz="1400" b="0" dirty="0"/>
-              <a:t>EXTRA: Ý chính: tóm tắt hội nghị thường là sản phẩm đầu tiên của một nghiên cứu. Nó theo cùng logic IMRaD như tóm tắt bài báo, thường 250-300 từ, với số liệu thật và khoảng tin cậy - 'kết quả sẽ được trình bày' thường bị loại. Tuân theo mẫu và hạn nộp của hội nghị.</a:t>
+              <a:t>EXTRA: Ý chính: tóm tắt hội nghị thường là sản phẩm đầu tiên của một nghiên cứu. Nó theo cùng logic IMRaD như tóm tắt bài báo, thường 250-300 từ, với số liệu thật và khoảng tin cậy. Tóm tắt chỉ ghi 'kết quả sẽ được trình bày' thường bị loại. Tuân theo mẫu và hạn nộp của hội nghị.</a:t>
             </a:r>
           </a:p>
           <a:p>
@@ -4708,7 +4708,7 @@
           <a:p>
             <a:r>
               <a:rPr lang="en-US" sz="1400" b="0" dirty="0"/>
-              <a:t>Trình bày tóm tắt hội nghị thường không cản trở việc đăng bài đầy đủ, nhưng hãy kiểm tra chính sách của tạp chí - và hãy viết bài đầy đủ: nhiều tóm tắt không bao giờ trở thành bài báo.</a:t>
+              <a:t>Trình bày tóm tắt hội nghị thường không cản trở việc đăng bài đầy đủ, nhưng hãy kiểm tra chính sách của tạp chí. Hãy viết bài đầy đủ: nhiều tóm tắt không bao giờ trở thành bài báo.</a:t>
             </a:r>
           </a:p>
           <a:p>
@@ -4894,7 +4894,7 @@
           <a:p>
             <a:r>
               <a:rPr lang="en-US" sz="1400" b="0" dirty="0"/>
-              <a:t>Sau buổi học: tính mức thay đổi điểm trung bình trước/sau bằng bảng trong pre_post_quiz_answer_key - báo cáo cho lãnh đạo khoa trong báo cáo khóa học.</a:t>
+              <a:t>Sau buổi học: tính mức thay đổi điểm trung bình trước/sau bằng bảng trong pre_post_quiz_answer_key và báo cáo cho lãnh đạo khoa trong báo cáo khóa học.</a:t>
             </a:r>
           </a:p>
         </p:txBody>
@@ -5092,7 +5092,7 @@
           <a:p>
             <a:r>
               <a:rPr lang="en-US" sz="1400" b="0" dirty="0"/>
-              <a:t>Lưu ý: nhiễu do chỉ định (Buổi 4) CHÍNH LÀ khoảng trống - đó là lý do nghiên cứu đáng làm.</a:t>
+              <a:t>Lưu ý: nhiễu do chỉ định (Buổi 4) CHÍNH LÀ khoảng trống. Đó là lý do nghiên cứu đáng làm.</a:t>
             </a:r>
           </a:p>
         </p:txBody>
@@ -5173,7 +5173,7 @@
           <a:p>
             <a:r>
               <a:rPr lang="en-US" sz="1400" b="0" dirty="0"/>
-              <a:t>Phiếu ngắn ẩn danh (giấy hoặc trực tuyến). Câu hỏi về tốc độ rất quan trọng - chúng tôi thiết kế khóa học để đi chậm; hãy cho biết như vậy đã phù hợp chưa.</a:t>
+              <a:t>Phiếu ngắn ẩn danh (giấy hoặc trực tuyến). Câu hỏi về tốc độ rất quan trọng. Chúng tôi thiết kế khóa học để đi chậm, hãy cho biết như vậy đã phù hợp chưa.</a:t>
             </a:r>
           </a:p>
         </p:txBody>
@@ -5260,13 +5260,13 @@
           <a:p>
             <a:r>
               <a:rPr lang="en-US" sz="1400" b="0" dirty="0"/>
-              <a:t>Phản biện theo Assignment/peer_review_instructions.md và bảng kiểm 10 câu; tác giả trả lời bằng Templates/Response_to_Reviewers_Template.docx.</a:t>
+              <a:t>Phản biện theo Assignment/peer_review_instructions.md và bảng kiểm 10 câu. Tác giả trả lời bằng Templates/Response_to_Reviewers_Template.docx.</a:t>
             </a:r>
           </a:p>
           <a:p>
             <a:r>
               <a:rPr lang="en-US" sz="1400" b="0" dirty="0"/>
-              <a:t>Đây là bước cuối cùng của toàn bộ quá trình nghiên cứu - đúng như sau khi nộp bài thật.</a:t>
+              <a:t>Đây là bước cuối cùng của toàn bộ quá trình nghiên cứu, đúng như sau khi nộp bài thật.</a:t>
             </a:r>
           </a:p>
         </p:txBody>
@@ -5359,7 +5359,7 @@
           <a:p>
             <a:r>
               <a:rPr lang="en-US" sz="1400" b="0" dirty="0"/>
-              <a:t>Cấp độ 3 (theo yêu cầu): phương pháp nâng cao cho dữ liệu phức tạp - phân tích gộp, mô hình dự báo và học máy, độ chính xác chẩn đoán, phân tích sống còn nâng cao, mô hình dọc và đa tầng. Xem Course_Levels/.</a:t>
+              <a:t>Cấp độ 3 (theo yêu cầu): phương pháp nâng cao cho dữ liệu phức tạp: phân tích gộp, mô hình dự báo và học máy, độ chính xác chẩn đoán, phân tích sống còn nâng cao, mô hình dọc và đa tầng. Xem Course_Levels/.</a:t>
             </a:r>
           </a:p>
           <a:p>
@@ -5527,7 +5527,7 @@
           <a:p>
             <a:r>
               <a:rPr lang="en-US" sz="1400" b="0" dirty="0"/>
-              <a:t>Slide bản quyền - để trên màn hình khi học viên ra về.</a:t>
+              <a:t>Slide bản quyền. Để trên màn hình khi học viên ra về.</a:t>
             </a:r>
           </a:p>
         </p:txBody>
@@ -5626,7 +5626,7 @@
           <a:p>
             <a:r>
               <a:rPr lang="en-US" sz="1400" b="0" dirty="0"/>
-              <a:t>Hỏi: người viết lần đầu thường bỏ qua bước nào? Đáp án: hướng của hạn chế - nói rõ sai lệch làm tác động trông lớn hơn hay nhỏ hơn.</a:t>
+              <a:t>Hỏi: người viết lần đầu thường bỏ qua bước nào? Đáp án: hướng của hạn chế, tức là nói rõ sai lệch làm tác động trông lớn hơn hay nhỏ hơn.</a:t>
             </a:r>
           </a:p>
         </p:txBody>
@@ -5713,13 +5713,13 @@
           <a:p>
             <a:r>
               <a:rPr lang="en-US" sz="1400" b="0" dirty="0"/>
-              <a:t>1 Trả lời: OR hiệu chỉnh 1,62 (KTC 95% 1,02 đến 2,59). 2 So sánh: Bài 2 có HR ngày 2 là 2,13 (1,48 đến 3,06). 3 Giải thích: OR thô 2,49 giảm còn 1,62 sau hiệu chỉnh - nhiễu do chỉ định. 4 Hạn chế: nhiễu còn sót, quan hệ nhân quả ngược (bệnh nhân đang xấu đi tích dịch), bệnh nhân tử vong trước ngày 3; HR Cox hiệu chỉnh 1,46 có KTC chạm 1,00. 5 Hàm ý: không có cơ sở hạn chế dịch - cần thử nghiệm như Bài 1. 6 Kết luận: 'có liên quan với'.</a:t>
+              <a:t>1 Trả lời: OR hiệu chỉnh 1,62 (KTC 95% 1,02 đến 2,59). 2 So sánh: Bài 2 có HR ngày 2 là 2,13 (1,48 đến 3,06). 3 Giải thích: OR thô 2,49 giảm còn 1,62 sau hiệu chỉnh (nhiễu do chỉ định). 4 Hạn chế: nhiễu còn sót, quan hệ nhân quả ngược (bệnh nhân đang xấu đi tích dịch), bệnh nhân tử vong trước ngày 3; HR Cox hiệu chỉnh 1,46 có KTC chạm 1,00. 5 Hàm ý: không có cơ sở hạn chế dịch. Cần thử nghiệm như Bài 1. 6 Kết luận: 'có liên quan với'.</a:t>
             </a:r>
           </a:p>
           <a:p>
             <a:r>
               <a:rPr lang="en-US" sz="1400" b="0" dirty="0"/>
-              <a:t>Ý tùy chọn cho nhóm Q1: liên quan có vẻ mạnh hơn ở bệnh nhân suy tim (OR hiệu chỉnh 4,39 so với 1,29, p tương tác 0,031, chỉ 90 bệnh nhân) - là giả thuyết, không phải phát hiện.</a:t>
+              <a:t>Ý tùy chọn cho nhóm Q1: liên quan có vẻ mạnh hơn ở bệnh nhân suy tim (OR hiệu chỉnh 4,39 so với 1,29, p tương tác 0,031, chỉ 90 bệnh nhân). Đây là giả thuyết, không phải phát hiện.</a:t>
             </a:r>
           </a:p>
         </p:txBody>
@@ -5806,19 +5806,19 @@
           <a:p>
             <a:r>
               <a:rPr lang="en-US" sz="1400" b="0" dirty="0"/>
-              <a:t>Ý chính: việc giảm từ 2,49 xuống 1,62 là bài học Buổi 4 hiện ra trước mắt - bệnh nhân nặng hơn được truyền nhiều dịch hơn VÀ tử vong nhiều hơn. Ước lượng quy gán gần với ca đầy đủ, nên lactat thiếu không làm đổi kết luận.</a:t>
+              <a:t>Ý chính: việc giảm từ 2,49 xuống 1,62 là bài học Buổi 4 hiện ra trước mắt: bệnh nhân nặng hơn được truyền nhiều dịch hơn VÀ tử vong nhiều hơn. Ước lượng quy gán gần với ca đầy đủ, nên lactat thiếu không làm đổi kết luận.</a:t>
             </a:r>
           </a:p>
           <a:p>
             <a:r>
               <a:rPr lang="en-US" sz="1400" b="0" dirty="0"/>
-              <a:t>KTC hiệu chỉnh bắt đầu từ 1,02 - vừa trên 1. Câu tương xứng: 'vẫn còn mối liên quan mức độ vừa phải'.</a:t>
+              <a:t>KTC hiệu chỉnh bắt đầu từ 1,02, vừa trên 1. Câu tương xứng: 'vẫn còn mối liên quan mức độ vừa phải'.</a:t>
             </a:r>
           </a:p>
           <a:p>
             <a:r>
               <a:rPr lang="en-US" sz="1400" b="0" dirty="0"/>
-              <a:t>Hỏi: nếu KTC hiệu chỉnh vượt qua 1 thì viết gì? Đáp án: 'không có bằng chứng rõ về liên quan sau hiệu chỉnh' - không phải 'không có tác dụng'.</a:t>
+              <a:t>Hỏi: nếu KTC hiệu chỉnh vượt qua 1 thì viết gì? Đáp án: 'không có bằng chứng rõ về liên quan sau hiệu chỉnh', không phải 'không có tác dụng'.</a:t>
             </a:r>
           </a:p>
         </p:txBody>
@@ -5899,7 +5899,7 @@
           <a:p>
             <a:r>
               <a:rPr lang="en-US" sz="1400" b="0" dirty="0"/>
-              <a:t>Ý chính: độ mạnh của động từ là một khẳng định. Diễn giải quá mức - kết luận vượt quá dữ liệu - là một trong những lý do bị từ chối thường gặp nhất.</a:t>
+              <a:t>Ý chính: độ mạnh của động từ là một khẳng định. Diễn giải quá mức (kết luận vượt quá dữ liệu) là một trong những lý do bị từ chối thường gặp nhất.</a:t>
             </a:r>
           </a:p>
           <a:p>
@@ -5911,7 +5911,7 @@
           <a:p>
             <a:r>
               <a:rPr lang="en-US" sz="1400" b="0" dirty="0"/>
-              <a:t>KHÔNG BAO GIỜ: 'xu hướng không có ý nghĩa' với p = 0,42 (Bài 1, trang 10, chú giải #41); 'không khác biệt' khi nghiên cứu quá nhỏ - hãy nói 'không có bằng chứng về khác biệt' (#29); 'đầu tiên', 'chưa từng', 'mới' khi chưa kiểm chứng ('cân bằng dịch thấp nhất từng được công bố', #40); 'tác động', 'không tác động', 'chứng tỏ' trong nghiên cứu quan sát (Bài 2, #1, #27, #28); 'so sánh đáng tin cậy nhất' (#32); xếp hạng HR từ các đoàn hệ khác nhau thành 'nguy cơ cao nhất' mà không có kiểm định (#37).</a:t>
+              <a:t>KHÔNG BAO GIỜ: 'xu hướng không có ý nghĩa' với p = 0,42 (Bài 1, trang 10, chú giải #41); 'không khác biệt' khi nghiên cứu quá nhỏ (hãy nói 'không có bằng chứng về khác biệt', #29); 'đầu tiên', 'chưa từng', 'mới' khi chưa kiểm chứng ('cân bằng dịch thấp nhất từng được công bố', #40); 'tác động', 'không tác động', 'chứng tỏ' trong nghiên cứu quan sát (Bài 2, #1, #27, #28); 'so sánh đáng tin cậy nhất' (#32); xếp hạng HR từ các đoàn hệ khác nhau thành 'nguy cơ cao nhất' mà không có kiểm định (#37).</a:t>
             </a:r>
           </a:p>
           <a:p>
@@ -10256,7 +10256,7 @@
                 <a:latin typeface="Segoe UI"/>
                 <a:cs typeface="Segoe UI"/>
               </a:rPr>
-              <a:t>Chép số liệu từ phần Kết quả - tóm tắt không được có con số mới.</a:t>
+              <a:t>Chép số liệu từ phần Kết quả. Tóm tắt không được có con số mới.</a:t>
             </a:r>
           </a:p>
         </p:txBody>
@@ -10531,7 +10531,7 @@
                 <a:latin typeface="Segoe UI"/>
                 <a:cs typeface="Segoe UI"/>
               </a:rPr>
-              <a:t>Tiêu đề tốt nêu câu hỏi và thiết kế - không dùng từ quảng cáo.</a:t>
+              <a:t>Tiêu đề tốt nêu câu hỏi và thiết kế, không dùng từ quảng cáo.</a:t>
             </a:r>
           </a:p>
         </p:txBody>
@@ -11184,7 +11184,7 @@
                 <a:latin typeface="Segoe UI"/>
                 <a:cs typeface="Segoe UI"/>
               </a:rPr>
-              <a:t>Phần lớn lỗi của hai bài không cần dữ liệu mới - chỉ cần một đồng tác giả cẩn thận.</a:t>
+              <a:t>Phần lớn lỗi của hai bài không cần dữ liệu mới, chỉ cần một đồng tác giả cẩn thận.</a:t>
             </a:r>
           </a:p>
         </p:txBody>
@@ -11734,7 +11734,7 @@
                 <a:latin typeface="Segoe UI"/>
                 <a:cs typeface="Segoe UI"/>
               </a:rPr>
-              <a:t>0-8: Đặt vấn đề - ba đoạn (hai người)</a:t>
+              <a:t>0-8: Đặt vấn đề, ba đoạn (hai người)</a:t>
             </a:r>
           </a:p>
           <a:p>
@@ -11765,7 +11765,7 @@
                 <a:latin typeface="Segoe UI"/>
                 <a:cs typeface="Segoe UI"/>
               </a:rPr>
-              <a:t>0-15: Bàn luận - sáu bước (ba người)</a:t>
+              <a:t>0-15: Bàn luận, sáu bước (ba người)</a:t>
             </a:r>
           </a:p>
           <a:p>
@@ -11796,7 +11796,7 @@
                 <a:latin typeface="Segoe UI"/>
                 <a:cs typeface="Segoe UI"/>
               </a:rPr>
-              <a:t>15-23: Tóm tắt - 250 từ, số liệu lấy từ Kết quả</a:t>
+              <a:t>15-23: Tóm tắt 250 từ, số liệu lấy từ Kết quả</a:t>
             </a:r>
           </a:p>
           <a:p>
@@ -11858,7 +11858,7 @@
                 <a:latin typeface="Segoe UI"/>
                 <a:cs typeface="Segoe UI"/>
               </a:rPr>
-              <a:t>27-30: kiểm tra động từ: mọi 'gây ra', 'tác động' -&gt; 'có liên quan'</a:t>
+              <a:t>27-30: kiểm tra động từ: mọi 'gây ra', 'tác động' → 'có liên quan'</a:t>
             </a:r>
           </a:p>
         </p:txBody>
@@ -12048,7 +12048,7 @@
                 <a:latin typeface="Segoe UI"/>
                 <a:cs typeface="Segoe UI"/>
               </a:rPr>
-              <a:t>Bản nháp hoàn chỉnh (~2.000 từ) đã lưu - trao đổi phản biện sau khóa học</a:t>
+              <a:t>Bản nháp hoàn chỉnh (~2.000 từ) đã lưu để trao đổi phản biện sau khóa học</a:t>
             </a:r>
           </a:p>
         </p:txBody>
@@ -12833,7 +12833,7 @@
                 <a:latin typeface="Segoe UI"/>
                 <a:cs typeface="Segoe UI"/>
               </a:rPr>
-              <a:t>Từ bảng kiểm đến bản in thử - và những cái bẫy trên đường</a:t>
+              <a:t>Từ bảng kiểm đến bản in thử, và những cái bẫy trên đường</a:t>
             </a:r>
           </a:p>
         </p:txBody>
@@ -13108,7 +13108,7 @@
                 <a:latin typeface="Segoe UI"/>
                 <a:cs typeface="Segoe UI"/>
               </a:rPr>
-              <a:t>Ghi tên hướng dẫn trong Phần 4 - và dùng nó làm bảng kiểm khi viết.</a:t>
+              <a:t>Ghi tên hướng dẫn trong Phần 4 và dùng nó làm bảng kiểm khi viết.</a:t>
             </a:r>
           </a:p>
         </p:txBody>
@@ -13575,7 +13575,7 @@
                 <a:latin typeface="Segoe UI"/>
                 <a:cs typeface="Segoe UI"/>
               </a:rPr>
-              <a:t>Bàn luận - không phải Kết quả</a:t>
+              <a:t>Bàn luận, không phải Kết quả</a:t>
             </a:r>
           </a:p>
         </p:txBody>
@@ -13867,7 +13867,7 @@
                 <a:latin typeface="Segoe UI"/>
                 <a:cs typeface="Segoe UI"/>
               </a:rPr>
-              <a:t>Chọn tạp chí trước khi viết - tạp chí đặt ra luật chơi.</a:t>
+              <a:t>Chọn tạp chí trước khi viết: tạp chí đặt ra luật chơi.</a:t>
             </a:r>
           </a:p>
         </p:txBody>
@@ -14437,7 +14437,7 @@
                 <a:latin typeface="Segoe UI"/>
                 <a:cs typeface="Segoe UI"/>
               </a:rPr>
-              <a:t>Tạp chí tốt là nơi người đọc của bạn đọc - và được vận hành trung thực.</a:t>
+              <a:t>Tạp chí tốt là nơi người đọc của bạn đọc, và được vận hành trung thực.</a:t>
             </a:r>
           </a:p>
         </p:txBody>
@@ -15132,7 +15132,7 @@
                 <a:latin typeface="Segoe UI"/>
                 <a:cs typeface="Segoe UI"/>
               </a:rPr>
-              <a:t>Biết ai được đọc, được tái sử dụng và ai trả phí - trước khi nộp bài.</a:t>
+              <a:t>Biết ai được đọc, được tái sử dụng và ai trả phí trước khi nộp bài.</a:t>
             </a:r>
           </a:p>
         </p:txBody>
@@ -16268,7 +16268,7 @@
                 <a:latin typeface="Segoe UI"/>
                 <a:cs typeface="Segoe UI"/>
               </a:rPr>
-              <a:t>Nộp đủ cả bộ một lần - thiếu thứ gì là chậm trễ.</a:t>
+              <a:t>Nộp đủ cả bộ một lần. Thiếu thứ gì là chậm trễ.</a:t>
             </a:r>
           </a:p>
         </p:txBody>
@@ -16543,7 +16543,7 @@
                 <a:latin typeface="Segoe UI"/>
                 <a:cs typeface="Segoe UI"/>
               </a:rPr>
-              <a:t>Hầu hết bài báo phải sửa trước khi được nhận - trả lời lịch sự từng ý.</a:t>
+              <a:t>Hầu hết bài báo phải sửa trước khi được nhận. Hãy trả lời lịch sự từng ý.</a:t>
             </a:r>
           </a:p>
         </p:txBody>
@@ -16818,7 +16818,7 @@
                 <a:latin typeface="Segoe UI"/>
                 <a:cs typeface="Segoe UI"/>
               </a:rPr>
-              <a:t>Cảm ơn, trả lời mọi ý, chỉ rõ chỗ đã sửa - phản hồi lịch sự, có bằng chứng.</a:t>
+              <a:t>Cảm ơn, trả lời mọi ý, chỉ rõ chỗ đã sửa, và phản hồi lịch sự, có bằng chứng.</a:t>
             </a:r>
           </a:p>
         </p:txBody>
@@ -17093,7 +17093,7 @@
                 <a:latin typeface="Segoe UI"/>
                 <a:cs typeface="Segoe UI"/>
               </a:rPr>
-              <a:t>Đọc bản in thử kỹ như đọc dữ liệu - lỗi sẽ thành vĩnh viễn.</a:t>
+              <a:t>Đọc bản in thử kỹ như đọc dữ liệu. Lỗi sẽ thành vĩnh viễn.</a:t>
             </a:r>
           </a:p>
         </p:txBody>
@@ -17578,7 +17578,7 @@
                 <a:latin typeface="Segoe UI"/>
                 <a:cs typeface="Segoe UI"/>
               </a:rPr>
-              <a:t>1 Thường đúng - kiểm tra hai lần</a:t>
+              <a:t>1 Thường đúng: kiểm tra hai lần</a:t>
             </a:r>
           </a:p>
           <a:p>
@@ -17600,7 +17600,7 @@
                 <a:latin typeface="Segoe UI"/>
                 <a:cs typeface="Segoe UI"/>
               </a:rPr>
-              <a:t>2 Sai - nộp trùng lặp</a:t>
+              <a:t>2 Sai: nộp trùng lặp</a:t>
             </a:r>
           </a:p>
           <a:p>
@@ -17644,7 +17644,7 @@
                 <a:latin typeface="Segoe UI"/>
                 <a:cs typeface="Segoe UI"/>
               </a:rPr>
-              <a:t>4 Đúng - lịch sự, có bằng chứng</a:t>
+              <a:t>4 Đúng: lịch sự, có bằng chứng</a:t>
             </a:r>
           </a:p>
           <a:p>
@@ -17666,7 +17666,7 @@
                 <a:latin typeface="Segoe UI"/>
                 <a:cs typeface="Segoe UI"/>
               </a:rPr>
-              <a:t>5 Sai - STROBE (đoàn hệ)</a:t>
+              <a:t>5 Sai: STROBE (đoàn hệ)</a:t>
             </a:r>
           </a:p>
         </p:txBody>
@@ -18178,7 +18178,7 @@
                 <a:latin typeface="Segoe UI"/>
                 <a:cs typeface="Segoe UI"/>
               </a:rPr>
-              <a:t>Đặt vấn đề, Bàn luận, Tóm tắt và Tiêu đề - theo thứ tự đó</a:t>
+              <a:t>Đặt vấn đề, Bàn luận, Tóm tắt và Tiêu đề, theo thứ tự đó</a:t>
             </a:r>
           </a:p>
         </p:txBody>
@@ -18453,7 +18453,7 @@
                 <a:latin typeface="Segoe UI"/>
                 <a:cs typeface="Segoe UI"/>
               </a:rPr>
-              <a:t>Cùng câu hỏi lâm sàng, hai thiết kế - so sánh mỗi bài được kết luận gì.</a:t>
+              <a:t>Cùng câu hỏi lâm sàng, hai thiết kế. So sánh mỗi bài được kết luận gì.</a:t>
             </a:r>
           </a:p>
         </p:txBody>
@@ -21075,7 +21075,7 @@
                           </a:solidFill>
                           <a:latin typeface="Segoe UI"/>
                         </a:rPr>
-                        <a:t>Bài 1 - RCT (Boulet 2024)</a:t>
+                        <a:t>Bài 1: RCT (Boulet 2024)</a:t>
                       </a:r>
                     </a:p>
                   </a:txBody>
@@ -21098,7 +21098,7 @@
                           </a:solidFill>
                           <a:latin typeface="Segoe UI"/>
                         </a:rPr>
-                        <a:t>Bài 2 - đoàn hệ (Hyun 2023)</a:t>
+                        <a:t>Bài 2: đoàn hệ (Hyun 2023)</a:t>
                       </a:r>
                     </a:p>
                   </a:txBody>
@@ -22487,7 +22487,7 @@
                           </a:solidFill>
                           <a:latin typeface="Segoe UI"/>
                         </a:rPr>
-                        <a:t>Đã biết -&gt; chưa biết -&gt; mục tiêu, trong ba đoạn</a:t>
+                        <a:t>Đã biết → chưa biết → mục tiêu, trong ba đoạn</a:t>
                       </a:r>
                     </a:p>
                   </a:txBody>
@@ -23521,7 +23521,7 @@
                 <a:latin typeface="Segoe UI"/>
                 <a:cs typeface="Segoe UI"/>
               </a:rPr>
-              <a:t>Tiếp theo: trình bày đề cương - và trao đổi bản thảo để phản biện.</a:t>
+              <a:t>Tiếp theo: trình bày đề cương và trao đổi bản thảo để phản biện.</a:t>
             </a:r>
           </a:p>
         </p:txBody>
@@ -23777,7 +23777,7 @@
                 <a:latin typeface="Segoe UI"/>
                 <a:cs typeface="Segoe UI"/>
               </a:rPr>
-              <a:t>6 phút trình bày, 2 phút góp ý - tử tế và cụ thể</a:t>
+              <a:t>6 phút trình bày, 2 phút góp ý: tử tế và cụ thể</a:t>
             </a:r>
           </a:p>
         </p:txBody>
@@ -24052,7 +24052,7 @@
                 <a:latin typeface="Segoe UI"/>
                 <a:cs typeface="Segoe UI"/>
               </a:rPr>
-              <a:t>Đã biết, chưa biết, mục tiêu - và mục tiêu khớp với kết cục chính.</a:t>
+              <a:t>Đã biết, chưa biết, mục tiêu. Mục tiêu khớp với kết cục chính.</a:t>
             </a:r>
           </a:p>
         </p:txBody>
@@ -25903,7 +25903,7 @@
                 <a:latin typeface="Segoe UI"/>
                 <a:cs typeface="Segoe UI"/>
               </a:rPr>
-              <a:t>Slide bổ sung - Buổi 8</a:t>
+              <a:t>Slide bổ sung: Buổi 8</a:t>
             </a:r>
           </a:p>
           <a:p>
@@ -26308,7 +26308,7 @@
                 <a:latin typeface="Segoe UI"/>
                 <a:cs typeface="Segoe UI"/>
               </a:rPr>
-              <a:t>Nhóm: mỗi phần một dòng - Đặt vấn đề, Phương pháp, Kết quả dự kiến, Kết luận</a:t>
+              <a:t>Nhóm: mỗi phần một dòng (Đặt vấn đề, Phương pháp, Kết quả dự kiến, Kết luận)</a:t>
             </a:r>
           </a:p>
         </p:txBody>
@@ -26498,7 +26498,7 @@
                 <a:latin typeface="Segoe UI"/>
                 <a:cs typeface="Segoe UI"/>
               </a:rPr>
-              <a:t>Tiêu đề tạm + khung tóm tắt - đưa vào bài trình bày</a:t>
+              <a:t>Tiêu đề tạm + khung tóm tắt để đưa vào bài trình bày</a:t>
             </a:r>
           </a:p>
         </p:txBody>
@@ -26666,7 +26666,7 @@
                 <a:latin typeface="Segoe UI"/>
                 <a:cs typeface="Segoe UI"/>
               </a:rPr>
-              <a:t>Bị từ chối? Nộp lại - thông minh hơn</a:t>
+              <a:t>Bị từ chối? Nộp lại thông minh hơn</a:t>
             </a:r>
           </a:p>
         </p:txBody>
@@ -27190,7 +27190,7 @@
                 <a:latin typeface="Segoe UI"/>
                 <a:cs typeface="Segoe UI"/>
               </a:rPr>
-              <a:t>Người phản biện tiếp theo có thể vẫn là người cũ - hãy sửa lỗi trước.</a:t>
+              <a:t>Người phản biện tiếp theo có thể vẫn là người cũ. Hãy sửa lỗi trước.</a:t>
             </a:r>
           </a:p>
         </p:txBody>
@@ -29767,7 +29767,7 @@
                 <a:latin typeface="Segoe UI"/>
                 <a:cs typeface="Segoe UI"/>
               </a:rPr>
-              <a:t>Ba đoạn, khoảng 350 từ - và câu mục tiêu dùng 'có liên quan'.</a:t>
+              <a:t>Ba đoạn, khoảng 350 từ. Câu mục tiêu dùng 'có liên quan'.</a:t>
             </a:r>
           </a:p>
         </p:txBody>
@@ -30891,7 +30891,7 @@
                 <a:latin typeface="Segoe UI"/>
                 <a:cs typeface="Segoe UI"/>
               </a:rPr>
-              <a:t>Hạn nộp hai tuần sau Buổi 8 - xem Assignment/peer_review_instructions.</a:t>
+              <a:t>Hạn nộp hai tuần sau Buổi 8 (xem Assignment/peer_review_instructions).</a:t>
             </a:r>
           </a:p>
         </p:txBody>

--- a/vi/files/slides/Session_8_VN.pptx
+++ b/vi/files/slides/Session_8_VN.pptx
@@ -8995,8 +8995,8 @@
                 <a:solidFill>
                   <a:srgbClr val="0D7377"/>
                 </a:solidFill>
-                <a:latin typeface="Segoe UI"/>
-                <a:cs typeface="Segoe UI"/>
+                <a:latin typeface="Arial"/>
+                <a:cs typeface="Arial"/>
               </a:rPr>
               <a:t>Buổi 8 · Công bố: hoàn thiện bài báo, gửi đăng, trình bày</a:t>
             </a:r>
@@ -9063,8 +9063,8 @@
                 <a:solidFill>
                   <a:srgbClr val="0070C0"/>
                 </a:solidFill>
-                <a:latin typeface="Segoe UI"/>
-                <a:cs typeface="Segoe UI"/>
+                <a:latin typeface="Arial"/>
+                <a:cs typeface="Arial"/>
               </a:rPr>
               <a:t>Tuần 8 · Thứ Bảy</a:t>
             </a:r>
@@ -9088,8 +9088,8 @@
                 <a:solidFill>
                   <a:srgbClr val="000000"/>
                 </a:solidFill>
-                <a:latin typeface="Segoe UI"/>
-                <a:cs typeface="Segoe UI"/>
+                <a:latin typeface="Arial"/>
+                <a:cs typeface="Arial"/>
               </a:rPr>
               <a:t>Ôn tập (5 phút)</a:t>
             </a:r>
@@ -9107,8 +9107,8 @@
                 <a:solidFill>
                   <a:srgbClr val="000000"/>
                 </a:solidFill>
-                <a:latin typeface="Segoe UI"/>
-                <a:cs typeface="Segoe UI"/>
+                <a:latin typeface="Arial"/>
+                <a:cs typeface="Arial"/>
               </a:rPr>
               <a:t>8.1  Viết bài báo (II): Đặt vấn đề, Bàn luận, Tóm tắt, Tiêu đề</a:t>
             </a:r>
@@ -9126,8 +9126,8 @@
                 <a:solidFill>
                   <a:srgbClr val="000000"/>
                 </a:solidFill>
-                <a:latin typeface="Segoe UI"/>
-                <a:cs typeface="Segoe UI"/>
+                <a:latin typeface="Arial"/>
+                <a:cs typeface="Arial"/>
               </a:rPr>
               <a:t>Thực hành bản thảo 2: hoàn thiện bản nháp</a:t>
             </a:r>
@@ -9145,8 +9145,8 @@
                 <a:solidFill>
                   <a:srgbClr val="000000"/>
                 </a:solidFill>
-                <a:latin typeface="Segoe UI"/>
-                <a:cs typeface="Segoe UI"/>
+                <a:latin typeface="Arial"/>
+                <a:cs typeface="Arial"/>
               </a:rPr>
               <a:t>8.2  Công bố: từ bảng kiểm đến bản in thử</a:t>
             </a:r>
@@ -9164,8 +9164,8 @@
                 <a:solidFill>
                   <a:srgbClr val="000000"/>
                 </a:solidFill>
-                <a:latin typeface="Segoe UI"/>
-                <a:cs typeface="Segoe UI"/>
+                <a:latin typeface="Arial"/>
+                <a:cs typeface="Arial"/>
               </a:rPr>
               <a:t>8.3  Làm người phản biện: thẩm định Bài 1 và 2</a:t>
             </a:r>
@@ -9183,8 +9183,8 @@
                 <a:solidFill>
                   <a:srgbClr val="000000"/>
                 </a:solidFill>
-                <a:latin typeface="Segoe UI"/>
-                <a:cs typeface="Segoe UI"/>
+                <a:latin typeface="Arial"/>
+                <a:cs typeface="Arial"/>
               </a:rPr>
               <a:t>Các nhóm trình bày: đề cương + kế hoạch công bố</a:t>
             </a:r>
@@ -9221,7 +9221,7 @@
                     <a:lumMod val="50000"/>
                   </a:schemeClr>
                 </a:solidFill>
-                <a:latin typeface="Verdana"/>
+                <a:latin typeface="Arial"/>
               </a:rPr>
               <a:t>Neudata | #ClearDataClearImpact</a:t>
             </a:r>
@@ -9351,8 +9351,8 @@
                 <a:solidFill>
                   <a:srgbClr val="0D7377"/>
                 </a:solidFill>
-                <a:latin typeface="Segoe UI"/>
-                <a:cs typeface="Segoe UI"/>
+                <a:latin typeface="Arial"/>
+                <a:cs typeface="Arial"/>
               </a:rPr>
               <a:t>Kiểm tra: sửa động từ (FLUID-ICU, mô phỏng)</a:t>
             </a:r>
@@ -9422,8 +9422,8 @@
                 <a:solidFill>
                   <a:srgbClr val="FFFFFF"/>
                 </a:solidFill>
-                <a:latin typeface="Segoe UI"/>
-                <a:cs typeface="Segoe UI"/>
+                <a:latin typeface="Arial"/>
+                <a:cs typeface="Arial"/>
               </a:rPr>
               <a:t>CÂU HỎI NHANH   |   2 phút</a:t>
             </a:r>
@@ -9460,25 +9460,19 @@
               <a:spcBef>
                 <a:spcPts val="450"/>
               </a:spcBef>
-              <a:buNone/>
-            </a:pPr>
-            <a:r>
-              <a:rPr lang="en-US" sz="1650" b="1" dirty="0">
-                <a:solidFill>
-                  <a:srgbClr val="6C3483"/>
-                </a:solidFill>
-                <a:latin typeface="Segoe UI"/>
-                <a:cs typeface="Segoe UI"/>
-              </a:rPr>
-              <a:t>1.  </a:t>
-            </a:r>
+              <a:buClr>
+                <a:srgbClr val="6C3483"/>
+              </a:buClr>
+              <a:buFont typeface="Arial"/>
+              <a:buChar char="•"/>
+            </a:pPr>
             <a:r>
               <a:rPr lang="en-US" sz="1650" dirty="0">
                 <a:solidFill>
                   <a:srgbClr val="000000"/>
                 </a:solidFill>
-                <a:latin typeface="Segoe UI"/>
-                <a:cs typeface="Segoe UI"/>
+                <a:latin typeface="Arial"/>
+                <a:cs typeface="Arial"/>
               </a:rPr>
               <a:t>'Cân bằng dương gây ra tử vong cao hơn (OR 1,62).'</a:t>
             </a:r>
@@ -9491,25 +9485,19 @@
               <a:spcBef>
                 <a:spcPts val="450"/>
               </a:spcBef>
-              <a:buNone/>
-            </a:pPr>
-            <a:r>
-              <a:rPr lang="en-US" sz="1650" b="1" dirty="0">
-                <a:solidFill>
-                  <a:srgbClr val="6C3483"/>
-                </a:solidFill>
-                <a:latin typeface="Segoe UI"/>
-                <a:cs typeface="Segoe UI"/>
-              </a:rPr>
-              <a:t>2.  </a:t>
-            </a:r>
+              <a:buClr>
+                <a:srgbClr val="6C3483"/>
+              </a:buClr>
+              <a:buFont typeface="Arial"/>
+              <a:buChar char="•"/>
+            </a:pPr>
             <a:r>
               <a:rPr lang="en-US" sz="1650" dirty="0">
                 <a:solidFill>
                   <a:srgbClr val="000000"/>
                 </a:solidFill>
-                <a:latin typeface="Segoe UI"/>
-                <a:cs typeface="Segoe UI"/>
+                <a:latin typeface="Arial"/>
+                <a:cs typeface="Arial"/>
               </a:rPr>
               <a:t>'Quá tải dịch làm tăng tổn thương thận cấp (OR 1,27 mỗi 10 ml/kg).'</a:t>
             </a:r>
@@ -9522,25 +9510,19 @@
               <a:spcBef>
                 <a:spcPts val="450"/>
               </a:spcBef>
-              <a:buNone/>
-            </a:pPr>
-            <a:r>
-              <a:rPr lang="en-US" sz="1650" b="1" dirty="0">
-                <a:solidFill>
-                  <a:srgbClr val="6C3483"/>
-                </a:solidFill>
-                <a:latin typeface="Segoe UI"/>
-                <a:cs typeface="Segoe UI"/>
-              </a:rPr>
-              <a:t>3.  </a:t>
-            </a:r>
+              <a:buClr>
+                <a:srgbClr val="6C3483"/>
+              </a:buClr>
+              <a:buFont typeface="Arial"/>
+              <a:buChar char="•"/>
+            </a:pPr>
             <a:r>
               <a:rPr lang="en-US" sz="1650" dirty="0">
                 <a:solidFill>
                   <a:srgbClr val="000000"/>
                 </a:solidFill>
-                <a:latin typeface="Segoe UI"/>
-                <a:cs typeface="Segoe UI"/>
+                <a:latin typeface="Arial"/>
+                <a:cs typeface="Arial"/>
               </a:rPr>
               <a:t>'Có xu hướng tử vong (HR Cox 1,46, KTC 95% 1,00 đến 2,13).'</a:t>
             </a:r>
@@ -9553,25 +9535,19 @@
               <a:spcBef>
                 <a:spcPts val="450"/>
               </a:spcBef>
-              <a:buNone/>
-            </a:pPr>
-            <a:r>
-              <a:rPr lang="en-US" sz="1650" b="1" dirty="0">
-                <a:solidFill>
-                  <a:srgbClr val="6C3483"/>
-                </a:solidFill>
-                <a:latin typeface="Segoe UI"/>
-                <a:cs typeface="Segoe UI"/>
-              </a:rPr>
-              <a:t>4.  </a:t>
-            </a:r>
+              <a:buClr>
+                <a:srgbClr val="6C3483"/>
+              </a:buClr>
+              <a:buFont typeface="Arial"/>
+              <a:buChar char="•"/>
+            </a:pPr>
             <a:r>
               <a:rPr lang="en-US" sz="1650" dirty="0">
                 <a:solidFill>
                   <a:srgbClr val="000000"/>
                 </a:solidFill>
-                <a:latin typeface="Segoe UI"/>
-                <a:cs typeface="Segoe UI"/>
+                <a:latin typeface="Arial"/>
+                <a:cs typeface="Arial"/>
               </a:rPr>
               <a:t>'Lactat dự báo tử vong (OR 1,39 mỗi mmol/L).'</a:t>
             </a:r>
@@ -9615,8 +9591,8 @@
                 <a:solidFill>
                   <a:srgbClr val="6C3483"/>
                 </a:solidFill>
-                <a:latin typeface="Segoe UI"/>
-                <a:cs typeface="Segoe UI"/>
+                <a:latin typeface="Arial"/>
+                <a:cs typeface="Arial"/>
               </a:rPr>
               <a:t>Tốt hơn</a:t>
             </a:r>
@@ -9637,8 +9613,8 @@
                 <a:solidFill>
                   <a:srgbClr val="000000"/>
                 </a:solidFill>
-                <a:latin typeface="Segoe UI"/>
-                <a:cs typeface="Segoe UI"/>
+                <a:latin typeface="Arial"/>
+                <a:cs typeface="Arial"/>
               </a:rPr>
               <a:t>1 '... có liên quan với ...'</a:t>
             </a:r>
@@ -9659,8 +9635,8 @@
                 <a:solidFill>
                   <a:srgbClr val="000000"/>
                 </a:solidFill>
-                <a:latin typeface="Segoe UI"/>
-                <a:cs typeface="Segoe UI"/>
+                <a:latin typeface="Arial"/>
+                <a:cs typeface="Arial"/>
               </a:rPr>
               <a:t>2 '... liên quan với khả năng AKI cao hơn'</a:t>
             </a:r>
@@ -9681,8 +9657,8 @@
                 <a:solidFill>
                   <a:srgbClr val="000000"/>
                 </a:solidFill>
-                <a:latin typeface="Segoe UI"/>
-                <a:cs typeface="Segoe UI"/>
+                <a:latin typeface="Arial"/>
+                <a:cs typeface="Arial"/>
               </a:rPr>
               <a:t>3 'HR 1,46 (1,00 đến 2,13): KTC chạm 1'</a:t>
             </a:r>
@@ -9703,8 +9679,8 @@
                 <a:solidFill>
                   <a:srgbClr val="000000"/>
                 </a:solidFill>
-                <a:latin typeface="Segoe UI"/>
-                <a:cs typeface="Segoe UI"/>
+                <a:latin typeface="Arial"/>
+                <a:cs typeface="Arial"/>
               </a:rPr>
               <a:t>4 Được nếu là dự báo; nếu là nhân quả: 'có liên quan'</a:t>
             </a:r>
@@ -9741,7 +9717,7 @@
                     <a:lumMod val="50000"/>
                   </a:schemeClr>
                 </a:solidFill>
-                <a:latin typeface="Verdana"/>
+                <a:latin typeface="Arial"/>
               </a:rPr>
               <a:t>Neudata | #ClearDataClearImpact</a:t>
             </a:r>
@@ -9871,8 +9847,8 @@
                 <a:solidFill>
                   <a:srgbClr val="0D7377"/>
                 </a:solidFill>
-                <a:latin typeface="Segoe UI"/>
-                <a:cs typeface="Segoe UI"/>
+                <a:latin typeface="Arial"/>
+                <a:cs typeface="Arial"/>
               </a:rPr>
               <a:t>Tóm tắt có cấu trúc: tủ kính trưng bày</a:t>
             </a:r>
@@ -9968,8 +9944,8 @@
                 <a:solidFill>
                   <a:srgbClr val="FFFFFF"/>
                 </a:solidFill>
-                <a:latin typeface="Segoe UI"/>
-                <a:cs typeface="Segoe UI"/>
+                <a:latin typeface="Arial"/>
+                <a:cs typeface="Arial"/>
               </a:rPr>
               <a:t>THÔNG ĐIỆP CHÍNH   </a:t>
             </a:r>
@@ -9978,8 +9954,8 @@
                 <a:solidFill>
                   <a:srgbClr val="FFFFFF"/>
                 </a:solidFill>
-                <a:latin typeface="Segoe UI"/>
-                <a:cs typeface="Segoe UI"/>
+                <a:latin typeface="Arial"/>
+                <a:cs typeface="Arial"/>
               </a:rPr>
               <a:t>Mỗi kết quả trong tóm tắt có con số và khoảng tin cậy.</a:t>
             </a:r>
@@ -10016,7 +9992,7 @@
                     <a:lumMod val="50000"/>
                   </a:schemeClr>
                 </a:solidFill>
-                <a:latin typeface="Verdana"/>
+                <a:latin typeface="Arial"/>
               </a:rPr>
               <a:t>Neudata | #ClearDataClearImpact</a:t>
             </a:r>
@@ -10146,8 +10122,8 @@
                 <a:solidFill>
                   <a:srgbClr val="0D7377"/>
                 </a:solidFill>
-                <a:latin typeface="Segoe UI"/>
-                <a:cs typeface="Segoe UI"/>
+                <a:latin typeface="Arial"/>
+                <a:cs typeface="Arial"/>
               </a:rPr>
               <a:t>Ví dụ mẫu: tóm tắt và tiêu đề cho FLUID-ICU câu hỏi 1</a:t>
             </a:r>
@@ -10243,8 +10219,8 @@
                 <a:solidFill>
                   <a:srgbClr val="FFFFFF"/>
                 </a:solidFill>
-                <a:latin typeface="Segoe UI"/>
-                <a:cs typeface="Segoe UI"/>
+                <a:latin typeface="Arial"/>
+                <a:cs typeface="Arial"/>
               </a:rPr>
               <a:t>THÔNG ĐIỆP CHÍNH   </a:t>
             </a:r>
@@ -10253,8 +10229,8 @@
                 <a:solidFill>
                   <a:srgbClr val="FFFFFF"/>
                 </a:solidFill>
-                <a:latin typeface="Segoe UI"/>
-                <a:cs typeface="Segoe UI"/>
+                <a:latin typeface="Arial"/>
+                <a:cs typeface="Arial"/>
               </a:rPr>
               <a:t>Chép số liệu từ phần Kết quả. Tóm tắt không được có con số mới.</a:t>
             </a:r>
@@ -10291,7 +10267,7 @@
                     <a:lumMod val="50000"/>
                   </a:schemeClr>
                 </a:solidFill>
-                <a:latin typeface="Verdana"/>
+                <a:latin typeface="Arial"/>
               </a:rPr>
               <a:t>Neudata | #ClearDataClearImpact</a:t>
             </a:r>
@@ -10421,8 +10397,8 @@
                 <a:solidFill>
                   <a:srgbClr val="0D7377"/>
                 </a:solidFill>
-                <a:latin typeface="Segoe UI"/>
-                <a:cs typeface="Segoe UI"/>
+                <a:latin typeface="Arial"/>
+                <a:cs typeface="Arial"/>
               </a:rPr>
               <a:t>Tiêu đề và từ khóa: PICO của bạn trong một dòng</a:t>
             </a:r>
@@ -10518,8 +10494,8 @@
                 <a:solidFill>
                   <a:srgbClr val="FFFFFF"/>
                 </a:solidFill>
-                <a:latin typeface="Segoe UI"/>
-                <a:cs typeface="Segoe UI"/>
+                <a:latin typeface="Arial"/>
+                <a:cs typeface="Arial"/>
               </a:rPr>
               <a:t>THÔNG ĐIỆP CHÍNH   </a:t>
             </a:r>
@@ -10528,8 +10504,8 @@
                 <a:solidFill>
                   <a:srgbClr val="FFFFFF"/>
                 </a:solidFill>
-                <a:latin typeface="Segoe UI"/>
-                <a:cs typeface="Segoe UI"/>
+                <a:latin typeface="Arial"/>
+                <a:cs typeface="Arial"/>
               </a:rPr>
               <a:t>Tiêu đề tốt nêu câu hỏi và thiết kế, không dùng từ quảng cáo.</a:t>
             </a:r>
@@ -10566,7 +10542,7 @@
                     <a:lumMod val="50000"/>
                   </a:schemeClr>
                 </a:solidFill>
-                <a:latin typeface="Verdana"/>
+                <a:latin typeface="Arial"/>
               </a:rPr>
               <a:t>Neudata | #ClearDataClearImpact</a:t>
             </a:r>
@@ -10696,8 +10672,8 @@
                 <a:solidFill>
                   <a:srgbClr val="0D7377"/>
                 </a:solidFill>
-                <a:latin typeface="Segoe UI"/>
-                <a:cs typeface="Segoe UI"/>
+                <a:latin typeface="Arial"/>
+                <a:cs typeface="Arial"/>
               </a:rPr>
               <a:t>Trước khi nộp: tài liệu tham khảo, bảng kiểm, đọc lần cuối</a:t>
             </a:r>
@@ -10767,8 +10743,8 @@
                 <a:solidFill>
                   <a:srgbClr val="FFFFFF"/>
                 </a:solidFill>
-                <a:latin typeface="Segoe UI"/>
-                <a:cs typeface="Segoe UI"/>
+                <a:latin typeface="Arial"/>
+                <a:cs typeface="Arial"/>
               </a:rPr>
               <a:t>Tài liệu tham khảo</a:t>
             </a:r>
@@ -10816,8 +10792,8 @@
                 <a:solidFill>
                   <a:srgbClr val="000000"/>
                 </a:solidFill>
-                <a:latin typeface="Segoe UI"/>
-                <a:cs typeface="Segoe UI"/>
+                <a:latin typeface="Arial"/>
+                <a:cs typeface="Arial"/>
               </a:rPr>
               <a:t>Dùng phần mềm quản lý tài liệu</a:t>
             </a:r>
@@ -10837,8 +10813,8 @@
                 <a:solidFill>
                   <a:srgbClr val="000000"/>
                 </a:solidFill>
-                <a:latin typeface="Segoe UI"/>
-                <a:cs typeface="Segoe UI"/>
+                <a:latin typeface="Arial"/>
+                <a:cs typeface="Arial"/>
               </a:rPr>
               <a:t>Kiểm tra từng trích dẫn</a:t>
             </a:r>
@@ -10858,8 +10834,8 @@
                 <a:solidFill>
                   <a:srgbClr val="000000"/>
                 </a:solidFill>
-                <a:latin typeface="Segoe UI"/>
-                <a:cs typeface="Segoe UI"/>
+                <a:latin typeface="Arial"/>
+                <a:cs typeface="Arial"/>
               </a:rPr>
               <a:t>B2 dẫn bài Sepsis-3 cho các biến hiệu chỉnh</a:t>
             </a:r>
@@ -10901,8 +10877,8 @@
                 <a:solidFill>
                   <a:srgbClr val="FFFFFF"/>
                 </a:solidFill>
-                <a:latin typeface="Segoe UI"/>
-                <a:cs typeface="Segoe UI"/>
+                <a:latin typeface="Arial"/>
+                <a:cs typeface="Arial"/>
               </a:rPr>
               <a:t>Bảng kiểm báo cáo</a:t>
             </a:r>
@@ -10950,8 +10926,8 @@
                 <a:solidFill>
                   <a:srgbClr val="000000"/>
                 </a:solidFill>
-                <a:latin typeface="Segoe UI"/>
-                <a:cs typeface="Segoe UI"/>
+                <a:latin typeface="Arial"/>
+                <a:cs typeface="Arial"/>
               </a:rPr>
               <a:t>Điền ngay trong lúc viết</a:t>
             </a:r>
@@ -10971,8 +10947,8 @@
                 <a:solidFill>
                   <a:srgbClr val="000000"/>
                 </a:solidFill>
-                <a:latin typeface="Segoe UI"/>
-                <a:cs typeface="Segoe UI"/>
+                <a:latin typeface="Arial"/>
+                <a:cs typeface="Arial"/>
               </a:rPr>
               <a:t>Ghi số trang</a:t>
             </a:r>
@@ -10992,8 +10968,8 @@
                 <a:solidFill>
                   <a:srgbClr val="000000"/>
                 </a:solidFill>
-                <a:latin typeface="Segoe UI"/>
-                <a:cs typeface="Segoe UI"/>
+                <a:latin typeface="Arial"/>
+                <a:cs typeface="Arial"/>
               </a:rPr>
               <a:t>Cả hai bài không nêu CONSORT hay STROBE</a:t>
             </a:r>
@@ -11035,8 +11011,8 @@
                 <a:solidFill>
                   <a:srgbClr val="FFFFFF"/>
                 </a:solidFill>
-                <a:latin typeface="Segoe UI"/>
-                <a:cs typeface="Segoe UI"/>
+                <a:latin typeface="Arial"/>
+                <a:cs typeface="Arial"/>
               </a:rPr>
               <a:t>Đọc lần cuối</a:t>
             </a:r>
@@ -11084,8 +11060,8 @@
                 <a:solidFill>
                   <a:srgbClr val="000000"/>
                 </a:solidFill>
-                <a:latin typeface="Segoe UI"/>
-                <a:cs typeface="Segoe UI"/>
+                <a:latin typeface="Arial"/>
+                <a:cs typeface="Arial"/>
               </a:rPr>
               <a:t>Văn bản = bảng, từng con số</a:t>
             </a:r>
@@ -11105,8 +11081,8 @@
                 <a:solidFill>
                   <a:srgbClr val="000000"/>
                 </a:solidFill>
-                <a:latin typeface="Segoe UI"/>
-                <a:cs typeface="Segoe UI"/>
+                <a:latin typeface="Arial"/>
+                <a:cs typeface="Arial"/>
               </a:rPr>
               <a:t>Dẫn đúng số hình</a:t>
             </a:r>
@@ -11126,8 +11102,8 @@
                 <a:solidFill>
                   <a:srgbClr val="000000"/>
                 </a:solidFill>
-                <a:latin typeface="Segoe UI"/>
-                <a:cs typeface="Segoe UI"/>
+                <a:latin typeface="Arial"/>
+                <a:cs typeface="Arial"/>
               </a:rPr>
               <a:t>Một đồng tác giả đọc các bảng</a:t>
             </a:r>
@@ -11171,8 +11147,8 @@
                 <a:solidFill>
                   <a:srgbClr val="FFFFFF"/>
                 </a:solidFill>
-                <a:latin typeface="Segoe UI"/>
-                <a:cs typeface="Segoe UI"/>
+                <a:latin typeface="Arial"/>
+                <a:cs typeface="Arial"/>
               </a:rPr>
               <a:t>THÔNG ĐIỆP CHÍNH   </a:t>
             </a:r>
@@ -11181,8 +11157,8 @@
                 <a:solidFill>
                   <a:srgbClr val="FFFFFF"/>
                 </a:solidFill>
-                <a:latin typeface="Segoe UI"/>
-                <a:cs typeface="Segoe UI"/>
+                <a:latin typeface="Arial"/>
+                <a:cs typeface="Arial"/>
               </a:rPr>
               <a:t>Phần lớn lỗi của hai bài không cần dữ liệu mới, chỉ cần một đồng tác giả cẩn thận.</a:t>
             </a:r>
@@ -11219,7 +11195,7 @@
                     <a:lumMod val="50000"/>
                   </a:schemeClr>
                 </a:solidFill>
-                <a:latin typeface="Verdana"/>
+                <a:latin typeface="Arial"/>
               </a:rPr>
               <a:t>Neudata | #ClearDataClearImpact</a:t>
             </a:r>
@@ -11349,8 +11325,8 @@
                 <a:solidFill>
                   <a:srgbClr val="0D7377"/>
                 </a:solidFill>
-                <a:latin typeface="Segoe UI"/>
-                <a:cs typeface="Segoe UI"/>
+                <a:latin typeface="Arial"/>
+                <a:cs typeface="Arial"/>
               </a:rPr>
               <a:t>Thực hành bản thảo 2  |  30 phút</a:t>
             </a:r>
@@ -11419,8 +11395,8 @@
                 <a:solidFill>
                   <a:srgbClr val="0D7377"/>
                 </a:solidFill>
-                <a:latin typeface="Segoe UI"/>
-                <a:cs typeface="Segoe UI"/>
+                <a:latin typeface="Arial"/>
+                <a:cs typeface="Arial"/>
               </a:rPr>
               <a:t>Hoàn thiện bản nháp</a:t>
             </a:r>
@@ -11437,8 +11413,8 @@
                 <a:solidFill>
                   <a:srgbClr val="595959"/>
                 </a:solidFill>
-                <a:latin typeface="Segoe UI"/>
-                <a:cs typeface="Segoe UI"/>
+                <a:latin typeface="Arial"/>
+                <a:cs typeface="Arial"/>
               </a:rPr>
               <a:t>Đặt vấn đề, Bàn luận, Tóm tắt và Tiêu đề</a:t>
             </a:r>
@@ -11475,7 +11451,7 @@
                     <a:lumMod val="50000"/>
                   </a:schemeClr>
                 </a:solidFill>
-                <a:latin typeface="Verdana"/>
+                <a:latin typeface="Arial"/>
               </a:rPr>
               <a:t>Neudata | #ClearDataClearImpact</a:t>
             </a:r>
@@ -11605,8 +11581,8 @@
                 <a:solidFill>
                   <a:srgbClr val="0D7377"/>
                 </a:solidFill>
-                <a:latin typeface="Segoe UI"/>
-                <a:cs typeface="Segoe UI"/>
+                <a:latin typeface="Arial"/>
+                <a:cs typeface="Arial"/>
               </a:rPr>
               <a:t>Thực hành bản thảo 2: Đặt vấn đề, Bàn luận, Tóm tắt, Tiêu đề</a:t>
             </a:r>
@@ -11676,8 +11652,8 @@
                 <a:solidFill>
                   <a:srgbClr val="FFFFFF"/>
                 </a:solidFill>
-                <a:latin typeface="Segoe UI"/>
-                <a:cs typeface="Segoe UI"/>
+                <a:latin typeface="Arial"/>
+                <a:cs typeface="Arial"/>
               </a:rPr>
               <a:t>LÀM VIỆC NHÓM   |   30 phút</a:t>
             </a:r>
@@ -11714,25 +11690,19 @@
               <a:spcBef>
                 <a:spcPts val="450"/>
               </a:spcBef>
-              <a:buNone/>
-            </a:pPr>
-            <a:r>
-              <a:rPr lang="en-US" sz="1650" b="1" dirty="0">
-                <a:solidFill>
-                  <a:srgbClr val="0D7377"/>
-                </a:solidFill>
-                <a:latin typeface="Segoe UI"/>
-                <a:cs typeface="Segoe UI"/>
-              </a:rPr>
-              <a:t>1.  </a:t>
-            </a:r>
+              <a:buClr>
+                <a:srgbClr val="0D7377"/>
+              </a:buClr>
+              <a:buFont typeface="Arial"/>
+              <a:buChar char="•"/>
+            </a:pPr>
             <a:r>
               <a:rPr lang="en-US" sz="1650" dirty="0">
                 <a:solidFill>
                   <a:srgbClr val="000000"/>
                 </a:solidFill>
-                <a:latin typeface="Segoe UI"/>
-                <a:cs typeface="Segoe UI"/>
+                <a:latin typeface="Arial"/>
+                <a:cs typeface="Arial"/>
               </a:rPr>
               <a:t>0-8: Đặt vấn đề, ba đoạn (hai người)</a:t>
             </a:r>
@@ -11745,25 +11715,19 @@
               <a:spcBef>
                 <a:spcPts val="450"/>
               </a:spcBef>
-              <a:buNone/>
-            </a:pPr>
-            <a:r>
-              <a:rPr lang="en-US" sz="1650" b="1" dirty="0">
-                <a:solidFill>
-                  <a:srgbClr val="0D7377"/>
-                </a:solidFill>
-                <a:latin typeface="Segoe UI"/>
-                <a:cs typeface="Segoe UI"/>
-              </a:rPr>
-              <a:t>2.  </a:t>
-            </a:r>
+              <a:buClr>
+                <a:srgbClr val="0D7377"/>
+              </a:buClr>
+              <a:buFont typeface="Arial"/>
+              <a:buChar char="•"/>
+            </a:pPr>
             <a:r>
               <a:rPr lang="en-US" sz="1650" dirty="0">
                 <a:solidFill>
                   <a:srgbClr val="000000"/>
                 </a:solidFill>
-                <a:latin typeface="Segoe UI"/>
-                <a:cs typeface="Segoe UI"/>
+                <a:latin typeface="Arial"/>
+                <a:cs typeface="Arial"/>
               </a:rPr>
               <a:t>0-15: Bàn luận, sáu bước (ba người)</a:t>
             </a:r>
@@ -11776,25 +11740,19 @@
               <a:spcBef>
                 <a:spcPts val="450"/>
               </a:spcBef>
-              <a:buNone/>
-            </a:pPr>
-            <a:r>
-              <a:rPr lang="en-US" sz="1650" b="1" dirty="0">
-                <a:solidFill>
-                  <a:srgbClr val="0D7377"/>
-                </a:solidFill>
-                <a:latin typeface="Segoe UI"/>
-                <a:cs typeface="Segoe UI"/>
-              </a:rPr>
-              <a:t>3.  </a:t>
-            </a:r>
+              <a:buClr>
+                <a:srgbClr val="0D7377"/>
+              </a:buClr>
+              <a:buFont typeface="Arial"/>
+              <a:buChar char="•"/>
+            </a:pPr>
             <a:r>
               <a:rPr lang="en-US" sz="1650" dirty="0">
                 <a:solidFill>
                   <a:srgbClr val="000000"/>
                 </a:solidFill>
-                <a:latin typeface="Segoe UI"/>
-                <a:cs typeface="Segoe UI"/>
+                <a:latin typeface="Arial"/>
+                <a:cs typeface="Arial"/>
               </a:rPr>
               <a:t>15-23: Tóm tắt 250 từ, số liệu lấy từ Kết quả</a:t>
             </a:r>
@@ -11807,25 +11765,19 @@
               <a:spcBef>
                 <a:spcPts val="450"/>
               </a:spcBef>
-              <a:buNone/>
-            </a:pPr>
-            <a:r>
-              <a:rPr lang="en-US" sz="1650" b="1" dirty="0">
-                <a:solidFill>
-                  <a:srgbClr val="0D7377"/>
-                </a:solidFill>
-                <a:latin typeface="Segoe UI"/>
-                <a:cs typeface="Segoe UI"/>
-              </a:rPr>
-              <a:t>4.  </a:t>
-            </a:r>
+              <a:buClr>
+                <a:srgbClr val="0D7377"/>
+              </a:buClr>
+              <a:buFont typeface="Arial"/>
+              <a:buChar char="•"/>
+            </a:pPr>
             <a:r>
               <a:rPr lang="en-US" sz="1650" dirty="0">
                 <a:solidFill>
                   <a:srgbClr val="000000"/>
                 </a:solidFill>
-                <a:latin typeface="Segoe UI"/>
-                <a:cs typeface="Segoe UI"/>
+                <a:latin typeface="Arial"/>
+                <a:cs typeface="Arial"/>
               </a:rPr>
               <a:t>23-27: Tiêu đề (10-16 từ, nêu thiết kế) + từ khóa</a:t>
             </a:r>
@@ -11838,25 +11790,19 @@
               <a:spcBef>
                 <a:spcPts val="450"/>
               </a:spcBef>
-              <a:buNone/>
-            </a:pPr>
-            <a:r>
-              <a:rPr lang="en-US" sz="1650" b="1" dirty="0">
-                <a:solidFill>
-                  <a:srgbClr val="0D7377"/>
-                </a:solidFill>
-                <a:latin typeface="Segoe UI"/>
-                <a:cs typeface="Segoe UI"/>
-              </a:rPr>
-              <a:t>5.  </a:t>
-            </a:r>
+              <a:buClr>
+                <a:srgbClr val="0D7377"/>
+              </a:buClr>
+              <a:buFont typeface="Arial"/>
+              <a:buChar char="•"/>
+            </a:pPr>
             <a:r>
               <a:rPr lang="en-US" sz="1650" dirty="0">
                 <a:solidFill>
                   <a:srgbClr val="000000"/>
                 </a:solidFill>
-                <a:latin typeface="Segoe UI"/>
-                <a:cs typeface="Segoe UI"/>
+                <a:latin typeface="Arial"/>
+                <a:cs typeface="Arial"/>
               </a:rPr>
               <a:t>27-30: kiểm tra động từ: mọi 'gây ra', 'tác động' → 'có liên quan'</a:t>
             </a:r>
@@ -11900,8 +11846,8 @@
                 <a:solidFill>
                   <a:srgbClr val="0D7377"/>
                 </a:solidFill>
-                <a:latin typeface="Segoe UI"/>
-                <a:cs typeface="Segoe UI"/>
+                <a:latin typeface="Arial"/>
+                <a:cs typeface="Arial"/>
               </a:rPr>
               <a:t>Vai trò</a:t>
             </a:r>
@@ -11922,8 +11868,8 @@
                 <a:solidFill>
                   <a:srgbClr val="000000"/>
                 </a:solidFill>
-                <a:latin typeface="Segoe UI"/>
-                <a:cs typeface="Segoe UI"/>
+                <a:latin typeface="Arial"/>
+                <a:cs typeface="Arial"/>
               </a:rPr>
               <a:t>2 Đặt vấn đề</a:t>
             </a:r>
@@ -11944,8 +11890,8 @@
                 <a:solidFill>
                   <a:srgbClr val="000000"/>
                 </a:solidFill>
-                <a:latin typeface="Segoe UI"/>
-                <a:cs typeface="Segoe UI"/>
+                <a:latin typeface="Arial"/>
+                <a:cs typeface="Arial"/>
               </a:rPr>
               <a:t>3 Bàn luận</a:t>
             </a:r>
@@ -11966,8 +11912,8 @@
                 <a:solidFill>
                   <a:srgbClr val="000000"/>
                 </a:solidFill>
-                <a:latin typeface="Segoe UI"/>
-                <a:cs typeface="Segoe UI"/>
+                <a:latin typeface="Arial"/>
+                <a:cs typeface="Arial"/>
               </a:rPr>
               <a:t>1 kiểm số + động từ</a:t>
             </a:r>
@@ -11988,8 +11934,8 @@
                 <a:solidFill>
                   <a:srgbClr val="000000"/>
                 </a:solidFill>
-                <a:latin typeface="Segoe UI"/>
-                <a:cs typeface="Segoe UI"/>
+                <a:latin typeface="Arial"/>
+                <a:cs typeface="Arial"/>
               </a:rPr>
               <a:t>Cả nhóm: Tóm tắt và Tiêu đề</a:t>
             </a:r>
@@ -12035,8 +11981,8 @@
                 <a:solidFill>
                   <a:srgbClr val="0D7377"/>
                 </a:solidFill>
-                <a:latin typeface="Segoe UI"/>
-                <a:cs typeface="Segoe UI"/>
+                <a:latin typeface="Arial"/>
+                <a:cs typeface="Arial"/>
               </a:rPr>
               <a:t>SẢN PHẨM   </a:t>
             </a:r>
@@ -12045,8 +11991,8 @@
                 <a:solidFill>
                   <a:srgbClr val="000000"/>
                 </a:solidFill>
-                <a:latin typeface="Segoe UI"/>
-                <a:cs typeface="Segoe UI"/>
+                <a:latin typeface="Arial"/>
+                <a:cs typeface="Arial"/>
               </a:rPr>
               <a:t>Bản nháp hoàn chỉnh (~2.000 từ) đã lưu để trao đổi phản biện sau khóa học</a:t>
             </a:r>
@@ -12083,7 +12029,7 @@
                     <a:lumMod val="50000"/>
                   </a:schemeClr>
                 </a:solidFill>
-                <a:latin typeface="Verdana"/>
+                <a:latin typeface="Arial"/>
               </a:rPr>
               <a:t>Neudata | #ClearDataClearImpact</a:t>
             </a:r>
@@ -12213,8 +12159,8 @@
                 <a:solidFill>
                   <a:srgbClr val="0D7377"/>
                 </a:solidFill>
-                <a:latin typeface="Segoe UI"/>
-                <a:cs typeface="Segoe UI"/>
+                <a:latin typeface="Arial"/>
+                <a:cs typeface="Arial"/>
               </a:rPr>
               <a:t>Giải lao</a:t>
             </a:r>
@@ -12284,8 +12230,8 @@
                 <a:solidFill>
                   <a:srgbClr val="FFFFFF"/>
                 </a:solidFill>
-                <a:latin typeface="Segoe UI"/>
-                <a:cs typeface="Segoe UI"/>
+                <a:latin typeface="Arial"/>
+                <a:cs typeface="Arial"/>
               </a:rPr>
               <a:t>GIẢI LAO   |   15 phút</a:t>
             </a:r>
@@ -12322,25 +12268,19 @@
               <a:spcBef>
                 <a:spcPts val="450"/>
               </a:spcBef>
-              <a:buNone/>
-            </a:pPr>
-            <a:r>
-              <a:rPr lang="en-US" sz="1650" b="1" dirty="0">
-                <a:solidFill>
-                  <a:srgbClr val="8A99A3"/>
-                </a:solidFill>
-                <a:latin typeface="Segoe UI"/>
-                <a:cs typeface="Segoe UI"/>
-              </a:rPr>
-              <a:t>1.  </a:t>
-            </a:r>
+              <a:buClr>
+                <a:srgbClr val="8A99A3"/>
+              </a:buClr>
+              <a:buFont typeface="Arial"/>
+              <a:buChar char="•"/>
+            </a:pPr>
             <a:r>
               <a:rPr lang="en-US" sz="1650" dirty="0">
                 <a:solidFill>
                   <a:srgbClr val="000000"/>
                 </a:solidFill>
-                <a:latin typeface="Segoe UI"/>
-                <a:cs typeface="Segoe UI"/>
+                <a:latin typeface="Arial"/>
+                <a:cs typeface="Arial"/>
               </a:rPr>
               <a:t>Lưu và gửi bản nháp bản thảo</a:t>
             </a:r>
@@ -12353,25 +12293,19 @@
               <a:spcBef>
                 <a:spcPts val="450"/>
               </a:spcBef>
-              <a:buNone/>
-            </a:pPr>
-            <a:r>
-              <a:rPr lang="en-US" sz="1650" b="1" dirty="0">
-                <a:solidFill>
-                  <a:srgbClr val="8A99A3"/>
-                </a:solidFill>
-                <a:latin typeface="Segoe UI"/>
-                <a:cs typeface="Segoe UI"/>
-              </a:rPr>
-              <a:t>2.  </a:t>
-            </a:r>
+              <a:buClr>
+                <a:srgbClr val="8A99A3"/>
+              </a:buClr>
+              <a:buFont typeface="Arial"/>
+              <a:buChar char="•"/>
+            </a:pPr>
             <a:r>
               <a:rPr lang="en-US" sz="1650" dirty="0">
                 <a:solidFill>
                   <a:srgbClr val="000000"/>
                 </a:solidFill>
-                <a:latin typeface="Segoe UI"/>
-                <a:cs typeface="Segoe UI"/>
+                <a:latin typeface="Arial"/>
+                <a:cs typeface="Arial"/>
               </a:rPr>
               <a:t>Nhóm 1-3: nhận Bài 1 (RCT) và phiếu trả lời</a:t>
             </a:r>
@@ -12384,25 +12318,19 @@
               <a:spcBef>
                 <a:spcPts val="450"/>
               </a:spcBef>
-              <a:buNone/>
-            </a:pPr>
-            <a:r>
-              <a:rPr lang="en-US" sz="1650" b="1" dirty="0">
-                <a:solidFill>
-                  <a:srgbClr val="8A99A3"/>
-                </a:solidFill>
-                <a:latin typeface="Segoe UI"/>
-                <a:cs typeface="Segoe UI"/>
-              </a:rPr>
-              <a:t>3.  </a:t>
-            </a:r>
+              <a:buClr>
+                <a:srgbClr val="8A99A3"/>
+              </a:buClr>
+              <a:buFont typeface="Arial"/>
+              <a:buChar char="•"/>
+            </a:pPr>
             <a:r>
               <a:rPr lang="en-US" sz="1650" dirty="0">
                 <a:solidFill>
                   <a:srgbClr val="000000"/>
                 </a:solidFill>
-                <a:latin typeface="Segoe UI"/>
-                <a:cs typeface="Segoe UI"/>
+                <a:latin typeface="Arial"/>
+                <a:cs typeface="Arial"/>
               </a:rPr>
               <a:t>Nhóm 4-5: nhận Bài 2 (đoàn hệ) và phiếu trả lời</a:t>
             </a:r>
@@ -12415,25 +12343,19 @@
               <a:spcBef>
                 <a:spcPts val="450"/>
               </a:spcBef>
-              <a:buNone/>
-            </a:pPr>
-            <a:r>
-              <a:rPr lang="en-US" sz="1650" b="1" dirty="0">
-                <a:solidFill>
-                  <a:srgbClr val="8A99A3"/>
-                </a:solidFill>
-                <a:latin typeface="Segoe UI"/>
-                <a:cs typeface="Segoe UI"/>
-              </a:rPr>
-              <a:t>4.  </a:t>
-            </a:r>
+              <a:buClr>
+                <a:srgbClr val="8A99A3"/>
+              </a:buClr>
+              <a:buFont typeface="Arial"/>
+              <a:buChar char="•"/>
+            </a:pPr>
             <a:r>
               <a:rPr lang="en-US" sz="1650" dirty="0">
                 <a:solidFill>
                   <a:srgbClr val="000000"/>
                 </a:solidFill>
-                <a:latin typeface="Segoe UI"/>
-                <a:cs typeface="Segoe UI"/>
+                <a:latin typeface="Arial"/>
+                <a:cs typeface="Arial"/>
               </a:rPr>
               <a:t>Người trình bày: kiểm tra slide mở được trên máy trình chiếu</a:t>
             </a:r>
@@ -12446,25 +12368,19 @@
               <a:spcBef>
                 <a:spcPts val="450"/>
               </a:spcBef>
-              <a:buNone/>
-            </a:pPr>
-            <a:r>
-              <a:rPr lang="en-US" sz="1650" b="1" dirty="0">
-                <a:solidFill>
-                  <a:srgbClr val="8A99A3"/>
-                </a:solidFill>
-                <a:latin typeface="Segoe UI"/>
-                <a:cs typeface="Segoe UI"/>
-              </a:rPr>
-              <a:t>5.  </a:t>
-            </a:r>
+              <a:buClr>
+                <a:srgbClr val="8A99A3"/>
+              </a:buClr>
+              <a:buFont typeface="Arial"/>
+              <a:buChar char="•"/>
+            </a:pPr>
             <a:r>
               <a:rPr lang="en-US" sz="1650" dirty="0">
                 <a:solidFill>
                   <a:srgbClr val="000000"/>
                 </a:solidFill>
-                <a:latin typeface="Segoe UI"/>
-                <a:cs typeface="Segoe UI"/>
+                <a:latin typeface="Arial"/>
+                <a:cs typeface="Arial"/>
               </a:rPr>
               <a:t>Quay lại đúng 1:15</a:t>
             </a:r>
@@ -12508,8 +12424,8 @@
                 <a:solidFill>
                   <a:srgbClr val="8A99A3"/>
                 </a:solidFill>
-                <a:latin typeface="Segoe UI"/>
-                <a:cs typeface="Segoe UI"/>
+                <a:latin typeface="Arial"/>
+                <a:cs typeface="Arial"/>
               </a:rPr>
               <a:t>Sau giải lao</a:t>
             </a:r>
@@ -12530,8 +12446,8 @@
                 <a:solidFill>
                   <a:srgbClr val="000000"/>
                 </a:solidFill>
-                <a:latin typeface="Segoe UI"/>
-                <a:cs typeface="Segoe UI"/>
+                <a:latin typeface="Arial"/>
+                <a:cs typeface="Arial"/>
               </a:rPr>
               <a:t>Công bố (25 phút)</a:t>
             </a:r>
@@ -12552,8 +12468,8 @@
                 <a:solidFill>
                   <a:srgbClr val="000000"/>
                 </a:solidFill>
-                <a:latin typeface="Segoe UI"/>
-                <a:cs typeface="Segoe UI"/>
+                <a:latin typeface="Arial"/>
+                <a:cs typeface="Arial"/>
               </a:rPr>
               <a:t>Làm người phản biện (20 phút)</a:t>
             </a:r>
@@ -12574,8 +12490,8 @@
                 <a:solidFill>
                   <a:srgbClr val="000000"/>
                 </a:solidFill>
-                <a:latin typeface="Segoe UI"/>
-                <a:cs typeface="Segoe UI"/>
+                <a:latin typeface="Arial"/>
+                <a:cs typeface="Arial"/>
               </a:rPr>
               <a:t>Các nhóm trình bày (45 phút)</a:t>
             </a:r>
@@ -12612,7 +12528,7 @@
                     <a:lumMod val="50000"/>
                   </a:schemeClr>
                 </a:solidFill>
-                <a:latin typeface="Verdana"/>
+                <a:latin typeface="Arial"/>
               </a:rPr>
               <a:t>Neudata | #ClearDataClearImpact</a:t>
             </a:r>
@@ -12742,8 +12658,8 @@
                 <a:solidFill>
                   <a:srgbClr val="0D7377"/>
                 </a:solidFill>
-                <a:latin typeface="Segoe UI"/>
-                <a:cs typeface="Segoe UI"/>
+                <a:latin typeface="Arial"/>
+                <a:cs typeface="Arial"/>
               </a:rPr>
               <a:t>8.2  |  25 phút</a:t>
             </a:r>
@@ -12812,8 +12728,8 @@
                 <a:solidFill>
                   <a:srgbClr val="0D7377"/>
                 </a:solidFill>
-                <a:latin typeface="Segoe UI"/>
-                <a:cs typeface="Segoe UI"/>
+                <a:latin typeface="Arial"/>
+                <a:cs typeface="Arial"/>
               </a:rPr>
               <a:t>Công bố bài báo</a:t>
             </a:r>
@@ -12830,8 +12746,8 @@
                 <a:solidFill>
                   <a:srgbClr val="595959"/>
                 </a:solidFill>
-                <a:latin typeface="Segoe UI"/>
-                <a:cs typeface="Segoe UI"/>
+                <a:latin typeface="Arial"/>
+                <a:cs typeface="Arial"/>
               </a:rPr>
               <a:t>Từ bảng kiểm đến bản in thử, và những cái bẫy trên đường</a:t>
             </a:r>
@@ -12868,7 +12784,7 @@
                     <a:lumMod val="50000"/>
                   </a:schemeClr>
                 </a:solidFill>
-                <a:latin typeface="Verdana"/>
+                <a:latin typeface="Arial"/>
               </a:rPr>
               <a:t>Neudata | #ClearDataClearImpact</a:t>
             </a:r>
@@ -12998,8 +12914,8 @@
                 <a:solidFill>
                   <a:srgbClr val="0D7377"/>
                 </a:solidFill>
-                <a:latin typeface="Segoe UI"/>
-                <a:cs typeface="Segoe UI"/>
+                <a:latin typeface="Arial"/>
+                <a:cs typeface="Arial"/>
               </a:rPr>
               <a:t>Hướng dẫn báo cáo: chọn theo thiết kế</a:t>
             </a:r>
@@ -13095,8 +13011,8 @@
                 <a:solidFill>
                   <a:srgbClr val="FFFFFF"/>
                 </a:solidFill>
-                <a:latin typeface="Segoe UI"/>
-                <a:cs typeface="Segoe UI"/>
+                <a:latin typeface="Arial"/>
+                <a:cs typeface="Arial"/>
               </a:rPr>
               <a:t>THÔNG ĐIỆP CHÍNH   </a:t>
             </a:r>
@@ -13105,8 +13021,8 @@
                 <a:solidFill>
                   <a:srgbClr val="FFFFFF"/>
                 </a:solidFill>
-                <a:latin typeface="Segoe UI"/>
-                <a:cs typeface="Segoe UI"/>
+                <a:latin typeface="Arial"/>
+                <a:cs typeface="Arial"/>
               </a:rPr>
               <a:t>Ghi tên hướng dẫn trong Phần 4 và dùng nó làm bảng kiểm khi viết.</a:t>
             </a:r>
@@ -13143,7 +13059,7 @@
                     <a:lumMod val="50000"/>
                   </a:schemeClr>
                 </a:solidFill>
-                <a:latin typeface="Verdana"/>
+                <a:latin typeface="Arial"/>
               </a:rPr>
               <a:t>Neudata | #ClearDataClearImpact</a:t>
             </a:r>
@@ -13273,8 +13189,8 @@
                 <a:solidFill>
                   <a:srgbClr val="0D7377"/>
                 </a:solidFill>
-                <a:latin typeface="Segoe UI"/>
-                <a:cs typeface="Segoe UI"/>
+                <a:latin typeface="Arial"/>
+                <a:cs typeface="Arial"/>
               </a:rPr>
               <a:t>Ôn tập: ba câu hỏi từ Buổi 7</a:t>
             </a:r>
@@ -13344,8 +13260,8 @@
                 <a:solidFill>
                   <a:srgbClr val="FFFFFF"/>
                 </a:solidFill>
-                <a:latin typeface="Segoe UI"/>
-                <a:cs typeface="Segoe UI"/>
+                <a:latin typeface="Arial"/>
+                <a:cs typeface="Arial"/>
               </a:rPr>
               <a:t>CÂU HỎI NHANH   |   5 phút</a:t>
             </a:r>
@@ -13382,25 +13298,19 @@
               <a:spcBef>
                 <a:spcPts val="450"/>
               </a:spcBef>
-              <a:buNone/>
-            </a:pPr>
-            <a:r>
-              <a:rPr lang="en-US" sz="1650" b="1" dirty="0">
-                <a:solidFill>
-                  <a:srgbClr val="6C3483"/>
-                </a:solidFill>
-                <a:latin typeface="Segoe UI"/>
-                <a:cs typeface="Segoe UI"/>
-              </a:rPr>
-              <a:t>1.  </a:t>
-            </a:r>
+              <a:buClr>
+                <a:srgbClr val="6C3483"/>
+              </a:buClr>
+              <a:buFont typeface="Arial"/>
+              <a:buChar char="•"/>
+            </a:pPr>
             <a:r>
               <a:rPr lang="en-US" sz="1650" dirty="0">
                 <a:solidFill>
                   <a:srgbClr val="000000"/>
                 </a:solidFill>
-                <a:latin typeface="Segoe UI"/>
-                <a:cs typeface="Segoe UI"/>
+                <a:latin typeface="Arial"/>
+                <a:cs typeface="Arial"/>
               </a:rPr>
               <a:t>Ai chấp thuận cho bệnh nhân sốc nhiễm khuẩn đang an thần?</a:t>
             </a:r>
@@ -13413,25 +13323,19 @@
               <a:spcBef>
                 <a:spcPts val="450"/>
               </a:spcBef>
-              <a:buNone/>
-            </a:pPr>
-            <a:r>
-              <a:rPr lang="en-US" sz="1650" b="1" dirty="0">
-                <a:solidFill>
-                  <a:srgbClr val="6C3483"/>
-                </a:solidFill>
-                <a:latin typeface="Segoe UI"/>
-                <a:cs typeface="Segoe UI"/>
-              </a:rPr>
-              <a:t>2.  </a:t>
-            </a:r>
+              <a:buClr>
+                <a:srgbClr val="6C3483"/>
+              </a:buClr>
+              <a:buFont typeface="Arial"/>
+              <a:buChar char="•"/>
+            </a:pPr>
             <a:r>
               <a:rPr lang="en-US" sz="1650" dirty="0">
                 <a:solidFill>
                   <a:srgbClr val="000000"/>
                 </a:solidFill>
-                <a:latin typeface="Segoe UI"/>
-                <a:cs typeface="Segoe UI"/>
+                <a:latin typeface="Arial"/>
+                <a:cs typeface="Arial"/>
               </a:rPr>
               <a:t>Mục STROBE nào yêu cầu ước lượng thô VÀ hiệu chỉnh?</a:t>
             </a:r>
@@ -13444,25 +13348,19 @@
               <a:spcBef>
                 <a:spcPts val="450"/>
               </a:spcBef>
-              <a:buNone/>
-            </a:pPr>
-            <a:r>
-              <a:rPr lang="en-US" sz="1650" b="1" dirty="0">
-                <a:solidFill>
-                  <a:srgbClr val="6C3483"/>
-                </a:solidFill>
-                <a:latin typeface="Segoe UI"/>
-                <a:cs typeface="Segoe UI"/>
-              </a:rPr>
-              <a:t>3.  </a:t>
-            </a:r>
+              <a:buClr>
+                <a:srgbClr val="6C3483"/>
+              </a:buClr>
+              <a:buFont typeface="Arial"/>
+              <a:buChar char="•"/>
+            </a:pPr>
             <a:r>
               <a:rPr lang="en-US" sz="1650" dirty="0">
                 <a:solidFill>
                   <a:srgbClr val="000000"/>
                 </a:solidFill>
-                <a:latin typeface="Segoe UI"/>
-                <a:cs typeface="Segoe UI"/>
+                <a:latin typeface="Arial"/>
+                <a:cs typeface="Arial"/>
               </a:rPr>
               <a:t>Câu 'có thể do bệnh nặng hơn được truyền nhiều dịch hơn' thuộc phần nào?</a:t>
             </a:r>
@@ -13506,8 +13404,8 @@
                 <a:solidFill>
                   <a:srgbClr val="6C3483"/>
                 </a:solidFill>
-                <a:latin typeface="Segoe UI"/>
-                <a:cs typeface="Segoe UI"/>
+                <a:latin typeface="Arial"/>
+                <a:cs typeface="Arial"/>
               </a:rPr>
               <a:t>Đáp án</a:t>
             </a:r>
@@ -13528,8 +13426,8 @@
                 <a:solidFill>
                   <a:srgbClr val="000000"/>
                 </a:solidFill>
-                <a:latin typeface="Segoe UI"/>
-                <a:cs typeface="Segoe UI"/>
+                <a:latin typeface="Arial"/>
+                <a:cs typeface="Arial"/>
               </a:rPr>
               <a:t>Người đại diện hợp pháp (hoặc chấp thuận trì hoãn nếu được duyệt)</a:t>
             </a:r>
@@ -13550,8 +13448,8 @@
                 <a:solidFill>
                   <a:srgbClr val="000000"/>
                 </a:solidFill>
-                <a:latin typeface="Segoe UI"/>
-                <a:cs typeface="Segoe UI"/>
+                <a:latin typeface="Arial"/>
+                <a:cs typeface="Arial"/>
               </a:rPr>
               <a:t>Mục 16 (kết quả chính)</a:t>
             </a:r>
@@ -13572,8 +13470,8 @@
                 <a:solidFill>
                   <a:srgbClr val="000000"/>
                 </a:solidFill>
-                <a:latin typeface="Segoe UI"/>
-                <a:cs typeface="Segoe UI"/>
+                <a:latin typeface="Arial"/>
+                <a:cs typeface="Arial"/>
               </a:rPr>
               <a:t>Bàn luận, không phải Kết quả</a:t>
             </a:r>
@@ -13619,8 +13517,8 @@
                 <a:solidFill>
                   <a:srgbClr val="6C3483"/>
                 </a:solidFill>
-                <a:latin typeface="Segoe UI"/>
-                <a:cs typeface="Segoe UI"/>
+                <a:latin typeface="Arial"/>
+                <a:cs typeface="Arial"/>
               </a:rPr>
               <a:t>SẢN PHẨM   </a:t>
             </a:r>
@@ -13629,8 +13527,8 @@
                 <a:solidFill>
                   <a:srgbClr val="000000"/>
                 </a:solidFill>
-                <a:latin typeface="Segoe UI"/>
-                <a:cs typeface="Segoe UI"/>
+                <a:latin typeface="Arial"/>
+                <a:cs typeface="Arial"/>
               </a:rPr>
               <a:t>Mọi người trở lại tinh thần viết</a:t>
             </a:r>
@@ -13667,7 +13565,7 @@
                     <a:lumMod val="50000"/>
                   </a:schemeClr>
                 </a:solidFill>
-                <a:latin typeface="Verdana"/>
+                <a:latin typeface="Arial"/>
               </a:rPr>
               <a:t>Neudata | #ClearDataClearImpact</a:t>
             </a:r>
@@ -13797,8 +13695,8 @@
                 <a:solidFill>
                   <a:srgbClr val="0D7377"/>
                 </a:solidFill>
-                <a:latin typeface="Segoe UI"/>
-                <a:cs typeface="Segoe UI"/>
+                <a:latin typeface="Arial"/>
+                <a:cs typeface="Arial"/>
               </a:rPr>
               <a:t>Chọn tạp chí: bốn điều cần kiểm tra</a:t>
             </a:r>
@@ -13864,8 +13762,8 @@
                 <a:solidFill>
                   <a:srgbClr val="595959"/>
                 </a:solidFill>
-                <a:latin typeface="Segoe UI"/>
-                <a:cs typeface="Segoe UI"/>
+                <a:latin typeface="Arial"/>
+                <a:cs typeface="Arial"/>
               </a:rPr>
               <a:t>Chọn tạp chí trước khi viết: tạp chí đặt ra luật chơi.</a:t>
             </a:r>
@@ -13907,8 +13805,8 @@
                 <a:solidFill>
                   <a:srgbClr val="FFFFFF"/>
                 </a:solidFill>
-                <a:latin typeface="Segoe UI"/>
-                <a:cs typeface="Segoe UI"/>
+                <a:latin typeface="Arial"/>
+                <a:cs typeface="Arial"/>
               </a:rPr>
               <a:t>Phù hợp</a:t>
             </a:r>
@@ -13956,8 +13854,8 @@
                 <a:solidFill>
                   <a:srgbClr val="000000"/>
                 </a:solidFill>
-                <a:latin typeface="Segoe UI"/>
-                <a:cs typeface="Segoe UI"/>
+                <a:latin typeface="Arial"/>
+                <a:cs typeface="Arial"/>
               </a:rPr>
               <a:t>Ai cần kết quả của bạn?</a:t>
             </a:r>
@@ -13977,8 +13875,8 @@
                 <a:solidFill>
                   <a:srgbClr val="000000"/>
                 </a:solidFill>
-                <a:latin typeface="Segoe UI"/>
-                <a:cs typeface="Segoe UI"/>
+                <a:latin typeface="Arial"/>
+                <a:cs typeface="Arial"/>
               </a:rPr>
               <a:t>Đọc 3 số gần đây</a:t>
             </a:r>
@@ -13998,8 +13896,8 @@
                 <a:solidFill>
                   <a:srgbClr val="000000"/>
                 </a:solidFill>
-                <a:latin typeface="Segoe UI"/>
-                <a:cs typeface="Segoe UI"/>
+                <a:latin typeface="Arial"/>
+                <a:cs typeface="Arial"/>
               </a:rPr>
               <a:t>Có đăng thiết kế tương tự?</a:t>
             </a:r>
@@ -14041,8 +13939,8 @@
                 <a:solidFill>
                   <a:srgbClr val="FFFFFF"/>
                 </a:solidFill>
-                <a:latin typeface="Segoe UI"/>
-                <a:cs typeface="Segoe UI"/>
+                <a:latin typeface="Arial"/>
+                <a:cs typeface="Arial"/>
               </a:rPr>
               <a:t>Tin cậy</a:t>
             </a:r>
@@ -14090,8 +13988,8 @@
                 <a:solidFill>
                   <a:srgbClr val="000000"/>
                 </a:solidFill>
-                <a:latin typeface="Segoe UI"/>
-                <a:cs typeface="Segoe UI"/>
+                <a:latin typeface="Arial"/>
+                <a:cs typeface="Arial"/>
               </a:rPr>
               <a:t>Được chỉ mục: MEDLINE, DOAJ, Scopus hoặc Web of Science</a:t>
             </a:r>
@@ -14111,8 +14009,8 @@
                 <a:solidFill>
                   <a:srgbClr val="000000"/>
                 </a:solidFill>
-                <a:latin typeface="Segoe UI"/>
-                <a:cs typeface="Segoe UI"/>
+                <a:latin typeface="Arial"/>
+                <a:cs typeface="Arial"/>
               </a:rPr>
               <a:t>Chính sách phản biện rõ ràng</a:t>
             </a:r>
@@ -14154,8 +14052,8 @@
                 <a:solidFill>
                   <a:srgbClr val="FFFFFF"/>
                 </a:solidFill>
-                <a:latin typeface="Segoe UI"/>
-                <a:cs typeface="Segoe UI"/>
+                <a:latin typeface="Arial"/>
+                <a:cs typeface="Arial"/>
               </a:rPr>
               <a:t>Quy định</a:t>
             </a:r>
@@ -14203,8 +14101,8 @@
                 <a:solidFill>
                   <a:srgbClr val="000000"/>
                 </a:solidFill>
-                <a:latin typeface="Segoe UI"/>
-                <a:cs typeface="Segoe UI"/>
+                <a:latin typeface="Arial"/>
+                <a:cs typeface="Arial"/>
               </a:rPr>
               <a:t>Hướng dẫn tác giả</a:t>
             </a:r>
@@ -14224,8 +14122,8 @@
                 <a:solidFill>
                   <a:srgbClr val="000000"/>
                 </a:solidFill>
-                <a:latin typeface="Segoe UI"/>
-                <a:cs typeface="Segoe UI"/>
+                <a:latin typeface="Arial"/>
+                <a:cs typeface="Arial"/>
               </a:rPr>
               <a:t>Giới hạn số chữ, bảng kiểm</a:t>
             </a:r>
@@ -14245,8 +14143,8 @@
                 <a:solidFill>
                   <a:srgbClr val="000000"/>
                 </a:solidFill>
-                <a:latin typeface="Segoe UI"/>
-                <a:cs typeface="Segoe UI"/>
+                <a:latin typeface="Arial"/>
+                <a:cs typeface="Arial"/>
               </a:rPr>
               <a:t>Có yêu cầu đăng ký?</a:t>
             </a:r>
@@ -14288,8 +14186,8 @@
                 <a:solidFill>
                   <a:srgbClr val="FFFFFF"/>
                 </a:solidFill>
-                <a:latin typeface="Segoe UI"/>
-                <a:cs typeface="Segoe UI"/>
+                <a:latin typeface="Arial"/>
+                <a:cs typeface="Arial"/>
               </a:rPr>
               <a:t>Chi phí &amp; tốc độ</a:t>
             </a:r>
@@ -14337,8 +14235,8 @@
                 <a:solidFill>
                   <a:srgbClr val="000000"/>
                 </a:solidFill>
-                <a:latin typeface="Segoe UI"/>
-                <a:cs typeface="Segoe UI"/>
+                <a:latin typeface="Arial"/>
+                <a:cs typeface="Arial"/>
               </a:rPr>
               <a:t>Phí (APC) và miễn giảm</a:t>
             </a:r>
@@ -14358,8 +14256,8 @@
                 <a:solidFill>
                   <a:srgbClr val="000000"/>
                 </a:solidFill>
-                <a:latin typeface="Segoe UI"/>
-                <a:cs typeface="Segoe UI"/>
+                <a:latin typeface="Arial"/>
+                <a:cs typeface="Arial"/>
               </a:rPr>
               <a:t>Giấy phép: CC BY hay BY-NC-ND</a:t>
             </a:r>
@@ -14379,8 +14277,8 @@
                 <a:solidFill>
                   <a:srgbClr val="000000"/>
                 </a:solidFill>
-                <a:latin typeface="Segoe UI"/>
-                <a:cs typeface="Segoe UI"/>
+                <a:latin typeface="Arial"/>
+                <a:cs typeface="Arial"/>
               </a:rPr>
               <a:t>Bài 1: 7 tuần; Bài 2: 7 tháng</a:t>
             </a:r>
@@ -14424,8 +14322,8 @@
                 <a:solidFill>
                   <a:srgbClr val="FFFFFF"/>
                 </a:solidFill>
-                <a:latin typeface="Segoe UI"/>
-                <a:cs typeface="Segoe UI"/>
+                <a:latin typeface="Arial"/>
+                <a:cs typeface="Arial"/>
               </a:rPr>
               <a:t>THÔNG ĐIỆP CHÍNH   </a:t>
             </a:r>
@@ -14434,8 +14332,8 @@
                 <a:solidFill>
                   <a:srgbClr val="FFFFFF"/>
                 </a:solidFill>
-                <a:latin typeface="Segoe UI"/>
-                <a:cs typeface="Segoe UI"/>
+                <a:latin typeface="Arial"/>
+                <a:cs typeface="Arial"/>
               </a:rPr>
               <a:t>Tạp chí tốt là nơi người đọc của bạn đọc, và được vận hành trung thực.</a:t>
             </a:r>
@@ -14472,7 +14370,7 @@
                     <a:lumMod val="50000"/>
                   </a:schemeClr>
                 </a:solidFill>
-                <a:latin typeface="Verdana"/>
+                <a:latin typeface="Arial"/>
               </a:rPr>
               <a:t>Neudata | #ClearDataClearImpact</a:t>
             </a:r>
@@ -14602,8 +14500,8 @@
                 <a:solidFill>
                   <a:srgbClr val="0D7377"/>
                 </a:solidFill>
-                <a:latin typeface="Segoe UI"/>
-                <a:cs typeface="Segoe UI"/>
+                <a:latin typeface="Arial"/>
+                <a:cs typeface="Arial"/>
               </a:rPr>
               <a:t>Bản tiền ấn phẩm, truy cập mở và giấy phép</a:t>
             </a:r>
@@ -14673,8 +14571,8 @@
                 <a:solidFill>
                   <a:srgbClr val="FFFFFF"/>
                 </a:solidFill>
-                <a:latin typeface="Segoe UI"/>
-                <a:cs typeface="Segoe UI"/>
+                <a:latin typeface="Arial"/>
+                <a:cs typeface="Arial"/>
               </a:rPr>
               <a:t>Tiền ấn phẩm</a:t>
             </a:r>
@@ -14722,8 +14620,8 @@
                 <a:solidFill>
                   <a:srgbClr val="000000"/>
                 </a:solidFill>
-                <a:latin typeface="Segoe UI"/>
-                <a:cs typeface="Segoe UI"/>
+                <a:latin typeface="Arial"/>
+                <a:cs typeface="Arial"/>
               </a:rPr>
               <a:t>Đăng trước phản biện (VD: medRxiv)</a:t>
             </a:r>
@@ -14743,8 +14641,8 @@
                 <a:solidFill>
                   <a:srgbClr val="000000"/>
                 </a:solidFill>
-                <a:latin typeface="Segoe UI"/>
-                <a:cs typeface="Segoe UI"/>
+                <a:latin typeface="Arial"/>
+                <a:cs typeface="Arial"/>
               </a:rPr>
               <a:t>Nhanh, có dấu thời gian, góp ý mở</a:t>
             </a:r>
@@ -14764,8 +14662,8 @@
                 <a:solidFill>
                   <a:srgbClr val="000000"/>
                 </a:solidFill>
-                <a:latin typeface="Segoe UI"/>
-                <a:cs typeface="Segoe UI"/>
+                <a:latin typeface="Arial"/>
+                <a:cs typeface="Arial"/>
               </a:rPr>
               <a:t>CHƯA qua phản biện: phải nói rõ</a:t>
             </a:r>
@@ -14785,8 +14683,8 @@
                 <a:solidFill>
                   <a:srgbClr val="000000"/>
                 </a:solidFill>
-                <a:latin typeface="Segoe UI"/>
-                <a:cs typeface="Segoe UI"/>
+                <a:latin typeface="Arial"/>
+                <a:cs typeface="Arial"/>
               </a:rPr>
               <a:t>Xem chính sách của tạp chí</a:t>
             </a:r>
@@ -14828,8 +14726,8 @@
                 <a:solidFill>
                   <a:srgbClr val="FFFFFF"/>
                 </a:solidFill>
-                <a:latin typeface="Segoe UI"/>
-                <a:cs typeface="Segoe UI"/>
+                <a:latin typeface="Arial"/>
+                <a:cs typeface="Arial"/>
               </a:rPr>
               <a:t>Truy cập mở</a:t>
             </a:r>
@@ -14877,8 +14775,8 @@
                 <a:solidFill>
                   <a:srgbClr val="000000"/>
                 </a:solidFill>
-                <a:latin typeface="Segoe UI"/>
-                <a:cs typeface="Segoe UI"/>
+                <a:latin typeface="Arial"/>
+                <a:cs typeface="Arial"/>
               </a:rPr>
               <a:t>Ai cũng đọc miễn phí</a:t>
             </a:r>
@@ -14898,8 +14796,8 @@
                 <a:solidFill>
                   <a:srgbClr val="000000"/>
                 </a:solidFill>
-                <a:latin typeface="Segoe UI"/>
-                <a:cs typeface="Segoe UI"/>
+                <a:latin typeface="Arial"/>
+                <a:cs typeface="Arial"/>
               </a:rPr>
               <a:t>Gold: tạp chí thu phí (APC)</a:t>
             </a:r>
@@ -14919,8 +14817,8 @@
                 <a:solidFill>
                   <a:srgbClr val="000000"/>
                 </a:solidFill>
-                <a:latin typeface="Segoe UI"/>
-                <a:cs typeface="Segoe UI"/>
+                <a:latin typeface="Arial"/>
+                <a:cs typeface="Arial"/>
               </a:rPr>
               <a:t>Green: bản được chấp nhận lưu ở kho</a:t>
             </a:r>
@@ -14940,8 +14838,8 @@
                 <a:solidFill>
                   <a:srgbClr val="000000"/>
                 </a:solidFill>
-                <a:latin typeface="Segoe UI"/>
-                <a:cs typeface="Segoe UI"/>
+                <a:latin typeface="Arial"/>
+                <a:cs typeface="Arial"/>
               </a:rPr>
               <a:t>Hỏi về miễn giảm phí</a:t>
             </a:r>
@@ -14983,8 +14881,8 @@
                 <a:solidFill>
                   <a:srgbClr val="FFFFFF"/>
                 </a:solidFill>
-                <a:latin typeface="Segoe UI"/>
-                <a:cs typeface="Segoe UI"/>
+                <a:latin typeface="Arial"/>
+                <a:cs typeface="Arial"/>
               </a:rPr>
               <a:t>Giấy phép</a:t>
             </a:r>
@@ -15032,8 +14930,8 @@
                 <a:solidFill>
                   <a:srgbClr val="000000"/>
                 </a:solidFill>
-                <a:latin typeface="Segoe UI"/>
-                <a:cs typeface="Segoe UI"/>
+                <a:latin typeface="Arial"/>
+                <a:cs typeface="Arial"/>
               </a:rPr>
               <a:t>CC BY: tái sử dụng, ghi nguồn (Bài 2)</a:t>
             </a:r>
@@ -15053,8 +14951,8 @@
                 <a:solidFill>
                   <a:srgbClr val="000000"/>
                 </a:solidFill>
-                <a:latin typeface="Segoe UI"/>
-                <a:cs typeface="Segoe UI"/>
+                <a:latin typeface="Arial"/>
+                <a:cs typeface="Arial"/>
               </a:rPr>
               <a:t>CC BY-NC-ND: chia sẻ, không sửa (Bài 1)</a:t>
             </a:r>
@@ -15074,8 +14972,8 @@
                 <a:solidFill>
                   <a:srgbClr val="000000"/>
                 </a:solidFill>
-                <a:latin typeface="Segoe UI"/>
-                <a:cs typeface="Segoe UI"/>
+                <a:latin typeface="Arial"/>
+                <a:cs typeface="Arial"/>
               </a:rPr>
               <a:t>Đọc kỹ trước khi ký</a:t>
             </a:r>
@@ -15119,8 +15017,8 @@
                 <a:solidFill>
                   <a:srgbClr val="FFFFFF"/>
                 </a:solidFill>
-                <a:latin typeface="Segoe UI"/>
-                <a:cs typeface="Segoe UI"/>
+                <a:latin typeface="Arial"/>
+                <a:cs typeface="Arial"/>
               </a:rPr>
               <a:t>THÔNG ĐIỆP CHÍNH   </a:t>
             </a:r>
@@ -15129,8 +15027,8 @@
                 <a:solidFill>
                   <a:srgbClr val="FFFFFF"/>
                 </a:solidFill>
-                <a:latin typeface="Segoe UI"/>
-                <a:cs typeface="Segoe UI"/>
+                <a:latin typeface="Arial"/>
+                <a:cs typeface="Arial"/>
               </a:rPr>
               <a:t>Biết ai được đọc, được tái sử dụng và ai trả phí trước khi nộp bài.</a:t>
             </a:r>
@@ -15167,7 +15065,7 @@
                     <a:lumMod val="50000"/>
                   </a:schemeClr>
                 </a:solidFill>
-                <a:latin typeface="Verdana"/>
+                <a:latin typeface="Arial"/>
               </a:rPr>
               <a:t>Neudata | #ClearDataClearImpact</a:t>
             </a:r>
@@ -15297,8 +15195,8 @@
                 <a:solidFill>
                   <a:srgbClr val="0D7377"/>
                 </a:solidFill>
-                <a:latin typeface="Segoe UI"/>
-                <a:cs typeface="Segoe UI"/>
+                <a:latin typeface="Arial"/>
+                <a:cs typeface="Arial"/>
               </a:rPr>
               <a:t>Nhận diện tạp chí săn mồi</a:t>
             </a:r>
@@ -15394,8 +15292,8 @@
                 <a:solidFill>
                   <a:srgbClr val="FFFFFF"/>
                 </a:solidFill>
-                <a:latin typeface="Segoe UI"/>
-                <a:cs typeface="Segoe UI"/>
+                <a:latin typeface="Arial"/>
+                <a:cs typeface="Arial"/>
               </a:rPr>
               <a:t>THÔNG ĐIỆP CHÍNH   </a:t>
             </a:r>
@@ -15404,8 +15302,8 @@
                 <a:solidFill>
                   <a:srgbClr val="FFFFFF"/>
                 </a:solidFill>
-                <a:latin typeface="Segoe UI"/>
-                <a:cs typeface="Segoe UI"/>
+                <a:latin typeface="Arial"/>
+                <a:cs typeface="Arial"/>
               </a:rPr>
               <a:t>Nếu tạp chí tìm đến bạn bằng email tâng bốc, hãy kiểm tra hai lần.</a:t>
             </a:r>
@@ -15442,7 +15340,7 @@
                     <a:lumMod val="50000"/>
                   </a:schemeClr>
                 </a:solidFill>
-                <a:latin typeface="Verdana"/>
+                <a:latin typeface="Arial"/>
               </a:rPr>
               <a:t>Neudata | #ClearDataClearImpact</a:t>
             </a:r>
@@ -15572,8 +15470,8 @@
                 <a:solidFill>
                   <a:srgbClr val="0D7377"/>
                 </a:solidFill>
-                <a:latin typeface="Segoe UI"/>
-                <a:cs typeface="Segoe UI"/>
+                <a:latin typeface="Arial"/>
+                <a:cs typeface="Arial"/>
               </a:rPr>
               <a:t>Trình diễn: tìm bảng kiểm và kiểm tra tạp chí</a:t>
             </a:r>
@@ -15643,8 +15541,8 @@
                 <a:solidFill>
                   <a:srgbClr val="FFFFFF"/>
                 </a:solidFill>
-                <a:latin typeface="Segoe UI"/>
-                <a:cs typeface="Segoe UI"/>
+                <a:latin typeface="Arial"/>
+                <a:cs typeface="Arial"/>
               </a:rPr>
               <a:t>TRÌNH DIỄN TRỰC TIẾP   |   3 phút</a:t>
             </a:r>
@@ -15681,25 +15579,19 @@
               <a:spcBef>
                 <a:spcPts val="450"/>
               </a:spcBef>
-              <a:buNone/>
-            </a:pPr>
-            <a:r>
-              <a:rPr lang="en-US" sz="1650" b="1" dirty="0">
-                <a:solidFill>
-                  <a:srgbClr val="B5651D"/>
-                </a:solidFill>
-                <a:latin typeface="Segoe UI"/>
-                <a:cs typeface="Segoe UI"/>
-              </a:rPr>
-              <a:t>1.  </a:t>
-            </a:r>
+              <a:buClr>
+                <a:srgbClr val="B5651D"/>
+              </a:buClr>
+              <a:buFont typeface="Arial"/>
+              <a:buChar char="•"/>
+            </a:pPr>
             <a:r>
               <a:rPr lang="en-US" sz="1650" dirty="0">
                 <a:solidFill>
                   <a:srgbClr val="000000"/>
                 </a:solidFill>
-                <a:latin typeface="Segoe UI"/>
-                <a:cs typeface="Segoe UI"/>
+                <a:latin typeface="Arial"/>
+                <a:cs typeface="Arial"/>
               </a:rPr>
               <a:t>Mở trang Mạng lưới EQUATOR và tìm 'CONSORT'</a:t>
             </a:r>
@@ -15712,25 +15604,19 @@
               <a:spcBef>
                 <a:spcPts val="450"/>
               </a:spcBef>
-              <a:buNone/>
-            </a:pPr>
-            <a:r>
-              <a:rPr lang="en-US" sz="1650" b="1" dirty="0">
-                <a:solidFill>
-                  <a:srgbClr val="B5651D"/>
-                </a:solidFill>
-                <a:latin typeface="Segoe UI"/>
-                <a:cs typeface="Segoe UI"/>
-              </a:rPr>
-              <a:t>2.  </a:t>
-            </a:r>
+              <a:buClr>
+                <a:srgbClr val="B5651D"/>
+              </a:buClr>
+              <a:buFont typeface="Arial"/>
+              <a:buChar char="•"/>
+            </a:pPr>
             <a:r>
               <a:rPr lang="en-US" sz="1650" dirty="0">
                 <a:solidFill>
                   <a:srgbClr val="000000"/>
                 </a:solidFill>
-                <a:latin typeface="Segoe UI"/>
-                <a:cs typeface="Segoe UI"/>
+                <a:latin typeface="Arial"/>
+                <a:cs typeface="Arial"/>
               </a:rPr>
               <a:t>Xem bảng kiểm và sơ đồ chọn bệnh (Bài 1 có sơ đồ này)</a:t>
             </a:r>
@@ -15743,25 +15629,19 @@
               <a:spcBef>
                 <a:spcPts val="450"/>
               </a:spcBef>
-              <a:buNone/>
-            </a:pPr>
-            <a:r>
-              <a:rPr lang="en-US" sz="1650" b="1" dirty="0">
-                <a:solidFill>
-                  <a:srgbClr val="B5651D"/>
-                </a:solidFill>
-                <a:latin typeface="Segoe UI"/>
-                <a:cs typeface="Segoe UI"/>
-              </a:rPr>
-              <a:t>3.  </a:t>
-            </a:r>
+              <a:buClr>
+                <a:srgbClr val="B5651D"/>
+              </a:buClr>
+              <a:buFont typeface="Arial"/>
+              <a:buChar char="•"/>
+            </a:pPr>
             <a:r>
               <a:rPr lang="en-US" sz="1650" dirty="0">
                 <a:solidFill>
                   <a:srgbClr val="000000"/>
                 </a:solidFill>
-                <a:latin typeface="Segoe UI"/>
-                <a:cs typeface="Segoe UI"/>
+                <a:latin typeface="Arial"/>
+                <a:cs typeface="Arial"/>
               </a:rPr>
               <a:t>Tìm STROBE theo cách tương tự (Bài 2)</a:t>
             </a:r>
@@ -15774,25 +15654,19 @@
               <a:spcBef>
                 <a:spcPts val="450"/>
               </a:spcBef>
-              <a:buNone/>
-            </a:pPr>
-            <a:r>
-              <a:rPr lang="en-US" sz="1650" b="1" dirty="0">
-                <a:solidFill>
-                  <a:srgbClr val="B5651D"/>
-                </a:solidFill>
-                <a:latin typeface="Segoe UI"/>
-                <a:cs typeface="Segoe UI"/>
-              </a:rPr>
-              <a:t>4.  </a:t>
-            </a:r>
+              <a:buClr>
+                <a:srgbClr val="B5651D"/>
+              </a:buClr>
+              <a:buFont typeface="Arial"/>
+              <a:buChar char="•"/>
+            </a:pPr>
             <a:r>
               <a:rPr lang="en-US" sz="1650" dirty="0">
                 <a:solidFill>
                   <a:srgbClr val="000000"/>
                 </a:solidFill>
-                <a:latin typeface="Segoe UI"/>
-                <a:cs typeface="Segoe UI"/>
+                <a:latin typeface="Arial"/>
+                <a:cs typeface="Arial"/>
               </a:rPr>
               <a:t>Kiểm tra một tạp chí: tìm trên DOAJ và NLM Catalog</a:t>
             </a:r>
@@ -15805,25 +15679,19 @@
               <a:spcBef>
                 <a:spcPts val="450"/>
               </a:spcBef>
-              <a:buNone/>
-            </a:pPr>
-            <a:r>
-              <a:rPr lang="en-US" sz="1650" b="1" dirty="0">
-                <a:solidFill>
-                  <a:srgbClr val="B5651D"/>
-                </a:solidFill>
-                <a:latin typeface="Segoe UI"/>
-                <a:cs typeface="Segoe UI"/>
-              </a:rPr>
-              <a:t>5.  </a:t>
-            </a:r>
+              <a:buClr>
+                <a:srgbClr val="B5651D"/>
+              </a:buClr>
+              <a:buFont typeface="Arial"/>
+              <a:buChar char="•"/>
+            </a:pPr>
             <a:r>
               <a:rPr lang="en-US" sz="1650" dirty="0">
                 <a:solidFill>
                   <a:srgbClr val="000000"/>
                 </a:solidFill>
-                <a:latin typeface="Segoe UI"/>
-                <a:cs typeface="Segoe UI"/>
+                <a:latin typeface="Arial"/>
+                <a:cs typeface="Arial"/>
               </a:rPr>
               <a:t>Mở bảng kiểm Think.Check.Submit</a:t>
             </a:r>
@@ -15867,8 +15735,8 @@
                 <a:solidFill>
                   <a:srgbClr val="B5651D"/>
                 </a:solidFill>
-                <a:latin typeface="Segoe UI"/>
-                <a:cs typeface="Segoe UI"/>
+                <a:latin typeface="Arial"/>
+                <a:cs typeface="Arial"/>
               </a:rPr>
               <a:t>Chú ý</a:t>
             </a:r>
@@ -15889,8 +15757,8 @@
                 <a:solidFill>
                   <a:srgbClr val="000000"/>
                 </a:solidFill>
-                <a:latin typeface="Segoe UI"/>
-                <a:cs typeface="Segoe UI"/>
+                <a:latin typeface="Arial"/>
+                <a:cs typeface="Arial"/>
               </a:rPr>
               <a:t>Tệp PDF bảng kiểm ở đâu</a:t>
             </a:r>
@@ -15911,8 +15779,8 @@
                 <a:solidFill>
                   <a:srgbClr val="000000"/>
                 </a:solidFill>
-                <a:latin typeface="Segoe UI"/>
-                <a:cs typeface="Segoe UI"/>
+                <a:latin typeface="Arial"/>
+                <a:cs typeface="Arial"/>
               </a:rPr>
               <a:t>Cách xem tạp chí có trong MEDLINE</a:t>
             </a:r>
@@ -15933,8 +15801,8 @@
                 <a:solidFill>
                   <a:srgbClr val="000000"/>
                 </a:solidFill>
-                <a:latin typeface="Segoe UI"/>
-                <a:cs typeface="Segoe UI"/>
+                <a:latin typeface="Arial"/>
+                <a:cs typeface="Arial"/>
               </a:rPr>
               <a:t>Ba câu hỏi cho mọi tạp chí</a:t>
             </a:r>
@@ -15980,8 +15848,8 @@
                 <a:solidFill>
                   <a:srgbClr val="B5651D"/>
                 </a:solidFill>
-                <a:latin typeface="Segoe UI"/>
-                <a:cs typeface="Segoe UI"/>
+                <a:latin typeface="Arial"/>
+                <a:cs typeface="Arial"/>
               </a:rPr>
               <a:t>SẢN PHẨM   </a:t>
             </a:r>
@@ -15990,8 +15858,8 @@
                 <a:solidFill>
                   <a:srgbClr val="000000"/>
                 </a:solidFill>
-                <a:latin typeface="Segoe UI"/>
-                <a:cs typeface="Segoe UI"/>
+                <a:latin typeface="Arial"/>
+                <a:cs typeface="Arial"/>
               </a:rPr>
               <a:t>Mỗi nhóm kiểm tra tạp chí + hướng dẫn báo cáo trong kế hoạch công bố</a:t>
             </a:r>
@@ -16028,7 +15896,7 @@
                     <a:lumMod val="50000"/>
                   </a:schemeClr>
                 </a:solidFill>
-                <a:latin typeface="Verdana"/>
+                <a:latin typeface="Arial"/>
               </a:rPr>
               <a:t>Neudata | #ClearDataClearImpact</a:t>
             </a:r>
@@ -16158,8 +16026,8 @@
                 <a:solidFill>
                   <a:srgbClr val="0D7377"/>
                 </a:solidFill>
-                <a:latin typeface="Segoe UI"/>
-                <a:cs typeface="Segoe UI"/>
+                <a:latin typeface="Arial"/>
+                <a:cs typeface="Arial"/>
               </a:rPr>
               <a:t>Bộ hồ sơ nộp bài</a:t>
             </a:r>
@@ -16255,8 +16123,8 @@
                 <a:solidFill>
                   <a:srgbClr val="FFFFFF"/>
                 </a:solidFill>
-                <a:latin typeface="Segoe UI"/>
-                <a:cs typeface="Segoe UI"/>
+                <a:latin typeface="Arial"/>
+                <a:cs typeface="Arial"/>
               </a:rPr>
               <a:t>THÔNG ĐIỆP CHÍNH   </a:t>
             </a:r>
@@ -16265,8 +16133,8 @@
                 <a:solidFill>
                   <a:srgbClr val="FFFFFF"/>
                 </a:solidFill>
-                <a:latin typeface="Segoe UI"/>
-                <a:cs typeface="Segoe UI"/>
+                <a:latin typeface="Arial"/>
+                <a:cs typeface="Arial"/>
               </a:rPr>
               <a:t>Nộp đủ cả bộ một lần. Thiếu thứ gì là chậm trễ.</a:t>
             </a:r>
@@ -16303,7 +16171,7 @@
                     <a:lumMod val="50000"/>
                   </a:schemeClr>
                 </a:solidFill>
-                <a:latin typeface="Verdana"/>
+                <a:latin typeface="Arial"/>
               </a:rPr>
               <a:t>Neudata | #ClearDataClearImpact</a:t>
             </a:r>
@@ -16433,8 +16301,8 @@
                 <a:solidFill>
                   <a:srgbClr val="0D7377"/>
                 </a:solidFill>
-                <a:latin typeface="Segoe UI"/>
-                <a:cs typeface="Segoe UI"/>
+                <a:latin typeface="Arial"/>
+                <a:cs typeface="Arial"/>
               </a:rPr>
               <a:t>Hành trình phản biện</a:t>
             </a:r>
@@ -16530,8 +16398,8 @@
                 <a:solidFill>
                   <a:srgbClr val="FFFFFF"/>
                 </a:solidFill>
-                <a:latin typeface="Segoe UI"/>
-                <a:cs typeface="Segoe UI"/>
+                <a:latin typeface="Arial"/>
+                <a:cs typeface="Arial"/>
               </a:rPr>
               <a:t>THÔNG ĐIỆP CHÍNH   </a:t>
             </a:r>
@@ -16540,8 +16408,8 @@
                 <a:solidFill>
                   <a:srgbClr val="FFFFFF"/>
                 </a:solidFill>
-                <a:latin typeface="Segoe UI"/>
-                <a:cs typeface="Segoe UI"/>
+                <a:latin typeface="Arial"/>
+                <a:cs typeface="Arial"/>
               </a:rPr>
               <a:t>Hầu hết bài báo phải sửa trước khi được nhận. Hãy trả lời lịch sự từng ý.</a:t>
             </a:r>
@@ -16578,7 +16446,7 @@
                     <a:lumMod val="50000"/>
                   </a:schemeClr>
                 </a:solidFill>
-                <a:latin typeface="Verdana"/>
+                <a:latin typeface="Arial"/>
               </a:rPr>
               <a:t>Neudata | #ClearDataClearImpact</a:t>
             </a:r>
@@ -16708,8 +16576,8 @@
                 <a:solidFill>
                   <a:srgbClr val="0D7377"/>
                 </a:solidFill>
-                <a:latin typeface="Segoe UI"/>
-                <a:cs typeface="Segoe UI"/>
+                <a:latin typeface="Arial"/>
+                <a:cs typeface="Arial"/>
               </a:rPr>
               <a:t>Trả lời phản biện: bảng trả lời từng ý</a:t>
             </a:r>
@@ -16805,8 +16673,8 @@
                 <a:solidFill>
                   <a:srgbClr val="FFFFFF"/>
                 </a:solidFill>
-                <a:latin typeface="Segoe UI"/>
-                <a:cs typeface="Segoe UI"/>
+                <a:latin typeface="Arial"/>
+                <a:cs typeface="Arial"/>
               </a:rPr>
               <a:t>THÔNG ĐIỆP CHÍNH   </a:t>
             </a:r>
@@ -16815,8 +16683,8 @@
                 <a:solidFill>
                   <a:srgbClr val="FFFFFF"/>
                 </a:solidFill>
-                <a:latin typeface="Segoe UI"/>
-                <a:cs typeface="Segoe UI"/>
+                <a:latin typeface="Arial"/>
+                <a:cs typeface="Arial"/>
               </a:rPr>
               <a:t>Cảm ơn, trả lời mọi ý, chỉ rõ chỗ đã sửa, và phản hồi lịch sự, có bằng chứng.</a:t>
             </a:r>
@@ -16853,7 +16721,7 @@
                     <a:lumMod val="50000"/>
                   </a:schemeClr>
                 </a:solidFill>
-                <a:latin typeface="Verdana"/>
+                <a:latin typeface="Arial"/>
               </a:rPr>
               <a:t>Neudata | #ClearDataClearImpact</a:t>
             </a:r>
@@ -16983,8 +16851,8 @@
                 <a:solidFill>
                   <a:srgbClr val="0D7377"/>
                 </a:solidFill>
-                <a:latin typeface="Segoe UI"/>
-                <a:cs typeface="Segoe UI"/>
+                <a:latin typeface="Arial"/>
+                <a:cs typeface="Arial"/>
               </a:rPr>
               <a:t>Sau khi được chấp nhận: bản in thử, chia sẻ, đính chính</a:t>
             </a:r>
@@ -17080,8 +16948,8 @@
                 <a:solidFill>
                   <a:srgbClr val="FFFFFF"/>
                 </a:solidFill>
-                <a:latin typeface="Segoe UI"/>
-                <a:cs typeface="Segoe UI"/>
+                <a:latin typeface="Arial"/>
+                <a:cs typeface="Arial"/>
               </a:rPr>
               <a:t>THÔNG ĐIỆP CHÍNH   </a:t>
             </a:r>
@@ -17090,8 +16958,8 @@
                 <a:solidFill>
                   <a:srgbClr val="FFFFFF"/>
                 </a:solidFill>
-                <a:latin typeface="Segoe UI"/>
-                <a:cs typeface="Segoe UI"/>
+                <a:latin typeface="Arial"/>
+                <a:cs typeface="Arial"/>
               </a:rPr>
               <a:t>Đọc bản in thử kỹ như đọc dữ liệu. Lỗi sẽ thành vĩnh viễn.</a:t>
             </a:r>
@@ -17128,7 +16996,7 @@
                     <a:lumMod val="50000"/>
                   </a:schemeClr>
                 </a:solidFill>
-                <a:latin typeface="Verdana"/>
+                <a:latin typeface="Arial"/>
               </a:rPr>
               <a:t>Neudata | #ClearDataClearImpact</a:t>
             </a:r>
@@ -17258,8 +17126,8 @@
                 <a:solidFill>
                   <a:srgbClr val="0D7377"/>
                 </a:solidFill>
-                <a:latin typeface="Segoe UI"/>
-                <a:cs typeface="Segoe UI"/>
+                <a:latin typeface="Arial"/>
+                <a:cs typeface="Arial"/>
               </a:rPr>
               <a:t>Kiểm tra: đúng hay sai?</a:t>
             </a:r>
@@ -17329,8 +17197,8 @@
                 <a:solidFill>
                   <a:srgbClr val="FFFFFF"/>
                 </a:solidFill>
-                <a:latin typeface="Segoe UI"/>
-                <a:cs typeface="Segoe UI"/>
+                <a:latin typeface="Arial"/>
+                <a:cs typeface="Arial"/>
               </a:rPr>
               <a:t>CÂU HỎI NHANH   |   2 phút</a:t>
             </a:r>
@@ -17367,25 +17235,19 @@
               <a:spcBef>
                 <a:spcPts val="450"/>
               </a:spcBef>
-              <a:buNone/>
-            </a:pPr>
-            <a:r>
-              <a:rPr lang="en-US" sz="1650" b="1" dirty="0">
-                <a:solidFill>
-                  <a:srgbClr val="6C3483"/>
-                </a:solidFill>
-                <a:latin typeface="Segoe UI"/>
-                <a:cs typeface="Segoe UI"/>
-              </a:rPr>
-              <a:t>1.  </a:t>
-            </a:r>
+              <a:buClr>
+                <a:srgbClr val="6C3483"/>
+              </a:buClr>
+              <a:buFont typeface="Arial"/>
+              <a:buChar char="•"/>
+            </a:pPr>
             <a:r>
               <a:rPr lang="en-US" sz="1650" dirty="0">
                 <a:solidFill>
                   <a:srgbClr val="000000"/>
                 </a:solidFill>
-                <a:latin typeface="Segoe UI"/>
-                <a:cs typeface="Segoe UI"/>
+                <a:latin typeface="Arial"/>
+                <a:cs typeface="Arial"/>
               </a:rPr>
               <a:t>'Tạp chí gửi email mời trước thường là tạp chí săn mồi'</a:t>
             </a:r>
@@ -17398,25 +17260,19 @@
               <a:spcBef>
                 <a:spcPts val="450"/>
               </a:spcBef>
-              <a:buNone/>
-            </a:pPr>
-            <a:r>
-              <a:rPr lang="en-US" sz="1650" b="1" dirty="0">
-                <a:solidFill>
-                  <a:srgbClr val="6C3483"/>
-                </a:solidFill>
-                <a:latin typeface="Segoe UI"/>
-                <a:cs typeface="Segoe UI"/>
-              </a:rPr>
-              <a:t>2.  </a:t>
-            </a:r>
+              <a:buClr>
+                <a:srgbClr val="6C3483"/>
+              </a:buClr>
+              <a:buFont typeface="Arial"/>
+              <a:buChar char="•"/>
+            </a:pPr>
             <a:r>
               <a:rPr lang="en-US" sz="1650" dirty="0">
                 <a:solidFill>
                   <a:srgbClr val="000000"/>
                 </a:solidFill>
-                <a:latin typeface="Segoe UI"/>
-                <a:cs typeface="Segoe UI"/>
+                <a:latin typeface="Arial"/>
+                <a:cs typeface="Arial"/>
               </a:rPr>
               <a:t>'Tôi có thể gửi bài cho hai tạp chí cùng lúc cho nhanh'</a:t>
             </a:r>
@@ -17429,25 +17285,19 @@
               <a:spcBef>
                 <a:spcPts val="450"/>
               </a:spcBef>
-              <a:buNone/>
-            </a:pPr>
-            <a:r>
-              <a:rPr lang="en-US" sz="1650" b="1" dirty="0">
-                <a:solidFill>
-                  <a:srgbClr val="6C3483"/>
-                </a:solidFill>
-                <a:latin typeface="Segoe UI"/>
-                <a:cs typeface="Segoe UI"/>
-              </a:rPr>
-              <a:t>3.  </a:t>
-            </a:r>
+              <a:buClr>
+                <a:srgbClr val="6C3483"/>
+              </a:buClr>
+              <a:buFont typeface="Arial"/>
+              <a:buChar char="•"/>
+            </a:pPr>
             <a:r>
               <a:rPr lang="en-US" sz="1650" dirty="0">
                 <a:solidFill>
                   <a:srgbClr val="000000"/>
                 </a:solidFill>
-                <a:latin typeface="Segoe UI"/>
-                <a:cs typeface="Segoe UI"/>
+                <a:latin typeface="Arial"/>
+                <a:cs typeface="Arial"/>
               </a:rPr>
               <a:t>'Bản tiền ấn phẩm đã được phản biện'</a:t>
             </a:r>
@@ -17460,25 +17310,19 @@
               <a:spcBef>
                 <a:spcPts val="450"/>
               </a:spcBef>
-              <a:buNone/>
-            </a:pPr>
-            <a:r>
-              <a:rPr lang="en-US" sz="1650" b="1" dirty="0">
-                <a:solidFill>
-                  <a:srgbClr val="6C3483"/>
-                </a:solidFill>
-                <a:latin typeface="Segoe UI"/>
-                <a:cs typeface="Segoe UI"/>
-              </a:rPr>
-              <a:t>4.  </a:t>
-            </a:r>
+              <a:buClr>
+                <a:srgbClr val="6C3483"/>
+              </a:buClr>
+              <a:buFont typeface="Arial"/>
+              <a:buChar char="•"/>
+            </a:pPr>
             <a:r>
               <a:rPr lang="en-US" sz="1650" dirty="0">
                 <a:solidFill>
                   <a:srgbClr val="000000"/>
                 </a:solidFill>
-                <a:latin typeface="Segoe UI"/>
-                <a:cs typeface="Segoe UI"/>
+                <a:latin typeface="Arial"/>
+                <a:cs typeface="Arial"/>
               </a:rPr>
               <a:t>'Tôi phải trả lời mọi nhận xét của phản biện, kể cả khi không đồng ý'</a:t>
             </a:r>
@@ -17491,25 +17335,19 @@
               <a:spcBef>
                 <a:spcPts val="450"/>
               </a:spcBef>
-              <a:buNone/>
-            </a:pPr>
-            <a:r>
-              <a:rPr lang="en-US" sz="1650" b="1" dirty="0">
-                <a:solidFill>
-                  <a:srgbClr val="6C3483"/>
-                </a:solidFill>
-                <a:latin typeface="Segoe UI"/>
-                <a:cs typeface="Segoe UI"/>
-              </a:rPr>
-              <a:t>5.  </a:t>
-            </a:r>
+              <a:buClr>
+                <a:srgbClr val="6C3483"/>
+              </a:buClr>
+              <a:buFont typeface="Arial"/>
+              <a:buChar char="•"/>
+            </a:pPr>
             <a:r>
               <a:rPr lang="en-US" sz="1650" dirty="0">
                 <a:solidFill>
                   <a:srgbClr val="000000"/>
                 </a:solidFill>
-                <a:latin typeface="Segoe UI"/>
-                <a:cs typeface="Segoe UI"/>
+                <a:latin typeface="Arial"/>
+                <a:cs typeface="Arial"/>
               </a:rPr>
               <a:t>'Bài báo FLUID-ICU nên theo CONSORT'</a:t>
             </a:r>
@@ -17553,8 +17391,8 @@
                 <a:solidFill>
                   <a:srgbClr val="6C3483"/>
                 </a:solidFill>
-                <a:latin typeface="Segoe UI"/>
-                <a:cs typeface="Segoe UI"/>
+                <a:latin typeface="Arial"/>
+                <a:cs typeface="Arial"/>
               </a:rPr>
               <a:t>Đáp án</a:t>
             </a:r>
@@ -17575,8 +17413,8 @@
                 <a:solidFill>
                   <a:srgbClr val="000000"/>
                 </a:solidFill>
-                <a:latin typeface="Segoe UI"/>
-                <a:cs typeface="Segoe UI"/>
+                <a:latin typeface="Arial"/>
+                <a:cs typeface="Arial"/>
               </a:rPr>
               <a:t>1 Thường đúng: kiểm tra hai lần</a:t>
             </a:r>
@@ -17597,8 +17435,8 @@
                 <a:solidFill>
                   <a:srgbClr val="000000"/>
                 </a:solidFill>
-                <a:latin typeface="Segoe UI"/>
-                <a:cs typeface="Segoe UI"/>
+                <a:latin typeface="Arial"/>
+                <a:cs typeface="Arial"/>
               </a:rPr>
               <a:t>2 Sai: nộp trùng lặp</a:t>
             </a:r>
@@ -17619,8 +17457,8 @@
                 <a:solidFill>
                   <a:srgbClr val="000000"/>
                 </a:solidFill>
-                <a:latin typeface="Segoe UI"/>
-                <a:cs typeface="Segoe UI"/>
+                <a:latin typeface="Arial"/>
+                <a:cs typeface="Arial"/>
               </a:rPr>
               <a:t>3 Sai</a:t>
             </a:r>
@@ -17641,8 +17479,8 @@
                 <a:solidFill>
                   <a:srgbClr val="000000"/>
                 </a:solidFill>
-                <a:latin typeface="Segoe UI"/>
-                <a:cs typeface="Segoe UI"/>
+                <a:latin typeface="Arial"/>
+                <a:cs typeface="Arial"/>
               </a:rPr>
               <a:t>4 Đúng: lịch sự, có bằng chứng</a:t>
             </a:r>
@@ -17663,8 +17501,8 @@
                 <a:solidFill>
                   <a:srgbClr val="000000"/>
                 </a:solidFill>
-                <a:latin typeface="Segoe UI"/>
-                <a:cs typeface="Segoe UI"/>
+                <a:latin typeface="Arial"/>
+                <a:cs typeface="Arial"/>
               </a:rPr>
               <a:t>5 Sai: STROBE (đoàn hệ)</a:t>
             </a:r>
@@ -17701,7 +17539,7 @@
                     <a:lumMod val="50000"/>
                   </a:schemeClr>
                 </a:solidFill>
-                <a:latin typeface="Verdana"/>
+                <a:latin typeface="Arial"/>
               </a:rPr>
               <a:t>Neudata | #ClearDataClearImpact</a:t>
             </a:r>
@@ -17831,8 +17669,8 @@
                 <a:solidFill>
                   <a:srgbClr val="0D7377"/>
                 </a:solidFill>
-                <a:latin typeface="Segoe UI"/>
-                <a:cs typeface="Segoe UI"/>
+                <a:latin typeface="Arial"/>
+                <a:cs typeface="Arial"/>
               </a:rPr>
               <a:t>8.3  |  20 phút</a:t>
             </a:r>
@@ -17901,8 +17739,8 @@
                 <a:solidFill>
                   <a:srgbClr val="0D7377"/>
                 </a:solidFill>
-                <a:latin typeface="Segoe UI"/>
-                <a:cs typeface="Segoe UI"/>
+                <a:latin typeface="Arial"/>
+                <a:cs typeface="Arial"/>
               </a:rPr>
               <a:t>Làm người phản biện</a:t>
             </a:r>
@@ -17919,8 +17757,8 @@
                 <a:solidFill>
                   <a:srgbClr val="595959"/>
                 </a:solidFill>
-                <a:latin typeface="Segoe UI"/>
-                <a:cs typeface="Segoe UI"/>
+                <a:latin typeface="Arial"/>
+                <a:cs typeface="Arial"/>
               </a:rPr>
               <a:t>Luyện tập cho việc trao đổi phản biện bản thảo</a:t>
             </a:r>
@@ -17957,7 +17795,7 @@
                     <a:lumMod val="50000"/>
                   </a:schemeClr>
                 </a:solidFill>
-                <a:latin typeface="Verdana"/>
+                <a:latin typeface="Arial"/>
               </a:rPr>
               <a:t>Neudata | #ClearDataClearImpact</a:t>
             </a:r>
@@ -18087,8 +17925,8 @@
                 <a:solidFill>
                   <a:srgbClr val="0D7377"/>
                 </a:solidFill>
-                <a:latin typeface="Segoe UI"/>
-                <a:cs typeface="Segoe UI"/>
+                <a:latin typeface="Arial"/>
+                <a:cs typeface="Arial"/>
               </a:rPr>
               <a:t>8.1  |  25 phút</a:t>
             </a:r>
@@ -18157,8 +17995,8 @@
                 <a:solidFill>
                   <a:srgbClr val="0D7377"/>
                 </a:solidFill>
-                <a:latin typeface="Segoe UI"/>
-                <a:cs typeface="Segoe UI"/>
+                <a:latin typeface="Arial"/>
+                <a:cs typeface="Arial"/>
               </a:rPr>
               <a:t>Viết bài báo (II)</a:t>
             </a:r>
@@ -18175,8 +18013,8 @@
                 <a:solidFill>
                   <a:srgbClr val="595959"/>
                 </a:solidFill>
-                <a:latin typeface="Segoe UI"/>
-                <a:cs typeface="Segoe UI"/>
+                <a:latin typeface="Arial"/>
+                <a:cs typeface="Arial"/>
               </a:rPr>
               <a:t>Đặt vấn đề, Bàn luận, Tóm tắt và Tiêu đề, theo thứ tự đó</a:t>
             </a:r>
@@ -18213,7 +18051,7 @@
                     <a:lumMod val="50000"/>
                   </a:schemeClr>
                 </a:solidFill>
-                <a:latin typeface="Verdana"/>
+                <a:latin typeface="Arial"/>
               </a:rPr>
               <a:t>Neudata | #ClearDataClearImpact</a:t>
             </a:r>
@@ -18343,8 +18181,8 @@
                 <a:solidFill>
                   <a:srgbClr val="0D7377"/>
                 </a:solidFill>
-                <a:latin typeface="Segoe UI"/>
-                <a:cs typeface="Segoe UI"/>
+                <a:latin typeface="Arial"/>
+                <a:cs typeface="Arial"/>
               </a:rPr>
               <a:t>Ghép mảnh: ba nhóm đọc thử nghiệm, hai nhóm đọc đoàn hệ</a:t>
             </a:r>
@@ -18440,8 +18278,8 @@
                 <a:solidFill>
                   <a:srgbClr val="FFFFFF"/>
                 </a:solidFill>
-                <a:latin typeface="Segoe UI"/>
-                <a:cs typeface="Segoe UI"/>
+                <a:latin typeface="Arial"/>
+                <a:cs typeface="Arial"/>
               </a:rPr>
               <a:t>THÔNG ĐIỆP CHÍNH   </a:t>
             </a:r>
@@ -18450,8 +18288,8 @@
                 <a:solidFill>
                   <a:srgbClr val="FFFFFF"/>
                 </a:solidFill>
-                <a:latin typeface="Segoe UI"/>
-                <a:cs typeface="Segoe UI"/>
+                <a:latin typeface="Arial"/>
+                <a:cs typeface="Arial"/>
               </a:rPr>
               <a:t>Cùng câu hỏi lâm sàng, hai thiết kế. So sánh mỗi bài được kết luận gì.</a:t>
             </a:r>
@@ -18488,7 +18326,7 @@
                     <a:lumMod val="50000"/>
                   </a:schemeClr>
                 </a:solidFill>
-                <a:latin typeface="Verdana"/>
+                <a:latin typeface="Arial"/>
               </a:rPr>
               <a:t>Neudata | #ClearDataClearImpact</a:t>
             </a:r>
@@ -18618,8 +18456,8 @@
                 <a:solidFill>
                   <a:srgbClr val="0D7377"/>
                 </a:solidFill>
-                <a:latin typeface="Segoe UI"/>
-                <a:cs typeface="Segoe UI"/>
+                <a:latin typeface="Arial"/>
+                <a:cs typeface="Arial"/>
               </a:rPr>
               <a:t>Bảng kiểm 10 câu hỏi (1-5)</a:t>
             </a:r>
@@ -18689,8 +18527,8 @@
                 <a:solidFill>
                   <a:srgbClr val="FFFFFF"/>
                 </a:solidFill>
-                <a:latin typeface="Segoe UI"/>
-                <a:cs typeface="Segoe UI"/>
+                <a:latin typeface="Arial"/>
+                <a:cs typeface="Arial"/>
               </a:rPr>
               <a:t>1  Câu hỏi</a:t>
             </a:r>
@@ -18738,8 +18576,8 @@
                 <a:solidFill>
                   <a:srgbClr val="000000"/>
                 </a:solidFill>
-                <a:latin typeface="Segoe UI"/>
-                <a:cs typeface="Segoe UI"/>
+                <a:latin typeface="Arial"/>
+                <a:cs typeface="Arial"/>
               </a:rPr>
               <a:t>Bạn có viết được PICO của nghiên cứu trong một dòng không?</a:t>
             </a:r>
@@ -18781,8 +18619,8 @@
                 <a:solidFill>
                   <a:srgbClr val="FFFFFF"/>
                 </a:solidFill>
-                <a:latin typeface="Segoe UI"/>
-                <a:cs typeface="Segoe UI"/>
+                <a:latin typeface="Arial"/>
+                <a:cs typeface="Arial"/>
               </a:rPr>
               <a:t>2  Thiết kế</a:t>
             </a:r>
@@ -18830,8 +18668,8 @@
                 <a:solidFill>
                   <a:srgbClr val="000000"/>
                 </a:solidFill>
-                <a:latin typeface="Segoe UI"/>
-                <a:cs typeface="Segoe UI"/>
+                <a:latin typeface="Arial"/>
+                <a:cs typeface="Arial"/>
               </a:rPr>
               <a:t>Thiết kế là gì, và có phù hợp với câu hỏi không?</a:t>
             </a:r>
@@ -18873,8 +18711,8 @@
                 <a:solidFill>
                   <a:srgbClr val="FFFFFF"/>
                 </a:solidFill>
-                <a:latin typeface="Segoe UI"/>
-                <a:cs typeface="Segoe UI"/>
+                <a:latin typeface="Arial"/>
+                <a:cs typeface="Arial"/>
               </a:rPr>
               <a:t>3  Đối tượng</a:t>
             </a:r>
@@ -18922,8 +18760,8 @@
                 <a:solidFill>
                   <a:srgbClr val="000000"/>
                 </a:solidFill>
-                <a:latin typeface="Segoe UI"/>
-                <a:cs typeface="Segoe UI"/>
+                <a:latin typeface="Arial"/>
+                <a:cs typeface="Arial"/>
               </a:rPr>
               <a:t>Ai được đưa vào, ai bị loại ra?</a:t>
             </a:r>
@@ -18943,8 +18781,8 @@
                 <a:solidFill>
                   <a:srgbClr val="000000"/>
                 </a:solidFill>
-                <a:latin typeface="Segoe UI"/>
-                <a:cs typeface="Segoe UI"/>
+                <a:latin typeface="Arial"/>
+                <a:cs typeface="Arial"/>
               </a:rPr>
               <a:t>Bệnh nhân của bạn có được đưa vào không?</a:t>
             </a:r>
@@ -18986,8 +18824,8 @@
                 <a:solidFill>
                   <a:srgbClr val="FFFFFF"/>
                 </a:solidFill>
-                <a:latin typeface="Segoe UI"/>
-                <a:cs typeface="Segoe UI"/>
+                <a:latin typeface="Arial"/>
+                <a:cs typeface="Arial"/>
               </a:rPr>
               <a:t>4  Nhóm so sánh</a:t>
             </a:r>
@@ -19035,8 +18873,8 @@
                 <a:solidFill>
                   <a:srgbClr val="000000"/>
                 </a:solidFill>
-                <a:latin typeface="Segoe UI"/>
-                <a:cs typeface="Segoe UI"/>
+                <a:latin typeface="Arial"/>
+                <a:cs typeface="Arial"/>
               </a:rPr>
               <a:t>Các nhóm có tương đồng lúc ban đầu không (Bảng 1)?</a:t>
             </a:r>
@@ -19056,8 +18894,8 @@
                 <a:solidFill>
                   <a:srgbClr val="000000"/>
                 </a:solidFill>
-                <a:latin typeface="Segoe UI"/>
-                <a:cs typeface="Segoe UI"/>
+                <a:latin typeface="Arial"/>
+                <a:cs typeface="Arial"/>
               </a:rPr>
               <a:t>Đạt được bằng cách nào (ngẫu nhiên / bắt cặp / hiệu chỉnh)?</a:t>
             </a:r>
@@ -19099,8 +18937,8 @@
                 <a:solidFill>
                   <a:srgbClr val="FFFFFF"/>
                 </a:solidFill>
-                <a:latin typeface="Segoe UI"/>
-                <a:cs typeface="Segoe UI"/>
+                <a:latin typeface="Arial"/>
+                <a:cs typeface="Arial"/>
               </a:rPr>
               <a:t>5  Sai lệch</a:t>
             </a:r>
@@ -19148,8 +18986,8 @@
                 <a:solidFill>
                   <a:srgbClr val="000000"/>
                 </a:solidFill>
-                <a:latin typeface="Segoe UI"/>
-                <a:cs typeface="Segoe UI"/>
+                <a:latin typeface="Arial"/>
+                <a:cs typeface="Arial"/>
               </a:rPr>
               <a:t>Ai biết bệnh nhân thuộc nhóm nào (làm mù)?</a:t>
             </a:r>
@@ -19169,8 +19007,8 @@
                 <a:solidFill>
                   <a:srgbClr val="000000"/>
                 </a:solidFill>
-                <a:latin typeface="Segoe UI"/>
-                <a:cs typeface="Segoe UI"/>
+                <a:latin typeface="Arial"/>
+                <a:cs typeface="Arial"/>
               </a:rPr>
               <a:t>Điều đó có thể thay đổi kết cục không?</a:t>
             </a:r>
@@ -19207,7 +19045,7 @@
                     <a:lumMod val="50000"/>
                   </a:schemeClr>
                 </a:solidFill>
-                <a:latin typeface="Verdana"/>
+                <a:latin typeface="Arial"/>
               </a:rPr>
               <a:t>Neudata | #ClearDataClearImpact</a:t>
             </a:r>
@@ -19337,8 +19175,8 @@
                 <a:solidFill>
                   <a:srgbClr val="0D7377"/>
                 </a:solidFill>
-                <a:latin typeface="Segoe UI"/>
-                <a:cs typeface="Segoe UI"/>
+                <a:latin typeface="Arial"/>
+                <a:cs typeface="Arial"/>
               </a:rPr>
               <a:t>Bảng kiểm 10 câu hỏi (6-10)</a:t>
             </a:r>
@@ -19408,8 +19246,8 @@
                 <a:solidFill>
                   <a:srgbClr val="FFFFFF"/>
                 </a:solidFill>
-                <a:latin typeface="Segoe UI"/>
-                <a:cs typeface="Segoe UI"/>
+                <a:latin typeface="Arial"/>
+                <a:cs typeface="Arial"/>
               </a:rPr>
               <a:t>6  Kết cục</a:t>
             </a:r>
@@ -19457,8 +19295,8 @@
                 <a:solidFill>
                   <a:srgbClr val="000000"/>
                 </a:solidFill>
-                <a:latin typeface="Segoe UI"/>
-                <a:cs typeface="Segoe UI"/>
+                <a:latin typeface="Arial"/>
+                <a:cs typeface="Arial"/>
               </a:rPr>
               <a:t>Có MỘT kết cục chính định trước,</a:t>
             </a:r>
@@ -19478,8 +19316,8 @@
                 <a:solidFill>
                   <a:srgbClr val="000000"/>
                 </a:solidFill>
-                <a:latin typeface="Segoe UI"/>
-                <a:cs typeface="Segoe UI"/>
+                <a:latin typeface="Arial"/>
+                <a:cs typeface="Arial"/>
               </a:rPr>
               <a:t>đo cùng một cách ở cả hai nhóm không?</a:t>
             </a:r>
@@ -19521,8 +19359,8 @@
                 <a:solidFill>
                   <a:srgbClr val="FFFFFF"/>
                 </a:solidFill>
-                <a:latin typeface="Segoe UI"/>
-                <a:cs typeface="Segoe UI"/>
+                <a:latin typeface="Arial"/>
+                <a:cs typeface="Arial"/>
               </a:rPr>
               <a:t>7  Con số</a:t>
             </a:r>
@@ -19570,8 +19408,8 @@
                 <a:solidFill>
                   <a:srgbClr val="000000"/>
                 </a:solidFill>
-                <a:latin typeface="Segoe UI"/>
-                <a:cs typeface="Segoe UI"/>
+                <a:latin typeface="Arial"/>
+                <a:cs typeface="Arial"/>
               </a:rPr>
               <a:t>Kết quả chính là số đo tác động nào, với KTC 95%?</a:t>
             </a:r>
@@ -19591,8 +19429,8 @@
                 <a:solidFill>
                   <a:srgbClr val="000000"/>
                 </a:solidFill>
-                <a:latin typeface="Segoe UI"/>
-                <a:cs typeface="Segoe UI"/>
+                <a:latin typeface="Arial"/>
+                <a:cs typeface="Arial"/>
               </a:rPr>
               <a:t>KTC hẹp hay rộng?</a:t>
             </a:r>
@@ -19634,8 +19472,8 @@
                 <a:solidFill>
                   <a:srgbClr val="FFFFFF"/>
                 </a:solidFill>
-                <a:latin typeface="Segoe UI"/>
-                <a:cs typeface="Segoe UI"/>
+                <a:latin typeface="Arial"/>
+                <a:cs typeface="Arial"/>
               </a:rPr>
               <a:t>8  Lời văn và thiết kế</a:t>
             </a:r>
@@ -19683,8 +19521,8 @@
                 <a:solidFill>
                   <a:srgbClr val="000000"/>
                 </a:solidFill>
-                <a:latin typeface="Segoe UI"/>
-                <a:cs typeface="Segoe UI"/>
+                <a:latin typeface="Arial"/>
+                <a:cs typeface="Arial"/>
               </a:rPr>
               <a:t>Kết luận có tương xứng với thiết kế</a:t>
             </a:r>
@@ -19704,8 +19542,8 @@
                 <a:solidFill>
                   <a:srgbClr val="000000"/>
                 </a:solidFill>
-                <a:latin typeface="Segoe UI"/>
-                <a:cs typeface="Segoe UI"/>
+                <a:latin typeface="Arial"/>
+                <a:cs typeface="Arial"/>
               </a:rPr>
               <a:t>('liên quan' hay 'gây ra'; không 'xu hướng' với p = 0,42)?</a:t>
             </a:r>
@@ -19747,8 +19585,8 @@
                 <a:solidFill>
                   <a:srgbClr val="FFFFFF"/>
                 </a:solidFill>
-                <a:latin typeface="Segoe UI"/>
-                <a:cs typeface="Segoe UI"/>
+                <a:latin typeface="Arial"/>
+                <a:cs typeface="Arial"/>
               </a:rPr>
               <a:t>9  Hạn chế</a:t>
             </a:r>
@@ -19796,8 +19634,8 @@
                 <a:solidFill>
                   <a:srgbClr val="000000"/>
                 </a:solidFill>
-                <a:latin typeface="Segoe UI"/>
-                <a:cs typeface="Segoe UI"/>
+                <a:latin typeface="Arial"/>
+                <a:cs typeface="Arial"/>
               </a:rPr>
               <a:t>Các hạn chế chính có được nêu trung thực?</a:t>
             </a:r>
@@ -19817,8 +19655,8 @@
                 <a:solidFill>
                   <a:srgbClr val="000000"/>
                 </a:solidFill>
-                <a:latin typeface="Segoe UI"/>
-                <a:cs typeface="Segoe UI"/>
+                <a:latin typeface="Arial"/>
+                <a:cs typeface="Arial"/>
               </a:rPr>
               <a:t>Kể một hạn chế tác giả bỏ sót.</a:t>
             </a:r>
@@ -19860,8 +19698,8 @@
                 <a:solidFill>
                   <a:srgbClr val="FFFFFF"/>
                 </a:solidFill>
-                <a:latin typeface="Segoe UI"/>
-                <a:cs typeface="Segoe UI"/>
+                <a:latin typeface="Arial"/>
+                <a:cs typeface="Arial"/>
               </a:rPr>
               <a:t>10  Ứng dụng</a:t>
             </a:r>
@@ -19909,8 +19747,8 @@
                 <a:solidFill>
                   <a:srgbClr val="000000"/>
                 </a:solidFill>
-                <a:latin typeface="Segoe UI"/>
-                <a:cs typeface="Segoe UI"/>
+                <a:latin typeface="Arial"/>
+                <a:cs typeface="Arial"/>
               </a:rPr>
               <a:t>Bài này có thay đổi thực hành ở khoa bạn không?</a:t>
             </a:r>
@@ -19930,8 +19768,8 @@
                 <a:solidFill>
                   <a:srgbClr val="000000"/>
                 </a:solidFill>
-                <a:latin typeface="Segoe UI"/>
-                <a:cs typeface="Segoe UI"/>
+                <a:latin typeface="Arial"/>
+                <a:cs typeface="Arial"/>
               </a:rPr>
               <a:t>Vì sao / vì sao không?</a:t>
             </a:r>
@@ -19968,7 +19806,7 @@
                     <a:lumMod val="50000"/>
                   </a:schemeClr>
                 </a:solidFill>
-                <a:latin typeface="Verdana"/>
+                <a:latin typeface="Arial"/>
               </a:rPr>
               <a:t>Neudata | #ClearDataClearImpact</a:t>
             </a:r>
@@ -20098,8 +19936,8 @@
                 <a:solidFill>
                   <a:srgbClr val="0D7377"/>
                 </a:solidFill>
-                <a:latin typeface="Segoe UI"/>
-                <a:cs typeface="Segoe UI"/>
+                <a:latin typeface="Arial"/>
+                <a:cs typeface="Arial"/>
               </a:rPr>
               <a:t>Làm người phản biện: thẩm định bài báo của nhóm</a:t>
             </a:r>
@@ -20169,8 +20007,8 @@
                 <a:solidFill>
                   <a:srgbClr val="FFFFFF"/>
                 </a:solidFill>
-                <a:latin typeface="Segoe UI"/>
-                <a:cs typeface="Segoe UI"/>
+                <a:latin typeface="Arial"/>
+                <a:cs typeface="Arial"/>
               </a:rPr>
               <a:t>LÀM VIỆC NHÓM   |   10 phút</a:t>
             </a:r>
@@ -20207,25 +20045,19 @@
               <a:spcBef>
                 <a:spcPts val="450"/>
               </a:spcBef>
-              <a:buNone/>
-            </a:pPr>
-            <a:r>
-              <a:rPr lang="en-US" sz="1650" b="1" dirty="0">
-                <a:solidFill>
-                  <a:srgbClr val="0D7377"/>
-                </a:solidFill>
-                <a:latin typeface="Segoe UI"/>
-                <a:cs typeface="Segoe UI"/>
-              </a:rPr>
-              <a:t>1.  </a:t>
-            </a:r>
+              <a:buClr>
+                <a:srgbClr val="0D7377"/>
+              </a:buClr>
+              <a:buFont typeface="Arial"/>
+              <a:buChar char="•"/>
+            </a:pPr>
             <a:r>
               <a:rPr lang="en-US" sz="1650" dirty="0">
                 <a:solidFill>
                   <a:srgbClr val="000000"/>
                 </a:solidFill>
-                <a:latin typeface="Segoe UI"/>
-                <a:cs typeface="Segoe UI"/>
+                <a:latin typeface="Arial"/>
+                <a:cs typeface="Arial"/>
               </a:rPr>
               <a:t>Các cặp nhận câu 1-3, 4-6 và 7-10</a:t>
             </a:r>
@@ -20238,25 +20070,19 @@
               <a:spcBef>
                 <a:spcPts val="450"/>
               </a:spcBef>
-              <a:buNone/>
-            </a:pPr>
-            <a:r>
-              <a:rPr lang="en-US" sz="1650" b="1" dirty="0">
-                <a:solidFill>
-                  <a:srgbClr val="0D7377"/>
-                </a:solidFill>
-                <a:latin typeface="Segoe UI"/>
-                <a:cs typeface="Segoe UI"/>
-              </a:rPr>
-              <a:t>2.  </a:t>
-            </a:r>
+              <a:buClr>
+                <a:srgbClr val="0D7377"/>
+              </a:buClr>
+              <a:buFont typeface="Arial"/>
+              <a:buChar char="•"/>
+            </a:pPr>
             <a:r>
               <a:rPr lang="en-US" sz="1650" dirty="0">
                 <a:solidFill>
                   <a:srgbClr val="000000"/>
                 </a:solidFill>
-                <a:latin typeface="Segoe UI"/>
-                <a:cs typeface="Segoe UI"/>
+                <a:latin typeface="Arial"/>
+                <a:cs typeface="Arial"/>
               </a:rPr>
               <a:t>CHỈ đọc các trang ghi trên phiếu trả lời</a:t>
             </a:r>
@@ -20269,25 +20095,19 @@
               <a:spcBef>
                 <a:spcPts val="450"/>
               </a:spcBef>
-              <a:buNone/>
-            </a:pPr>
-            <a:r>
-              <a:rPr lang="en-US" sz="1650" b="1" dirty="0">
-                <a:solidFill>
-                  <a:srgbClr val="0D7377"/>
-                </a:solidFill>
-                <a:latin typeface="Segoe UI"/>
-                <a:cs typeface="Segoe UI"/>
-              </a:rPr>
-              <a:t>3.  </a:t>
-            </a:r>
+              <a:buClr>
+                <a:srgbClr val="0D7377"/>
+              </a:buClr>
+              <a:buFont typeface="Arial"/>
+              <a:buChar char="•"/>
+            </a:pPr>
             <a:r>
               <a:rPr lang="en-US" sz="1650" dirty="0">
                 <a:solidFill>
                   <a:srgbClr val="000000"/>
                 </a:solidFill>
-                <a:latin typeface="Segoe UI"/>
-                <a:cs typeface="Segoe UI"/>
+                <a:latin typeface="Arial"/>
+                <a:cs typeface="Arial"/>
               </a:rPr>
               <a:t>Trả lời Có / Không / Không rõ + số trang</a:t>
             </a:r>
@@ -20300,25 +20120,19 @@
               <a:spcBef>
                 <a:spcPts val="450"/>
               </a:spcBef>
-              <a:buNone/>
-            </a:pPr>
-            <a:r>
-              <a:rPr lang="en-US" sz="1650" b="1" dirty="0">
-                <a:solidFill>
-                  <a:srgbClr val="0D7377"/>
-                </a:solidFill>
-                <a:latin typeface="Segoe UI"/>
-                <a:cs typeface="Segoe UI"/>
-              </a:rPr>
-              <a:t>4.  </a:t>
-            </a:r>
+              <a:buClr>
+                <a:srgbClr val="0D7377"/>
+              </a:buClr>
+              <a:buFont typeface="Arial"/>
+              <a:buChar char="•"/>
+            </a:pPr>
             <a:r>
               <a:rPr lang="en-US" sz="1650" dirty="0">
                 <a:solidFill>
                   <a:srgbClr val="000000"/>
                 </a:solidFill>
-                <a:latin typeface="Segoe UI"/>
-                <a:cs typeface="Segoe UI"/>
+                <a:latin typeface="Arial"/>
+                <a:cs typeface="Arial"/>
               </a:rPr>
               <a:t>Phút 7: thống nhất câu trả lời của nhóm</a:t>
             </a:r>
@@ -20331,25 +20145,19 @@
               <a:spcBef>
                 <a:spcPts val="450"/>
               </a:spcBef>
-              <a:buNone/>
-            </a:pPr>
-            <a:r>
-              <a:rPr lang="en-US" sz="1650" b="1" dirty="0">
-                <a:solidFill>
-                  <a:srgbClr val="0D7377"/>
-                </a:solidFill>
-                <a:latin typeface="Segoe UI"/>
-                <a:cs typeface="Segoe UI"/>
-              </a:rPr>
-              <a:t>5.  </a:t>
-            </a:r>
+              <a:buClr>
+                <a:srgbClr val="0D7377"/>
+              </a:buClr>
+              <a:buFont typeface="Arial"/>
+              <a:buChar char="•"/>
+            </a:pPr>
             <a:r>
               <a:rPr lang="en-US" sz="1650" dirty="0">
                 <a:solidFill>
                   <a:srgbClr val="000000"/>
                 </a:solidFill>
-                <a:latin typeface="Segoe UI"/>
-                <a:cs typeface="Segoe UI"/>
+                <a:latin typeface="Arial"/>
+                <a:cs typeface="Arial"/>
               </a:rPr>
               <a:t>Phút 9: chọn người báo cáo; viết nhận định trong một câu</a:t>
             </a:r>
@@ -20393,8 +20201,8 @@
                 <a:solidFill>
                   <a:srgbClr val="0D7377"/>
                 </a:solidFill>
-                <a:latin typeface="Segoe UI"/>
-                <a:cs typeface="Segoe UI"/>
+                <a:latin typeface="Arial"/>
+                <a:cs typeface="Arial"/>
               </a:rPr>
               <a:t>Tìm ở đâu</a:t>
             </a:r>
@@ -20415,8 +20223,8 @@
                 <a:solidFill>
                   <a:srgbClr val="000000"/>
                 </a:solidFill>
-                <a:latin typeface="Segoe UI"/>
-                <a:cs typeface="Segoe UI"/>
+                <a:latin typeface="Arial"/>
+                <a:cs typeface="Arial"/>
               </a:rPr>
               <a:t>Tóm tắt: câu hỏi và kết quả</a:t>
             </a:r>
@@ -20437,8 +20245,8 @@
                 <a:solidFill>
                   <a:srgbClr val="000000"/>
                 </a:solidFill>
-                <a:latin typeface="Segoe UI"/>
-                <a:cs typeface="Segoe UI"/>
+                <a:latin typeface="Arial"/>
+                <a:cs typeface="Arial"/>
               </a:rPr>
               <a:t>Phương pháp: thiết kế, làm mù, kết cục</a:t>
             </a:r>
@@ -20459,8 +20267,8 @@
                 <a:solidFill>
                   <a:srgbClr val="000000"/>
                 </a:solidFill>
-                <a:latin typeface="Segoe UI"/>
-                <a:cs typeface="Segoe UI"/>
+                <a:latin typeface="Arial"/>
+                <a:cs typeface="Arial"/>
               </a:rPr>
               <a:t>Bảng 1: các nhóm tương đồng?</a:t>
             </a:r>
@@ -20481,8 +20289,8 @@
                 <a:solidFill>
                   <a:srgbClr val="000000"/>
                 </a:solidFill>
-                <a:latin typeface="Segoe UI"/>
-                <a:cs typeface="Segoe UI"/>
+                <a:latin typeface="Arial"/>
+                <a:cs typeface="Arial"/>
               </a:rPr>
               <a:t>Bàn luận: lời văn và hạn chế</a:t>
             </a:r>
@@ -20528,8 +20336,8 @@
                 <a:solidFill>
                   <a:srgbClr val="0D7377"/>
                 </a:solidFill>
-                <a:latin typeface="Segoe UI"/>
-                <a:cs typeface="Segoe UI"/>
+                <a:latin typeface="Arial"/>
+                <a:cs typeface="Arial"/>
               </a:rPr>
               <a:t>SẢN PHẨM   </a:t>
             </a:r>
@@ -20538,8 +20346,8 @@
                 <a:solidFill>
                   <a:srgbClr val="000000"/>
                 </a:solidFill>
-                <a:latin typeface="Segoe UI"/>
-                <a:cs typeface="Segoe UI"/>
+                <a:latin typeface="Arial"/>
+                <a:cs typeface="Arial"/>
               </a:rPr>
               <a:t>Phiếu trả lời hoàn chỉnh + nhận định một câu của mỗi nhóm</a:t>
             </a:r>
@@ -20576,7 +20384,7 @@
                     <a:lumMod val="50000"/>
                   </a:schemeClr>
                 </a:solidFill>
-                <a:latin typeface="Verdana"/>
+                <a:latin typeface="Arial"/>
               </a:rPr>
               <a:t>Neudata | #ClearDataClearImpact</a:t>
             </a:r>
@@ -20706,8 +20514,8 @@
                 <a:solidFill>
                   <a:srgbClr val="0D7377"/>
                 </a:solidFill>
-                <a:latin typeface="Segoe UI"/>
-                <a:cs typeface="Segoe UI"/>
+                <a:latin typeface="Arial"/>
+                <a:cs typeface="Arial"/>
               </a:rPr>
               <a:t>Mỗi thiết kế được phép kết luận gì?</a:t>
             </a:r>
@@ -20803,8 +20611,8 @@
                 <a:solidFill>
                   <a:srgbClr val="FFFFFF"/>
                 </a:solidFill>
-                <a:latin typeface="Segoe UI"/>
-                <a:cs typeface="Segoe UI"/>
+                <a:latin typeface="Arial"/>
+                <a:cs typeface="Arial"/>
               </a:rPr>
               <a:t>THÔNG ĐIỆP CHÍNH   </a:t>
             </a:r>
@@ -20813,8 +20621,8 @@
                 <a:solidFill>
                   <a:srgbClr val="FFFFFF"/>
                 </a:solidFill>
-                <a:latin typeface="Segoe UI"/>
-                <a:cs typeface="Segoe UI"/>
+                <a:latin typeface="Arial"/>
+                <a:cs typeface="Arial"/>
               </a:rPr>
               <a:t>Phân nhóm ngẫu nhiên mới được nói 'gây ra'; quan sát chỉ được nói 'có liên quan'.</a:t>
             </a:r>
@@ -20851,7 +20659,7 @@
                     <a:lumMod val="50000"/>
                   </a:schemeClr>
                 </a:solidFill>
-                <a:latin typeface="Verdana"/>
+                <a:latin typeface="Arial"/>
               </a:rPr>
               <a:t>Neudata | #ClearDataClearImpact</a:t>
             </a:r>
@@ -20981,8 +20789,8 @@
                 <a:solidFill>
                   <a:srgbClr val="0D7377"/>
                 </a:solidFill>
-                <a:latin typeface="Segoe UI"/>
-                <a:cs typeface="Segoe UI"/>
+                <a:latin typeface="Arial"/>
+                <a:cs typeface="Arial"/>
               </a:rPr>
               <a:t>Hai bài báo đặt cạnh nhau</a:t>
             </a:r>
@@ -21050,7 +20858,7 @@
                           <a:solidFill>
                             <a:srgbClr val="FFFFFF"/>
                           </a:solidFill>
-                          <a:latin typeface="Segoe UI"/>
+                          <a:latin typeface="Arial"/>
                         </a:rPr>
                         <a:t/>
                       </a:r>
@@ -21073,7 +20881,7 @@
                           <a:solidFill>
                             <a:srgbClr val="FFFFFF"/>
                           </a:solidFill>
-                          <a:latin typeface="Segoe UI"/>
+                          <a:latin typeface="Arial"/>
                         </a:rPr>
                         <a:t>Bài 1: RCT (Boulet 2024)</a:t>
                       </a:r>
@@ -21096,7 +20904,7 @@
                           <a:solidFill>
                             <a:srgbClr val="FFFFFF"/>
                           </a:solidFill>
-                          <a:latin typeface="Segoe UI"/>
+                          <a:latin typeface="Arial"/>
                         </a:rPr>
                         <a:t>Bài 2: đoàn hệ (Hyun 2023)</a:t>
                       </a:r>
@@ -21121,7 +20929,7 @@
                           <a:solidFill>
                             <a:srgbClr val="000000"/>
                           </a:solidFill>
-                          <a:latin typeface="Segoe UI"/>
+                          <a:latin typeface="Arial"/>
                         </a:rPr>
                         <a:t>Các nhóm tương đồng nhờ</a:t>
                       </a:r>
@@ -21144,7 +20952,7 @@
                           <a:solidFill>
                             <a:srgbClr val="000000"/>
                           </a:solidFill>
-                          <a:latin typeface="Segoe UI"/>
+                          <a:latin typeface="Arial"/>
                         </a:rPr>
                         <a:t>Phân nhóm ngẫu nhiên 1:1 (khối 2)</a:t>
                       </a:r>
@@ -21167,7 +20975,7 @@
                           <a:solidFill>
                             <a:srgbClr val="000000"/>
                           </a:solidFill>
-                          <a:latin typeface="Segoe UI"/>
+                          <a:latin typeface="Arial"/>
                         </a:rPr>
                         <a:t>Bắt cặp điểm xu hướng (chỉ yếu tố đã đo)</a:t>
                       </a:r>
@@ -21192,7 +21000,7 @@
                           <a:solidFill>
                             <a:srgbClr val="000000"/>
                           </a:solidFill>
-                          <a:latin typeface="Segoe UI"/>
+                          <a:latin typeface="Arial"/>
                         </a:rPr>
                         <a:t>Ai biết nhóm</a:t>
                       </a:r>
@@ -21215,7 +21023,7 @@
                           <a:solidFill>
                             <a:srgbClr val="000000"/>
                           </a:solidFill>
-                          <a:latin typeface="Segoe UI"/>
+                          <a:latin typeface="Arial"/>
                         </a:rPr>
                         <a:t>Bác sĩ biết; bệnh nhân, thống kê được làm mù</a:t>
                       </a:r>
@@ -21238,7 +21046,7 @@
                           <a:solidFill>
                             <a:srgbClr val="000000"/>
                           </a:solidFill>
-                          <a:latin typeface="Segoe UI"/>
+                          <a:latin typeface="Arial"/>
                         </a:rPr>
                         <a:t>Tất cả (quan sát)</a:t>
                       </a:r>
@@ -21263,7 +21071,7 @@
                           <a:solidFill>
                             <a:srgbClr val="000000"/>
                           </a:solidFill>
-                          <a:latin typeface="Segoe UI"/>
+                          <a:latin typeface="Arial"/>
                         </a:rPr>
                         <a:t>Kết quả chính</a:t>
                       </a:r>
@@ -21286,7 +21094,7 @@
                           <a:solidFill>
                             <a:srgbClr val="000000"/>
                           </a:solidFill>
-                          <a:latin typeface="Segoe UI"/>
+                          <a:latin typeface="Arial"/>
                         </a:rPr>
                         <a:t>13,2 ml/kg (KTC 95% -15,2 đến 41,6), p = 0,42</a:t>
                       </a:r>
@@ -21309,7 +21117,7 @@
                           <a:solidFill>
                             <a:srgbClr val="000000"/>
                           </a:solidFill>
-                          <a:latin typeface="Segoe UI"/>
+                          <a:latin typeface="Arial"/>
                         </a:rPr>
                         <a:t>Ngày 2: HR 2,13 (1,48 đến 3,06)</a:t>
                       </a:r>
@@ -21334,7 +21142,7 @@
                           <a:solidFill>
                             <a:srgbClr val="000000"/>
                           </a:solidFill>
-                          <a:latin typeface="Segoe UI"/>
+                          <a:latin typeface="Arial"/>
                         </a:rPr>
                         <a:t>Hạn chế bị bỏ sót</a:t>
                       </a:r>
@@ -21357,7 +21165,7 @@
                           <a:solidFill>
                             <a:srgbClr val="000000"/>
                           </a:solidFill>
-                          <a:latin typeface="Segoe UI"/>
+                          <a:latin typeface="Arial"/>
                         </a:rPr>
                         <a:t>Khối 2 với bác sĩ không bị làm mù</a:t>
                       </a:r>
@@ -21380,7 +21188,7 @@
                           <a:solidFill>
                             <a:srgbClr val="000000"/>
                           </a:solidFill>
-                          <a:latin typeface="Segoe UI"/>
+                          <a:latin typeface="Arial"/>
                         </a:rPr>
                         <a:t>Sai lệch sống sót (nằm ICU từ 3 ngày)</a:t>
                       </a:r>
@@ -21405,7 +21213,7 @@
                           <a:solidFill>
                             <a:srgbClr val="000000"/>
                           </a:solidFill>
-                          <a:latin typeface="Segoe UI"/>
+                          <a:latin typeface="Arial"/>
                         </a:rPr>
                         <a:t>Lỗi lời văn</a:t>
                       </a:r>
@@ -21428,7 +21236,7 @@
                           <a:solidFill>
                             <a:srgbClr val="000000"/>
                           </a:solidFill>
-                          <a:latin typeface="Segoe UI"/>
+                          <a:latin typeface="Arial"/>
                         </a:rPr>
                         <a:t>'Xu hướng không có ý nghĩa' (p = 0,42)</a:t>
                       </a:r>
@@ -21451,7 +21259,7 @@
                           <a:solidFill>
                             <a:srgbClr val="000000"/>
                           </a:solidFill>
-                          <a:latin typeface="Segoe UI"/>
+                          <a:latin typeface="Arial"/>
                         </a:rPr>
                         <a:t>'Impact', 'did not impact', 'show'</a:t>
                       </a:r>
@@ -21476,7 +21284,7 @@
                           <a:solidFill>
                             <a:srgbClr val="000000"/>
                           </a:solidFill>
-                          <a:latin typeface="Segoe UI"/>
+                          <a:latin typeface="Arial"/>
                         </a:rPr>
                         <a:t>Được kết luận</a:t>
                       </a:r>
@@ -21499,7 +21307,7 @@
                           <a:solidFill>
                             <a:srgbClr val="000000"/>
                           </a:solidFill>
-                          <a:latin typeface="Segoe UI"/>
+                          <a:latin typeface="Arial"/>
                         </a:rPr>
                         <a:t>Không giảm cân bằng dịch ngày 5 (thí điểm nhỏ)</a:t>
                       </a:r>
@@ -21522,7 +21330,7 @@
                           <a:solidFill>
                             <a:srgbClr val="000000"/>
                           </a:solidFill>
-                          <a:latin typeface="Segoe UI"/>
+                          <a:latin typeface="Arial"/>
                         </a:rPr>
                         <a:t>Cân bằng dương liên quan tử vong</a:t>
                       </a:r>
@@ -21570,8 +21378,8 @@
                 <a:solidFill>
                   <a:srgbClr val="595959"/>
                 </a:solidFill>
-                <a:latin typeface="Segoe UI"/>
-                <a:cs typeface="Segoe UI"/>
+                <a:latin typeface="Arial"/>
+                <a:cs typeface="Arial"/>
               </a:rPr>
               <a:t>Số trang và chi tiết: Resources/appraisal_instructor_guide.md</a:t>
             </a:r>
@@ -21608,7 +21416,7 @@
                     <a:lumMod val="50000"/>
                   </a:schemeClr>
                 </a:solidFill>
-                <a:latin typeface="Verdana"/>
+                <a:latin typeface="Arial"/>
               </a:rPr>
               <a:t>Neudata | #ClearDataClearImpact</a:t>
             </a:r>
@@ -21738,8 +21546,8 @@
                 <a:solidFill>
                   <a:srgbClr val="0D7377"/>
                 </a:solidFill>
-                <a:latin typeface="Segoe UI"/>
-                <a:cs typeface="Segoe UI"/>
+                <a:latin typeface="Arial"/>
+                <a:cs typeface="Arial"/>
               </a:rPr>
               <a:t>Thảo luận chung: mỗi thiết kế được kết luận gì?</a:t>
             </a:r>
@@ -21809,8 +21617,8 @@
                 <a:solidFill>
                   <a:srgbClr val="FFFFFF"/>
                 </a:solidFill>
-                <a:latin typeface="Segoe UI"/>
-                <a:cs typeface="Segoe UI"/>
+                <a:latin typeface="Arial"/>
+                <a:cs typeface="Arial"/>
               </a:rPr>
               <a:t>THẢO LUẬN   |   6 phút</a:t>
             </a:r>
@@ -21847,25 +21655,19 @@
               <a:spcBef>
                 <a:spcPts val="450"/>
               </a:spcBef>
-              <a:buNone/>
-            </a:pPr>
-            <a:r>
-              <a:rPr lang="en-US" sz="1650" b="1" dirty="0">
-                <a:solidFill>
-                  <a:srgbClr val="1F5C7A"/>
-                </a:solidFill>
-                <a:latin typeface="Segoe UI"/>
-                <a:cs typeface="Segoe UI"/>
-              </a:rPr>
-              <a:t>1.  </a:t>
-            </a:r>
+              <a:buClr>
+                <a:srgbClr val="1F5C7A"/>
+              </a:buClr>
+              <a:buFont typeface="Arial"/>
+              <a:buChar char="•"/>
+            </a:pPr>
             <a:r>
               <a:rPr lang="en-US" sz="1650" dirty="0">
                 <a:solidFill>
                   <a:srgbClr val="000000"/>
                 </a:solidFill>
-                <a:latin typeface="Segoe UI"/>
-                <a:cs typeface="Segoe UI"/>
+                <a:latin typeface="Arial"/>
+                <a:cs typeface="Arial"/>
               </a:rPr>
               <a:t>Nhóm 1 và 4 báo cáo câu 1-4 (mỗi nhóm 1 phút)</a:t>
             </a:r>
@@ -21878,25 +21680,19 @@
               <a:spcBef>
                 <a:spcPts val="450"/>
               </a:spcBef>
-              <a:buNone/>
-            </a:pPr>
-            <a:r>
-              <a:rPr lang="en-US" sz="1650" b="1" dirty="0">
-                <a:solidFill>
-                  <a:srgbClr val="1F5C7A"/>
-                </a:solidFill>
-                <a:latin typeface="Segoe UI"/>
-                <a:cs typeface="Segoe UI"/>
-              </a:rPr>
-              <a:t>2.  </a:t>
-            </a:r>
+              <a:buClr>
+                <a:srgbClr val="1F5C7A"/>
+              </a:buClr>
+              <a:buFont typeface="Arial"/>
+              <a:buChar char="•"/>
+            </a:pPr>
             <a:r>
               <a:rPr lang="en-US" sz="1650" dirty="0">
                 <a:solidFill>
                   <a:srgbClr val="000000"/>
                 </a:solidFill>
-                <a:latin typeface="Segoe UI"/>
-                <a:cs typeface="Segoe UI"/>
+                <a:latin typeface="Arial"/>
+                <a:cs typeface="Arial"/>
               </a:rPr>
               <a:t>Nhóm 2 và 5 báo cáo câu 5-8 (mỗi nhóm 1 phút)</a:t>
             </a:r>
@@ -21909,25 +21705,19 @@
               <a:spcBef>
                 <a:spcPts val="450"/>
               </a:spcBef>
-              <a:buNone/>
-            </a:pPr>
-            <a:r>
-              <a:rPr lang="en-US" sz="1650" b="1" dirty="0">
-                <a:solidFill>
-                  <a:srgbClr val="1F5C7A"/>
-                </a:solidFill>
-                <a:latin typeface="Segoe UI"/>
-                <a:cs typeface="Segoe UI"/>
-              </a:rPr>
-              <a:t>3.  </a:t>
-            </a:r>
+              <a:buClr>
+                <a:srgbClr val="1F5C7A"/>
+              </a:buClr>
+              <a:buFont typeface="Arial"/>
+              <a:buChar char="•"/>
+            </a:pPr>
             <a:r>
               <a:rPr lang="en-US" sz="1650" dirty="0">
                 <a:solidFill>
                   <a:srgbClr val="000000"/>
                 </a:solidFill>
-                <a:latin typeface="Segoe UI"/>
-                <a:cs typeface="Segoe UI"/>
+                <a:latin typeface="Arial"/>
+                <a:cs typeface="Arial"/>
               </a:rPr>
               <a:t>Nhóm 3 báo cáo câu 9-10 cho Bài 1</a:t>
             </a:r>
@@ -21940,25 +21730,19 @@
               <a:spcBef>
                 <a:spcPts val="450"/>
               </a:spcBef>
-              <a:buNone/>
-            </a:pPr>
-            <a:r>
-              <a:rPr lang="en-US" sz="1650" b="1" dirty="0">
-                <a:solidFill>
-                  <a:srgbClr val="1F5C7A"/>
-                </a:solidFill>
-                <a:latin typeface="Segoe UI"/>
-                <a:cs typeface="Segoe UI"/>
-              </a:rPr>
-              <a:t>4.  </a:t>
-            </a:r>
+              <a:buClr>
+                <a:srgbClr val="1F5C7A"/>
+              </a:buClr>
+              <a:buFont typeface="Arial"/>
+              <a:buChar char="•"/>
+            </a:pPr>
             <a:r>
               <a:rPr lang="en-US" sz="1650" dirty="0">
                 <a:solidFill>
                   <a:srgbClr val="000000"/>
                 </a:solidFill>
-                <a:latin typeface="Segoe UI"/>
-                <a:cs typeface="Segoe UI"/>
+                <a:latin typeface="Arial"/>
+                <a:cs typeface="Arial"/>
               </a:rPr>
               <a:t>So sánh câu 4, 5 và 8 giữa hai bài</a:t>
             </a:r>
@@ -21971,25 +21755,19 @@
               <a:spcBef>
                 <a:spcPts val="450"/>
               </a:spcBef>
-              <a:buNone/>
-            </a:pPr>
-            <a:r>
-              <a:rPr lang="en-US" sz="1650" b="1" dirty="0">
-                <a:solidFill>
-                  <a:srgbClr val="1F5C7A"/>
-                </a:solidFill>
-                <a:latin typeface="Segoe UI"/>
-                <a:cs typeface="Segoe UI"/>
-              </a:rPr>
-              <a:t>5.  </a:t>
-            </a:r>
+              <a:buClr>
+                <a:srgbClr val="1F5C7A"/>
+              </a:buClr>
+              <a:buFont typeface="Arial"/>
+              <a:buChar char="•"/>
+            </a:pPr>
             <a:r>
               <a:rPr lang="en-US" sz="1650" dirty="0">
                 <a:solidFill>
                   <a:srgbClr val="000000"/>
                 </a:solidFill>
-                <a:latin typeface="Segoe UI"/>
-                <a:cs typeface="Segoe UI"/>
+                <a:latin typeface="Arial"/>
+                <a:cs typeface="Arial"/>
               </a:rPr>
               <a:t>Biểu quyết câu 10: bài nào sẽ thay đổi thực hành ở khoa ta?</a:t>
             </a:r>
@@ -22033,8 +21811,8 @@
                 <a:solidFill>
                   <a:srgbClr val="1F5C7A"/>
                 </a:solidFill>
-                <a:latin typeface="Segoe UI"/>
-                <a:cs typeface="Segoe UI"/>
+                <a:latin typeface="Arial"/>
+                <a:cs typeface="Arial"/>
               </a:rPr>
               <a:t>Chốt các thông điệp</a:t>
             </a:r>
@@ -22055,8 +21833,8 @@
                 <a:solidFill>
                   <a:srgbClr val="000000"/>
                 </a:solidFill>
-                <a:latin typeface="Segoe UI"/>
-                <a:cs typeface="Segoe UI"/>
+                <a:latin typeface="Arial"/>
+                <a:cs typeface="Arial"/>
               </a:rPr>
               <a:t>Thiết kế quyết định động từ: gây ra hay liên quan</a:t>
             </a:r>
@@ -22077,8 +21855,8 @@
                 <a:solidFill>
                   <a:srgbClr val="000000"/>
                 </a:solidFill>
-                <a:latin typeface="Segoe UI"/>
-                <a:cs typeface="Segoe UI"/>
+                <a:latin typeface="Arial"/>
+                <a:cs typeface="Arial"/>
               </a:rPr>
               <a:t>KTC rộng nghĩa là 'chưa biết'</a:t>
             </a:r>
@@ -22099,8 +21877,8 @@
                 <a:solidFill>
                   <a:srgbClr val="000000"/>
                 </a:solidFill>
-                <a:latin typeface="Segoe UI"/>
-                <a:cs typeface="Segoe UI"/>
+                <a:latin typeface="Arial"/>
+                <a:cs typeface="Arial"/>
               </a:rPr>
               <a:t>Đã đăng không có nghĩa là đúng</a:t>
             </a:r>
@@ -22121,8 +21899,8 @@
                 <a:solidFill>
                   <a:srgbClr val="000000"/>
                 </a:solidFill>
-                <a:latin typeface="Segoe UI"/>
-                <a:cs typeface="Segoe UI"/>
+                <a:latin typeface="Arial"/>
+                <a:cs typeface="Arial"/>
               </a:rPr>
               <a:t>Ghi tên hướng dẫn báo cáo: CONSORT, STROBE</a:t>
             </a:r>
@@ -22168,8 +21946,8 @@
                 <a:solidFill>
                   <a:srgbClr val="1F5C7A"/>
                 </a:solidFill>
-                <a:latin typeface="Segoe UI"/>
-                <a:cs typeface="Segoe UI"/>
+                <a:latin typeface="Arial"/>
+                <a:cs typeface="Arial"/>
               </a:rPr>
               <a:t>SẢN PHẨM   </a:t>
             </a:r>
@@ -22178,8 +21956,8 @@
                 <a:solidFill>
                   <a:srgbClr val="000000"/>
                 </a:solidFill>
-                <a:latin typeface="Segoe UI"/>
-                <a:cs typeface="Segoe UI"/>
+                <a:latin typeface="Arial"/>
+                <a:cs typeface="Arial"/>
               </a:rPr>
               <a:t>Mỗi nhóm nêu bài của mình được và không được kết luận gì</a:t>
             </a:r>
@@ -22216,7 +21994,7 @@
                     <a:lumMod val="50000"/>
                   </a:schemeClr>
                 </a:solidFill>
-                <a:latin typeface="Verdana"/>
+                <a:latin typeface="Arial"/>
               </a:rPr>
               <a:t>Neudata | #ClearDataClearImpact</a:t>
             </a:r>
@@ -22346,8 +22124,8 @@
                 <a:solidFill>
                   <a:srgbClr val="0D7377"/>
                 </a:solidFill>
-                <a:latin typeface="Segoe UI"/>
-                <a:cs typeface="Segoe UI"/>
+                <a:latin typeface="Arial"/>
+                <a:cs typeface="Arial"/>
               </a:rPr>
               <a:t>Từ khóa của Buổi 8</a:t>
             </a:r>
@@ -22414,7 +22192,7 @@
                           <a:solidFill>
                             <a:srgbClr val="FFFFFF"/>
                           </a:solidFill>
-                          <a:latin typeface="Segoe UI"/>
+                          <a:latin typeface="Arial"/>
                         </a:rPr>
                         <a:t>Thuật ngữ</a:t>
                       </a:r>
@@ -22437,7 +22215,7 @@
                           <a:solidFill>
                             <a:srgbClr val="FFFFFF"/>
                           </a:solidFill>
-                          <a:latin typeface="Segoe UI"/>
+                          <a:latin typeface="Arial"/>
                         </a:rPr>
                         <a:t>Nói đơn giản</a:t>
                       </a:r>
@@ -22462,7 +22240,7 @@
                           <a:solidFill>
                             <a:srgbClr val="000000"/>
                           </a:solidFill>
-                          <a:latin typeface="Segoe UI"/>
+                          <a:latin typeface="Arial"/>
                         </a:rPr>
                         <a:t>Phễu Đặt vấn đề</a:t>
                       </a:r>
@@ -22485,7 +22263,7 @@
                           <a:solidFill>
                             <a:srgbClr val="000000"/>
                           </a:solidFill>
-                          <a:latin typeface="Segoe UI"/>
+                          <a:latin typeface="Arial"/>
                         </a:rPr>
                         <a:t>Đã biết → chưa biết → mục tiêu, trong ba đoạn</a:t>
                       </a:r>
@@ -22510,7 +22288,7 @@
                           <a:solidFill>
                             <a:srgbClr val="000000"/>
                           </a:solidFill>
-                          <a:latin typeface="Segoe UI"/>
+                          <a:latin typeface="Arial"/>
                         </a:rPr>
                         <a:t>Sáu bước</a:t>
                       </a:r>
@@ -22533,7 +22311,7 @@
                           <a:solidFill>
                             <a:srgbClr val="000000"/>
                           </a:solidFill>
-                          <a:latin typeface="Segoe UI"/>
+                          <a:latin typeface="Arial"/>
                         </a:rPr>
                         <a:t>Trả lời, so sánh, giải thích, hạn chế, hàm ý, kết luận</a:t>
                       </a:r>
@@ -22558,7 +22336,7 @@
                           <a:solidFill>
                             <a:srgbClr val="000000"/>
                           </a:solidFill>
-                          <a:latin typeface="Segoe UI"/>
+                          <a:latin typeface="Arial"/>
                         </a:rPr>
                         <a:t>Lời văn tương xứng</a:t>
                       </a:r>
@@ -22581,7 +22359,7 @@
                           <a:solidFill>
                             <a:srgbClr val="000000"/>
                           </a:solidFill>
-                          <a:latin typeface="Segoe UI"/>
+                          <a:latin typeface="Arial"/>
                         </a:rPr>
                         <a:t>Động từ mạnh đúng mức thiết kế cho phép ('liên quan', không 'gây ra')</a:t>
                       </a:r>
@@ -22606,7 +22384,7 @@
                           <a:solidFill>
                             <a:srgbClr val="000000"/>
                           </a:solidFill>
-                          <a:latin typeface="Segoe UI"/>
+                          <a:latin typeface="Arial"/>
                         </a:rPr>
                         <a:t>Tạp chí săn mồi</a:t>
                       </a:r>
@@ -22629,7 +22407,7 @@
                           <a:solidFill>
                             <a:srgbClr val="000000"/>
                           </a:solidFill>
-                          <a:latin typeface="Segoe UI"/>
+                          <a:latin typeface="Arial"/>
                         </a:rPr>
                         <a:t>Thu phí mà không phản biện hay chỉ mục thực sự</a:t>
                       </a:r>
@@ -22654,7 +22432,7 @@
                           <a:solidFill>
                             <a:srgbClr val="000000"/>
                           </a:solidFill>
-                          <a:latin typeface="Segoe UI"/>
+                          <a:latin typeface="Arial"/>
                         </a:rPr>
                         <a:t>Trả lời từng ý</a:t>
                       </a:r>
@@ -22677,7 +22455,7 @@
                           <a:solidFill>
                             <a:srgbClr val="000000"/>
                           </a:solidFill>
-                          <a:latin typeface="Segoe UI"/>
+                          <a:latin typeface="Arial"/>
                         </a:rPr>
                         <a:t>Bảng trả lời mọi nhận xét phản biện kèm chỗ đã sửa</a:t>
                       </a:r>
@@ -22702,7 +22480,7 @@
                           <a:solidFill>
                             <a:srgbClr val="000000"/>
                           </a:solidFill>
-                          <a:latin typeface="Segoe UI"/>
+                          <a:latin typeface="Arial"/>
                         </a:rPr>
                         <a:t>Tiền ấn phẩm</a:t>
                       </a:r>
@@ -22725,7 +22503,7 @@
                           <a:solidFill>
                             <a:srgbClr val="000000"/>
                           </a:solidFill>
-                          <a:latin typeface="Segoe UI"/>
+                          <a:latin typeface="Arial"/>
                         </a:rPr>
                         <a:t>Bản thảo công khai trước khi phản biện</a:t>
                       </a:r>
@@ -22773,8 +22551,8 @@
                 <a:solidFill>
                   <a:srgbClr val="595959"/>
                 </a:solidFill>
-                <a:latin typeface="Segoe UI"/>
-                <a:cs typeface="Segoe UI"/>
+                <a:latin typeface="Arial"/>
+                <a:cs typeface="Arial"/>
               </a:rPr>
               <a:t>Bảng thuật ngữ đầy đủ (Anh-Việt): Course/References/</a:t>
             </a:r>
@@ -22811,7 +22589,7 @@
                     <a:lumMod val="50000"/>
                   </a:schemeClr>
                 </a:solidFill>
-                <a:latin typeface="Verdana"/>
+                <a:latin typeface="Arial"/>
               </a:rPr>
               <a:t>Neudata | #ClearDataClearImpact</a:t>
             </a:r>
@@ -22941,8 +22719,8 @@
                 <a:solidFill>
                   <a:srgbClr val="0D7377"/>
                 </a:solidFill>
-                <a:latin typeface="Segoe UI"/>
-                <a:cs typeface="Segoe UI"/>
+                <a:latin typeface="Arial"/>
+                <a:cs typeface="Arial"/>
               </a:rPr>
               <a:t>Từ câu hỏi đến công bố: những gì bạn làm được</a:t>
             </a:r>
@@ -23012,8 +22790,8 @@
                 <a:solidFill>
                   <a:srgbClr val="FFFFFF"/>
                 </a:solidFill>
-                <a:latin typeface="Segoe UI"/>
-                <a:cs typeface="Segoe UI"/>
+                <a:latin typeface="Arial"/>
+                <a:cs typeface="Arial"/>
               </a:rPr>
               <a:t>Bảo vệ</a:t>
             </a:r>
@@ -23061,8 +22839,8 @@
                 <a:solidFill>
                   <a:srgbClr val="000000"/>
                 </a:solidFill>
-                <a:latin typeface="Segoe UI"/>
-                <a:cs typeface="Segoe UI"/>
+                <a:latin typeface="Arial"/>
+                <a:cs typeface="Arial"/>
               </a:rPr>
               <a:t>Đạo đức, chấp thuận, đăng ký</a:t>
             </a:r>
@@ -23082,8 +22860,8 @@
                 <a:solidFill>
                   <a:srgbClr val="000000"/>
                 </a:solidFill>
-                <a:latin typeface="Segoe UI"/>
-                <a:cs typeface="Segoe UI"/>
+                <a:latin typeface="Arial"/>
+                <a:cs typeface="Arial"/>
               </a:rPr>
               <a:t>Dữ liệu và tác giả trung thực</a:t>
             </a:r>
@@ -23125,8 +22903,8 @@
                 <a:solidFill>
                   <a:srgbClr val="FFFFFF"/>
                 </a:solidFill>
-                <a:latin typeface="Segoe UI"/>
-                <a:cs typeface="Segoe UI"/>
+                <a:latin typeface="Arial"/>
+                <a:cs typeface="Arial"/>
               </a:rPr>
               <a:t>Viết</a:t>
             </a:r>
@@ -23174,8 +22952,8 @@
                 <a:solidFill>
                   <a:srgbClr val="000000"/>
                 </a:solidFill>
-                <a:latin typeface="Segoe UI"/>
-                <a:cs typeface="Segoe UI"/>
+                <a:latin typeface="Arial"/>
+                <a:cs typeface="Arial"/>
               </a:rPr>
               <a:t>IMRaD đúng thứ tự</a:t>
             </a:r>
@@ -23195,8 +22973,8 @@
                 <a:solidFill>
                   <a:srgbClr val="000000"/>
                 </a:solidFill>
-                <a:latin typeface="Segoe UI"/>
-                <a:cs typeface="Segoe UI"/>
+                <a:latin typeface="Arial"/>
+                <a:cs typeface="Arial"/>
               </a:rPr>
               <a:t>Con số kèm KTC</a:t>
             </a:r>
@@ -23216,8 +22994,8 @@
                 <a:solidFill>
                   <a:srgbClr val="000000"/>
                 </a:solidFill>
-                <a:latin typeface="Segoe UI"/>
-                <a:cs typeface="Segoe UI"/>
+                <a:latin typeface="Arial"/>
+                <a:cs typeface="Arial"/>
               </a:rPr>
               <a:t>Động từ đúng thiết kế</a:t>
             </a:r>
@@ -23259,8 +23037,8 @@
                 <a:solidFill>
                   <a:srgbClr val="FFFFFF"/>
                 </a:solidFill>
-                <a:latin typeface="Segoe UI"/>
-                <a:cs typeface="Segoe UI"/>
+                <a:latin typeface="Arial"/>
+                <a:cs typeface="Arial"/>
               </a:rPr>
               <a:t>Công bố</a:t>
             </a:r>
@@ -23308,8 +23086,8 @@
                 <a:solidFill>
                   <a:srgbClr val="000000"/>
                 </a:solidFill>
-                <a:latin typeface="Segoe UI"/>
-                <a:cs typeface="Segoe UI"/>
+                <a:latin typeface="Arial"/>
+                <a:cs typeface="Arial"/>
               </a:rPr>
               <a:t>Bảng kiểm báo cáo</a:t>
             </a:r>
@@ -23329,8 +23107,8 @@
                 <a:solidFill>
                   <a:srgbClr val="000000"/>
                 </a:solidFill>
-                <a:latin typeface="Segoe UI"/>
-                <a:cs typeface="Segoe UI"/>
+                <a:latin typeface="Arial"/>
+                <a:cs typeface="Arial"/>
               </a:rPr>
               <a:t>Tạp chí đáng tin</a:t>
             </a:r>
@@ -23350,8 +23128,8 @@
                 <a:solidFill>
                   <a:srgbClr val="000000"/>
                 </a:solidFill>
-                <a:latin typeface="Segoe UI"/>
-                <a:cs typeface="Segoe UI"/>
+                <a:latin typeface="Arial"/>
+                <a:cs typeface="Arial"/>
               </a:rPr>
               <a:t>Trả lời lịch sự, đầy đủ</a:t>
             </a:r>
@@ -23393,8 +23171,8 @@
                 <a:solidFill>
                   <a:srgbClr val="FFFFFF"/>
                 </a:solidFill>
-                <a:latin typeface="Segoe UI"/>
-                <a:cs typeface="Segoe UI"/>
+                <a:latin typeface="Arial"/>
+                <a:cs typeface="Arial"/>
               </a:rPr>
               <a:t>Phản biện</a:t>
             </a:r>
@@ -23442,8 +23220,8 @@
                 <a:solidFill>
                   <a:srgbClr val="000000"/>
                 </a:solidFill>
-                <a:latin typeface="Segoe UI"/>
-                <a:cs typeface="Segoe UI"/>
+                <a:latin typeface="Arial"/>
+                <a:cs typeface="Arial"/>
               </a:rPr>
               <a:t>10 câu hỏi</a:t>
             </a:r>
@@ -23463,8 +23241,8 @@
                 <a:solidFill>
                   <a:srgbClr val="000000"/>
                 </a:solidFill>
-                <a:latin typeface="Segoe UI"/>
-                <a:cs typeface="Segoe UI"/>
+                <a:latin typeface="Arial"/>
+                <a:cs typeface="Arial"/>
               </a:rPr>
               <a:t>Mỗi thiết kế được kết luận gì</a:t>
             </a:r>
@@ -23508,8 +23286,8 @@
                 <a:solidFill>
                   <a:srgbClr val="FFFFFF"/>
                 </a:solidFill>
-                <a:latin typeface="Segoe UI"/>
-                <a:cs typeface="Segoe UI"/>
+                <a:latin typeface="Arial"/>
+                <a:cs typeface="Arial"/>
               </a:rPr>
               <a:t>THÔNG ĐIỆP CHÍNH   </a:t>
             </a:r>
@@ -23518,8 +23296,8 @@
                 <a:solidFill>
                   <a:srgbClr val="FFFFFF"/>
                 </a:solidFill>
-                <a:latin typeface="Segoe UI"/>
-                <a:cs typeface="Segoe UI"/>
+                <a:latin typeface="Arial"/>
+                <a:cs typeface="Arial"/>
               </a:rPr>
               <a:t>Tiếp theo: trình bày đề cương và trao đổi bản thảo để phản biện.</a:t>
             </a:r>
@@ -23556,7 +23334,7 @@
                     <a:lumMod val="50000"/>
                   </a:schemeClr>
                 </a:solidFill>
-                <a:latin typeface="Verdana"/>
+                <a:latin typeface="Arial"/>
               </a:rPr>
               <a:t>Neudata | #ClearDataClearImpact</a:t>
             </a:r>
@@ -23686,8 +23464,8 @@
                 <a:solidFill>
                   <a:srgbClr val="0D7377"/>
                 </a:solidFill>
-                <a:latin typeface="Segoe UI"/>
-                <a:cs typeface="Segoe UI"/>
+                <a:latin typeface="Arial"/>
+                <a:cs typeface="Arial"/>
               </a:rPr>
               <a:t>Các nhóm trình bày  |  45 phút</a:t>
             </a:r>
@@ -23756,8 +23534,8 @@
                 <a:solidFill>
                   <a:srgbClr val="0D7377"/>
                 </a:solidFill>
-                <a:latin typeface="Segoe UI"/>
-                <a:cs typeface="Segoe UI"/>
+                <a:latin typeface="Arial"/>
+                <a:cs typeface="Arial"/>
               </a:rPr>
               <a:t>Đề cương và kế hoạch công bố của các bạn</a:t>
             </a:r>
@@ -23774,8 +23552,8 @@
                 <a:solidFill>
                   <a:srgbClr val="595959"/>
                 </a:solidFill>
-                <a:latin typeface="Segoe UI"/>
-                <a:cs typeface="Segoe UI"/>
+                <a:latin typeface="Arial"/>
+                <a:cs typeface="Arial"/>
               </a:rPr>
               <a:t>6 phút trình bày, 2 phút góp ý: tử tế và cụ thể</a:t>
             </a:r>
@@ -23812,7 +23590,7 @@
                     <a:lumMod val="50000"/>
                   </a:schemeClr>
                 </a:solidFill>
-                <a:latin typeface="Verdana"/>
+                <a:latin typeface="Arial"/>
               </a:rPr>
               <a:t>Neudata | #ClearDataClearImpact</a:t>
             </a:r>
@@ -23942,8 +23720,8 @@
                 <a:solidFill>
                   <a:srgbClr val="0D7377"/>
                 </a:solidFill>
-                <a:latin typeface="Segoe UI"/>
-                <a:cs typeface="Segoe UI"/>
+                <a:latin typeface="Arial"/>
+                <a:cs typeface="Arial"/>
               </a:rPr>
               <a:t>Đặt vấn đề: hình phễu trong ba đoạn</a:t>
             </a:r>
@@ -24039,8 +23817,8 @@
                 <a:solidFill>
                   <a:srgbClr val="FFFFFF"/>
                 </a:solidFill>
-                <a:latin typeface="Segoe UI"/>
-                <a:cs typeface="Segoe UI"/>
+                <a:latin typeface="Arial"/>
+                <a:cs typeface="Arial"/>
               </a:rPr>
               <a:t>THÔNG ĐIỆP CHÍNH   </a:t>
             </a:r>
@@ -24049,8 +23827,8 @@
                 <a:solidFill>
                   <a:srgbClr val="FFFFFF"/>
                 </a:solidFill>
-                <a:latin typeface="Segoe UI"/>
-                <a:cs typeface="Segoe UI"/>
+                <a:latin typeface="Arial"/>
+                <a:cs typeface="Arial"/>
               </a:rPr>
               <a:t>Đã biết, chưa biết, mục tiêu. Mục tiêu khớp với kết cục chính.</a:t>
             </a:r>
@@ -24087,7 +23865,7 @@
                     <a:lumMod val="50000"/>
                   </a:schemeClr>
                 </a:solidFill>
-                <a:latin typeface="Verdana"/>
+                <a:latin typeface="Arial"/>
               </a:rPr>
               <a:t>Neudata | #ClearDataClearImpact</a:t>
             </a:r>
@@ -24217,8 +23995,8 @@
                 <a:solidFill>
                   <a:srgbClr val="0D7377"/>
                 </a:solidFill>
-                <a:latin typeface="Segoe UI"/>
-                <a:cs typeface="Segoe UI"/>
+                <a:latin typeface="Arial"/>
+                <a:cs typeface="Arial"/>
               </a:rPr>
               <a:t>Cách chấm điểm phần trình bày</a:t>
             </a:r>
@@ -24286,7 +24064,7 @@
                           <a:solidFill>
                             <a:srgbClr val="FFFFFF"/>
                           </a:solidFill>
-                          <a:latin typeface="Segoe UI"/>
+                          <a:latin typeface="Arial"/>
                         </a:rPr>
                         <a:t>Tiêu chí</a:t>
                       </a:r>
@@ -24309,7 +24087,7 @@
                           <a:solidFill>
                             <a:srgbClr val="FFFFFF"/>
                           </a:solidFill>
-                          <a:latin typeface="Segoe UI"/>
+                          <a:latin typeface="Arial"/>
                         </a:rPr>
                         <a:t>Điều chúng tôi tìm</a:t>
                       </a:r>
@@ -24332,7 +24110,7 @@
                           <a:solidFill>
                             <a:srgbClr val="FFFFFF"/>
                           </a:solidFill>
-                          <a:latin typeface="Segoe UI"/>
+                          <a:latin typeface="Arial"/>
                         </a:rPr>
                         <a:t>Điểm</a:t>
                       </a:r>
@@ -24357,7 +24135,7 @@
                           <a:solidFill>
                             <a:srgbClr val="000000"/>
                           </a:solidFill>
-                          <a:latin typeface="Segoe UI"/>
+                          <a:latin typeface="Arial"/>
                         </a:rPr>
                         <a:t>12  Cấu trúc &amp; nội dung</a:t>
                       </a:r>
@@ -24380,7 +24158,7 @@
                           <a:solidFill>
                             <a:srgbClr val="000000"/>
                           </a:solidFill>
-                          <a:latin typeface="Segoe UI"/>
+                          <a:latin typeface="Arial"/>
                         </a:rPr>
                         <a:t>Đủ 6 slide; thấy rõ câu hỏi, thiết kế, kết cục, cỡ mẫu, đạo đức, tạp chí + hướng dẫn</a:t>
                       </a:r>
@@ -24403,7 +24181,7 @@
                           <a:solidFill>
                             <a:srgbClr val="000000"/>
                           </a:solidFill>
-                          <a:latin typeface="Segoe UI"/>
+                          <a:latin typeface="Arial"/>
                         </a:rPr>
                         <a:t>0-6</a:t>
                       </a:r>
@@ -24428,7 +24206,7 @@
                           <a:solidFill>
                             <a:srgbClr val="000000"/>
                           </a:solidFill>
-                          <a:latin typeface="Segoe UI"/>
+                          <a:latin typeface="Arial"/>
                         </a:rPr>
                         <a:t>13  Rõ ràng</a:t>
                       </a:r>
@@ -24451,7 +24229,7 @@
                           <a:solidFill>
                             <a:srgbClr val="000000"/>
                           </a:solidFill>
-                          <a:latin typeface="Segoe UI"/>
+                          <a:latin typeface="Arial"/>
                         </a:rPr>
                         <a:t>Mọi ngành nghề đều hiểu; mỗi slide một thông điệp</a:t>
                       </a:r>
@@ -24474,7 +24252,7 @@
                           <a:solidFill>
                             <a:srgbClr val="000000"/>
                           </a:solidFill>
-                          <a:latin typeface="Segoe UI"/>
+                          <a:latin typeface="Arial"/>
                         </a:rPr>
                         <a:t>0-6</a:t>
                       </a:r>
@@ -24499,7 +24277,7 @@
                           <a:solidFill>
                             <a:srgbClr val="000000"/>
                           </a:solidFill>
-                          <a:latin typeface="Segoe UI"/>
+                          <a:latin typeface="Arial"/>
                         </a:rPr>
                         <a:t>14  Hình thức slide</a:t>
                       </a:r>
@@ -24522,7 +24300,7 @@
                           <a:solidFill>
                             <a:srgbClr val="000000"/>
                           </a:solidFill>
-                          <a:latin typeface="Segoe UI"/>
+                          <a:latin typeface="Arial"/>
                         </a:rPr>
                         <a:t>Đọc được từ cuối phòng; hình ảnh thay cho khối chữ</a:t>
                       </a:r>
@@ -24545,7 +24323,7 @@
                           <a:solidFill>
                             <a:srgbClr val="000000"/>
                           </a:solidFill>
-                          <a:latin typeface="Segoe UI"/>
+                          <a:latin typeface="Arial"/>
                         </a:rPr>
                         <a:t>0-6</a:t>
                       </a:r>
@@ -24570,7 +24348,7 @@
                           <a:solidFill>
                             <a:srgbClr val="000000"/>
                           </a:solidFill>
-                          <a:latin typeface="Segoe UI"/>
+                          <a:latin typeface="Arial"/>
                         </a:rPr>
                         <a:t>15  Thời gian</a:t>
                       </a:r>
@@ -24593,7 +24371,7 @@
                           <a:solidFill>
                             <a:srgbClr val="000000"/>
                           </a:solidFill>
-                          <a:latin typeface="Segoe UI"/>
+                          <a:latin typeface="Arial"/>
                         </a:rPr>
                         <a:t>Kết thúc trong khoảng 5:00 đến 6:00</a:t>
                       </a:r>
@@ -24616,7 +24394,7 @@
                           <a:solidFill>
                             <a:srgbClr val="000000"/>
                           </a:solidFill>
-                          <a:latin typeface="Segoe UI"/>
+                          <a:latin typeface="Arial"/>
                         </a:rPr>
                         <a:t>0-6</a:t>
                       </a:r>
@@ -24641,7 +24419,7 @@
                           <a:solidFill>
                             <a:srgbClr val="000000"/>
                           </a:solidFill>
-                          <a:latin typeface="Segoe UI"/>
+                          <a:latin typeface="Arial"/>
                         </a:rPr>
                         <a:t>16  Trả lời &amp; làm việc nhóm</a:t>
                       </a:r>
@@ -24664,7 +24442,7 @@
                           <a:solidFill>
                             <a:srgbClr val="000000"/>
                           </a:solidFill>
-                          <a:latin typeface="Segoe UI"/>
+                          <a:latin typeface="Arial"/>
                         </a:rPr>
                         <a:t>Trả lời thẳng, trung thực; nhiều thành viên tham gia</a:t>
                       </a:r>
@@ -24687,7 +24465,7 @@
                           <a:solidFill>
                             <a:srgbClr val="000000"/>
                           </a:solidFill>
-                          <a:latin typeface="Segoe UI"/>
+                          <a:latin typeface="Arial"/>
                         </a:rPr>
                         <a:t>0-6</a:t>
                       </a:r>
@@ -24735,8 +24513,8 @@
                 <a:solidFill>
                   <a:srgbClr val="595959"/>
                 </a:solidFill>
-                <a:latin typeface="Segoe UI"/>
-                <a:cs typeface="Segoe UI"/>
+                <a:latin typeface="Arial"/>
+                <a:cs typeface="Arial"/>
               </a:rPr>
               <a:t>6 xuất sắc, 4 tốt, 2 cần cải thiện, 0 chưa có = trình bày /30.  Đề cương viết + kế hoạch công bố /70 chấm sau khóa học.</a:t>
             </a:r>
@@ -24773,7 +24551,7 @@
                     <a:lumMod val="50000"/>
                   </a:schemeClr>
                 </a:solidFill>
-                <a:latin typeface="Verdana"/>
+                <a:latin typeface="Arial"/>
               </a:rPr>
               <a:t>Neudata | #ClearDataClearImpact</a:t>
             </a:r>
@@ -24903,8 +24681,8 @@
                 <a:solidFill>
                   <a:srgbClr val="0D7377"/>
                 </a:solidFill>
-                <a:latin typeface="Segoe UI"/>
-                <a:cs typeface="Segoe UI"/>
+                <a:latin typeface="Arial"/>
+                <a:cs typeface="Arial"/>
               </a:rPr>
               <a:t>Thứ tự trình bày và bấm giờ</a:t>
             </a:r>
@@ -25000,8 +24778,8 @@
                 <a:solidFill>
                   <a:srgbClr val="FFFFFF"/>
                 </a:solidFill>
-                <a:latin typeface="Segoe UI"/>
-                <a:cs typeface="Segoe UI"/>
+                <a:latin typeface="Arial"/>
+                <a:cs typeface="Arial"/>
               </a:rPr>
               <a:t>THÔNG ĐIỆP CHÍNH   </a:t>
             </a:r>
@@ -25010,8 +24788,8 @@
                 <a:solidFill>
                   <a:srgbClr val="FFFFFF"/>
                 </a:solidFill>
-                <a:latin typeface="Segoe UI"/>
-                <a:cs typeface="Segoe UI"/>
+                <a:latin typeface="Arial"/>
+                <a:cs typeface="Arial"/>
               </a:rPr>
               <a:t>Khi thẻ đỏ giơ lên, hãy nói hết câu và dừng.</a:t>
             </a:r>
@@ -25048,7 +24826,7 @@
                     <a:lumMod val="50000"/>
                   </a:schemeClr>
                 </a:solidFill>
-                <a:latin typeface="Verdana"/>
+                <a:latin typeface="Arial"/>
               </a:rPr>
               <a:t>Neudata | #ClearDataClearImpact</a:t>
             </a:r>
@@ -25178,8 +24956,8 @@
                 <a:solidFill>
                   <a:srgbClr val="0D7377"/>
                 </a:solidFill>
-                <a:latin typeface="Segoe UI"/>
-                <a:cs typeface="Segoe UI"/>
+                <a:latin typeface="Arial"/>
+                <a:cs typeface="Arial"/>
               </a:rPr>
               <a:t>Các nhóm trình bày đề cương</a:t>
             </a:r>
@@ -25249,8 +25027,8 @@
                 <a:solidFill>
                   <a:srgbClr val="FFFFFF"/>
                 </a:solidFill>
-                <a:latin typeface="Segoe UI"/>
-                <a:cs typeface="Segoe UI"/>
+                <a:latin typeface="Arial"/>
+                <a:cs typeface="Arial"/>
               </a:rPr>
               <a:t>NHÓM TRÌNH BÀY   |   45 phút</a:t>
             </a:r>
@@ -25287,25 +25065,19 @@
               <a:spcBef>
                 <a:spcPts val="450"/>
               </a:spcBef>
-              <a:buNone/>
-            </a:pPr>
-            <a:r>
-              <a:rPr lang="en-US" sz="1650" b="1" dirty="0">
-                <a:solidFill>
-                  <a:srgbClr val="0070C0"/>
-                </a:solidFill>
-                <a:latin typeface="Segoe UI"/>
-                <a:cs typeface="Segoe UI"/>
-              </a:rPr>
-              <a:t>1.  </a:t>
-            </a:r>
+              <a:buClr>
+                <a:srgbClr val="0070C0"/>
+              </a:buClr>
+              <a:buFont typeface="Arial"/>
+              <a:buChar char="•"/>
+            </a:pPr>
             <a:r>
               <a:rPr lang="en-US" sz="1650" dirty="0">
                 <a:solidFill>
                   <a:srgbClr val="000000"/>
                 </a:solidFill>
-                <a:latin typeface="Segoe UI"/>
-                <a:cs typeface="Segoe UI"/>
+                <a:latin typeface="Arial"/>
+                <a:cs typeface="Arial"/>
               </a:rPr>
               <a:t>6 phút, 6 slide: câu hỏi, thiết kế, dữ liệu và phân tích, đạo đức và khả thi, kế hoạch công bố (tiêu đề, tạp chí, hướng dẫn, tóm tắt)</a:t>
             </a:r>
@@ -25318,25 +25090,19 @@
               <a:spcBef>
                 <a:spcPts val="450"/>
               </a:spcBef>
-              <a:buNone/>
-            </a:pPr>
-            <a:r>
-              <a:rPr lang="en-US" sz="1650" b="1" dirty="0">
-                <a:solidFill>
-                  <a:srgbClr val="0070C0"/>
-                </a:solidFill>
-                <a:latin typeface="Segoe UI"/>
-                <a:cs typeface="Segoe UI"/>
-              </a:rPr>
-              <a:t>2.  </a:t>
-            </a:r>
+              <a:buClr>
+                <a:srgbClr val="0070C0"/>
+              </a:buClr>
+              <a:buFont typeface="Arial"/>
+              <a:buChar char="•"/>
+            </a:pPr>
             <a:r>
               <a:rPr lang="en-US" sz="1650" dirty="0">
                 <a:solidFill>
                   <a:srgbClr val="000000"/>
                 </a:solidFill>
-                <a:latin typeface="Segoe UI"/>
-                <a:cs typeface="Segoe UI"/>
+                <a:latin typeface="Arial"/>
+                <a:cs typeface="Arial"/>
               </a:rPr>
               <a:t>Người bấm giờ: xanh lúc 4:00, vàng lúc 5:00, đỏ lúc 6:00</a:t>
             </a:r>
@@ -25349,25 +25115,19 @@
               <a:spcBef>
                 <a:spcPts val="450"/>
               </a:spcBef>
-              <a:buNone/>
-            </a:pPr>
-            <a:r>
-              <a:rPr lang="en-US" sz="1650" b="1" dirty="0">
-                <a:solidFill>
-                  <a:srgbClr val="0070C0"/>
-                </a:solidFill>
-                <a:latin typeface="Segoe UI"/>
-                <a:cs typeface="Segoe UI"/>
-              </a:rPr>
-              <a:t>3.  </a:t>
-            </a:r>
+              <a:buClr>
+                <a:srgbClr val="0070C0"/>
+              </a:buClr>
+              <a:buFont typeface="Arial"/>
+              <a:buChar char="•"/>
+            </a:pPr>
             <a:r>
               <a:rPr lang="en-US" sz="1650" dirty="0">
                 <a:solidFill>
                   <a:srgbClr val="000000"/>
                 </a:solidFill>
-                <a:latin typeface="Segoe UI"/>
-                <a:cs typeface="Segoe UI"/>
+                <a:latin typeface="Arial"/>
+                <a:cs typeface="Arial"/>
               </a:rPr>
               <a:t>Góp ý 2 phút: nhóm đồng đẳng (hai ngôi sao và một mong muốn), rồi giảng viên</a:t>
             </a:r>
@@ -25380,25 +25140,19 @@
               <a:spcBef>
                 <a:spcPts val="450"/>
               </a:spcBef>
-              <a:buNone/>
-            </a:pPr>
-            <a:r>
-              <a:rPr lang="en-US" sz="1650" b="1" dirty="0">
-                <a:solidFill>
-                  <a:srgbClr val="0070C0"/>
-                </a:solidFill>
-                <a:latin typeface="Segoe UI"/>
-                <a:cs typeface="Segoe UI"/>
-              </a:rPr>
-              <a:t>4.  </a:t>
-            </a:r>
+              <a:buClr>
+                <a:srgbClr val="0070C0"/>
+              </a:buClr>
+              <a:buFont typeface="Arial"/>
+              <a:buChar char="•"/>
+            </a:pPr>
             <a:r>
               <a:rPr lang="en-US" sz="1650" dirty="0">
                 <a:solidFill>
                   <a:srgbClr val="000000"/>
                 </a:solidFill>
-                <a:latin typeface="Segoe UI"/>
-                <a:cs typeface="Segoe UI"/>
+                <a:latin typeface="Arial"/>
+                <a:cs typeface="Arial"/>
               </a:rPr>
               <a:t>Nhóm đồng đẳng và giảng viên điền phiếu góp ý</a:t>
             </a:r>
@@ -25411,25 +25165,19 @@
               <a:spcBef>
                 <a:spcPts val="450"/>
               </a:spcBef>
-              <a:buNone/>
-            </a:pPr>
-            <a:r>
-              <a:rPr lang="en-US" sz="1650" b="1" dirty="0">
-                <a:solidFill>
-                  <a:srgbClr val="0070C0"/>
-                </a:solidFill>
-                <a:latin typeface="Segoe UI"/>
-                <a:cs typeface="Segoe UI"/>
-              </a:rPr>
-              <a:t>5.  </a:t>
-            </a:r>
+              <a:buClr>
+                <a:srgbClr val="0070C0"/>
+              </a:buClr>
+              <a:buFont typeface="Arial"/>
+              <a:buChar char="•"/>
+            </a:pPr>
             <a:r>
               <a:rPr lang="en-US" sz="1650" dirty="0">
                 <a:solidFill>
                   <a:srgbClr val="000000"/>
                 </a:solidFill>
-                <a:latin typeface="Segoe UI"/>
-                <a:cs typeface="Segoe UI"/>
+                <a:latin typeface="Arial"/>
+                <a:cs typeface="Arial"/>
               </a:rPr>
               <a:t>Nhóm tiếp theo chuẩn bị trong lúc góp ý</a:t>
             </a:r>
@@ -25473,8 +25221,8 @@
                 <a:solidFill>
                   <a:srgbClr val="0070C0"/>
                 </a:solidFill>
-                <a:latin typeface="Segoe UI"/>
-                <a:cs typeface="Segoe UI"/>
+                <a:latin typeface="Arial"/>
+                <a:cs typeface="Arial"/>
               </a:rPr>
               <a:t>Thứ tự</a:t>
             </a:r>
@@ -25495,8 +25243,8 @@
                 <a:solidFill>
                   <a:srgbClr val="000000"/>
                 </a:solidFill>
-                <a:latin typeface="Segoe UI"/>
-                <a:cs typeface="Segoe UI"/>
+                <a:latin typeface="Arial"/>
+                <a:cs typeface="Arial"/>
               </a:rPr>
               <a:t>2:00  Nhóm 1</a:t>
             </a:r>
@@ -25517,8 +25265,8 @@
                 <a:solidFill>
                   <a:srgbClr val="000000"/>
                 </a:solidFill>
-                <a:latin typeface="Segoe UI"/>
-                <a:cs typeface="Segoe UI"/>
+                <a:latin typeface="Arial"/>
+                <a:cs typeface="Arial"/>
               </a:rPr>
               <a:t>2:08  Nhóm 2</a:t>
             </a:r>
@@ -25539,8 +25287,8 @@
                 <a:solidFill>
                   <a:srgbClr val="000000"/>
                 </a:solidFill>
-                <a:latin typeface="Segoe UI"/>
-                <a:cs typeface="Segoe UI"/>
+                <a:latin typeface="Arial"/>
+                <a:cs typeface="Arial"/>
               </a:rPr>
               <a:t>2:16  Nhóm 3</a:t>
             </a:r>
@@ -25561,8 +25309,8 @@
                 <a:solidFill>
                   <a:srgbClr val="000000"/>
                 </a:solidFill>
-                <a:latin typeface="Segoe UI"/>
-                <a:cs typeface="Segoe UI"/>
+                <a:latin typeface="Arial"/>
+                <a:cs typeface="Arial"/>
               </a:rPr>
               <a:t>2:24  Nhóm 4</a:t>
             </a:r>
@@ -25583,8 +25331,8 @@
                 <a:solidFill>
                   <a:srgbClr val="000000"/>
                 </a:solidFill>
-                <a:latin typeface="Segoe UI"/>
-                <a:cs typeface="Segoe UI"/>
+                <a:latin typeface="Arial"/>
+                <a:cs typeface="Arial"/>
               </a:rPr>
               <a:t>2:32  Nhóm 5</a:t>
             </a:r>
@@ -25605,8 +25353,8 @@
                 <a:solidFill>
                   <a:srgbClr val="000000"/>
                 </a:solidFill>
-                <a:latin typeface="Segoe UI"/>
-                <a:cs typeface="Segoe UI"/>
+                <a:latin typeface="Arial"/>
+                <a:cs typeface="Arial"/>
               </a:rPr>
               <a:t>2:40  Tóm tắt bản thảo</a:t>
             </a:r>
@@ -25652,8 +25400,8 @@
                 <a:solidFill>
                   <a:srgbClr val="0070C0"/>
                 </a:solidFill>
-                <a:latin typeface="Segoe UI"/>
-                <a:cs typeface="Segoe UI"/>
+                <a:latin typeface="Arial"/>
+                <a:cs typeface="Arial"/>
               </a:rPr>
               <a:t>SẢN PHẨM   </a:t>
             </a:r>
@@ -25662,8 +25410,8 @@
                 <a:solidFill>
                   <a:srgbClr val="000000"/>
                 </a:solidFill>
-                <a:latin typeface="Segoe UI"/>
-                <a:cs typeface="Segoe UI"/>
+                <a:latin typeface="Arial"/>
+                <a:cs typeface="Arial"/>
               </a:rPr>
               <a:t>Năm đề cương và kế hoạch công bố đã trình bày; phiếu góp ý nộp cho giảng viên</a:t>
             </a:r>
@@ -25700,7 +25448,7 @@
                     <a:lumMod val="50000"/>
                   </a:schemeClr>
                 </a:solidFill>
-                <a:latin typeface="Verdana"/>
+                <a:latin typeface="Arial"/>
               </a:rPr>
               <a:t>Neudata | #ClearDataClearImpact</a:t>
             </a:r>
@@ -25830,8 +25578,8 @@
                 <a:solidFill>
                   <a:srgbClr val="0D7377"/>
                 </a:solidFill>
-                <a:latin typeface="Segoe UI"/>
-                <a:cs typeface="Segoe UI"/>
+                <a:latin typeface="Arial"/>
+                <a:cs typeface="Arial"/>
               </a:rPr>
               <a:t>Slide bổ sung  |  Buổi 8</a:t>
             </a:r>
@@ -25900,8 +25648,8 @@
                 <a:solidFill>
                   <a:srgbClr val="0D7377"/>
                 </a:solidFill>
-                <a:latin typeface="Segoe UI"/>
-                <a:cs typeface="Segoe UI"/>
+                <a:latin typeface="Arial"/>
+                <a:cs typeface="Arial"/>
               </a:rPr>
               <a:t>Slide bổ sung: Buổi 8</a:t>
             </a:r>
@@ -25918,8 +25666,8 @@
                 <a:solidFill>
                   <a:srgbClr val="595959"/>
                 </a:solidFill>
-                <a:latin typeface="Segoe UI"/>
-                <a:cs typeface="Segoe UI"/>
+                <a:latin typeface="Arial"/>
+                <a:cs typeface="Arial"/>
               </a:rPr>
               <a:t>Chỉ dùng khi còn thời gian, hoặc để tự học</a:t>
             </a:r>
@@ -25956,7 +25704,7 @@
                     <a:lumMod val="50000"/>
                   </a:schemeClr>
                 </a:solidFill>
-                <a:latin typeface="Verdana"/>
+                <a:latin typeface="Arial"/>
               </a:rPr>
               <a:t>Neudata | #ClearDataClearImpact</a:t>
             </a:r>
@@ -26086,8 +25834,8 @@
                 <a:solidFill>
                   <a:srgbClr val="0D7377"/>
                 </a:solidFill>
-                <a:latin typeface="Segoe UI"/>
-                <a:cs typeface="Segoe UI"/>
+                <a:latin typeface="Arial"/>
+                <a:cs typeface="Arial"/>
               </a:rPr>
               <a:t>Viết cho đúng: sửa câu 'tô vẽ', rồi soạn tiêu đề</a:t>
             </a:r>
@@ -26157,8 +25905,8 @@
                 <a:solidFill>
                   <a:srgbClr val="FFFFFF"/>
                 </a:solidFill>
-                <a:latin typeface="Segoe UI"/>
-                <a:cs typeface="Segoe UI"/>
+                <a:latin typeface="Arial"/>
+                <a:cs typeface="Arial"/>
               </a:rPr>
               <a:t>BÀI TẬP CÁ NHÂN   |   6 phút</a:t>
             </a:r>
@@ -26195,25 +25943,19 @@
               <a:spcBef>
                 <a:spcPts val="450"/>
               </a:spcBef>
-              <a:buNone/>
-            </a:pPr>
-            <a:r>
-              <a:rPr lang="en-US" sz="1650" b="1" dirty="0">
-                <a:solidFill>
-                  <a:srgbClr val="0B376C"/>
-                </a:solidFill>
-                <a:latin typeface="Segoe UI"/>
-                <a:cs typeface="Segoe UI"/>
-              </a:rPr>
-              <a:t>1.  </a:t>
-            </a:r>
+              <a:buClr>
+                <a:srgbClr val="0B376C"/>
+              </a:buClr>
+              <a:buFont typeface="Arial"/>
+              <a:buChar char="•"/>
+            </a:pPr>
             <a:r>
               <a:rPr lang="en-US" sz="1650" dirty="0">
                 <a:solidFill>
                   <a:srgbClr val="000000"/>
                 </a:solidFill>
-                <a:latin typeface="Segoe UI"/>
-                <a:cs typeface="Segoe UI"/>
+                <a:latin typeface="Arial"/>
+                <a:cs typeface="Arial"/>
               </a:rPr>
               <a:t>Cá nhân (2 phút): viết lại trung thực câu 'xu hướng không có ý nghĩa' của Bài 1</a:t>
             </a:r>
@@ -26226,25 +25968,19 @@
               <a:spcBef>
                 <a:spcPts val="450"/>
               </a:spcBef>
-              <a:buNone/>
-            </a:pPr>
-            <a:r>
-              <a:rPr lang="en-US" sz="1650" b="1" dirty="0">
-                <a:solidFill>
-                  <a:srgbClr val="0B376C"/>
-                </a:solidFill>
-                <a:latin typeface="Segoe UI"/>
-                <a:cs typeface="Segoe UI"/>
-              </a:rPr>
-              <a:t>2.  </a:t>
-            </a:r>
+              <a:buClr>
+                <a:srgbClr val="0B376C"/>
+              </a:buClr>
+              <a:buFont typeface="Arial"/>
+              <a:buChar char="•"/>
+            </a:pPr>
             <a:r>
               <a:rPr lang="en-US" sz="1650" dirty="0">
                 <a:solidFill>
                   <a:srgbClr val="000000"/>
                 </a:solidFill>
-                <a:latin typeface="Segoe UI"/>
-                <a:cs typeface="Segoe UI"/>
+                <a:latin typeface="Arial"/>
+                <a:cs typeface="Arial"/>
               </a:rPr>
               <a:t>Cá nhân: viết lại tiêu đề Bài 2 với lời văn tương xứng</a:t>
             </a:r>
@@ -26257,25 +25993,19 @@
               <a:spcBef>
                 <a:spcPts val="450"/>
               </a:spcBef>
-              <a:buNone/>
-            </a:pPr>
-            <a:r>
-              <a:rPr lang="en-US" sz="1650" b="1" dirty="0">
-                <a:solidFill>
-                  <a:srgbClr val="0B376C"/>
-                </a:solidFill>
-                <a:latin typeface="Segoe UI"/>
-                <a:cs typeface="Segoe UI"/>
-              </a:rPr>
-              <a:t>3.  </a:t>
-            </a:r>
+              <a:buClr>
+                <a:srgbClr val="0B376C"/>
+              </a:buClr>
+              <a:buFont typeface="Arial"/>
+              <a:buChar char="•"/>
+            </a:pPr>
             <a:r>
               <a:rPr lang="en-US" sz="1650" dirty="0">
                 <a:solidFill>
                   <a:srgbClr val="000000"/>
                 </a:solidFill>
-                <a:latin typeface="Segoe UI"/>
-                <a:cs typeface="Segoe UI"/>
+                <a:latin typeface="Arial"/>
+                <a:cs typeface="Arial"/>
               </a:rPr>
               <a:t>Nhóm (4 phút): soạn tiêu đề tạm từ PICO của nhóm</a:t>
             </a:r>
@@ -26288,25 +26018,19 @@
               <a:spcBef>
                 <a:spcPts val="450"/>
               </a:spcBef>
-              <a:buNone/>
-            </a:pPr>
-            <a:r>
-              <a:rPr lang="en-US" sz="1650" b="1" dirty="0">
-                <a:solidFill>
-                  <a:srgbClr val="0B376C"/>
-                </a:solidFill>
-                <a:latin typeface="Segoe UI"/>
-                <a:cs typeface="Segoe UI"/>
-              </a:rPr>
-              <a:t>4.  </a:t>
-            </a:r>
+              <a:buClr>
+                <a:srgbClr val="0B376C"/>
+              </a:buClr>
+              <a:buFont typeface="Arial"/>
+              <a:buChar char="•"/>
+            </a:pPr>
             <a:r>
               <a:rPr lang="en-US" sz="1650" dirty="0">
                 <a:solidFill>
                   <a:srgbClr val="000000"/>
                 </a:solidFill>
-                <a:latin typeface="Segoe UI"/>
-                <a:cs typeface="Segoe UI"/>
+                <a:latin typeface="Arial"/>
+                <a:cs typeface="Arial"/>
               </a:rPr>
               <a:t>Nhóm: mỗi phần một dòng (Đặt vấn đề, Phương pháp, Kết quả dự kiến, Kết luận)</a:t>
             </a:r>
@@ -26350,8 +26074,8 @@
                 <a:solidFill>
                   <a:srgbClr val="0B376C"/>
                 </a:solidFill>
-                <a:latin typeface="Segoe UI"/>
-                <a:cs typeface="Segoe UI"/>
+                <a:latin typeface="Arial"/>
+                <a:cs typeface="Arial"/>
               </a:rPr>
               <a:t>Kế hoạch công bố (Phần 4)</a:t>
             </a:r>
@@ -26372,8 +26096,8 @@
                 <a:solidFill>
                   <a:srgbClr val="000000"/>
                 </a:solidFill>
-                <a:latin typeface="Segoe UI"/>
-                <a:cs typeface="Segoe UI"/>
+                <a:latin typeface="Arial"/>
+                <a:cs typeface="Arial"/>
               </a:rPr>
               <a:t>Tiêu đề tạm</a:t>
             </a:r>
@@ -26394,8 +26118,8 @@
                 <a:solidFill>
                   <a:srgbClr val="000000"/>
                 </a:solidFill>
-                <a:latin typeface="Segoe UI"/>
-                <a:cs typeface="Segoe UI"/>
+                <a:latin typeface="Arial"/>
+                <a:cs typeface="Arial"/>
               </a:rPr>
               <a:t>Khung tóm tắt</a:t>
             </a:r>
@@ -26416,8 +26140,8 @@
                 <a:solidFill>
                   <a:srgbClr val="000000"/>
                 </a:solidFill>
-                <a:latin typeface="Segoe UI"/>
-                <a:cs typeface="Segoe UI"/>
+                <a:latin typeface="Arial"/>
+                <a:cs typeface="Arial"/>
               </a:rPr>
               <a:t>Tác giả + vai trò CRediT</a:t>
             </a:r>
@@ -26438,8 +26162,8 @@
                 <a:solidFill>
                   <a:srgbClr val="000000"/>
                 </a:solidFill>
-                <a:latin typeface="Segoe UI"/>
-                <a:cs typeface="Segoe UI"/>
+                <a:latin typeface="Arial"/>
+                <a:cs typeface="Arial"/>
               </a:rPr>
               <a:t>Tạp chí + hướng dẫn (8.2)</a:t>
             </a:r>
@@ -26485,8 +26209,8 @@
                 <a:solidFill>
                   <a:srgbClr val="0B376C"/>
                 </a:solidFill>
-                <a:latin typeface="Segoe UI"/>
-                <a:cs typeface="Segoe UI"/>
+                <a:latin typeface="Arial"/>
+                <a:cs typeface="Arial"/>
               </a:rPr>
               <a:t>SẢN PHẨM   </a:t>
             </a:r>
@@ -26495,8 +26219,8 @@
                 <a:solidFill>
                   <a:srgbClr val="000000"/>
                 </a:solidFill>
-                <a:latin typeface="Segoe UI"/>
-                <a:cs typeface="Segoe UI"/>
+                <a:latin typeface="Arial"/>
+                <a:cs typeface="Arial"/>
               </a:rPr>
               <a:t>Tiêu đề tạm + khung tóm tắt để đưa vào bài trình bày</a:t>
             </a:r>
@@ -26533,7 +26257,7 @@
                     <a:lumMod val="50000"/>
                   </a:schemeClr>
                 </a:solidFill>
-                <a:latin typeface="Verdana"/>
+                <a:latin typeface="Arial"/>
               </a:rPr>
               <a:t>Neudata | #ClearDataClearImpact</a:t>
             </a:r>
@@ -26663,8 +26387,8 @@
                 <a:solidFill>
                   <a:srgbClr val="0D7377"/>
                 </a:solidFill>
-                <a:latin typeface="Segoe UI"/>
-                <a:cs typeface="Segoe UI"/>
+                <a:latin typeface="Arial"/>
+                <a:cs typeface="Arial"/>
               </a:rPr>
               <a:t>Bị từ chối? Nộp lại thông minh hơn</a:t>
             </a:r>
@@ -26730,8 +26454,8 @@
                 <a:solidFill>
                   <a:srgbClr val="595959"/>
                 </a:solidFill>
-                <a:latin typeface="Segoe UI"/>
-                <a:cs typeface="Segoe UI"/>
+                <a:latin typeface="Arial"/>
+                <a:cs typeface="Arial"/>
               </a:rPr>
               <a:t>Bị từ chối là bình thường: đa số bài báo bị từ chối ít nhất một lần.</a:t>
             </a:r>
@@ -26773,8 +26497,8 @@
                 <a:solidFill>
                   <a:srgbClr val="FFFFFF"/>
                 </a:solidFill>
-                <a:latin typeface="Segoe UI"/>
-                <a:cs typeface="Segoe UI"/>
+                <a:latin typeface="Arial"/>
+                <a:cs typeface="Arial"/>
               </a:rPr>
               <a:t>Từ chối ngay</a:t>
             </a:r>
@@ -26822,8 +26546,8 @@
                 <a:solidFill>
                   <a:srgbClr val="000000"/>
                 </a:solidFill>
-                <a:latin typeface="Segoe UI"/>
-                <a:cs typeface="Segoe UI"/>
+                <a:latin typeface="Arial"/>
+                <a:cs typeface="Arial"/>
               </a:rPr>
               <a:t>Ngoài phạm vi hoặc báo cáo kém</a:t>
             </a:r>
@@ -26843,8 +26567,8 @@
                 <a:solidFill>
                   <a:srgbClr val="000000"/>
                 </a:solidFill>
-                <a:latin typeface="Segoe UI"/>
-                <a:cs typeface="Segoe UI"/>
+                <a:latin typeface="Arial"/>
+                <a:cs typeface="Arial"/>
               </a:rPr>
               <a:t>Thường trong vài ngày</a:t>
             </a:r>
@@ -26864,8 +26588,8 @@
                 <a:solidFill>
                   <a:srgbClr val="000000"/>
                 </a:solidFill>
-                <a:latin typeface="Segoe UI"/>
-                <a:cs typeface="Segoe UI"/>
+                <a:latin typeface="Arial"/>
+                <a:cs typeface="Arial"/>
               </a:rPr>
               <a:t>Chọn lại tạp chí</a:t>
             </a:r>
@@ -26907,8 +26631,8 @@
                 <a:solidFill>
                   <a:srgbClr val="FFFFFF"/>
                 </a:solidFill>
-                <a:latin typeface="Segoe UI"/>
-                <a:cs typeface="Segoe UI"/>
+                <a:latin typeface="Arial"/>
+                <a:cs typeface="Arial"/>
               </a:rPr>
               <a:t>Sau phản biện</a:t>
             </a:r>
@@ -26956,8 +26680,8 @@
                 <a:solidFill>
                   <a:srgbClr val="000000"/>
                 </a:solidFill>
-                <a:latin typeface="Segoe UI"/>
-                <a:cs typeface="Segoe UI"/>
+                <a:latin typeface="Arial"/>
+                <a:cs typeface="Arial"/>
               </a:rPr>
               <a:t>Đọc nhận xét, chờ một ngày</a:t>
             </a:r>
@@ -26977,8 +26701,8 @@
                 <a:solidFill>
                   <a:srgbClr val="000000"/>
                 </a:solidFill>
-                <a:latin typeface="Segoe UI"/>
-                <a:cs typeface="Segoe UI"/>
+                <a:latin typeface="Arial"/>
+                <a:cs typeface="Arial"/>
               </a:rPr>
               <a:t>Sửa những gì họ phát hiện</a:t>
             </a:r>
@@ -26998,8 +26722,8 @@
                 <a:solidFill>
                   <a:srgbClr val="000000"/>
                 </a:solidFill>
-                <a:latin typeface="Segoe UI"/>
-                <a:cs typeface="Segoe UI"/>
+                <a:latin typeface="Arial"/>
+                <a:cs typeface="Arial"/>
               </a:rPr>
               <a:t>Không nộp lại nguyên bản</a:t>
             </a:r>
@@ -27041,8 +26765,8 @@
                 <a:solidFill>
                   <a:srgbClr val="FFFFFF"/>
                 </a:solidFill>
-                <a:latin typeface="Segoe UI"/>
-                <a:cs typeface="Segoe UI"/>
+                <a:latin typeface="Arial"/>
+                <a:cs typeface="Arial"/>
               </a:rPr>
               <a:t>Tạp chí tiếp theo</a:t>
             </a:r>
@@ -27090,8 +26814,8 @@
                 <a:solidFill>
                   <a:srgbClr val="000000"/>
                 </a:solidFill>
-                <a:latin typeface="Segoe UI"/>
-                <a:cs typeface="Segoe UI"/>
+                <a:latin typeface="Arial"/>
+                <a:cs typeface="Arial"/>
               </a:rPr>
               <a:t>Định dạng theo Hướng dẫn mới</a:t>
             </a:r>
@@ -27111,8 +26835,8 @@
                 <a:solidFill>
                   <a:srgbClr val="000000"/>
                 </a:solidFill>
-                <a:latin typeface="Segoe UI"/>
-                <a:cs typeface="Segoe UI"/>
+                <a:latin typeface="Arial"/>
+                <a:cs typeface="Arial"/>
               </a:rPr>
               <a:t>Dùng đề nghị chuyển bài nếu có</a:t>
             </a:r>
@@ -27132,8 +26856,8 @@
                 <a:solidFill>
                   <a:srgbClr val="000000"/>
                 </a:solidFill>
-                <a:latin typeface="Segoe UI"/>
-                <a:cs typeface="Segoe UI"/>
+                <a:latin typeface="Arial"/>
+                <a:cs typeface="Arial"/>
               </a:rPr>
               <a:t>Chỉ khiếu nại khi có lỗi rõ ràng</a:t>
             </a:r>
@@ -27177,8 +26901,8 @@
                 <a:solidFill>
                   <a:srgbClr val="FFFFFF"/>
                 </a:solidFill>
-                <a:latin typeface="Segoe UI"/>
-                <a:cs typeface="Segoe UI"/>
+                <a:latin typeface="Arial"/>
+                <a:cs typeface="Arial"/>
               </a:rPr>
               <a:t>THÔNG ĐIỆP CHÍNH   </a:t>
             </a:r>
@@ -27187,8 +26911,8 @@
                 <a:solidFill>
                   <a:srgbClr val="FFFFFF"/>
                 </a:solidFill>
-                <a:latin typeface="Segoe UI"/>
-                <a:cs typeface="Segoe UI"/>
+                <a:latin typeface="Arial"/>
+                <a:cs typeface="Arial"/>
               </a:rPr>
               <a:t>Người phản biện tiếp theo có thể vẫn là người cũ. Hãy sửa lỗi trước.</a:t>
             </a:r>
@@ -27225,7 +26949,7 @@
                     <a:lumMod val="50000"/>
                   </a:schemeClr>
                 </a:solidFill>
-                <a:latin typeface="Verdana"/>
+                <a:latin typeface="Arial"/>
               </a:rPr>
               <a:t>Neudata | #ClearDataClearImpact</a:t>
             </a:r>
@@ -27355,8 +27079,8 @@
                 <a:solidFill>
                   <a:srgbClr val="0D7377"/>
                 </a:solidFill>
-                <a:latin typeface="Segoe UI"/>
-                <a:cs typeface="Segoe UI"/>
+                <a:latin typeface="Arial"/>
+                <a:cs typeface="Arial"/>
               </a:rPr>
               <a:t>Tóm tắt hội nghị và áp phích</a:t>
             </a:r>
@@ -27452,8 +27176,8 @@
                 <a:solidFill>
                   <a:srgbClr val="FFFFFF"/>
                 </a:solidFill>
-                <a:latin typeface="Segoe UI"/>
-                <a:cs typeface="Segoe UI"/>
+                <a:latin typeface="Arial"/>
+                <a:cs typeface="Arial"/>
               </a:rPr>
               <a:t>THÔNG ĐIỆP CHÍNH   </a:t>
             </a:r>
@@ -27462,8 +27186,8 @@
                 <a:solidFill>
                   <a:srgbClr val="FFFFFF"/>
                 </a:solidFill>
-                <a:latin typeface="Segoe UI"/>
-                <a:cs typeface="Segoe UI"/>
+                <a:latin typeface="Arial"/>
+                <a:cs typeface="Arial"/>
               </a:rPr>
               <a:t>Áp phích là bảng quảng cáo: một thông điệp, một hình, đọc được từ 2 mét.</a:t>
             </a:r>
@@ -27500,7 +27224,7 @@
                     <a:lumMod val="50000"/>
                   </a:schemeClr>
                 </a:solidFill>
-                <a:latin typeface="Verdana"/>
+                <a:latin typeface="Arial"/>
               </a:rPr>
               <a:t>Neudata | #ClearDataClearImpact</a:t>
             </a:r>
@@ -27630,8 +27354,8 @@
                 <a:solidFill>
                   <a:srgbClr val="0D7377"/>
                 </a:solidFill>
-                <a:latin typeface="Segoe UI"/>
-                <a:cs typeface="Segoe UI"/>
+                <a:latin typeface="Arial"/>
+                <a:cs typeface="Arial"/>
               </a:rPr>
               <a:t>Kết thúc: những gì bạn đã xây dựng và bước tiếp theo</a:t>
             </a:r>
@@ -27698,8 +27422,8 @@
                 <a:solidFill>
                   <a:srgbClr val="0070C0"/>
                 </a:solidFill>
-                <a:latin typeface="Segoe UI"/>
-                <a:cs typeface="Segoe UI"/>
+                <a:latin typeface="Arial"/>
+                <a:cs typeface="Arial"/>
               </a:rPr>
               <a:t>Nội dung</a:t>
             </a:r>
@@ -27723,8 +27447,8 @@
                 <a:solidFill>
                   <a:srgbClr val="000000"/>
                 </a:solidFill>
-                <a:latin typeface="Segoe UI"/>
-                <a:cs typeface="Segoe UI"/>
+                <a:latin typeface="Arial"/>
+                <a:cs typeface="Arial"/>
               </a:rPr>
               <a:t>Bài kiểm tra cuối khóa (cùng 24 câu)</a:t>
             </a:r>
@@ -27742,8 +27466,8 @@
                 <a:solidFill>
                   <a:srgbClr val="000000"/>
                 </a:solidFill>
-                <a:latin typeface="Segoe UI"/>
-                <a:cs typeface="Segoe UI"/>
+                <a:latin typeface="Arial"/>
+                <a:cs typeface="Arial"/>
               </a:rPr>
               <a:t>Những gì bạn đã xây dựng trong tám buổi</a:t>
             </a:r>
@@ -27761,8 +27485,8 @@
                 <a:solidFill>
                   <a:srgbClr val="000000"/>
                 </a:solidFill>
-                <a:latin typeface="Segoe UI"/>
-                <a:cs typeface="Segoe UI"/>
+                <a:latin typeface="Arial"/>
+                <a:cs typeface="Arial"/>
               </a:rPr>
               <a:t>Đánh giá khóa học</a:t>
             </a:r>
@@ -27780,8 +27504,8 @@
                 <a:solidFill>
                   <a:srgbClr val="000000"/>
                 </a:solidFill>
-                <a:latin typeface="Segoe UI"/>
-                <a:cs typeface="Segoe UI"/>
+                <a:latin typeface="Arial"/>
+                <a:cs typeface="Arial"/>
               </a:rPr>
               <a:t>Sau khóa học: phản biện chéo các bản thảo</a:t>
             </a:r>
@@ -27799,8 +27523,8 @@
                 <a:solidFill>
                   <a:srgbClr val="000000"/>
                 </a:solidFill>
-                <a:latin typeface="Segoe UI"/>
-                <a:cs typeface="Segoe UI"/>
+                <a:latin typeface="Arial"/>
+                <a:cs typeface="Arial"/>
               </a:rPr>
               <a:t>Bước tiếp theo</a:t>
             </a:r>
@@ -27837,7 +27561,7 @@
                     <a:lumMod val="50000"/>
                   </a:schemeClr>
                 </a:solidFill>
-                <a:latin typeface="Verdana"/>
+                <a:latin typeface="Arial"/>
               </a:rPr>
               <a:t>Neudata | #ClearDataClearImpact</a:t>
             </a:r>
@@ -27967,8 +27691,8 @@
                 <a:solidFill>
                   <a:srgbClr val="0D7377"/>
                 </a:solidFill>
-                <a:latin typeface="Segoe UI"/>
-                <a:cs typeface="Segoe UI"/>
+                <a:latin typeface="Arial"/>
+                <a:cs typeface="Arial"/>
               </a:rPr>
               <a:t>Bài kiểm tra cuối khóa</a:t>
             </a:r>
@@ -28038,8 +27762,8 @@
                 <a:solidFill>
                   <a:srgbClr val="FFFFFF"/>
                 </a:solidFill>
-                <a:latin typeface="Segoe UI"/>
-                <a:cs typeface="Segoe UI"/>
+                <a:latin typeface="Arial"/>
+                <a:cs typeface="Arial"/>
               </a:rPr>
               <a:t>CÂU HỎI NHANH   |   8 phút</a:t>
             </a:r>
@@ -28076,25 +27800,19 @@
               <a:spcBef>
                 <a:spcPts val="450"/>
               </a:spcBef>
-              <a:buNone/>
-            </a:pPr>
-            <a:r>
-              <a:rPr lang="en-US" sz="1650" b="1" dirty="0">
-                <a:solidFill>
-                  <a:srgbClr val="6C3483"/>
-                </a:solidFill>
-                <a:latin typeface="Segoe UI"/>
-                <a:cs typeface="Segoe UI"/>
-              </a:rPr>
-              <a:t>1.  </a:t>
-            </a:r>
+              <a:buClr>
+                <a:srgbClr val="6C3483"/>
+              </a:buClr>
+              <a:buFont typeface="Arial"/>
+              <a:buChar char="•"/>
+            </a:pPr>
             <a:r>
               <a:rPr lang="en-US" sz="1650" dirty="0">
                 <a:solidFill>
                   <a:srgbClr val="000000"/>
                 </a:solidFill>
-                <a:latin typeface="Segoe UI"/>
-                <a:cs typeface="Segoe UI"/>
+                <a:latin typeface="Arial"/>
+                <a:cs typeface="Arial"/>
               </a:rPr>
               <a:t>Cùng 24 câu hỏi như Buổi 1 (nên dùng biểu mẫu trực tuyến)</a:t>
             </a:r>
@@ -28107,25 +27825,19 @@
               <a:spcBef>
                 <a:spcPts val="450"/>
               </a:spcBef>
-              <a:buNone/>
-            </a:pPr>
-            <a:r>
-              <a:rPr lang="en-US" sz="1650" b="1" dirty="0">
-                <a:solidFill>
-                  <a:srgbClr val="6C3483"/>
-                </a:solidFill>
-                <a:latin typeface="Segoe UI"/>
-                <a:cs typeface="Segoe UI"/>
-              </a:rPr>
-              <a:t>2.  </a:t>
-            </a:r>
+              <a:buClr>
+                <a:srgbClr val="6C3483"/>
+              </a:buClr>
+              <a:buFont typeface="Arial"/>
+              <a:buChar char="•"/>
+            </a:pPr>
             <a:r>
               <a:rPr lang="en-US" sz="1650" dirty="0">
                 <a:solidFill>
                   <a:srgbClr val="000000"/>
                 </a:solidFill>
-                <a:latin typeface="Segoe UI"/>
-                <a:cs typeface="Segoe UI"/>
+                <a:latin typeface="Arial"/>
+                <a:cs typeface="Arial"/>
               </a:rPr>
               <a:t>Làm cá nhân, không thảo luận</a:t>
             </a:r>
@@ -28138,25 +27850,19 @@
               <a:spcBef>
                 <a:spcPts val="450"/>
               </a:spcBef>
-              <a:buNone/>
-            </a:pPr>
-            <a:r>
-              <a:rPr lang="en-US" sz="1650" b="1" dirty="0">
-                <a:solidFill>
-                  <a:srgbClr val="6C3483"/>
-                </a:solidFill>
-                <a:latin typeface="Segoe UI"/>
-                <a:cs typeface="Segoe UI"/>
-              </a:rPr>
-              <a:t>3.  </a:t>
-            </a:r>
+              <a:buClr>
+                <a:srgbClr val="6C3483"/>
+              </a:buClr>
+              <a:buFont typeface="Arial"/>
+              <a:buChar char="•"/>
+            </a:pPr>
             <a:r>
               <a:rPr lang="en-US" sz="1650" dirty="0">
                 <a:solidFill>
                   <a:srgbClr val="000000"/>
                 </a:solidFill>
-                <a:latin typeface="Segoe UI"/>
-                <a:cs typeface="Segoe UI"/>
+                <a:latin typeface="Arial"/>
+                <a:cs typeface="Arial"/>
               </a:rPr>
               <a:t>Ghi cùng mã số học viên như Buổi 1</a:t>
             </a:r>
@@ -28169,25 +27875,19 @@
               <a:spcBef>
                 <a:spcPts val="450"/>
               </a:spcBef>
-              <a:buNone/>
-            </a:pPr>
-            <a:r>
-              <a:rPr lang="en-US" sz="1650" b="1" dirty="0">
-                <a:solidFill>
-                  <a:srgbClr val="6C3483"/>
-                </a:solidFill>
-                <a:latin typeface="Segoe UI"/>
-                <a:cs typeface="Segoe UI"/>
-              </a:rPr>
-              <a:t>4.  </a:t>
-            </a:r>
+              <a:buClr>
+                <a:srgbClr val="6C3483"/>
+              </a:buClr>
+              <a:buFont typeface="Arial"/>
+              <a:buChar char="•"/>
+            </a:pPr>
             <a:r>
               <a:rPr lang="en-US" sz="1650" dirty="0">
                 <a:solidFill>
                   <a:srgbClr val="000000"/>
                 </a:solidFill>
-                <a:latin typeface="Segoe UI"/>
-                <a:cs typeface="Segoe UI"/>
+                <a:latin typeface="Arial"/>
+                <a:cs typeface="Arial"/>
               </a:rPr>
               <a:t>Đáp án được gửi sau khóa học</a:t>
             </a:r>
@@ -28233,8 +27933,8 @@
                 <a:solidFill>
                   <a:srgbClr val="6C3483"/>
                 </a:solidFill>
-                <a:latin typeface="Segoe UI"/>
-                <a:cs typeface="Segoe UI"/>
+                <a:latin typeface="Arial"/>
+                <a:cs typeface="Arial"/>
               </a:rPr>
               <a:t>SẢN PHẨM   </a:t>
             </a:r>
@@ -28243,8 +27943,8 @@
                 <a:solidFill>
                   <a:srgbClr val="000000"/>
                 </a:solidFill>
-                <a:latin typeface="Segoe UI"/>
-                <a:cs typeface="Segoe UI"/>
+                <a:latin typeface="Arial"/>
+                <a:cs typeface="Arial"/>
               </a:rPr>
               <a:t>Nộp bài (chỉ ghi mã số học viên)</a:t>
             </a:r>
@@ -28281,7 +27981,7 @@
                     <a:lumMod val="50000"/>
                   </a:schemeClr>
                 </a:solidFill>
-                <a:latin typeface="Verdana"/>
+                <a:latin typeface="Arial"/>
               </a:rPr>
               <a:t>Neudata | #ClearDataClearImpact</a:t>
             </a:r>
@@ -28411,8 +28111,8 @@
                 <a:solidFill>
                   <a:srgbClr val="0D7377"/>
                 </a:solidFill>
-                <a:latin typeface="Segoe UI"/>
-                <a:cs typeface="Segoe UI"/>
+                <a:latin typeface="Arial"/>
+                <a:cs typeface="Arial"/>
               </a:rPr>
               <a:t>Những gì bạn đã xây dựng trong tám buổi</a:t>
             </a:r>
@@ -28484,8 +28184,8 @@
                 <a:solidFill>
                   <a:srgbClr val="FFFFFF"/>
                 </a:solidFill>
-                <a:latin typeface="Segoe UI"/>
-                <a:cs typeface="Segoe UI"/>
+                <a:latin typeface="Arial"/>
+                <a:cs typeface="Arial"/>
               </a:rPr>
               <a:t>HỎI &amp; TÌM</a:t>
             </a:r>
@@ -28533,8 +28233,8 @@
                 <a:solidFill>
                   <a:srgbClr val="000000"/>
                 </a:solidFill>
-                <a:latin typeface="Segoe UI"/>
-                <a:cs typeface="Segoe UI"/>
+                <a:latin typeface="Arial"/>
+                <a:cs typeface="Arial"/>
               </a:rPr>
               <a:t>Một câu hỏi PICO</a:t>
             </a:r>
@@ -28554,8 +28254,8 @@
                 <a:solidFill>
                   <a:srgbClr val="000000"/>
                 </a:solidFill>
-                <a:latin typeface="Segoe UI"/>
-                <a:cs typeface="Segoe UI"/>
+                <a:latin typeface="Arial"/>
+                <a:cs typeface="Arial"/>
               </a:rPr>
               <a:t>5 tài liệu chính</a:t>
             </a:r>
@@ -28575,8 +28275,8 @@
                 <a:solidFill>
                   <a:srgbClr val="000000"/>
                 </a:solidFill>
-                <a:latin typeface="Segoe UI"/>
-                <a:cs typeface="Segoe UI"/>
+                <a:latin typeface="Arial"/>
+                <a:cs typeface="Arial"/>
               </a:rPr>
               <a:t>Tên đề tài dự kiến</a:t>
             </a:r>
@@ -28620,8 +28320,8 @@
                 <a:solidFill>
                   <a:srgbClr val="FFFFFF"/>
                 </a:solidFill>
-                <a:latin typeface="Segoe UI"/>
-                <a:cs typeface="Segoe UI"/>
+                <a:latin typeface="Arial"/>
+                <a:cs typeface="Arial"/>
               </a:rPr>
               <a:t>THIẾT KẾ</a:t>
             </a:r>
@@ -28669,8 +28369,8 @@
                 <a:solidFill>
                   <a:srgbClr val="000000"/>
                 </a:solidFill>
-                <a:latin typeface="Segoe UI"/>
-                <a:cs typeface="Segoe UI"/>
+                <a:latin typeface="Arial"/>
+                <a:cs typeface="Arial"/>
               </a:rPr>
               <a:t>Thiết kế có lý giải</a:t>
             </a:r>
@@ -28690,8 +28390,8 @@
                 <a:solidFill>
                   <a:srgbClr val="000000"/>
                 </a:solidFill>
-                <a:latin typeface="Segoe UI"/>
-                <a:cs typeface="Segoe UI"/>
+                <a:latin typeface="Arial"/>
+                <a:cs typeface="Arial"/>
               </a:rPr>
               <a:t>Kết cục</a:t>
             </a:r>
@@ -28711,8 +28411,8 @@
                 <a:solidFill>
                   <a:srgbClr val="000000"/>
                 </a:solidFill>
-                <a:latin typeface="Segoe UI"/>
-                <a:cs typeface="Segoe UI"/>
+                <a:latin typeface="Arial"/>
+                <a:cs typeface="Arial"/>
               </a:rPr>
               <a:t>Kế hoạch giảm sai lệch</a:t>
             </a:r>
@@ -28756,8 +28456,8 @@
                 <a:solidFill>
                   <a:srgbClr val="FFFFFF"/>
                 </a:solidFill>
-                <a:latin typeface="Segoe UI"/>
-                <a:cs typeface="Segoe UI"/>
+                <a:latin typeface="Arial"/>
+                <a:cs typeface="Arial"/>
               </a:rPr>
               <a:t>PHÂN TÍCH</a:t>
             </a:r>
@@ -28805,8 +28505,8 @@
                 <a:solidFill>
                   <a:srgbClr val="000000"/>
                 </a:solidFill>
-                <a:latin typeface="Segoe UI"/>
-                <a:cs typeface="Segoe UI"/>
+                <a:latin typeface="Arial"/>
+                <a:cs typeface="Arial"/>
               </a:rPr>
               <a:t>CRF và kế hoạch phân tích</a:t>
             </a:r>
@@ -28826,8 +28526,8 @@
                 <a:solidFill>
                   <a:srgbClr val="000000"/>
                 </a:solidFill>
-                <a:latin typeface="Segoe UI"/>
-                <a:cs typeface="Segoe UI"/>
+                <a:latin typeface="Arial"/>
+                <a:cs typeface="Arial"/>
               </a:rPr>
               <a:t>Đọc và diễn giải một bộ dữ liệu thật</a:t>
             </a:r>
@@ -28871,8 +28571,8 @@
                 <a:solidFill>
                   <a:srgbClr val="FFFFFF"/>
                 </a:solidFill>
-                <a:latin typeface="Segoe UI"/>
-                <a:cs typeface="Segoe UI"/>
+                <a:latin typeface="Arial"/>
+                <a:cs typeface="Arial"/>
               </a:rPr>
               <a:t>VIẾT</a:t>
             </a:r>
@@ -28920,8 +28620,8 @@
                 <a:solidFill>
                   <a:srgbClr val="000000"/>
                 </a:solidFill>
-                <a:latin typeface="Segoe UI"/>
-                <a:cs typeface="Segoe UI"/>
+                <a:latin typeface="Arial"/>
+                <a:cs typeface="Arial"/>
               </a:rPr>
               <a:t>Phương pháp, Kết quả</a:t>
             </a:r>
@@ -28941,8 +28641,8 @@
                 <a:solidFill>
                   <a:srgbClr val="000000"/>
                 </a:solidFill>
-                <a:latin typeface="Segoe UI"/>
-                <a:cs typeface="Segoe UI"/>
+                <a:latin typeface="Arial"/>
+                <a:cs typeface="Arial"/>
               </a:rPr>
               <a:t>Đặt vấn đề, Bàn luận, Tóm tắt</a:t>
             </a:r>
@@ -28986,8 +28686,8 @@
                 <a:solidFill>
                   <a:srgbClr val="FFFFFF"/>
                 </a:solidFill>
-                <a:latin typeface="Segoe UI"/>
-                <a:cs typeface="Segoe UI"/>
+                <a:latin typeface="Arial"/>
+                <a:cs typeface="Arial"/>
               </a:rPr>
               <a:t>CÔNG BỐ</a:t>
             </a:r>
@@ -29035,8 +28735,8 @@
                 <a:solidFill>
                   <a:srgbClr val="000000"/>
                 </a:solidFill>
-                <a:latin typeface="Segoe UI"/>
-                <a:cs typeface="Segoe UI"/>
+                <a:latin typeface="Arial"/>
+                <a:cs typeface="Arial"/>
               </a:rPr>
               <a:t>Đề cương đã trình bày</a:t>
             </a:r>
@@ -29056,8 +28756,8 @@
                 <a:solidFill>
                   <a:srgbClr val="000000"/>
                 </a:solidFill>
-                <a:latin typeface="Segoe UI"/>
-                <a:cs typeface="Segoe UI"/>
+                <a:latin typeface="Arial"/>
+                <a:cs typeface="Arial"/>
               </a:rPr>
               <a:t>Bản thảo bài báo</a:t>
             </a:r>
@@ -29101,8 +28801,8 @@
                 <a:solidFill>
                   <a:srgbClr val="FFFFFF"/>
                 </a:solidFill>
-                <a:latin typeface="Segoe UI"/>
-                <a:cs typeface="Segoe UI"/>
+                <a:latin typeface="Arial"/>
+                <a:cs typeface="Arial"/>
               </a:rPr>
               <a:t>THÔNG ĐIỆP CHÍNH   </a:t>
             </a:r>
@@ -29111,8 +28811,8 @@
                 <a:solidFill>
                   <a:srgbClr val="FFFFFF"/>
                 </a:solidFill>
-                <a:latin typeface="Segoe UI"/>
-                <a:cs typeface="Segoe UI"/>
+                <a:latin typeface="Arial"/>
+                <a:cs typeface="Arial"/>
               </a:rPr>
               <a:t>Năm đề cương và năm bản thảo bài báo từ khoa này.</a:t>
             </a:r>
@@ -29149,7 +28849,7 @@
                     <a:lumMod val="50000"/>
                   </a:schemeClr>
                 </a:solidFill>
-                <a:latin typeface="Verdana"/>
+                <a:latin typeface="Arial"/>
               </a:rPr>
               <a:t>Neudata | #ClearDataClearImpact</a:t>
             </a:r>
@@ -29279,8 +28979,8 @@
                 <a:solidFill>
                   <a:srgbClr val="0D7377"/>
                 </a:solidFill>
-                <a:latin typeface="Segoe UI"/>
-                <a:cs typeface="Segoe UI"/>
+                <a:latin typeface="Arial"/>
+                <a:cs typeface="Arial"/>
               </a:rPr>
               <a:t>Ví dụ mẫu: phễu Đặt vấn đề cho FLUID-ICU (Q1)</a:t>
             </a:r>
@@ -29350,8 +29050,8 @@
                 <a:solidFill>
                   <a:srgbClr val="FFFFFF"/>
                 </a:solidFill>
-                <a:latin typeface="Segoe UI"/>
-                <a:cs typeface="Segoe UI"/>
+                <a:latin typeface="Arial"/>
+                <a:cs typeface="Arial"/>
               </a:rPr>
               <a:t>1  Đã biết</a:t>
             </a:r>
@@ -29399,8 +29099,8 @@
                 <a:solidFill>
                   <a:srgbClr val="000000"/>
                 </a:solidFill>
-                <a:latin typeface="Segoe UI"/>
-                <a:cs typeface="Segoe UI"/>
+                <a:latin typeface="Arial"/>
+                <a:cs typeface="Arial"/>
               </a:rPr>
               <a:t>Dịch truyền cứu sống giai đoạn sớm</a:t>
             </a:r>
@@ -29420,8 +29120,8 @@
                 <a:solidFill>
                   <a:srgbClr val="000000"/>
                 </a:solidFill>
-                <a:latin typeface="Segoe UI"/>
-                <a:cs typeface="Segoe UI"/>
+                <a:latin typeface="Arial"/>
+                <a:cs typeface="Arial"/>
               </a:rPr>
               <a:t>Cân bằng dương liên quan tử vong</a:t>
             </a:r>
@@ -29441,8 +29141,8 @@
                 <a:solidFill>
                   <a:srgbClr val="000000"/>
                 </a:solidFill>
-                <a:latin typeface="Segoe UI"/>
-                <a:cs typeface="Segoe UI"/>
+                <a:latin typeface="Arial"/>
+                <a:cs typeface="Arial"/>
               </a:rPr>
               <a:t>(Bài 2; các đoàn hệ lớn)</a:t>
             </a:r>
@@ -29484,8 +29184,8 @@
                 <a:solidFill>
                   <a:srgbClr val="FFFFFF"/>
                 </a:solidFill>
-                <a:latin typeface="Segoe UI"/>
-                <a:cs typeface="Segoe UI"/>
+                <a:latin typeface="Arial"/>
+                <a:cs typeface="Arial"/>
               </a:rPr>
               <a:t>2  Chưa biết</a:t>
             </a:r>
@@ -29533,8 +29233,8 @@
                 <a:solidFill>
                   <a:srgbClr val="000000"/>
                 </a:solidFill>
-                <a:latin typeface="Segoe UI"/>
-                <a:cs typeface="Segoe UI"/>
+                <a:latin typeface="Arial"/>
+                <a:cs typeface="Arial"/>
               </a:rPr>
               <a:t>Liên quan còn không sau khi</a:t>
             </a:r>
@@ -29554,8 +29254,8 @@
                 <a:solidFill>
                   <a:srgbClr val="000000"/>
                 </a:solidFill>
-                <a:latin typeface="Segoe UI"/>
-                <a:cs typeface="Segoe UI"/>
+                <a:latin typeface="Arial"/>
+                <a:cs typeface="Arial"/>
               </a:rPr>
               <a:t>hiệu chỉnh theo mức độ nặng</a:t>
             </a:r>
@@ -29575,8 +29275,8 @@
                 <a:solidFill>
                   <a:srgbClr val="000000"/>
                 </a:solidFill>
-                <a:latin typeface="Segoe UI"/>
-                <a:cs typeface="Segoe UI"/>
+                <a:latin typeface="Arial"/>
+                <a:cs typeface="Arial"/>
               </a:rPr>
               <a:t>Bệnh nặng hơn được truyền nhiều hơn</a:t>
             </a:r>
@@ -29618,8 +29318,8 @@
                 <a:solidFill>
                   <a:srgbClr val="FFFFFF"/>
                 </a:solidFill>
-                <a:latin typeface="Segoe UI"/>
-                <a:cs typeface="Segoe UI"/>
+                <a:latin typeface="Arial"/>
+                <a:cs typeface="Arial"/>
               </a:rPr>
               <a:t>3  Mục tiêu</a:t>
             </a:r>
@@ -29667,8 +29367,8 @@
                 <a:solidFill>
                   <a:srgbClr val="000000"/>
                 </a:solidFill>
-                <a:latin typeface="Segoe UI"/>
-                <a:cs typeface="Segoe UI"/>
+                <a:latin typeface="Arial"/>
+                <a:cs typeface="Arial"/>
               </a:rPr>
               <a:t>Chúng tôi đánh giá cân bằng dương</a:t>
             </a:r>
@@ -29688,8 +29388,8 @@
                 <a:solidFill>
                   <a:srgbClr val="000000"/>
                 </a:solidFill>
-                <a:latin typeface="Segoe UI"/>
-                <a:cs typeface="Segoe UI"/>
+                <a:latin typeface="Arial"/>
+                <a:cs typeface="Arial"/>
               </a:rPr>
               <a:t>đến ngày 3 có liên quan với</a:t>
             </a:r>
@@ -29709,8 +29409,8 @@
                 <a:solidFill>
                   <a:srgbClr val="000000"/>
                 </a:solidFill>
-                <a:latin typeface="Segoe UI"/>
-                <a:cs typeface="Segoe UI"/>
+                <a:latin typeface="Arial"/>
+                <a:cs typeface="Arial"/>
               </a:rPr>
               <a:t>tử vong 28 ngày, sau hiệu chỉnh</a:t>
             </a:r>
@@ -29754,8 +29454,8 @@
                 <a:solidFill>
                   <a:srgbClr val="FFFFFF"/>
                 </a:solidFill>
-                <a:latin typeface="Segoe UI"/>
-                <a:cs typeface="Segoe UI"/>
+                <a:latin typeface="Arial"/>
+                <a:cs typeface="Arial"/>
               </a:rPr>
               <a:t>THÔNG ĐIỆP CHÍNH   </a:t>
             </a:r>
@@ -29764,8 +29464,8 @@
                 <a:solidFill>
                   <a:srgbClr val="FFFFFF"/>
                 </a:solidFill>
-                <a:latin typeface="Segoe UI"/>
-                <a:cs typeface="Segoe UI"/>
+                <a:latin typeface="Arial"/>
+                <a:cs typeface="Arial"/>
               </a:rPr>
               <a:t>Ba đoạn, khoảng 350 từ. Câu mục tiêu dùng 'có liên quan'.</a:t>
             </a:r>
@@ -29802,7 +29502,7 @@
                     <a:lumMod val="50000"/>
                   </a:schemeClr>
                 </a:solidFill>
-                <a:latin typeface="Verdana"/>
+                <a:latin typeface="Arial"/>
               </a:rPr>
               <a:t>Neudata | #ClearDataClearImpact</a:t>
             </a:r>
@@ -29932,8 +29632,8 @@
                 <a:solidFill>
                   <a:srgbClr val="0D7377"/>
                 </a:solidFill>
-                <a:latin typeface="Segoe UI"/>
-                <a:cs typeface="Segoe UI"/>
+                <a:latin typeface="Arial"/>
+                <a:cs typeface="Arial"/>
               </a:rPr>
               <a:t>Đánh giá khóa học</a:t>
             </a:r>
@@ -30003,8 +29703,8 @@
                 <a:solidFill>
                   <a:srgbClr val="FFFFFF"/>
                 </a:solidFill>
-                <a:latin typeface="Segoe UI"/>
-                <a:cs typeface="Segoe UI"/>
+                <a:latin typeface="Arial"/>
+                <a:cs typeface="Arial"/>
               </a:rPr>
               <a:t>BÀI TẬP CÁ NHÂN   |   3 phút</a:t>
             </a:r>
@@ -30041,25 +29741,19 @@
               <a:spcBef>
                 <a:spcPts val="450"/>
               </a:spcBef>
-              <a:buNone/>
-            </a:pPr>
-            <a:r>
-              <a:rPr lang="en-US" sz="1650" b="1" dirty="0">
-                <a:solidFill>
-                  <a:srgbClr val="0B376C"/>
-                </a:solidFill>
-                <a:latin typeface="Segoe UI"/>
-                <a:cs typeface="Segoe UI"/>
-              </a:rPr>
-              <a:t>1.  </a:t>
-            </a:r>
+              <a:buClr>
+                <a:srgbClr val="0B376C"/>
+              </a:buClr>
+              <a:buFont typeface="Arial"/>
+              <a:buChar char="•"/>
+            </a:pPr>
             <a:r>
               <a:rPr lang="en-US" sz="1650" dirty="0">
                 <a:solidFill>
                   <a:srgbClr val="000000"/>
                 </a:solidFill>
-                <a:latin typeface="Segoe UI"/>
-                <a:cs typeface="Segoe UI"/>
+                <a:latin typeface="Arial"/>
+                <a:cs typeface="Arial"/>
               </a:rPr>
               <a:t>Chấm điểm từng buổi: nội dung, tốc độ, mức hữu ích</a:t>
             </a:r>
@@ -30072,25 +29766,19 @@
               <a:spcBef>
                 <a:spcPts val="450"/>
               </a:spcBef>
-              <a:buNone/>
-            </a:pPr>
-            <a:r>
-              <a:rPr lang="en-US" sz="1650" b="1" dirty="0">
-                <a:solidFill>
-                  <a:srgbClr val="0B376C"/>
-                </a:solidFill>
-                <a:latin typeface="Segoe UI"/>
-                <a:cs typeface="Segoe UI"/>
-              </a:rPr>
-              <a:t>2.  </a:t>
-            </a:r>
+              <a:buClr>
+                <a:srgbClr val="0B376C"/>
+              </a:buClr>
+              <a:buFont typeface="Arial"/>
+              <a:buChar char="•"/>
+            </a:pPr>
             <a:r>
               <a:rPr lang="en-US" sz="1650" dirty="0">
                 <a:solidFill>
                   <a:srgbClr val="000000"/>
                 </a:solidFill>
-                <a:latin typeface="Segoe UI"/>
-                <a:cs typeface="Segoe UI"/>
+                <a:latin typeface="Arial"/>
+                <a:cs typeface="Arial"/>
               </a:rPr>
               <a:t>Một điều nên giữ, một điều nên thay đổi</a:t>
             </a:r>
@@ -30103,25 +29791,19 @@
               <a:spcBef>
                 <a:spcPts val="450"/>
               </a:spcBef>
-              <a:buNone/>
-            </a:pPr>
-            <a:r>
-              <a:rPr lang="en-US" sz="1650" b="1" dirty="0">
-                <a:solidFill>
-                  <a:srgbClr val="0B376C"/>
-                </a:solidFill>
-                <a:latin typeface="Segoe UI"/>
-                <a:cs typeface="Segoe UI"/>
-              </a:rPr>
-              <a:t>3.  </a:t>
-            </a:r>
+              <a:buClr>
+                <a:srgbClr val="0B376C"/>
+              </a:buClr>
+              <a:buFont typeface="Arial"/>
+              <a:buChar char="•"/>
+            </a:pPr>
             <a:r>
               <a:rPr lang="en-US" sz="1650" dirty="0">
                 <a:solidFill>
                   <a:srgbClr val="000000"/>
                 </a:solidFill>
-                <a:latin typeface="Segoe UI"/>
-                <a:cs typeface="Segoe UI"/>
+                <a:latin typeface="Arial"/>
+                <a:cs typeface="Arial"/>
               </a:rPr>
               <a:t>Bạn có quan tâm đến Cấp độ 2 (thực hành R)?</a:t>
             </a:r>
@@ -30167,8 +29849,8 @@
                 <a:solidFill>
                   <a:srgbClr val="0B376C"/>
                 </a:solidFill>
-                <a:latin typeface="Segoe UI"/>
-                <a:cs typeface="Segoe UI"/>
+                <a:latin typeface="Arial"/>
+                <a:cs typeface="Arial"/>
               </a:rPr>
               <a:t>SẢN PHẨM   </a:t>
             </a:r>
@@ -30177,8 +29859,8 @@
                 <a:solidFill>
                   <a:srgbClr val="000000"/>
                 </a:solidFill>
-                <a:latin typeface="Segoe UI"/>
-                <a:cs typeface="Segoe UI"/>
+                <a:latin typeface="Arial"/>
+                <a:cs typeface="Arial"/>
               </a:rPr>
               <a:t>Phiếu đánh giá (ẩn danh)</a:t>
             </a:r>
@@ -30215,7 +29897,7 @@
                     <a:lumMod val="50000"/>
                   </a:schemeClr>
                 </a:solidFill>
-                <a:latin typeface="Verdana"/>
+                <a:latin typeface="Arial"/>
               </a:rPr>
               <a:t>Neudata | #ClearDataClearImpact</a:t>
             </a:r>
@@ -30345,8 +30027,8 @@
                 <a:solidFill>
                   <a:srgbClr val="0D7377"/>
                 </a:solidFill>
-                <a:latin typeface="Segoe UI"/>
-                <a:cs typeface="Segoe UI"/>
+                <a:latin typeface="Arial"/>
+                <a:cs typeface="Arial"/>
               </a:rPr>
               <a:t>Sau khóa học: phản biện như tác giả thật</a:t>
             </a:r>
@@ -30418,8 +30100,8 @@
                 <a:solidFill>
                   <a:srgbClr val="FFFFFF"/>
                 </a:solidFill>
-                <a:latin typeface="Segoe UI"/>
-                <a:cs typeface="Segoe UI"/>
+                <a:latin typeface="Arial"/>
+                <a:cs typeface="Arial"/>
               </a:rPr>
               <a:t>Tuần 1</a:t>
             </a:r>
@@ -30467,8 +30149,8 @@
                 <a:solidFill>
                   <a:srgbClr val="000000"/>
                 </a:solidFill>
-                <a:latin typeface="Segoe UI"/>
-                <a:cs typeface="Segoe UI"/>
+                <a:latin typeface="Arial"/>
+                <a:cs typeface="Arial"/>
               </a:rPr>
               <a:t>Hoàn thiện bản thảo</a:t>
             </a:r>
@@ -30488,8 +30170,8 @@
                 <a:solidFill>
                   <a:srgbClr val="000000"/>
                 </a:solidFill>
-                <a:latin typeface="Segoe UI"/>
-                <a:cs typeface="Segoe UI"/>
+                <a:latin typeface="Arial"/>
+                <a:cs typeface="Arial"/>
               </a:rPr>
               <a:t>Nộp cho giảng viên</a:t>
             </a:r>
@@ -30533,8 +30215,8 @@
                 <a:solidFill>
                   <a:srgbClr val="FFFFFF"/>
                 </a:solidFill>
-                <a:latin typeface="Segoe UI"/>
-                <a:cs typeface="Segoe UI"/>
+                <a:latin typeface="Arial"/>
+                <a:cs typeface="Arial"/>
               </a:rPr>
               <a:t>Đổi bài</a:t>
             </a:r>
@@ -30582,8 +30264,8 @@
                 <a:solidFill>
                   <a:srgbClr val="000000"/>
                 </a:solidFill>
-                <a:latin typeface="Segoe UI"/>
-                <a:cs typeface="Segoe UI"/>
+                <a:latin typeface="Arial"/>
+                <a:cs typeface="Arial"/>
               </a:rPr>
               <a:t>Phản biện bài của nhóm khác</a:t>
             </a:r>
@@ -30603,8 +30285,8 @@
                 <a:solidFill>
                   <a:srgbClr val="000000"/>
                 </a:solidFill>
-                <a:latin typeface="Segoe UI"/>
-                <a:cs typeface="Segoe UI"/>
+                <a:latin typeface="Arial"/>
+                <a:cs typeface="Arial"/>
               </a:rPr>
               <a:t>Bảng kiểm 10 câu + kiểm tra cách viết</a:t>
             </a:r>
@@ -30648,8 +30330,8 @@
                 <a:solidFill>
                   <a:srgbClr val="FFFFFF"/>
                 </a:solidFill>
-                <a:latin typeface="Segoe UI"/>
-                <a:cs typeface="Segoe UI"/>
+                <a:latin typeface="Arial"/>
+                <a:cs typeface="Arial"/>
               </a:rPr>
               <a:t>Trả lời</a:t>
             </a:r>
@@ -30697,8 +30379,8 @@
                 <a:solidFill>
                   <a:srgbClr val="000000"/>
                 </a:solidFill>
-                <a:latin typeface="Segoe UI"/>
-                <a:cs typeface="Segoe UI"/>
+                <a:latin typeface="Arial"/>
+                <a:cs typeface="Arial"/>
               </a:rPr>
               <a:t>Trả lời từng nhận xét</a:t>
             </a:r>
@@ -30718,8 +30400,8 @@
                 <a:solidFill>
                   <a:srgbClr val="000000"/>
                 </a:solidFill>
-                <a:latin typeface="Segoe UI"/>
-                <a:cs typeface="Segoe UI"/>
+                <a:latin typeface="Arial"/>
+                <a:cs typeface="Arial"/>
               </a:rPr>
               <a:t>Mẫu trả lời phản biện</a:t>
             </a:r>
@@ -30763,8 +30445,8 @@
                 <a:solidFill>
                   <a:srgbClr val="FFFFFF"/>
                 </a:solidFill>
-                <a:latin typeface="Segoe UI"/>
-                <a:cs typeface="Segoe UI"/>
+                <a:latin typeface="Arial"/>
+                <a:cs typeface="Arial"/>
               </a:rPr>
               <a:t>Tuần 2</a:t>
             </a:r>
@@ -30812,8 +30494,8 @@
                 <a:solidFill>
                   <a:srgbClr val="000000"/>
                 </a:solidFill>
-                <a:latin typeface="Segoe UI"/>
-                <a:cs typeface="Segoe UI"/>
+                <a:latin typeface="Arial"/>
+                <a:cs typeface="Arial"/>
               </a:rPr>
               <a:t>Bản cuối + thư trả lời</a:t>
             </a:r>
@@ -30833,8 +30515,8 @@
                 <a:solidFill>
                   <a:srgbClr val="000000"/>
                 </a:solidFill>
-                <a:latin typeface="Segoe UI"/>
-                <a:cs typeface="Segoe UI"/>
+                <a:latin typeface="Arial"/>
+                <a:cs typeface="Arial"/>
               </a:rPr>
               <a:t>Giảng viên góp ý</a:t>
             </a:r>
@@ -30878,8 +30560,8 @@
                 <a:solidFill>
                   <a:srgbClr val="FFFFFF"/>
                 </a:solidFill>
-                <a:latin typeface="Segoe UI"/>
-                <a:cs typeface="Segoe UI"/>
+                <a:latin typeface="Arial"/>
+                <a:cs typeface="Arial"/>
               </a:rPr>
               <a:t>THÔNG ĐIỆP CHÍNH   </a:t>
             </a:r>
@@ -30888,8 +30570,8 @@
                 <a:solidFill>
                   <a:srgbClr val="FFFFFF"/>
                 </a:solidFill>
-                <a:latin typeface="Segoe UI"/>
-                <a:cs typeface="Segoe UI"/>
+                <a:latin typeface="Arial"/>
+                <a:cs typeface="Arial"/>
               </a:rPr>
               <a:t>Hạn nộp hai tuần sau Buổi 8 (xem Assignment/peer_review_instructions).</a:t>
             </a:r>
@@ -30926,7 +30608,7 @@
                     <a:lumMod val="50000"/>
                   </a:schemeClr>
                 </a:solidFill>
-                <a:latin typeface="Verdana"/>
+                <a:latin typeface="Arial"/>
               </a:rPr>
               <a:t>Neudata | #ClearDataClearImpact</a:t>
             </a:r>
@@ -31056,8 +30738,8 @@
                 <a:solidFill>
                   <a:srgbClr val="0D7377"/>
                 </a:solidFill>
-                <a:latin typeface="Segoe UI"/>
-                <a:cs typeface="Segoe UI"/>
+                <a:latin typeface="Arial"/>
+                <a:cs typeface="Arial"/>
               </a:rPr>
               <a:t>Bước tiếp theo</a:t>
             </a:r>
@@ -31127,8 +30809,8 @@
                 <a:solidFill>
                   <a:srgbClr val="FFFFFF"/>
                 </a:solidFill>
-                <a:latin typeface="Segoe UI"/>
-                <a:cs typeface="Segoe UI"/>
+                <a:latin typeface="Arial"/>
+                <a:cs typeface="Arial"/>
               </a:rPr>
               <a:t>Hoàn thành</a:t>
             </a:r>
@@ -31176,8 +30858,8 @@
                 <a:solidFill>
                   <a:srgbClr val="000000"/>
                 </a:solidFill>
-                <a:latin typeface="Segoe UI"/>
-                <a:cs typeface="Segoe UI"/>
+                <a:latin typeface="Arial"/>
+                <a:cs typeface="Arial"/>
               </a:rPr>
               <a:t>Tham dự ít nhất 6/8 buổi</a:t>
             </a:r>
@@ -31197,8 +30879,8 @@
                 <a:solidFill>
                   <a:srgbClr val="000000"/>
                 </a:solidFill>
-                <a:latin typeface="Segoe UI"/>
-                <a:cs typeface="Segoe UI"/>
+                <a:latin typeface="Arial"/>
+                <a:cs typeface="Arial"/>
               </a:rPr>
               <a:t>Đã trình bày đề cương</a:t>
             </a:r>
@@ -31218,8 +30900,8 @@
                 <a:solidFill>
                   <a:srgbClr val="000000"/>
                 </a:solidFill>
-                <a:latin typeface="Segoe UI"/>
-                <a:cs typeface="Segoe UI"/>
+                <a:latin typeface="Arial"/>
+                <a:cs typeface="Arial"/>
               </a:rPr>
               <a:t>Đã nộp bản thảo</a:t>
             </a:r>
@@ -31261,8 +30943,8 @@
                 <a:solidFill>
                   <a:srgbClr val="FFFFFF"/>
                 </a:solidFill>
-                <a:latin typeface="Segoe UI"/>
-                <a:cs typeface="Segoe UI"/>
+                <a:latin typeface="Arial"/>
+                <a:cs typeface="Arial"/>
               </a:rPr>
               <a:t>Bộ công cụ của bạn</a:t>
             </a:r>
@@ -31310,8 +30992,8 @@
                 <a:solidFill>
                   <a:srgbClr val="000000"/>
                 </a:solidFill>
-                <a:latin typeface="Segoe UI"/>
-                <a:cs typeface="Segoe UI"/>
+                <a:latin typeface="Arial"/>
+                <a:cs typeface="Arial"/>
               </a:rPr>
               <a:t>Slide, tài liệu phát tay, bảng thuật ngữ</a:t>
             </a:r>
@@ -31331,8 +31013,8 @@
                 <a:solidFill>
                   <a:srgbClr val="000000"/>
                 </a:solidFill>
-                <a:latin typeface="Segoe UI"/>
-                <a:cs typeface="Segoe UI"/>
+                <a:latin typeface="Arial"/>
+                <a:cs typeface="Arial"/>
               </a:rPr>
               <a:t>Mẫu đề cương, đề cương chi tiết, đồng thuận, CRF, SAP,</a:t>
             </a:r>
@@ -31352,8 +31034,8 @@
                 <a:solidFill>
                   <a:srgbClr val="000000"/>
                 </a:solidFill>
-                <a:latin typeface="Segoe UI"/>
-                <a:cs typeface="Segoe UI"/>
+                <a:latin typeface="Arial"/>
+                <a:cs typeface="Arial"/>
               </a:rPr>
               <a:t>bản thảo và trả lời phản biện</a:t>
             </a:r>
@@ -31395,8 +31077,8 @@
                 <a:solidFill>
                   <a:srgbClr val="FFFFFF"/>
                 </a:solidFill>
-                <a:latin typeface="Segoe UI"/>
-                <a:cs typeface="Segoe UI"/>
+                <a:latin typeface="Arial"/>
+                <a:cs typeface="Arial"/>
               </a:rPr>
               <a:t>Tiếp tục</a:t>
             </a:r>
@@ -31444,8 +31126,8 @@
                 <a:solidFill>
                   <a:srgbClr val="000000"/>
                 </a:solidFill>
-                <a:latin typeface="Segoe UI"/>
-                <a:cs typeface="Segoe UI"/>
+                <a:latin typeface="Arial"/>
+                <a:cs typeface="Arial"/>
               </a:rPr>
               <a:t>Đưa đề cương đến hội đồng đạo đức</a:t>
             </a:r>
@@ -31465,8 +31147,8 @@
                 <a:solidFill>
                   <a:srgbClr val="000000"/>
                 </a:solidFill>
-                <a:latin typeface="Segoe UI"/>
-                <a:cs typeface="Segoe UI"/>
+                <a:latin typeface="Arial"/>
+                <a:cs typeface="Arial"/>
               </a:rPr>
               <a:t>Cấp độ 2: thực hành phân tích bằng R</a:t>
             </a:r>
@@ -31486,8 +31168,8 @@
                 <a:solidFill>
                   <a:srgbClr val="000000"/>
                 </a:solidFill>
-                <a:latin typeface="Segoe UI"/>
-                <a:cs typeface="Segoe UI"/>
+                <a:latin typeface="Arial"/>
+                <a:cs typeface="Arial"/>
               </a:rPr>
               <a:t>Cấp độ 3: phương pháp nâng cao</a:t>
             </a:r>
@@ -31524,7 +31206,7 @@
                     <a:lumMod val="50000"/>
                   </a:schemeClr>
                 </a:solidFill>
-                <a:latin typeface="Verdana"/>
+                <a:latin typeface="Arial"/>
               </a:rPr>
               <a:t>Neudata | #ClearDataClearImpact</a:t>
             </a:r>
@@ -31657,8 +31339,8 @@
                 <a:solidFill>
                   <a:srgbClr val="0D7377"/>
                 </a:solidFill>
-                <a:latin typeface="Segoe UI"/>
-                <a:cs typeface="Segoe UI"/>
+                <a:latin typeface="Arial"/>
+                <a:cs typeface="Arial"/>
               </a:rPr>
               <a:t>Xin cảm ơn!</a:t>
             </a:r>
@@ -31675,8 +31357,8 @@
                 <a:solidFill>
                   <a:srgbClr val="595959"/>
                 </a:solidFill>
-                <a:latin typeface="Segoe UI"/>
-                <a:cs typeface="Segoe UI"/>
+                <a:latin typeface="Arial"/>
+                <a:cs typeface="Arial"/>
               </a:rPr>
               <a:t>Câu hỏi tốt. Thiết kế chặt chẽ. Phân tích trung thực. Viết rõ ràng.</a:t>
             </a:r>
@@ -31713,7 +31395,7 @@
                     <a:lumMod val="50000"/>
                   </a:schemeClr>
                 </a:solidFill>
-                <a:latin typeface="Verdana"/>
+                <a:latin typeface="Arial"/>
               </a:rPr>
               <a:t>Neudata | #ClearDataClearImpact</a:t>
             </a:r>
@@ -31867,8 +31549,8 @@
                 <a:solidFill>
                   <a:srgbClr val="4472C4"/>
                 </a:solidFill>
-                <a:latin typeface="Segoe UI"/>
-                <a:cs typeface="Segoe UI"/>
+                <a:latin typeface="Arial"/>
+                <a:cs typeface="Arial"/>
               </a:rPr>
               <a:t>Copyright © Neudata, 2026</a:t>
             </a:r>
@@ -32013,7 +31695,7 @@
                     <a:lumMod val="50000"/>
                   </a:schemeClr>
                 </a:solidFill>
-                <a:latin typeface="Verdana"/>
+                <a:latin typeface="Arial"/>
               </a:rPr>
               <a:t>Neudata | #ClearDataClearImpact</a:t>
             </a:r>
@@ -32119,8 +31801,8 @@
                 <a:solidFill>
                   <a:srgbClr val="0D7377"/>
                 </a:solidFill>
-                <a:latin typeface="Segoe UI"/>
-                <a:cs typeface="Segoe UI"/>
+                <a:latin typeface="Arial"/>
+                <a:cs typeface="Arial"/>
               </a:rPr>
               <a:t>Bàn luận: sáu bước</a:t>
             </a:r>
@@ -32216,8 +31898,8 @@
                 <a:solidFill>
                   <a:srgbClr val="FFFFFF"/>
                 </a:solidFill>
-                <a:latin typeface="Segoe UI"/>
-                <a:cs typeface="Segoe UI"/>
+                <a:latin typeface="Arial"/>
+                <a:cs typeface="Arial"/>
               </a:rPr>
               <a:t>THÔNG ĐIỆP CHÍNH   </a:t>
             </a:r>
@@ -32226,8 +31908,8 @@
                 <a:solidFill>
                   <a:srgbClr val="FFFFFF"/>
                 </a:solidFill>
-                <a:latin typeface="Segoe UI"/>
-                <a:cs typeface="Segoe UI"/>
+                <a:latin typeface="Arial"/>
+                <a:cs typeface="Arial"/>
               </a:rPr>
               <a:t>Trả lời trước; hạn chế kèm hướng sai lệch; kết luận = tóm tắt = tiêu đề.</a:t>
             </a:r>
@@ -32264,7 +31946,7 @@
                     <a:lumMod val="50000"/>
                   </a:schemeClr>
                 </a:solidFill>
-                <a:latin typeface="Verdana"/>
+                <a:latin typeface="Arial"/>
               </a:rPr>
               <a:t>Neudata | #ClearDataClearImpact</a:t>
             </a:r>
@@ -32394,8 +32076,8 @@
                 <a:solidFill>
                   <a:srgbClr val="0D7377"/>
                 </a:solidFill>
-                <a:latin typeface="Segoe UI"/>
-                <a:cs typeface="Segoe UI"/>
+                <a:latin typeface="Arial"/>
+                <a:cs typeface="Arial"/>
               </a:rPr>
               <a:t>Ví dụ mẫu: Bàn luận cho FLUID-ICU câu hỏi 1</a:t>
             </a:r>
@@ -32491,8 +32173,8 @@
                 <a:solidFill>
                   <a:srgbClr val="FFFFFF"/>
                 </a:solidFill>
-                <a:latin typeface="Segoe UI"/>
-                <a:cs typeface="Segoe UI"/>
+                <a:latin typeface="Arial"/>
+                <a:cs typeface="Arial"/>
               </a:rPr>
               <a:t>THÔNG ĐIỆP CHÍNH   </a:t>
             </a:r>
@@ -32501,8 +32183,8 @@
                 <a:solidFill>
                   <a:srgbClr val="FFFFFF"/>
                 </a:solidFill>
-                <a:latin typeface="Segoe UI"/>
-                <a:cs typeface="Segoe UI"/>
+                <a:latin typeface="Arial"/>
+                <a:cs typeface="Arial"/>
               </a:rPr>
               <a:t>Trả lời bằng con số, giải thích chênh thô-hiệu chỉnh, kết bằng cùng động từ.</a:t>
             </a:r>
@@ -32539,7 +32221,7 @@
                     <a:lumMod val="50000"/>
                   </a:schemeClr>
                 </a:solidFill>
-                <a:latin typeface="Verdana"/>
+                <a:latin typeface="Arial"/>
               </a:rPr>
               <a:t>Neudata | #ClearDataClearImpact</a:t>
             </a:r>
@@ -32669,8 +32351,8 @@
                 <a:solidFill>
                   <a:srgbClr val="0D7377"/>
                 </a:solidFill>
-                <a:latin typeface="Segoe UI"/>
-                <a:cs typeface="Segoe UI"/>
+                <a:latin typeface="Arial"/>
+                <a:cs typeface="Arial"/>
               </a:rPr>
               <a:t>Vì sao OR giảm: giải thích trong Bàn luận</a:t>
             </a:r>
@@ -32736,8 +32418,8 @@
                 <a:solidFill>
                   <a:srgbClr val="0D7377"/>
                 </a:solidFill>
-                <a:latin typeface="Segoe UI"/>
-                <a:cs typeface="Segoe UI"/>
+                <a:latin typeface="Arial"/>
+                <a:cs typeface="Arial"/>
               </a:rPr>
               <a:t>FLUID-ICU Q1 (mô phỏng)</a:t>
             </a:r>
@@ -32755,8 +32437,8 @@
                 <a:solidFill>
                   <a:srgbClr val="000000"/>
                 </a:solidFill>
-                <a:latin typeface="Segoe UI"/>
-                <a:cs typeface="Segoe UI"/>
+                <a:latin typeface="Arial"/>
+                <a:cs typeface="Arial"/>
               </a:rPr>
               <a:t>OR thô 2,49 (1,70 đến 3,70)</a:t>
             </a:r>
@@ -32774,8 +32456,8 @@
                 <a:solidFill>
                   <a:srgbClr val="000000"/>
                 </a:solidFill>
-                <a:latin typeface="Segoe UI"/>
-                <a:cs typeface="Segoe UI"/>
+                <a:latin typeface="Arial"/>
+                <a:cs typeface="Arial"/>
               </a:rPr>
               <a:t>OR hiệu chỉnh 1,62 (1,02 đến 2,59)</a:t>
             </a:r>
@@ -32793,8 +32475,8 @@
                 <a:solidFill>
                   <a:srgbClr val="000000"/>
                 </a:solidFill>
-                <a:latin typeface="Segoe UI"/>
-                <a:cs typeface="Segoe UI"/>
+                <a:latin typeface="Arial"/>
+                <a:cs typeface="Arial"/>
               </a:rPr>
               <a:t>OR quy gán 1,70 (1,09 đến 2,64)</a:t>
             </a:r>
@@ -32812,8 +32494,8 @@
                 <a:solidFill>
                   <a:srgbClr val="000000"/>
                 </a:solidFill>
-                <a:latin typeface="Segoe UI"/>
-                <a:cs typeface="Segoe UI"/>
+                <a:latin typeface="Arial"/>
+                <a:cs typeface="Arial"/>
               </a:rPr>
               <a:t>Chênh lệch = nhiễu do chỉ định</a:t>
             </a:r>
@@ -32881,8 +32563,8 @@
                 <a:solidFill>
                   <a:srgbClr val="FFFFFF"/>
                 </a:solidFill>
-                <a:latin typeface="Segoe UI"/>
-                <a:cs typeface="Segoe UI"/>
+                <a:latin typeface="Arial"/>
+                <a:cs typeface="Arial"/>
               </a:rPr>
               <a:t>THÔNG ĐIỆP CHÍNH   </a:t>
             </a:r>
@@ -32891,8 +32573,8 @@
                 <a:solidFill>
                   <a:srgbClr val="FFFFFF"/>
                 </a:solidFill>
-                <a:latin typeface="Segoe UI"/>
-                <a:cs typeface="Segoe UI"/>
+                <a:latin typeface="Arial"/>
+                <a:cs typeface="Arial"/>
               </a:rPr>
               <a:t>Báo cáo cả hai; giải thích chênh lệch; giữ động từ 'có liên quan'.</a:t>
             </a:r>
@@ -32929,7 +32611,7 @@
                     <a:lumMod val="50000"/>
                   </a:schemeClr>
                 </a:solidFill>
-                <a:latin typeface="Verdana"/>
+                <a:latin typeface="Arial"/>
               </a:rPr>
               <a:t>Neudata | #ClearDataClearImpact</a:t>
             </a:r>
@@ -33059,8 +32741,8 @@
                 <a:solidFill>
                   <a:srgbClr val="0D7377"/>
                 </a:solidFill>
-                <a:latin typeface="Segoe UI"/>
-                <a:cs typeface="Segoe UI"/>
+                <a:latin typeface="Arial"/>
+                <a:cs typeface="Arial"/>
               </a:rPr>
               <a:t>Lời văn tương xứng: chọn động từ theo thiết kế</a:t>
             </a:r>
@@ -33156,8 +32838,8 @@
                 <a:solidFill>
                   <a:srgbClr val="FFFFFF"/>
                 </a:solidFill>
-                <a:latin typeface="Segoe UI"/>
-                <a:cs typeface="Segoe UI"/>
+                <a:latin typeface="Arial"/>
+                <a:cs typeface="Arial"/>
               </a:rPr>
               <a:t>THÔNG ĐIỆP CHÍNH   </a:t>
             </a:r>
@@ -33166,8 +32848,8 @@
                 <a:solidFill>
                   <a:srgbClr val="FFFFFF"/>
                 </a:solidFill>
-                <a:latin typeface="Segoe UI"/>
-                <a:cs typeface="Segoe UI"/>
+                <a:latin typeface="Arial"/>
+                <a:cs typeface="Arial"/>
               </a:rPr>
               <a:t>Chỉ leo thang đến mức thiết kế của bạn cho phép.</a:t>
             </a:r>
@@ -33204,7 +32886,7 @@
                     <a:lumMod val="50000"/>
                   </a:schemeClr>
                 </a:solidFill>
-                <a:latin typeface="Verdana"/>
+                <a:latin typeface="Arial"/>
               </a:rPr>
               <a:t>Neudata | #ClearDataClearImpact</a:t>
             </a:r>
@@ -33321,7 +33003,7 @@
     </a:clrScheme>
     <a:fontScheme name="Office">
       <a:majorFont>
-        <a:latin typeface="Calibri"/>
+        <a:latin typeface="Arial"/>
         <a:ea typeface=""/>
         <a:cs typeface=""/>
         <a:font script="Jpan" typeface="ＭＳ Ｐゴシック"/>
@@ -33356,7 +33038,7 @@
         <a:font script="Geor" typeface="Sylfaen"/>
       </a:majorFont>
       <a:minorFont>
-        <a:latin typeface="Calibri"/>
+        <a:latin typeface="Arial"/>
         <a:ea typeface=""/>
         <a:cs typeface=""/>
         <a:font script="Jpan" typeface="ＭＳ Ｐゴシック"/>
@@ -33641,7 +33323,7 @@
     </a:clrScheme>
     <a:fontScheme name="Office">
       <a:majorFont>
-        <a:latin typeface="Calibri Light" panose="020F0302020204030204"/>
+        <a:latin typeface="Arial" panose="020F0302020204030204"/>
         <a:ea typeface=""/>
         <a:cs typeface=""/>
         <a:font script="Jpan" typeface="游ゴシック Light"/>
@@ -33676,7 +33358,7 @@
         <a:font script="Geor" typeface="Sylfaen"/>
       </a:majorFont>
       <a:minorFont>
-        <a:latin typeface="Calibri" panose="020F0502020204030204"/>
+        <a:latin typeface="Arial" panose="020F0502020204030204"/>
         <a:ea typeface=""/>
         <a:cs typeface=""/>
         <a:font script="Jpan" typeface="游ゴシック"/>
@@ -33902,7 +33584,7 @@
     </a:clrScheme>
     <a:fontScheme name="Office">
       <a:majorFont>
-        <a:latin typeface="Calibri Light" panose="020F0302020204030204"/>
+        <a:latin typeface="Arial" panose="020F0302020204030204"/>
         <a:ea typeface=""/>
         <a:cs typeface=""/>
         <a:font script="Jpan" typeface="游ゴシック Light"/>
@@ -33937,7 +33619,7 @@
         <a:font script="Geor" typeface="Sylfaen"/>
       </a:majorFont>
       <a:minorFont>
-        <a:latin typeface="Calibri" panose="020F0502020204030204"/>
+        <a:latin typeface="Arial" panose="020F0502020204030204"/>
         <a:ea typeface=""/>
         <a:cs typeface=""/>
         <a:font script="Jpan" typeface="游ゴシック"/>

--- a/vi/files/slides/Session_8_VN.pptx
+++ b/vi/files/slides/Session_8_VN.pptx
@@ -741,7 +741,7 @@
           <a:p>
             <a:r>
               <a:rPr lang="en-US" sz="1400" b="0" dirty="0"/>
-              <a:t>Buổi 8 (19:30). Trực tuyến, 19:30-22:30, giải lao 15 phút lúc 20:50. Buổi cuối cùng. Hôm nay ta hoàn thành phần viết bản thảo FLUID-ICU (cả lớp làm Q1, rồi mỗi học viên làm câu hỏi của mình), theo một bài báo từ lúc nộp đến khi nhận ý kiến phản biện, cả lớp luyện phản biện, và khoảng năm học viên tình nguyện trình bày đề cương của mình.</a:t>
+              <a:t>Buổi 8 (19:30). Trực tuyến, 19:30-22:30, giải lao 15 phút lúc 20:50. Buổi cuối cùng. Hôm nay cả lớp hoàn thành phần viết bản thảo FLUID-ICU (cả lớp làm Q1, rồi mỗi học viên làm câu hỏi của mình), theo một bài báo từ lúc nộp đến khi nhận ý kiến phản biện, cả lớp luyện phản biện, và khoảng năm học viên tình nguyện trình bày đề cương của mình.</a:t>
             </a:r>
           </a:p>
           <a:p>
@@ -933,7 +933,7 @@
           <a:p>
             <a:r>
               <a:rPr lang="en-US" sz="1400" b="0" dirty="0"/>
-              <a:t>Ý chính: đa số tạp chí lâm sàng yêu cầu tóm tắt có cấu trúc (Đặt vấn đề, Phương pháp, Kết quả, Kết luận), khoảng 250-300 từ. Thử nghiệm thêm số đăng ký. Nhiều người đọc không đọc tiếp, nên tóm tắt phải tự đứng được.</a:t>
+              <a:t>Ý chính: đa số tạp chí lâm sàng yêu cầu tóm tắt có cấu trúc (Đặt vấn đề, Phương pháp, Kết quả, Kết luận), khoảng 250-300 từ. Thử nghiệm thêm số đăng ký. Nhiều người đọc không đọc tiếp, nên tóm tắt phải đọc riêng vẫn hiểu được.</a:t>
             </a:r>
           </a:p>
           <a:p>
@@ -1452,7 +1452,7 @@
           <a:p>
             <a:r>
               <a:rPr lang="en-US" sz="1400" b="0" dirty="0"/>
-              <a:t>Câu gợi ý: 'Câu đầu Bàn luận của ta có trả lời câu hỏi bằng con số không?' 'Có hạn chế nào kèm hướng sai lệch không?' 'Kết luận có dùng cùng động từ với mục tiêu không?' 'Mọi con số trong tóm tắt có giống hệt phần Kết quả không?'</a:t>
+              <a:t>Câu gợi ý: 'Câu đầu Bàn luận của lớp có trả lời câu hỏi bằng con số không?' 'Có hạn chế nào kèm hướng sai lệch không?' 'Kết luận có dùng cùng động từ với mục tiêu không?' 'Mọi con số trong tóm tắt có giống hệt phần Kết quả không?'</a:t>
             </a:r>
           </a:p>
           <a:p>
@@ -1755,7 +1755,7 @@
           <a:p>
             <a:r>
               <a:rPr lang="en-US" sz="1400" b="0" dirty="0"/>
-              <a:t>Bình chọn: hướng dẫn nào phù hợp đề cương của bạn? Thường là thuần tập hoặc cắt ngang (STROBE). một vài đề cương là thử nghiệm (CONSORT, và SPIRIT cho đề cương).</a:t>
+              <a:t>Bình chọn: hướng dẫn nào phù hợp đề cương của bạn? Thường là thuần tập hoặc cắt ngang (STROBE). Một vài đề cương là thử nghiệm (CONSORT, và SPIRIT cho đề cương).</a:t>
             </a:r>
           </a:p>
         </p:txBody>
@@ -2622,7 +2622,7 @@
           <a:p>
             <a:r>
               <a:rPr lang="en-US" sz="1400" b="0" dirty="0"/>
-              <a:t>Slide chỉ có hình, có chủ ý. Trước giờ giải lao, nói: ta quay lại lúc 21:05 với phần 8.3, làm người phản biện (25 phút), rồi trình bày đề cương (45 phút) và bế mạc (15 phút). Trong giờ giải lao, mở Bài 1 và Bài 2 (bản PDF gốc) và phiếu bài tập Buổi 8, Phần D (phiếu trả lời). Người trình bày: kiểm tra giảng viên đã nhận slide của bạn.</a:t>
+              <a:t>Slide chỉ có hình, có chủ ý. Trước giờ giải lao, nói: lớp quay lại lúc 21:05 với phần 8.3, làm người phản biện (25 phút), rồi trình bày đề cương (45 phút) và bế mạc (15 phút). Trong giờ giải lao, mở Bài 1 và Bài 2 (bản PDF gốc) và phiếu bài tập Buổi 8, Phần D (phiếu trả lời). Người trình bày: kiểm tra giảng viên đã nhận slide của bạn.</a:t>
             </a:r>
           </a:p>
           <a:p>
@@ -3204,7 +3204,7 @@
           <a:p>
             <a:r>
               <a:rPr lang="en-US" sz="1400" b="0" dirty="0"/>
-              <a:t>Các câu gợi ý hữu ích nhất (xem thêm trong hướng dẫn giảng viên): Bài 1: 'Ai Không được làm mù, và ai quyết định lượng dịch truyền?' (bác sĩ không bị làm mù và chính họ kê dịch tạo nên kết cục). 'Tìm p = 0.42 trong phần Bàn luận. Tác giả dùng từ gì?' (trang 10, 'xu hướng không có ý nghĩa thống kê'). Bài 2: 'Ai quyết định người bệnh nào được truyền nhiều dịch hơn?' (bác sĩ, và người bệnh nặng hơn được truyền nhiều hơn: nhiễu do chỉ định). 'Người bệnh phải nằm ICU ít nhất 3 ngày. Ai bị thiếu?' (tử vong sớm và chuyển khoa sớm: sai lệch người sống sót).</a:t>
+              <a:t>Các câu gợi ý hữu ích nhất (xem thêm trong hướng dẫn giảng viên): Bài 1: 'Ai không được làm mù, và ai quyết định lượng dịch truyền?' (bác sĩ không bị làm mù và chính họ kê dịch tạo nên kết cục). 'Tìm p = 0.42 trong phần Bàn luận. Tác giả dùng từ gì?' (trang 10, 'xu hướng không có ý nghĩa thống kê'). Bài 2: 'Ai quyết định người bệnh nào được truyền nhiều dịch hơn?' (bác sĩ, và người bệnh nặng hơn được truyền nhiều hơn: nhiễu do chỉ định). 'Người bệnh phải nằm ICU ít nhất 3 ngày. Ai bị thiếu?' (tử vong sớm và chuyển khoa sớm: sai lệch người sống sót).</a:t>
             </a:r>
           </a:p>
           <a:p>
@@ -3309,7 +3309,7 @@
           <a:p>
             <a:r>
               <a:rPr lang="en-US" sz="1400" b="0" dirty="0"/>
-              <a:t>Bình chọn: nếu phải đổi thực hành ICU ngày mai, bài nào là bằng chứng nhân quả mạnh hơn, bài nào cho biết nhiều hơn về nguy cơ ngoài thực tế? Đáp án: RCT cho nhân quả (nhưng chỉ là thử nghiệm thí điểm nhỏ). nghiên cứu thuần tập cho một mối liên quan lớn, thực tế, cần thử nghiệm để khẳng định.</a:t>
+              <a:t>Bình chọn: nếu phải đổi thực hành ICU ngày mai, bài nào là bằng chứng nhân quả mạnh hơn, bài nào cho biết nhiều hơn về nguy cơ ngoài thực tế? Đáp án: RCT cho nhân quả (nhưng chỉ là thử nghiệm thí điểm nhỏ). Nghiên cứu thuần tập cho một mối liên quan lớn, thực tế, cần thử nghiệm để khẳng định.</a:t>
             </a:r>
           </a:p>
         </p:txBody>
@@ -3402,7 +3402,7 @@
           <a:p>
             <a:r>
               <a:rPr lang="en-US" sz="1400" b="0" dirty="0"/>
-              <a:t>Cả hai đều là bài tốt, đăng trên tạp chí Q1, và cả hai đều có lỗi sửa được. Đó là trạng thái bình thường của y văn, và vì thế thẩm định phê bình là một kỹ năng lâm sàng.</a:t>
+              <a:t>Cả hai đều là bài tốt, đăng trên tạp chí Q1, và cả hai đều có lỗi sửa được. Đó là trạng thái bình thường của các bài đã công bố, và vì thế thẩm định phê bình là một kỹ năng lâm sàng.</a:t>
             </a:r>
           </a:p>
           <a:p>
@@ -3513,7 +3513,7 @@
           <a:p>
             <a:r>
               <a:rPr lang="en-US" sz="1400" b="0" dirty="0"/>
-              <a:t>Nhắc lớp: kỹ năng phản biện vừa dùng nay áp dụng cho đề cương của chính chúng ta, nhưng góp ý theo cách mà bạn muốn được nhận.</a:t>
+              <a:t>Nhắc lớp: kỹ năng phản biện vừa dùng nay áp dụng cho đề cương của chính các bạn, nhưng góp ý theo cách mà bạn muốn được nhận.</a:t>
             </a:r>
           </a:p>
         </p:txBody>
@@ -3600,13 +3600,13 @@
           <a:p>
             <a:r>
               <a:rPr lang="en-US" sz="1400" b="0" dirty="0"/>
-              <a:t>Ai chấm phần trình bày: giảng viên. Hai ba người góp ý, bật micro (hai ngôi sao và một mong muốn).</a:t>
+              <a:t>Ai chấm phần trình bày: giảng viên. Hai ba người góp ý, bật micro (hai điểm mạnh và một đề xuất cải thiện).</a:t>
             </a:r>
           </a:p>
           <a:p>
             <a:r>
               <a:rPr lang="en-US" sz="1400" b="0" dirty="0"/>
-              <a:t>Góp ý trong 2 phút (Course/Assignment/presentation_guide.md): mời hai người nói hai ngôi sao và một mong muốn, bật micro (45 giây). giảng viên 1 phút (một điểm mạnh, cải thiện quan trọng nhất, một câu hỏi). Người trình bày 15 giây ('cảm ơn', không biện hộ). Điền phiếu góp ý ở cuối thang chấm và gửi email kèm khung chat đã lưu sau buổi học.</a:t>
+              <a:t>Góp ý trong 2 phút (Course/Assignment/presentation_guide.md): mời hai người nói hai điểm mạnh và một đề xuất cải thiện, bật micro (45 giây). Giảng viên 1 phút (một điểm mạnh, cải thiện quan trọng nhất, một câu hỏi). Người trình bày 15 giây ('cảm ơn', không biện hộ). Điền phiếu góp ý ở cuối thang chấm và gửi email kèm khung chat đã lưu sau buổi học.</a:t>
             </a:r>
           </a:p>
           <a:p>
@@ -4083,7 +4083,7 @@
           <a:p>
             <a:r>
               <a:rPr lang="en-US" sz="1400" b="0" dirty="0"/>
-              <a:t>Tiêu đề của bạn: kiểm tra 10-16 từ, nêu thiết kế, không có từ đánh giá. Khung tóm tắt: Kết quả là kết quả dự Kiến, nên viết dạng trình bày, VD 'tử vong 28 ngày, RR (KTC 95%)'.</a:t>
+              <a:t>Tiêu đề của bạn: kiểm tra 10-16 từ, nêu thiết kế, không có từ đánh giá. Khung tóm tắt: Kết quả là kết quả dự kiến, nên viết dạng trình bày, VD 'tử vong 28 ngày, RR (KTC 95%)'.</a:t>
             </a:r>
           </a:p>
         </p:txBody>
@@ -4170,7 +4170,7 @@
           <a:p>
             <a:r>
               <a:rPr lang="en-US" sz="1400" b="0" dirty="0"/>
-              <a:t>Truy cập mở: gold OA là tạp chí cho đọc miễn phí và thường thu phí xử lý bài báo (APC). Cả hai bài của chúng ta đều là gold OA. Green OA là tự lưu bản thảo được chấp nhận vào kho lưu trữ, thường sau một thời gian cấm.</a:t>
+              <a:t>Truy cập mở: gold OA là tạp chí cho đọc miễn phí và thường thu phí xử lý bài báo (APC). Cả hai bài ví dụ đều là gold OA. Green OA là tự lưu bản thảo được chấp nhận vào kho lưu trữ, thường sau một thời gian cấm.</a:t>
             </a:r>
           </a:p>
           <a:p>
@@ -4374,7 +4374,7 @@
           <a:p>
             <a:r>
               <a:rPr lang="en-US" sz="1400" b="0" dirty="0"/>
-              <a:t>Tạp chí tiếp theo: định dạng lại theo Hướng dẫn tác giả mới. Một số nhà xuất bản đề nghị chuyển bản thảo và nhận xét sang tạp chí chị em, việc này có thể tiết kiệm hàng tháng. Chỉ khiếu nại khi quyết định có lỗi sai rõ ràng về sự kiện.</a:t>
+              <a:t>Tạp chí tiếp theo: định dạng lại theo Hướng dẫn tác giả mới. Một số nhà xuất bản đề nghị chuyển bản thảo và nhận xét sang tạp chí khác cùng nhà xuất bản, việc này có thể tiết kiệm hàng tháng. Chỉ khiếu nại khi quyết định có lỗi sai rõ ràng về sự kiện.</a:t>
             </a:r>
           </a:p>
           <a:p>
@@ -4467,7 +4467,7 @@
           <a:p>
             <a:r>
               <a:rPr lang="en-US" sz="1400" b="0" dirty="0"/>
-              <a:t>Poster: một bảng quảng cáo, không phải bài báo dán lên tường. Tiêu đề ngắn nêu phát hiện, vài chữ về đặt vấn đề và phương pháp (một sơ đồ), một hình lớn, thông điệp mang về trong một câu, và mã QR dẫn tới chi tiết. Phải đọc được từ khoảng cách 2 mét.</a:t>
+              <a:t>Poster không phải bài báo dán lên tường. Tiêu đề ngắn nêu phát hiện, vài chữ về đặt vấn đề và phương pháp (một sơ đồ), một hình lớn, thông điệp mang về trong một câu, và mã QR dẫn tới chi tiết. Phải đọc được từ khoảng cách 2 mét.</a:t>
             </a:r>
           </a:p>
           <a:p>
@@ -4734,13 +4734,19 @@
           <a:p>
             <a:r>
               <a:rPr lang="en-US" sz="1400" b="0" dirty="0"/>
-              <a:t>Bài kiểm tra cuối khóa (22:15-22:23). Cùng biểu mẫu trực tuyến như bài kiểm tra đầu khóa ở Buổi 1.</a:t>
+              <a:t>Bài kiểm tra cuối khóa (22:15-22:23), cùng Google Form như Buổi 1. Họ và tên dùng để ghép hai lần làm bài.</a:t>
             </a:r>
           </a:p>
           <a:p>
             <a:r>
               <a:rPr lang="en-US" sz="1400" b="0" dirty="0"/>
-              <a:t>Sau buổi học: tính mức thay đổi điểm trung bình trước/sau bằng bảng trong đáp án bài kiểm tra trước/sau (Course/Assessment) và báo cáo cho lãnh đạo khoa trong báo cáo khóa học.</a:t>
+              <a:t>Giảng viên xem kết quả ngay trong thẻ Câu trả lời (Responses) và bảng kết quả liên kết. Học viên không thấy điểm.</a:t>
+            </a:r>
+          </a:p>
+          <a:p>
+            <a:r>
+              <a:rPr lang="en-US" sz="1400" b="0" dirty="0"/>
+              <a:t>Sau đó: báo cáo mức thay đổi điểm trung bình trước/sau trong báo cáo khóa học (đáp án: Course/Assessment).</a:t>
             </a:r>
           </a:p>
         </p:txBody>
@@ -4821,13 +4827,13 @@
           <a:p>
             <a:r>
               <a:rPr lang="en-US" sz="1400" b="0" dirty="0"/>
-              <a:t>Những gì đã xây dựng (1 phút). Ghi nhận thành quả: mỗi học viên có một đề cương có thể nộp hội đồng đạo đức và một bản thảo viết từ bộ dữ liệu của khóa học. CRF = phiếu thu thập dữ liệu.</a:t>
+              <a:t>Những gì đã xây dựng (1 phút). Mỗi học viên có một đề cương có thể nộp hội đồng đạo đức và một bản thảo bài báo. CRF = phiếu thu thập dữ liệu.</a:t>
             </a:r>
           </a:p>
           <a:p>
             <a:r>
               <a:rPr lang="en-US" sz="1400" b="0" dirty="0"/>
-              <a:t>Hỏi (mời hai ba người trả lời, bật micro): bước tiếp theo với đề cương của bạn là gì? (Trao đổi với ai, ngày dự kiến nộp hội đồng đạo đức.)</a:t>
+              <a:t>Hỏi hai ba người: bước tiếp theo với đề cương của bạn là gì?</a:t>
             </a:r>
           </a:p>
         </p:txBody>
@@ -4908,7 +4914,7 @@
           <a:p>
             <a:r>
               <a:rPr lang="en-US" sz="1400" b="0" dirty="0"/>
-              <a:t>Đánh giá (2 phút, có thể làm tiếp ở nhà). Phiếu trực tuyến ngắn, ẩn danh (đường dẫn trong khung chat). Câu hỏi về tốc độ rất quan trọng: chúng tôi thiết kế khóa học đi chậm và học trực tuyến buổi tối, hãy cho biết như vậy đã phù hợp chưa.</a:t>
+              <a:t>Đánh giá (2 phút). Phiếu trực tuyến ngắn, ẩn danh, đường link trong chat. Câu hỏi về tốc độ học là quan trọng nhất.</a:t>
             </a:r>
           </a:p>
         </p:txBody>
@@ -5109,12 +5115,6 @@
               <a:t>Bình duyệt theo Course/Assignment/peer_review_instructions.md và bảng kiểm 10 câu hỏi ở 8.3. Tác giả trả lời bằng Course/Templates/Response_to_Reviewers_Template.</a:t>
             </a:r>
           </a:p>
-          <a:p>
-            <a:r>
-              <a:rPr lang="en-US" sz="1400" b="0" dirty="0"/>
-              <a:t>Đây là bước cuối cùng của toàn bộ quá trình nghiên cứu, đúng như sau khi nộp bài thật.</a:t>
-            </a:r>
-          </a:p>
         </p:txBody>
       </p:sp>
       <p:sp>
@@ -5199,19 +5199,13 @@
           <a:p>
             <a:r>
               <a:rPr lang="en-US" sz="1400" b="0" dirty="0"/>
-              <a:t>Cấp độ 2 (thực hành, cho những ai muốn tự phân tích): mô hình thống kê bằng R, mỗi buổi một nhóm mô hình: hồi quy tuyến tính, logistic, mô hình đếm (Poisson, nhị thức âm) và Cox, cùng các giả định và cách báo cáo. Làm sạch dữ liệu, Bảng 1 và kiến thức cơ bản về dữ liệu bị thiếu được dạy vừa đủ cho phân tích, và mỗi học viên làm một dự án phân tích cá nhân. Điều kiện: đã học khóa này và khóa miễn phí Phân tích dữ liệu lâm sàng với R của Neudata.</a:t>
+              <a:t>Cấp độ 2: mô hình thống kê bằng R (tuyến tính, logistic, mô hình đếm và Cox) kèm một dự án phân tích cá nhân. Cấp độ 3: phương pháp nâng cao, theo yêu cầu. Chi tiết trong Course_Levels/.</a:t>
             </a:r>
           </a:p>
           <a:p>
             <a:r>
               <a:rPr lang="en-US" sz="1400" b="0" dirty="0"/>
-              <a:t>Cấp độ 3 (theo yêu cầu, dạng hội thảo chuyên đề và tư vấn): dự án có thể tái lập với quản lý phiên bản và Quarto, hình đạt yêu cầu của tạp chí, phân tích dữ liệu bị thiếu và phân tích độ nhạy chuyên sâu, tổng quan hệ thống và phân tích gộp, và các phương pháp nâng cao khác (dự báo, độ chính xác chẩn đoán, sống còn nâng cao, dữ liệu dọc và dữ liệu theo cụm). Xem Course_Levels/.</a:t>
-            </a:r>
-          </a:p>
-          <a:p>
-            <a:r>
-              <a:rPr lang="en-US" sz="1400" b="0" dirty="0"/>
-              <a:t>Gửi thông tin liên hệ của giảng viên vào khung chat để học viên hỏi thêm.</a:t>
+              <a:t>Gửi thông tin liên hệ của giảng viên vào chat.</a:t>
             </a:r>
           </a:p>
         </p:txBody>
@@ -5757,7 +5751,7 @@
           <a:p>
             <a:r>
               <a:rPr lang="en-US" sz="1400" b="0" dirty="0"/>
-              <a:t>Không bao giờ: 'xu hướng không có ý nghĩa' với p = 0.42 (Bài 1, trang 10, chú giải #41). 'Không khác biệt' khi nghiên cứu quá nhỏ (hãy nói 'không có bằng chứng về khác biệt', #29). 'Đầu tiên', 'chưa từng', 'mới' khi chưa kiểm chứng ('cân bằng dịch thấp nhất từng được công bố', #40). 'Tác động', 'không tác động', 'chứng tỏ' trong nghiên cứu quan sát (Bài 2, #1, #27, #28). 'So sánh đáng tin cậy nhất' (#32). xếp hạng HR từ các nghiên cứu thuần tập khác nhau thành 'nguy cơ cao nhất' mà không có kiểm định (#37).</a:t>
+              <a:t>Không bao giờ: 'xu hướng không có ý nghĩa' với p = 0.42 (Bài 1, trang 10, chú giải #41). 'Không khác biệt' khi nghiên cứu quá nhỏ (hãy nói 'không có bằng chứng về khác biệt', #29). 'Đầu tiên', 'chưa từng', 'mới' khi chưa kiểm chứng ('cân bằng dịch thấp nhất từng được công bố', #40). 'Tác động', 'không tác động', 'chứng tỏ' trong nghiên cứu quan sát (Bài 2, #1, #27, #28). 'So sánh đáng tin cậy nhất' (#32). Xếp hạng HR từ các nghiên cứu thuần tập khác nhau thành 'nguy cơ cao nhất' mà không có kiểm định (#37).</a:t>
             </a:r>
           </a:p>
           <a:p>
@@ -9424,12 +9418,12 @@
           </a:ln>
         </p:spPr>
         <p:txBody>
-          <a:bodyPr wrap="square" lIns="137160" tIns="91440" rIns="137160" bIns="91440" rtlCol="0" anchor="t">
+          <a:bodyPr wrap="square" lIns="137160" tIns="91440" rIns="137160" bIns="91440" rtlCol="0" anchor="ctr">
             <a:normAutofit/>
           </a:bodyPr>
           <a:lstStyle/>
           <a:p>
-            <a:pPr marL="0" indent="0" algn="l">
+            <a:pPr marL="0" indent="0" algn="ctr">
               <a:buNone/>
             </a:pPr>
             <a:r>
@@ -9444,15 +9438,14 @@
             </a:r>
           </a:p>
           <a:p>
-            <a:pPr marL="274320" indent="-274320" algn="l">
+            <a:pPr marL="0" indent="0" algn="ctr">
               <a:lnSpc>
                 <a:spcPct val="104000"/>
               </a:lnSpc>
               <a:spcBef>
                 <a:spcPts val="300"/>
               </a:spcBef>
-              <a:buFont typeface="Arial"/>
-              <a:buChar char="•"/>
+              <a:buNone/>
             </a:pPr>
             <a:r>
               <a:rPr lang="en-US" sz="1500" dirty="0">
@@ -9466,15 +9459,14 @@
             </a:r>
           </a:p>
           <a:p>
-            <a:pPr marL="274320" indent="-274320" algn="l">
+            <a:pPr marL="0" indent="0" algn="ctr">
               <a:lnSpc>
                 <a:spcPct val="104000"/>
               </a:lnSpc>
               <a:spcBef>
                 <a:spcPts val="300"/>
               </a:spcBef>
-              <a:buFont typeface="Arial"/>
-              <a:buChar char="•"/>
+              <a:buNone/>
             </a:pPr>
             <a:r>
               <a:rPr lang="en-US" sz="1500" dirty="0">
@@ -9488,15 +9480,14 @@
             </a:r>
           </a:p>
           <a:p>
-            <a:pPr marL="274320" indent="-274320" algn="l">
+            <a:pPr marL="0" indent="0" algn="ctr">
               <a:lnSpc>
                 <a:spcPct val="104000"/>
               </a:lnSpc>
               <a:spcBef>
                 <a:spcPts val="300"/>
               </a:spcBef>
-              <a:buFont typeface="Arial"/>
-              <a:buChar char="•"/>
+              <a:buNone/>
             </a:pPr>
             <a:r>
               <a:rPr lang="en-US" sz="1500" dirty="0">
@@ -9510,15 +9501,14 @@
             </a:r>
           </a:p>
           <a:p>
-            <a:pPr marL="274320" indent="-274320" algn="l">
+            <a:pPr marL="0" indent="0" algn="ctr">
               <a:lnSpc>
                 <a:spcPct val="104000"/>
               </a:lnSpc>
               <a:spcBef>
                 <a:spcPts val="300"/>
               </a:spcBef>
-              <a:buFont typeface="Arial"/>
-              <a:buChar char="•"/>
+              <a:buNone/>
             </a:pPr>
             <a:r>
               <a:rPr lang="en-US" sz="1500" dirty="0">
@@ -9696,7 +9686,7 @@
                 <a:latin typeface="Arial"/>
                 <a:cs typeface="Arial"/>
               </a:rPr>
-              <a:t>Tóm tắt có cấu trúc: tủ kính trưng bày</a:t>
+              <a:t>Tóm tắt có cấu trúc: phần được đọc đầu tiên</a:t>
             </a:r>
           </a:p>
         </p:txBody>
@@ -10817,12 +10807,12 @@
           </a:ln>
         </p:spPr>
         <p:txBody>
-          <a:bodyPr wrap="square" lIns="137160" tIns="91440" rIns="137160" bIns="91440" rtlCol="0" anchor="t">
+          <a:bodyPr wrap="square" lIns="137160" tIns="91440" rIns="137160" bIns="91440" rtlCol="0" anchor="ctr">
             <a:normAutofit/>
           </a:bodyPr>
           <a:lstStyle/>
           <a:p>
-            <a:pPr marL="0" indent="0" algn="l">
+            <a:pPr marL="0" indent="0" algn="ctr">
               <a:lnSpc>
                 <a:spcPct val="104000"/>
               </a:lnSpc>
@@ -10843,7 +10833,7 @@
             </a:r>
           </a:p>
           <a:p>
-            <a:pPr marL="0" indent="0" algn="l">
+            <a:pPr marL="0" indent="0" algn="ctr">
               <a:lnSpc>
                 <a:spcPct val="104000"/>
               </a:lnSpc>
@@ -10864,7 +10854,7 @@
             </a:r>
           </a:p>
           <a:p>
-            <a:pPr marL="0" indent="0" algn="l">
+            <a:pPr marL="0" indent="0" algn="ctr">
               <a:lnSpc>
                 <a:spcPct val="104000"/>
               </a:lnSpc>
@@ -10951,12 +10941,12 @@
           </a:ln>
         </p:spPr>
         <p:txBody>
-          <a:bodyPr wrap="square" lIns="137160" tIns="91440" rIns="137160" bIns="91440" rtlCol="0" anchor="t">
+          <a:bodyPr wrap="square" lIns="137160" tIns="91440" rIns="137160" bIns="91440" rtlCol="0" anchor="ctr">
             <a:normAutofit/>
           </a:bodyPr>
           <a:lstStyle/>
           <a:p>
-            <a:pPr marL="0" indent="0" algn="l">
+            <a:pPr marL="0" indent="0" algn="ctr">
               <a:lnSpc>
                 <a:spcPct val="104000"/>
               </a:lnSpc>
@@ -10977,7 +10967,7 @@
             </a:r>
           </a:p>
           <a:p>
-            <a:pPr marL="0" indent="0" algn="l">
+            <a:pPr marL="0" indent="0" algn="ctr">
               <a:lnSpc>
                 <a:spcPct val="104000"/>
               </a:lnSpc>
@@ -10998,7 +10988,7 @@
             </a:r>
           </a:p>
           <a:p>
-            <a:pPr marL="0" indent="0" algn="l">
+            <a:pPr marL="0" indent="0" algn="ctr">
               <a:lnSpc>
                 <a:spcPct val="104000"/>
               </a:lnSpc>
@@ -11336,12 +11326,12 @@
           </a:ln>
         </p:spPr>
         <p:txBody>
-          <a:bodyPr wrap="square" lIns="137160" tIns="91440" rIns="137160" bIns="91440" rtlCol="0" anchor="t">
+          <a:bodyPr wrap="square" lIns="137160" tIns="91440" rIns="137160" bIns="91440" rtlCol="0" anchor="ctr">
             <a:normAutofit/>
           </a:bodyPr>
           <a:lstStyle/>
           <a:p>
-            <a:pPr marL="0" indent="0" algn="l">
+            <a:pPr marL="0" indent="0" algn="ctr">
               <a:lnSpc>
                 <a:spcPct val="104000"/>
               </a:lnSpc>
@@ -11362,7 +11352,7 @@
             </a:r>
           </a:p>
           <a:p>
-            <a:pPr marL="0" indent="0" algn="l">
+            <a:pPr marL="0" indent="0" algn="ctr">
               <a:lnSpc>
                 <a:spcPct val="104000"/>
               </a:lnSpc>
@@ -11383,7 +11373,7 @@
             </a:r>
           </a:p>
           <a:p>
-            <a:pPr marL="0" indent="0" algn="l">
+            <a:pPr marL="0" indent="0" algn="ctr">
               <a:lnSpc>
                 <a:spcPct val="104000"/>
               </a:lnSpc>
@@ -11470,12 +11460,12 @@
           </a:ln>
         </p:spPr>
         <p:txBody>
-          <a:bodyPr wrap="square" lIns="137160" tIns="91440" rIns="137160" bIns="91440" rtlCol="0" anchor="t">
+          <a:bodyPr wrap="square" lIns="137160" tIns="91440" rIns="137160" bIns="91440" rtlCol="0" anchor="ctr">
             <a:normAutofit/>
           </a:bodyPr>
           <a:lstStyle/>
           <a:p>
-            <a:pPr marL="0" indent="0" algn="l">
+            <a:pPr marL="0" indent="0" algn="ctr">
               <a:lnSpc>
                 <a:spcPct val="104000"/>
               </a:lnSpc>
@@ -11496,7 +11486,7 @@
             </a:r>
           </a:p>
           <a:p>
-            <a:pPr marL="0" indent="0" algn="l">
+            <a:pPr marL="0" indent="0" algn="ctr">
               <a:lnSpc>
                 <a:spcPct val="104000"/>
               </a:lnSpc>
@@ -11517,7 +11507,7 @@
             </a:r>
           </a:p>
           <a:p>
-            <a:pPr marL="0" indent="0" algn="l">
+            <a:pPr marL="0" indent="0" algn="ctr">
               <a:lnSpc>
                 <a:spcPct val="104000"/>
               </a:lnSpc>
@@ -11604,12 +11594,12 @@
           </a:ln>
         </p:spPr>
         <p:txBody>
-          <a:bodyPr wrap="square" lIns="137160" tIns="91440" rIns="137160" bIns="91440" rtlCol="0" anchor="t">
+          <a:bodyPr wrap="square" lIns="137160" tIns="91440" rIns="137160" bIns="91440" rtlCol="0" anchor="ctr">
             <a:normAutofit/>
           </a:bodyPr>
           <a:lstStyle/>
           <a:p>
-            <a:pPr marL="0" indent="0" algn="l">
+            <a:pPr marL="0" indent="0" algn="ctr">
               <a:lnSpc>
                 <a:spcPct val="104000"/>
               </a:lnSpc>
@@ -11630,7 +11620,7 @@
             </a:r>
           </a:p>
           <a:p>
-            <a:pPr marL="0" indent="0" algn="l">
+            <a:pPr marL="0" indent="0" algn="ctr">
               <a:lnSpc>
                 <a:spcPct val="104000"/>
               </a:lnSpc>
@@ -11651,7 +11641,7 @@
             </a:r>
           </a:p>
           <a:p>
-            <a:pPr marL="0" indent="0" algn="l">
+            <a:pPr marL="0" indent="0" algn="ctr">
               <a:lnSpc>
                 <a:spcPct val="104000"/>
               </a:lnSpc>
@@ -12371,12 +12361,12 @@
           </a:ln>
         </p:spPr>
         <p:txBody>
-          <a:bodyPr wrap="square" lIns="137160" tIns="91440" rIns="137160" bIns="91440" rtlCol="0" anchor="t">
+          <a:bodyPr wrap="square" lIns="137160" tIns="91440" rIns="137160" bIns="91440" rtlCol="0" anchor="ctr">
             <a:normAutofit/>
           </a:bodyPr>
           <a:lstStyle/>
           <a:p>
-            <a:pPr marL="0" indent="0" algn="l">
+            <a:pPr marL="0" indent="0" algn="ctr">
               <a:buNone/>
             </a:pPr>
             <a:r>
@@ -12391,15 +12381,14 @@
             </a:r>
           </a:p>
           <a:p>
-            <a:pPr marL="274320" indent="-274320" algn="l">
+            <a:pPr marL="0" indent="0" algn="ctr">
               <a:lnSpc>
                 <a:spcPct val="104000"/>
               </a:lnSpc>
               <a:spcBef>
                 <a:spcPts val="300"/>
               </a:spcBef>
-              <a:buFont typeface="Arial"/>
-              <a:buChar char="•"/>
+              <a:buNone/>
             </a:pPr>
             <a:r>
               <a:rPr lang="en-US" sz="1500" dirty="0">
@@ -12413,15 +12402,14 @@
             </a:r>
           </a:p>
           <a:p>
-            <a:pPr marL="274320" indent="-274320" algn="l">
+            <a:pPr marL="0" indent="0" algn="ctr">
               <a:lnSpc>
                 <a:spcPct val="104000"/>
               </a:lnSpc>
               <a:spcBef>
                 <a:spcPts val="300"/>
               </a:spcBef>
-              <a:buFont typeface="Arial"/>
-              <a:buChar char="•"/>
+              <a:buNone/>
             </a:pPr>
             <a:r>
               <a:rPr lang="en-US" sz="1500" dirty="0">
@@ -12435,15 +12423,14 @@
             </a:r>
           </a:p>
           <a:p>
-            <a:pPr marL="274320" indent="-274320" algn="l">
+            <a:pPr marL="0" indent="0" algn="ctr">
               <a:lnSpc>
                 <a:spcPct val="104000"/>
               </a:lnSpc>
               <a:spcBef>
                 <a:spcPts val="300"/>
               </a:spcBef>
-              <a:buFont typeface="Arial"/>
-              <a:buChar char="•"/>
+              <a:buNone/>
             </a:pPr>
             <a:r>
               <a:rPr lang="en-US" sz="1500" dirty="0">
@@ -12902,12 +12889,12 @@
           </a:ln>
         </p:spPr>
         <p:txBody>
-          <a:bodyPr wrap="square" lIns="137160" tIns="91440" rIns="137160" bIns="91440" rtlCol="0" anchor="t">
+          <a:bodyPr wrap="square" lIns="137160" tIns="91440" rIns="137160" bIns="91440" rtlCol="0" anchor="ctr">
             <a:normAutofit/>
           </a:bodyPr>
           <a:lstStyle/>
           <a:p>
-            <a:pPr marL="0" indent="0" algn="l">
+            <a:pPr marL="0" indent="0" algn="ctr">
               <a:buNone/>
             </a:pPr>
             <a:r>
@@ -12922,15 +12909,14 @@
             </a:r>
           </a:p>
           <a:p>
-            <a:pPr marL="274320" indent="-274320" algn="l">
+            <a:pPr marL="0" indent="0" algn="ctr">
               <a:lnSpc>
                 <a:spcPct val="104000"/>
               </a:lnSpc>
               <a:spcBef>
                 <a:spcPts val="300"/>
               </a:spcBef>
-              <a:buFont typeface="Arial"/>
-              <a:buChar char="•"/>
+              <a:buNone/>
             </a:pPr>
             <a:r>
               <a:rPr lang="en-US" sz="1500" dirty="0">
@@ -12940,19 +12926,18 @@
                 <a:latin typeface="Arial"/>
                 <a:cs typeface="Arial"/>
               </a:rPr>
-              <a:t>Bản nháp hoàn chỉnh, khoảng 2 000 từ</a:t>
-            </a:r>
-          </a:p>
-          <a:p>
-            <a:pPr marL="274320" indent="-274320" algn="l">
+              <a:t>Bản nháp hoàn chỉnh, khoảng 2000 từ</a:t>
+            </a:r>
+          </a:p>
+          <a:p>
+            <a:pPr marL="0" indent="0" algn="ctr">
               <a:lnSpc>
                 <a:spcPct val="104000"/>
               </a:lnSpc>
               <a:spcBef>
                 <a:spcPts val="300"/>
               </a:spcBef>
-              <a:buFont typeface="Arial"/>
-              <a:buChar char="•"/>
+              <a:buNone/>
             </a:pPr>
             <a:r>
               <a:rPr lang="en-US" sz="1500" dirty="0">
@@ -12966,15 +12951,14 @@
             </a:r>
           </a:p>
           <a:p>
-            <a:pPr marL="274320" indent="-274320" algn="l">
+            <a:pPr marL="0" indent="0" algn="ctr">
               <a:lnSpc>
                 <a:spcPct val="104000"/>
               </a:lnSpc>
               <a:spcBef>
                 <a:spcPts val="300"/>
               </a:spcBef>
-              <a:buFont typeface="Arial"/>
-              <a:buChar char="•"/>
+              <a:buNone/>
             </a:pPr>
             <a:r>
               <a:rPr lang="en-US" sz="1500" dirty="0">
@@ -12988,15 +12972,14 @@
             </a:r>
           </a:p>
           <a:p>
-            <a:pPr marL="274320" indent="-274320" algn="l">
+            <a:pPr marL="0" indent="0" algn="ctr">
               <a:lnSpc>
                 <a:spcPct val="104000"/>
               </a:lnSpc>
               <a:spcBef>
                 <a:spcPts val="300"/>
               </a:spcBef>
-              <a:buFont typeface="Arial"/>
-              <a:buChar char="•"/>
+              <a:buNone/>
             </a:pPr>
             <a:r>
               <a:rPr lang="en-US" sz="1500" dirty="0">
@@ -13319,7 +13302,7 @@
                 <a:latin typeface="Arial"/>
                 <a:cs typeface="Arial"/>
               </a:rPr>
-              <a:t>Từ bảng kiểm đến người phản biện, và những cái bẫy trên đường</a:t>
+              <a:t>Từ bảng kiểm đến người phản biện, và những điều cần tránh</a:t>
             </a:r>
           </a:p>
         </p:txBody>
@@ -13604,7 +13587,7 @@
                           <a:latin typeface="Arial"/>
                           <a:cs typeface="Arial"/>
                         </a:rPr>
-                        <a:t>Ví dụ của chúng ta</a:t>
+                        <a:t>Ví dụ trong khóa học</a:t>
                       </a:r>
                     </a:p>
                   </a:txBody>
@@ -14464,12 +14447,12 @@
           </a:ln>
         </p:spPr>
         <p:txBody>
-          <a:bodyPr wrap="square" lIns="137160" tIns="91440" rIns="137160" bIns="91440" rtlCol="0" anchor="t">
+          <a:bodyPr wrap="square" lIns="137160" tIns="91440" rIns="137160" bIns="91440" rtlCol="0" anchor="ctr">
             <a:normAutofit/>
           </a:bodyPr>
           <a:lstStyle/>
           <a:p>
-            <a:pPr marL="0" indent="0" algn="l">
+            <a:pPr marL="0" indent="0" algn="ctr">
               <a:buNone/>
             </a:pPr>
             <a:r>
@@ -14484,15 +14467,14 @@
             </a:r>
           </a:p>
           <a:p>
-            <a:pPr marL="274320" indent="-274320" algn="l">
+            <a:pPr marL="0" indent="0" algn="ctr">
               <a:lnSpc>
                 <a:spcPct val="104000"/>
               </a:lnSpc>
               <a:spcBef>
                 <a:spcPts val="300"/>
               </a:spcBef>
-              <a:buFont typeface="Arial"/>
-              <a:buChar char="•"/>
+              <a:buNone/>
             </a:pPr>
             <a:r>
               <a:rPr lang="en-US" sz="1500" dirty="0">
@@ -14506,15 +14488,14 @@
             </a:r>
           </a:p>
           <a:p>
-            <a:pPr marL="274320" indent="-274320" algn="l">
+            <a:pPr marL="0" indent="0" algn="ctr">
               <a:lnSpc>
                 <a:spcPct val="104000"/>
               </a:lnSpc>
               <a:spcBef>
                 <a:spcPts val="300"/>
               </a:spcBef>
-              <a:buFont typeface="Arial"/>
-              <a:buChar char="•"/>
+              <a:buNone/>
             </a:pPr>
             <a:r>
               <a:rPr lang="en-US" sz="1500" dirty="0">
@@ -14528,15 +14509,14 @@
             </a:r>
           </a:p>
           <a:p>
-            <a:pPr marL="274320" indent="-274320" algn="l">
+            <a:pPr marL="0" indent="0" algn="ctr">
               <a:lnSpc>
                 <a:spcPct val="104000"/>
               </a:lnSpc>
               <a:spcBef>
                 <a:spcPts val="300"/>
               </a:spcBef>
-              <a:buFont typeface="Arial"/>
-              <a:buChar char="•"/>
+              <a:buNone/>
             </a:pPr>
             <a:r>
               <a:rPr lang="en-US" sz="1500" dirty="0">
@@ -14603,7 +14583,7 @@
                 <a:latin typeface="Arial"/>
                 <a:cs typeface="Arial"/>
               </a:rPr>
-              <a:t>Mọi người trở lại tinh thần viết</a:t>
+              <a:t>Mọi người sẵn sàng viết tiếp</a:t>
             </a:r>
           </a:p>
         </p:txBody>
@@ -14838,7 +14818,7 @@
                 <a:latin typeface="Arial"/>
                 <a:cs typeface="Arial"/>
               </a:rPr>
-              <a:t>Chọn tạp chí trước khi viết: tạp chí đặt ra luật chơi.</a:t>
+              <a:t>Chọn tạp chí trước khi viết: quy định của tạp chí chi phối cách viết.</a:t>
             </a:r>
           </a:p>
         </p:txBody>
@@ -14908,12 +14888,12 @@
           </a:ln>
         </p:spPr>
         <p:txBody>
-          <a:bodyPr wrap="square" lIns="137160" tIns="91440" rIns="137160" bIns="91440" rtlCol="0" anchor="t">
+          <a:bodyPr wrap="square" lIns="137160" tIns="91440" rIns="137160" bIns="91440" rtlCol="0" anchor="ctr">
             <a:normAutofit/>
           </a:bodyPr>
           <a:lstStyle/>
           <a:p>
-            <a:pPr marL="0" indent="0" algn="l">
+            <a:pPr marL="0" indent="0" algn="ctr">
               <a:lnSpc>
                 <a:spcPct val="104000"/>
               </a:lnSpc>
@@ -14934,7 +14914,7 @@
             </a:r>
           </a:p>
           <a:p>
-            <a:pPr marL="0" indent="0" algn="l">
+            <a:pPr marL="0" indent="0" algn="ctr">
               <a:lnSpc>
                 <a:spcPct val="104000"/>
               </a:lnSpc>
@@ -14955,7 +14935,7 @@
             </a:r>
           </a:p>
           <a:p>
-            <a:pPr marL="0" indent="0" algn="l">
+            <a:pPr marL="0" indent="0" algn="ctr">
               <a:lnSpc>
                 <a:spcPct val="104000"/>
               </a:lnSpc>
@@ -15042,12 +15022,12 @@
           </a:ln>
         </p:spPr>
         <p:txBody>
-          <a:bodyPr wrap="square" lIns="137160" tIns="91440" rIns="137160" bIns="91440" rtlCol="0" anchor="t">
+          <a:bodyPr wrap="square" lIns="137160" tIns="91440" rIns="137160" bIns="91440" rtlCol="0" anchor="ctr">
             <a:normAutofit/>
           </a:bodyPr>
           <a:lstStyle/>
           <a:p>
-            <a:pPr marL="0" indent="0" algn="l">
+            <a:pPr marL="0" indent="0" algn="ctr">
               <a:lnSpc>
                 <a:spcPct val="104000"/>
               </a:lnSpc>
@@ -15068,7 +15048,7 @@
             </a:r>
           </a:p>
           <a:p>
-            <a:pPr marL="0" indent="0" algn="l">
+            <a:pPr marL="0" indent="0" algn="ctr">
               <a:lnSpc>
                 <a:spcPct val="104000"/>
               </a:lnSpc>
@@ -15155,12 +15135,12 @@
           </a:ln>
         </p:spPr>
         <p:txBody>
-          <a:bodyPr wrap="square" lIns="137160" tIns="91440" rIns="137160" bIns="91440" rtlCol="0" anchor="t">
+          <a:bodyPr wrap="square" lIns="137160" tIns="91440" rIns="137160" bIns="91440" rtlCol="0" anchor="ctr">
             <a:normAutofit/>
           </a:bodyPr>
           <a:lstStyle/>
           <a:p>
-            <a:pPr marL="0" indent="0" algn="l">
+            <a:pPr marL="0" indent="0" algn="ctr">
               <a:lnSpc>
                 <a:spcPct val="104000"/>
               </a:lnSpc>
@@ -15181,7 +15161,7 @@
             </a:r>
           </a:p>
           <a:p>
-            <a:pPr marL="0" indent="0" algn="l">
+            <a:pPr marL="0" indent="0" algn="ctr">
               <a:lnSpc>
                 <a:spcPct val="104000"/>
               </a:lnSpc>
@@ -15202,7 +15182,7 @@
             </a:r>
           </a:p>
           <a:p>
-            <a:pPr marL="0" indent="0" algn="l">
+            <a:pPr marL="0" indent="0" algn="ctr">
               <a:lnSpc>
                 <a:spcPct val="104000"/>
               </a:lnSpc>
@@ -15289,12 +15269,12 @@
           </a:ln>
         </p:spPr>
         <p:txBody>
-          <a:bodyPr wrap="square" lIns="137160" tIns="91440" rIns="137160" bIns="91440" rtlCol="0" anchor="t">
+          <a:bodyPr wrap="square" lIns="137160" tIns="91440" rIns="137160" bIns="91440" rtlCol="0" anchor="ctr">
             <a:normAutofit/>
           </a:bodyPr>
           <a:lstStyle/>
           <a:p>
-            <a:pPr marL="0" indent="0" algn="l">
+            <a:pPr marL="0" indent="0" algn="ctr">
               <a:lnSpc>
                 <a:spcPct val="104000"/>
               </a:lnSpc>
@@ -15315,7 +15295,7 @@
             </a:r>
           </a:p>
           <a:p>
-            <a:pPr marL="0" indent="0" algn="l">
+            <a:pPr marL="0" indent="0" algn="ctr">
               <a:lnSpc>
                 <a:spcPct val="104000"/>
               </a:lnSpc>
@@ -15336,7 +15316,7 @@
             </a:r>
           </a:p>
           <a:p>
-            <a:pPr marL="0" indent="0" algn="l">
+            <a:pPr marL="0" indent="0" algn="ctr">
               <a:lnSpc>
                 <a:spcPct val="104000"/>
               </a:lnSpc>
@@ -15576,7 +15556,7 @@
                 <a:latin typeface="Arial"/>
                 <a:cs typeface="Arial"/>
               </a:rPr>
-              <a:t>Nhận diện tạp chí săn mồi</a:t>
+              <a:t>Nhận diện tạp chí săn mồi (predatory journal)</a:t>
             </a:r>
           </a:p>
         </p:txBody>
@@ -15683,7 +15663,7 @@
                 <a:latin typeface="Arial"/>
                 <a:cs typeface="Arial"/>
               </a:rPr>
-              <a:t>Nếu tạp chí tìm đến bạn bằng email tâng bốc, hãy kiểm tra hai lần.</a:t>
+              <a:t>Nếu tạp chí tìm đến bạn bằng email tâng bốc, hãy kiểm tra kỹ.</a:t>
             </a:r>
           </a:p>
         </p:txBody>
@@ -16100,12 +16080,12 @@
           </a:ln>
         </p:spPr>
         <p:txBody>
-          <a:bodyPr wrap="square" lIns="137160" tIns="91440" rIns="137160" bIns="91440" rtlCol="0" anchor="t">
+          <a:bodyPr wrap="square" lIns="137160" tIns="91440" rIns="137160" bIns="91440" rtlCol="0" anchor="ctr">
             <a:normAutofit/>
           </a:bodyPr>
           <a:lstStyle/>
           <a:p>
-            <a:pPr marL="0" indent="0" algn="l">
+            <a:pPr marL="0" indent="0" algn="ctr">
               <a:buNone/>
             </a:pPr>
             <a:r>
@@ -16120,15 +16100,14 @@
             </a:r>
           </a:p>
           <a:p>
-            <a:pPr marL="274320" indent="-274320" algn="l">
+            <a:pPr marL="0" indent="0" algn="ctr">
               <a:lnSpc>
                 <a:spcPct val="104000"/>
               </a:lnSpc>
               <a:spcBef>
                 <a:spcPts val="300"/>
               </a:spcBef>
-              <a:buFont typeface="Arial"/>
-              <a:buChar char="•"/>
+              <a:buNone/>
             </a:pPr>
             <a:r>
               <a:rPr lang="en-US" sz="1500" dirty="0">
@@ -16142,15 +16121,14 @@
             </a:r>
           </a:p>
           <a:p>
-            <a:pPr marL="274320" indent="-274320" algn="l">
+            <a:pPr marL="0" indent="0" algn="ctr">
               <a:lnSpc>
                 <a:spcPct val="104000"/>
               </a:lnSpc>
               <a:spcBef>
                 <a:spcPts val="300"/>
               </a:spcBef>
-              <a:buFont typeface="Arial"/>
-              <a:buChar char="•"/>
+              <a:buNone/>
             </a:pPr>
             <a:r>
               <a:rPr lang="en-US" sz="1500" dirty="0">
@@ -16164,15 +16142,14 @@
             </a:r>
           </a:p>
           <a:p>
-            <a:pPr marL="274320" indent="-274320" algn="l">
+            <a:pPr marL="0" indent="0" algn="ctr">
               <a:lnSpc>
                 <a:spcPct val="104000"/>
               </a:lnSpc>
               <a:spcBef>
                 <a:spcPts val="300"/>
               </a:spcBef>
-              <a:buFont typeface="Arial"/>
-              <a:buChar char="•"/>
+              <a:buNone/>
             </a:pPr>
             <a:r>
               <a:rPr lang="en-US" sz="1500" dirty="0">
@@ -17266,12 +17243,12 @@
           </a:ln>
         </p:spPr>
         <p:txBody>
-          <a:bodyPr wrap="square" lIns="110000" tIns="91440" rIns="110000" bIns="91440" rtlCol="0" anchor="t">
+          <a:bodyPr wrap="square" lIns="110000" tIns="91440" rIns="110000" bIns="91440" rtlCol="0" anchor="ctr">
             <a:normAutofit/>
           </a:bodyPr>
           <a:lstStyle/>
           <a:p>
-            <a:pPr marL="0" indent="0" algn="l">
+            <a:pPr marL="0" indent="0" algn="ctr">
               <a:lnSpc>
                 <a:spcPct val="104000"/>
               </a:lnSpc>
@@ -17360,12 +17337,12 @@
           </a:ln>
         </p:spPr>
         <p:txBody>
-          <a:bodyPr wrap="square" lIns="110000" tIns="91440" rIns="110000" bIns="91440" rtlCol="0" anchor="t">
+          <a:bodyPr wrap="square" lIns="110000" tIns="91440" rIns="110000" bIns="91440" rtlCol="0" anchor="ctr">
             <a:normAutofit/>
           </a:bodyPr>
           <a:lstStyle/>
           <a:p>
-            <a:pPr marL="0" indent="0" algn="l">
+            <a:pPr marL="0" indent="0" algn="ctr">
               <a:lnSpc>
                 <a:spcPct val="104000"/>
               </a:lnSpc>
@@ -17386,7 +17363,7 @@
             </a:r>
           </a:p>
           <a:p>
-            <a:pPr marL="0" indent="0" algn="l">
+            <a:pPr marL="0" indent="0" algn="ctr">
               <a:lnSpc>
                 <a:spcPct val="104000"/>
               </a:lnSpc>
@@ -17475,12 +17452,12 @@
           </a:ln>
         </p:spPr>
         <p:txBody>
-          <a:bodyPr wrap="square" lIns="110000" tIns="91440" rIns="110000" bIns="91440" rtlCol="0" anchor="t">
+          <a:bodyPr wrap="square" lIns="110000" tIns="91440" rIns="110000" bIns="91440" rtlCol="0" anchor="ctr">
             <a:normAutofit/>
           </a:bodyPr>
           <a:lstStyle/>
           <a:p>
-            <a:pPr marL="0" indent="0" algn="l">
+            <a:pPr marL="0" indent="0" algn="ctr">
               <a:lnSpc>
                 <a:spcPct val="104000"/>
               </a:lnSpc>
@@ -17569,12 +17546,12 @@
           </a:ln>
         </p:spPr>
         <p:txBody>
-          <a:bodyPr wrap="square" lIns="110000" tIns="91440" rIns="110000" bIns="91440" rtlCol="0" anchor="t">
+          <a:bodyPr wrap="square" lIns="110000" tIns="91440" rIns="110000" bIns="91440" rtlCol="0" anchor="ctr">
             <a:normAutofit/>
           </a:bodyPr>
           <a:lstStyle/>
           <a:p>
-            <a:pPr marL="0" indent="0" algn="l">
+            <a:pPr marL="0" indent="0" algn="ctr">
               <a:lnSpc>
                 <a:spcPct val="104000"/>
               </a:lnSpc>
@@ -17663,12 +17640,12 @@
           </a:ln>
         </p:spPr>
         <p:txBody>
-          <a:bodyPr wrap="square" lIns="110000" tIns="91440" rIns="110000" bIns="91440" rtlCol="0" anchor="t">
+          <a:bodyPr wrap="square" lIns="110000" tIns="91440" rIns="110000" bIns="91440" rtlCol="0" anchor="ctr">
             <a:normAutofit/>
           </a:bodyPr>
           <a:lstStyle/>
           <a:p>
-            <a:pPr marL="0" indent="0" algn="l">
+            <a:pPr marL="0" indent="0" algn="ctr">
               <a:lnSpc>
                 <a:spcPct val="104000"/>
               </a:lnSpc>
@@ -17689,7 +17666,7 @@
             </a:r>
           </a:p>
           <a:p>
-            <a:pPr marL="0" indent="0" algn="l">
+            <a:pPr marL="0" indent="0" algn="ctr">
               <a:lnSpc>
                 <a:spcPct val="104000"/>
               </a:lnSpc>
@@ -17778,12 +17755,12 @@
           </a:ln>
         </p:spPr>
         <p:txBody>
-          <a:bodyPr wrap="square" lIns="110000" tIns="91440" rIns="110000" bIns="91440" rtlCol="0" anchor="t">
+          <a:bodyPr wrap="square" lIns="110000" tIns="91440" rIns="110000" bIns="91440" rtlCol="0" anchor="ctr">
             <a:normAutofit/>
           </a:bodyPr>
           <a:lstStyle/>
           <a:p>
-            <a:pPr marL="0" indent="0" algn="l">
+            <a:pPr marL="0" indent="0" algn="ctr">
               <a:lnSpc>
                 <a:spcPct val="104000"/>
               </a:lnSpc>
@@ -18160,12 +18137,12 @@
           </a:ln>
         </p:spPr>
         <p:txBody>
-          <a:bodyPr wrap="square" lIns="137160" tIns="91440" rIns="137160" bIns="91440" rtlCol="0" anchor="t">
+          <a:bodyPr wrap="square" lIns="137160" tIns="91440" rIns="137160" bIns="91440" rtlCol="0" anchor="ctr">
             <a:normAutofit/>
           </a:bodyPr>
           <a:lstStyle/>
           <a:p>
-            <a:pPr marL="0" indent="0" algn="l">
+            <a:pPr marL="0" indent="0" algn="ctr">
               <a:lnSpc>
                 <a:spcPct val="104000"/>
               </a:lnSpc>
@@ -18186,7 +18163,7 @@
             </a:r>
           </a:p>
           <a:p>
-            <a:pPr marL="0" indent="0" algn="l">
+            <a:pPr marL="0" indent="0" algn="ctr">
               <a:lnSpc>
                 <a:spcPct val="104000"/>
               </a:lnSpc>
@@ -18207,7 +18184,7 @@
             </a:r>
           </a:p>
           <a:p>
-            <a:pPr marL="0" indent="0" algn="l">
+            <a:pPr marL="0" indent="0" algn="ctr">
               <a:lnSpc>
                 <a:spcPct val="104000"/>
               </a:lnSpc>
@@ -18294,12 +18271,12 @@
           </a:ln>
         </p:spPr>
         <p:txBody>
-          <a:bodyPr wrap="square" lIns="137160" tIns="91440" rIns="137160" bIns="91440" rtlCol="0" anchor="t">
+          <a:bodyPr wrap="square" lIns="137160" tIns="91440" rIns="137160" bIns="91440" rtlCol="0" anchor="ctr">
             <a:normAutofit/>
           </a:bodyPr>
           <a:lstStyle/>
           <a:p>
-            <a:pPr marL="0" indent="0" algn="l">
+            <a:pPr marL="0" indent="0" algn="ctr">
               <a:lnSpc>
                 <a:spcPct val="104000"/>
               </a:lnSpc>
@@ -18320,7 +18297,7 @@
             </a:r>
           </a:p>
           <a:p>
-            <a:pPr marL="0" indent="0" algn="l">
+            <a:pPr marL="0" indent="0" algn="ctr">
               <a:lnSpc>
                 <a:spcPct val="104000"/>
               </a:lnSpc>
@@ -18341,7 +18318,7 @@
             </a:r>
           </a:p>
           <a:p>
-            <a:pPr marL="0" indent="0" algn="l">
+            <a:pPr marL="0" indent="0" algn="ctr">
               <a:lnSpc>
                 <a:spcPct val="104000"/>
               </a:lnSpc>
@@ -18428,12 +18405,12 @@
           </a:ln>
         </p:spPr>
         <p:txBody>
-          <a:bodyPr wrap="square" lIns="137160" tIns="91440" rIns="137160" bIns="91440" rtlCol="0" anchor="t">
+          <a:bodyPr wrap="square" lIns="137160" tIns="91440" rIns="137160" bIns="91440" rtlCol="0" anchor="ctr">
             <a:normAutofit/>
           </a:bodyPr>
           <a:lstStyle/>
           <a:p>
-            <a:pPr marL="0" indent="0" algn="l">
+            <a:pPr marL="0" indent="0" algn="ctr">
               <a:lnSpc>
                 <a:spcPct val="104000"/>
               </a:lnSpc>
@@ -18454,7 +18431,7 @@
             </a:r>
           </a:p>
           <a:p>
-            <a:pPr marL="0" indent="0" algn="l">
+            <a:pPr marL="0" indent="0" algn="ctr">
               <a:lnSpc>
                 <a:spcPct val="104000"/>
               </a:lnSpc>
@@ -18475,7 +18452,7 @@
             </a:r>
           </a:p>
           <a:p>
-            <a:pPr marL="0" indent="0" algn="l">
+            <a:pPr marL="0" indent="0" algn="ctr">
               <a:lnSpc>
                 <a:spcPct val="104000"/>
               </a:lnSpc>
@@ -18964,12 +18941,12 @@
           </a:ln>
         </p:spPr>
         <p:txBody>
-          <a:bodyPr wrap="square" lIns="137160" tIns="91440" rIns="137160" bIns="91440" rtlCol="0" anchor="t">
+          <a:bodyPr wrap="square" lIns="137160" tIns="91440" rIns="137160" bIns="91440" rtlCol="0" anchor="ctr">
             <a:normAutofit/>
           </a:bodyPr>
           <a:lstStyle/>
           <a:p>
-            <a:pPr marL="0" indent="0" algn="l">
+            <a:pPr marL="0" indent="0" algn="ctr">
               <a:buNone/>
             </a:pPr>
             <a:r>
@@ -18984,15 +18961,14 @@
             </a:r>
           </a:p>
           <a:p>
-            <a:pPr marL="274320" indent="-274320" algn="l">
+            <a:pPr marL="0" indent="0" algn="ctr">
               <a:lnSpc>
                 <a:spcPct val="104000"/>
               </a:lnSpc>
               <a:spcBef>
                 <a:spcPts val="300"/>
               </a:spcBef>
-              <a:buFont typeface="Arial"/>
-              <a:buChar char="•"/>
+              <a:buNone/>
             </a:pPr>
             <a:r>
               <a:rPr lang="en-US" sz="1500" dirty="0">
@@ -19002,19 +18978,18 @@
                 <a:latin typeface="Arial"/>
                 <a:cs typeface="Arial"/>
               </a:rPr>
-              <a:t>Thường đúng: kiểm tra hai lần</a:t>
-            </a:r>
-          </a:p>
-          <a:p>
-            <a:pPr marL="274320" indent="-274320" algn="l">
+              <a:t>Thường đúng: kiểm tra kỹ</a:t>
+            </a:r>
+          </a:p>
+          <a:p>
+            <a:pPr marL="0" indent="0" algn="ctr">
               <a:lnSpc>
                 <a:spcPct val="104000"/>
               </a:lnSpc>
               <a:spcBef>
                 <a:spcPts val="300"/>
               </a:spcBef>
-              <a:buFont typeface="Arial"/>
-              <a:buChar char="•"/>
+              <a:buNone/>
             </a:pPr>
             <a:r>
               <a:rPr lang="en-US" sz="1500" dirty="0">
@@ -19028,15 +19003,14 @@
             </a:r>
           </a:p>
           <a:p>
-            <a:pPr marL="274320" indent="-274320" algn="l">
+            <a:pPr marL="0" indent="0" algn="ctr">
               <a:lnSpc>
                 <a:spcPct val="104000"/>
               </a:lnSpc>
               <a:spcBef>
                 <a:spcPts val="300"/>
               </a:spcBef>
-              <a:buFont typeface="Arial"/>
-              <a:buChar char="•"/>
+              <a:buNone/>
             </a:pPr>
             <a:r>
               <a:rPr lang="en-US" sz="1500" dirty="0">
@@ -19050,15 +19024,14 @@
             </a:r>
           </a:p>
           <a:p>
-            <a:pPr marL="274320" indent="-274320" algn="l">
+            <a:pPr marL="0" indent="0" algn="ctr">
               <a:lnSpc>
                 <a:spcPct val="104000"/>
               </a:lnSpc>
               <a:spcBef>
                 <a:spcPts val="300"/>
               </a:spcBef>
-              <a:buFont typeface="Arial"/>
-              <a:buChar char="•"/>
+              <a:buNone/>
             </a:pPr>
             <a:r>
               <a:rPr lang="en-US" sz="1500" dirty="0">
@@ -19072,15 +19045,14 @@
             </a:r>
           </a:p>
           <a:p>
-            <a:pPr marL="274320" indent="-274320" algn="l">
+            <a:pPr marL="0" indent="0" algn="ctr">
               <a:lnSpc>
                 <a:spcPct val="104000"/>
               </a:lnSpc>
               <a:spcBef>
                 <a:spcPts val="300"/>
               </a:spcBef>
-              <a:buFont typeface="Arial"/>
-              <a:buChar char="•"/>
+              <a:buNone/>
             </a:pPr>
             <a:r>
               <a:rPr lang="en-US" sz="1500" dirty="0">
@@ -20121,12 +20093,12 @@
           </a:ln>
         </p:spPr>
         <p:txBody>
-          <a:bodyPr wrap="square" lIns="137160" tIns="91440" rIns="137160" bIns="91440" rtlCol="0" anchor="t">
+          <a:bodyPr wrap="square" lIns="137160" tIns="91440" rIns="137160" bIns="91440" rtlCol="0" anchor="ctr">
             <a:normAutofit/>
           </a:bodyPr>
           <a:lstStyle/>
           <a:p>
-            <a:pPr marL="0" indent="0" algn="l">
+            <a:pPr marL="0" indent="0" algn="ctr">
               <a:lnSpc>
                 <a:spcPct val="104000"/>
               </a:lnSpc>
@@ -20147,7 +20119,7 @@
             </a:r>
           </a:p>
           <a:p>
-            <a:pPr marL="0" indent="0" algn="l">
+            <a:pPr marL="0" indent="0" algn="ctr">
               <a:lnSpc>
                 <a:spcPct val="104000"/>
               </a:lnSpc>
@@ -20168,7 +20140,7 @@
             </a:r>
           </a:p>
           <a:p>
-            <a:pPr marL="0" indent="0" algn="l">
+            <a:pPr marL="0" indent="0" algn="ctr">
               <a:lnSpc>
                 <a:spcPct val="104000"/>
               </a:lnSpc>
@@ -20189,7 +20161,7 @@
             </a:r>
           </a:p>
           <a:p>
-            <a:pPr marL="0" indent="0" algn="l">
+            <a:pPr marL="0" indent="0" algn="ctr">
               <a:lnSpc>
                 <a:spcPct val="104000"/>
               </a:lnSpc>
@@ -20276,12 +20248,12 @@
           </a:ln>
         </p:spPr>
         <p:txBody>
-          <a:bodyPr wrap="square" lIns="137160" tIns="91440" rIns="137160" bIns="91440" rtlCol="0" anchor="t">
+          <a:bodyPr wrap="square" lIns="137160" tIns="91440" rIns="137160" bIns="91440" rtlCol="0" anchor="ctr">
             <a:normAutofit/>
           </a:bodyPr>
           <a:lstStyle/>
           <a:p>
-            <a:pPr marL="0" indent="0" algn="l">
+            <a:pPr marL="0" indent="0" algn="ctr">
               <a:lnSpc>
                 <a:spcPct val="104000"/>
               </a:lnSpc>
@@ -20302,7 +20274,7 @@
             </a:r>
           </a:p>
           <a:p>
-            <a:pPr marL="0" indent="0" algn="l">
+            <a:pPr marL="0" indent="0" algn="ctr">
               <a:lnSpc>
                 <a:spcPct val="104000"/>
               </a:lnSpc>
@@ -20323,7 +20295,7 @@
             </a:r>
           </a:p>
           <a:p>
-            <a:pPr marL="0" indent="0" algn="l">
+            <a:pPr marL="0" indent="0" algn="ctr">
               <a:lnSpc>
                 <a:spcPct val="104000"/>
               </a:lnSpc>
@@ -20344,7 +20316,7 @@
             </a:r>
           </a:p>
           <a:p>
-            <a:pPr marL="0" indent="0" algn="l">
+            <a:pPr marL="0" indent="0" algn="ctr">
               <a:lnSpc>
                 <a:spcPct val="104000"/>
               </a:lnSpc>
@@ -20938,12 +20910,12 @@
           </a:ln>
         </p:spPr>
         <p:txBody>
-          <a:bodyPr wrap="square" lIns="137160" tIns="91440" rIns="137160" bIns="91440" rtlCol="0" anchor="t">
+          <a:bodyPr wrap="square" lIns="137160" tIns="91440" rIns="137160" bIns="91440" rtlCol="0" anchor="ctr">
             <a:normAutofit/>
           </a:bodyPr>
           <a:lstStyle/>
           <a:p>
-            <a:pPr marL="0" indent="0" algn="l">
+            <a:pPr marL="0" indent="0" algn="ctr">
               <a:lnSpc>
                 <a:spcPct val="104000"/>
               </a:lnSpc>
@@ -21030,12 +21002,12 @@
           </a:ln>
         </p:spPr>
         <p:txBody>
-          <a:bodyPr wrap="square" lIns="137160" tIns="91440" rIns="137160" bIns="91440" rtlCol="0" anchor="t">
+          <a:bodyPr wrap="square" lIns="137160" tIns="91440" rIns="137160" bIns="91440" rtlCol="0" anchor="ctr">
             <a:normAutofit/>
           </a:bodyPr>
           <a:lstStyle/>
           <a:p>
-            <a:pPr marL="0" indent="0" algn="l">
+            <a:pPr marL="0" indent="0" algn="ctr">
               <a:lnSpc>
                 <a:spcPct val="104000"/>
               </a:lnSpc>
@@ -21122,12 +21094,12 @@
           </a:ln>
         </p:spPr>
         <p:txBody>
-          <a:bodyPr wrap="square" lIns="137160" tIns="91440" rIns="137160" bIns="91440" rtlCol="0" anchor="t">
+          <a:bodyPr wrap="square" lIns="137160" tIns="91440" rIns="137160" bIns="91440" rtlCol="0" anchor="ctr">
             <a:normAutofit/>
           </a:bodyPr>
           <a:lstStyle/>
           <a:p>
-            <a:pPr marL="0" indent="0" algn="l">
+            <a:pPr marL="0" indent="0" algn="ctr">
               <a:lnSpc>
                 <a:spcPct val="104000"/>
               </a:lnSpc>
@@ -21148,7 +21120,7 @@
             </a:r>
           </a:p>
           <a:p>
-            <a:pPr marL="0" indent="0" algn="l">
+            <a:pPr marL="0" indent="0" algn="ctr">
               <a:lnSpc>
                 <a:spcPct val="104000"/>
               </a:lnSpc>
@@ -21235,12 +21207,12 @@
           </a:ln>
         </p:spPr>
         <p:txBody>
-          <a:bodyPr wrap="square" lIns="137160" tIns="91440" rIns="137160" bIns="91440" rtlCol="0" anchor="t">
+          <a:bodyPr wrap="square" lIns="137160" tIns="91440" rIns="137160" bIns="91440" rtlCol="0" anchor="ctr">
             <a:normAutofit/>
           </a:bodyPr>
           <a:lstStyle/>
           <a:p>
-            <a:pPr marL="0" indent="0" algn="l">
+            <a:pPr marL="0" indent="0" algn="ctr">
               <a:lnSpc>
                 <a:spcPct val="104000"/>
               </a:lnSpc>
@@ -21261,7 +21233,7 @@
             </a:r>
           </a:p>
           <a:p>
-            <a:pPr marL="0" indent="0" algn="l">
+            <a:pPr marL="0" indent="0" algn="ctr">
               <a:lnSpc>
                 <a:spcPct val="104000"/>
               </a:lnSpc>
@@ -21348,12 +21320,12 @@
           </a:ln>
         </p:spPr>
         <p:txBody>
-          <a:bodyPr wrap="square" lIns="137160" tIns="91440" rIns="137160" bIns="91440" rtlCol="0" anchor="t">
+          <a:bodyPr wrap="square" lIns="137160" tIns="91440" rIns="137160" bIns="91440" rtlCol="0" anchor="ctr">
             <a:normAutofit/>
           </a:bodyPr>
           <a:lstStyle/>
           <a:p>
-            <a:pPr marL="0" indent="0" algn="l">
+            <a:pPr marL="0" indent="0" algn="ctr">
               <a:lnSpc>
                 <a:spcPct val="104000"/>
               </a:lnSpc>
@@ -21374,7 +21346,7 @@
             </a:r>
           </a:p>
           <a:p>
-            <a:pPr marL="0" indent="0" algn="l">
+            <a:pPr marL="0" indent="0" algn="ctr">
               <a:lnSpc>
                 <a:spcPct val="104000"/>
               </a:lnSpc>
@@ -21657,12 +21629,12 @@
           </a:ln>
         </p:spPr>
         <p:txBody>
-          <a:bodyPr wrap="square" lIns="137160" tIns="91440" rIns="137160" bIns="91440" rtlCol="0" anchor="t">
+          <a:bodyPr wrap="square" lIns="137160" tIns="91440" rIns="137160" bIns="91440" rtlCol="0" anchor="ctr">
             <a:normAutofit/>
           </a:bodyPr>
           <a:lstStyle/>
           <a:p>
-            <a:pPr marL="0" indent="0" algn="l">
+            <a:pPr marL="0" indent="0" algn="ctr">
               <a:lnSpc>
                 <a:spcPct val="104000"/>
               </a:lnSpc>
@@ -21749,12 +21721,12 @@
           </a:ln>
         </p:spPr>
         <p:txBody>
-          <a:bodyPr wrap="square" lIns="137160" tIns="91440" rIns="137160" bIns="91440" rtlCol="0" anchor="t">
+          <a:bodyPr wrap="square" lIns="137160" tIns="91440" rIns="137160" bIns="91440" rtlCol="0" anchor="ctr">
             <a:normAutofit/>
           </a:bodyPr>
           <a:lstStyle/>
           <a:p>
-            <a:pPr marL="0" indent="0" algn="l">
+            <a:pPr marL="0" indent="0" algn="ctr">
               <a:lnSpc>
                 <a:spcPct val="104000"/>
               </a:lnSpc>
@@ -21775,7 +21747,7 @@
             </a:r>
           </a:p>
           <a:p>
-            <a:pPr marL="0" indent="0" algn="l">
+            <a:pPr marL="0" indent="0" algn="ctr">
               <a:lnSpc>
                 <a:spcPct val="104000"/>
               </a:lnSpc>
@@ -21862,12 +21834,12 @@
           </a:ln>
         </p:spPr>
         <p:txBody>
-          <a:bodyPr wrap="square" lIns="137160" tIns="91440" rIns="137160" bIns="91440" rtlCol="0" anchor="t">
+          <a:bodyPr wrap="square" lIns="137160" tIns="91440" rIns="137160" bIns="91440" rtlCol="0" anchor="ctr">
             <a:normAutofit/>
           </a:bodyPr>
           <a:lstStyle/>
           <a:p>
-            <a:pPr marL="0" indent="0" algn="l">
+            <a:pPr marL="0" indent="0" algn="ctr">
               <a:lnSpc>
                 <a:spcPct val="104000"/>
               </a:lnSpc>
@@ -21954,12 +21926,12 @@
           </a:ln>
         </p:spPr>
         <p:txBody>
-          <a:bodyPr wrap="square" lIns="137160" tIns="91440" rIns="137160" bIns="91440" rtlCol="0" anchor="t">
+          <a:bodyPr wrap="square" lIns="137160" tIns="91440" rIns="137160" bIns="91440" rtlCol="0" anchor="ctr">
             <a:normAutofit/>
           </a:bodyPr>
           <a:lstStyle/>
           <a:p>
-            <a:pPr marL="0" indent="0" algn="l">
+            <a:pPr marL="0" indent="0" algn="ctr">
               <a:lnSpc>
                 <a:spcPct val="104000"/>
               </a:lnSpc>
@@ -21980,7 +21952,7 @@
             </a:r>
           </a:p>
           <a:p>
-            <a:pPr marL="0" indent="0" algn="l">
+            <a:pPr marL="0" indent="0" algn="ctr">
               <a:lnSpc>
                 <a:spcPct val="104000"/>
               </a:lnSpc>
@@ -22067,12 +22039,12 @@
           </a:ln>
         </p:spPr>
         <p:txBody>
-          <a:bodyPr wrap="square" lIns="137160" tIns="91440" rIns="137160" bIns="91440" rtlCol="0" anchor="t">
+          <a:bodyPr wrap="square" lIns="137160" tIns="91440" rIns="137160" bIns="91440" rtlCol="0" anchor="ctr">
             <a:normAutofit/>
           </a:bodyPr>
           <a:lstStyle/>
           <a:p>
-            <a:pPr marL="0" indent="0" algn="l">
+            <a:pPr marL="0" indent="0" algn="ctr">
               <a:lnSpc>
                 <a:spcPct val="104000"/>
               </a:lnSpc>
@@ -22093,7 +22065,7 @@
             </a:r>
           </a:p>
           <a:p>
-            <a:pPr marL="0" indent="0" algn="l">
+            <a:pPr marL="0" indent="0" algn="ctr">
               <a:lnSpc>
                 <a:spcPct val="104000"/>
               </a:lnSpc>
@@ -22527,12 +22499,12 @@
           </a:ln>
         </p:spPr>
         <p:txBody>
-          <a:bodyPr wrap="square" lIns="137160" tIns="91440" rIns="137160" bIns="91440" rtlCol="0" anchor="t">
+          <a:bodyPr wrap="square" lIns="137160" tIns="91440" rIns="137160" bIns="91440" rtlCol="0" anchor="ctr">
             <a:normAutofit/>
           </a:bodyPr>
           <a:lstStyle/>
           <a:p>
-            <a:pPr marL="0" indent="0" algn="l">
+            <a:pPr marL="0" indent="0" algn="ctr">
               <a:buNone/>
             </a:pPr>
             <a:r>
@@ -22547,15 +22519,14 @@
             </a:r>
           </a:p>
           <a:p>
-            <a:pPr marL="274320" indent="-274320" algn="l">
+            <a:pPr marL="0" indent="0" algn="ctr">
               <a:lnSpc>
                 <a:spcPct val="104000"/>
               </a:lnSpc>
               <a:spcBef>
                 <a:spcPts val="300"/>
               </a:spcBef>
-              <a:buFont typeface="Arial"/>
-              <a:buChar char="•"/>
+              <a:buNone/>
             </a:pPr>
             <a:r>
               <a:rPr lang="en-US" sz="1500" dirty="0">
@@ -22569,15 +22540,14 @@
             </a:r>
           </a:p>
           <a:p>
-            <a:pPr marL="274320" indent="-274320" algn="l">
+            <a:pPr marL="0" indent="0" algn="ctr">
               <a:lnSpc>
                 <a:spcPct val="104000"/>
               </a:lnSpc>
               <a:spcBef>
                 <a:spcPts val="300"/>
               </a:spcBef>
-              <a:buFont typeface="Arial"/>
-              <a:buChar char="•"/>
+              <a:buNone/>
             </a:pPr>
             <a:r>
               <a:rPr lang="en-US" sz="1500" dirty="0">
@@ -22591,15 +22561,14 @@
             </a:r>
           </a:p>
           <a:p>
-            <a:pPr marL="274320" indent="-274320" algn="l">
+            <a:pPr marL="0" indent="0" algn="ctr">
               <a:lnSpc>
                 <a:spcPct val="104000"/>
               </a:lnSpc>
               <a:spcBef>
                 <a:spcPts val="300"/>
               </a:spcBef>
-              <a:buFont typeface="Arial"/>
-              <a:buChar char="•"/>
+              <a:buNone/>
             </a:pPr>
             <a:r>
               <a:rPr lang="en-US" sz="1500" dirty="0">
@@ -22613,15 +22582,14 @@
             </a:r>
           </a:p>
           <a:p>
-            <a:pPr marL="274320" indent="-274320" algn="l">
+            <a:pPr marL="0" indent="0" algn="ctr">
               <a:lnSpc>
                 <a:spcPct val="104000"/>
               </a:lnSpc>
               <a:spcBef>
                 <a:spcPts val="300"/>
               </a:spcBef>
-              <a:buFont typeface="Arial"/>
-              <a:buChar char="•"/>
+              <a:buNone/>
             </a:pPr>
             <a:r>
               <a:rPr lang="en-US" sz="1500" dirty="0">
@@ -22954,12 +22922,12 @@
           </a:ln>
         </p:spPr>
         <p:txBody>
-          <a:bodyPr wrap="square" lIns="137160" tIns="91440" rIns="137160" bIns="91440" rtlCol="0" anchor="t">
+          <a:bodyPr wrap="square" lIns="137160" tIns="91440" rIns="137160" bIns="91440" rtlCol="0" anchor="ctr">
             <a:normAutofit/>
           </a:bodyPr>
           <a:lstStyle/>
           <a:p>
-            <a:pPr marL="0" indent="0" algn="l">
+            <a:pPr marL="0" indent="0" algn="ctr">
               <a:lnSpc>
                 <a:spcPct val="104000"/>
               </a:lnSpc>
@@ -22980,7 +22948,7 @@
             </a:r>
           </a:p>
           <a:p>
-            <a:pPr marL="0" indent="0" algn="l">
+            <a:pPr marL="0" indent="0" algn="ctr">
               <a:lnSpc>
                 <a:spcPct val="104000"/>
               </a:lnSpc>
@@ -23001,7 +22969,7 @@
             </a:r>
           </a:p>
           <a:p>
-            <a:pPr marL="0" indent="0" algn="l">
+            <a:pPr marL="0" indent="0" algn="ctr">
               <a:lnSpc>
                 <a:spcPct val="104000"/>
               </a:lnSpc>
@@ -23022,7 +22990,7 @@
             </a:r>
           </a:p>
           <a:p>
-            <a:pPr marL="0" indent="0" algn="l">
+            <a:pPr marL="0" indent="0" algn="ctr">
               <a:lnSpc>
                 <a:spcPct val="104000"/>
               </a:lnSpc>
@@ -23109,12 +23077,12 @@
           </a:ln>
         </p:spPr>
         <p:txBody>
-          <a:bodyPr wrap="square" lIns="137160" tIns="91440" rIns="137160" bIns="91440" rtlCol="0" anchor="t">
+          <a:bodyPr wrap="square" lIns="137160" tIns="91440" rIns="137160" bIns="91440" rtlCol="0" anchor="ctr">
             <a:normAutofit/>
           </a:bodyPr>
           <a:lstStyle/>
           <a:p>
-            <a:pPr marL="0" indent="0" algn="l">
+            <a:pPr marL="0" indent="0" algn="ctr">
               <a:lnSpc>
                 <a:spcPct val="104000"/>
               </a:lnSpc>
@@ -23135,7 +23103,7 @@
             </a:r>
           </a:p>
           <a:p>
-            <a:pPr marL="0" indent="0" algn="l">
+            <a:pPr marL="0" indent="0" algn="ctr">
               <a:lnSpc>
                 <a:spcPct val="104000"/>
               </a:lnSpc>
@@ -23156,7 +23124,7 @@
             </a:r>
           </a:p>
           <a:p>
-            <a:pPr marL="0" indent="0" algn="l">
+            <a:pPr marL="0" indent="0" algn="ctr">
               <a:lnSpc>
                 <a:spcPct val="104000"/>
               </a:lnSpc>
@@ -23177,7 +23145,7 @@
             </a:r>
           </a:p>
           <a:p>
-            <a:pPr marL="0" indent="0" algn="l">
+            <a:pPr marL="0" indent="0" algn="ctr">
               <a:lnSpc>
                 <a:spcPct val="104000"/>
               </a:lnSpc>
@@ -24027,7 +23995,7 @@
                 <a:latin typeface="Arial"/>
                 <a:cs typeface="Arial"/>
               </a:rPr>
-              <a:t>RCT = thử nghiệm ngẫu nhiên có đối chứng. Số trang và chi tiết: Course/Resources/appraisal_instructor_guide.md</a:t>
+              <a:t>RCT = thử nghiệm ngẫu nhiên có đối chứng. Số trang và chi tiết: Course/Resources/appraisal_instructor_guide.md</a:t>
             </a:r>
           </a:p>
         </p:txBody>
@@ -25300,7 +25268,7 @@
                 <a:latin typeface="Arial"/>
                 <a:cs typeface="Arial"/>
               </a:rPr>
-              <a:t>Slide: tiêu đề, vấn đề và PICO, thiết kế, dữ liệu và phân tích, đạo đức và khả thi, kế hoạch công bố</a:t>
+              <a:t>Slide: tiêu đề, vấn đề và PICO, thiết kế, dữ liệu và phân tích, đạo đức và khả thi, kế hoạch công bố</a:t>
             </a:r>
           </a:p>
           <a:p>
@@ -25350,7 +25318,7 @@
                 <a:latin typeface="Arial"/>
                 <a:cs typeface="Arial"/>
               </a:rPr>
-              <a:t>Góp ý 2 phút: hai người nói hai ngôi sao và một mong muốn (bật micro), rồi giảng viên</a:t>
+              <a:t>Góp ý 2 phút: hai người nói hai điểm mạnh và một đề xuất cải thiện (bật micro), rồi giảng viên</a:t>
             </a:r>
           </a:p>
           <a:p>
@@ -25404,12 +25372,12 @@
           </a:ln>
         </p:spPr>
         <p:txBody>
-          <a:bodyPr wrap="square" lIns="137160" tIns="91440" rIns="137160" bIns="91440" rtlCol="0" anchor="t">
+          <a:bodyPr wrap="square" lIns="137160" tIns="91440" rIns="137160" bIns="91440" rtlCol="0" anchor="ctr">
             <a:normAutofit/>
           </a:bodyPr>
           <a:lstStyle/>
           <a:p>
-            <a:pPr marL="0" indent="0" algn="l">
+            <a:pPr marL="0" indent="0" algn="ctr">
               <a:buNone/>
             </a:pPr>
             <a:r>
@@ -25424,15 +25392,14 @@
             </a:r>
           </a:p>
           <a:p>
-            <a:pPr marL="274320" indent="-274320" algn="l">
+            <a:pPr marL="0" indent="0" algn="ctr">
               <a:lnSpc>
                 <a:spcPct val="104000"/>
               </a:lnSpc>
               <a:spcBef>
                 <a:spcPts val="300"/>
               </a:spcBef>
-              <a:buFont typeface="Arial"/>
-              <a:buChar char="•"/>
+              <a:buNone/>
             </a:pPr>
             <a:r>
               <a:rPr lang="en-US" sz="1500" dirty="0">
@@ -25446,15 +25413,14 @@
             </a:r>
           </a:p>
           <a:p>
-            <a:pPr marL="274320" indent="-274320" algn="l">
+            <a:pPr marL="0" indent="0" algn="ctr">
               <a:lnSpc>
                 <a:spcPct val="104000"/>
               </a:lnSpc>
               <a:spcBef>
                 <a:spcPts val="300"/>
               </a:spcBef>
-              <a:buFont typeface="Arial"/>
-              <a:buChar char="•"/>
+              <a:buNone/>
             </a:pPr>
             <a:r>
               <a:rPr lang="en-US" sz="1500" dirty="0">
@@ -25468,15 +25434,14 @@
             </a:r>
           </a:p>
           <a:p>
-            <a:pPr marL="274320" indent="-274320" algn="l">
+            <a:pPr marL="0" indent="0" algn="ctr">
               <a:lnSpc>
                 <a:spcPct val="104000"/>
               </a:lnSpc>
               <a:spcBef>
                 <a:spcPts val="300"/>
               </a:spcBef>
-              <a:buFont typeface="Arial"/>
-              <a:buChar char="•"/>
+              <a:buNone/>
             </a:pPr>
             <a:r>
               <a:rPr lang="en-US" sz="1500" dirty="0">
@@ -25490,15 +25455,14 @@
             </a:r>
           </a:p>
           <a:p>
-            <a:pPr marL="274320" indent="-274320" algn="l">
+            <a:pPr marL="0" indent="0" algn="ctr">
               <a:lnSpc>
                 <a:spcPct val="104000"/>
               </a:lnSpc>
               <a:spcBef>
                 <a:spcPts val="300"/>
               </a:spcBef>
-              <a:buFont typeface="Arial"/>
-              <a:buChar char="•"/>
+              <a:buNone/>
             </a:pPr>
             <a:r>
               <a:rPr lang="en-US" sz="1500" dirty="0">
@@ -25512,15 +25476,14 @@
             </a:r>
           </a:p>
           <a:p>
-            <a:pPr marL="274320" indent="-274320" algn="l">
+            <a:pPr marL="0" indent="0" algn="ctr">
               <a:lnSpc>
                 <a:spcPct val="104000"/>
               </a:lnSpc>
               <a:spcBef>
                 <a:spcPts val="300"/>
               </a:spcBef>
-              <a:buFont typeface="Arial"/>
-              <a:buChar char="•"/>
+              <a:buNone/>
             </a:pPr>
             <a:r>
               <a:rPr lang="en-US" sz="1500" dirty="0">
@@ -25534,15 +25497,14 @@
             </a:r>
           </a:p>
           <a:p>
-            <a:pPr marL="274320" indent="-274320" algn="l">
+            <a:pPr marL="0" indent="0" algn="ctr">
               <a:lnSpc>
                 <a:spcPct val="104000"/>
               </a:lnSpc>
               <a:spcBef>
                 <a:spcPts val="300"/>
               </a:spcBef>
-              <a:buFont typeface="Arial"/>
-              <a:buChar char="•"/>
+              <a:buNone/>
             </a:pPr>
             <a:r>
               <a:rPr lang="en-US" sz="1500" dirty="0">
@@ -27141,12 +27103,12 @@
           </a:ln>
         </p:spPr>
         <p:txBody>
-          <a:bodyPr wrap="square" lIns="137160" tIns="91440" rIns="137160" bIns="91440" rtlCol="0" anchor="t">
+          <a:bodyPr wrap="square" lIns="137160" tIns="91440" rIns="137160" bIns="91440" rtlCol="0" anchor="ctr">
             <a:normAutofit/>
           </a:bodyPr>
           <a:lstStyle/>
           <a:p>
-            <a:pPr marL="0" indent="0" algn="l">
+            <a:pPr marL="0" indent="0" algn="ctr">
               <a:buNone/>
             </a:pPr>
             <a:r>
@@ -27161,15 +27123,14 @@
             </a:r>
           </a:p>
           <a:p>
-            <a:pPr marL="274320" indent="-274320" algn="l">
+            <a:pPr marL="0" indent="0" algn="ctr">
               <a:lnSpc>
                 <a:spcPct val="104000"/>
               </a:lnSpc>
               <a:spcBef>
                 <a:spcPts val="300"/>
               </a:spcBef>
-              <a:buFont typeface="Arial"/>
-              <a:buChar char="•"/>
+              <a:buNone/>
             </a:pPr>
             <a:r>
               <a:rPr lang="en-US" sz="1500" dirty="0">
@@ -27183,15 +27144,14 @@
             </a:r>
           </a:p>
           <a:p>
-            <a:pPr marL="274320" indent="-274320" algn="l">
+            <a:pPr marL="0" indent="0" algn="ctr">
               <a:lnSpc>
                 <a:spcPct val="104000"/>
               </a:lnSpc>
               <a:spcBef>
                 <a:spcPts val="300"/>
               </a:spcBef>
-              <a:buFont typeface="Arial"/>
-              <a:buChar char="•"/>
+              <a:buNone/>
             </a:pPr>
             <a:r>
               <a:rPr lang="en-US" sz="1500" dirty="0">
@@ -27205,15 +27165,14 @@
             </a:r>
           </a:p>
           <a:p>
-            <a:pPr marL="274320" indent="-274320" algn="l">
+            <a:pPr marL="0" indent="0" algn="ctr">
               <a:lnSpc>
                 <a:spcPct val="104000"/>
               </a:lnSpc>
               <a:spcBef>
                 <a:spcPts val="300"/>
               </a:spcBef>
-              <a:buFont typeface="Arial"/>
-              <a:buChar char="•"/>
+              <a:buNone/>
             </a:pPr>
             <a:r>
               <a:rPr lang="en-US" sz="1500" dirty="0">
@@ -27227,15 +27186,14 @@
             </a:r>
           </a:p>
           <a:p>
-            <a:pPr marL="274320" indent="-274320" algn="l">
+            <a:pPr marL="0" indent="0" algn="ctr">
               <a:lnSpc>
                 <a:spcPct val="104000"/>
               </a:lnSpc>
               <a:spcBef>
                 <a:spcPts val="300"/>
               </a:spcBef>
-              <a:buFont typeface="Arial"/>
-              <a:buChar char="•"/>
+              <a:buNone/>
             </a:pPr>
             <a:r>
               <a:rPr lang="en-US" sz="1500" dirty="0">
@@ -27568,12 +27526,12 @@
           </a:ln>
         </p:spPr>
         <p:txBody>
-          <a:bodyPr wrap="square" lIns="137160" tIns="91440" rIns="137160" bIns="91440" rtlCol="0" anchor="t">
+          <a:bodyPr wrap="square" lIns="137160" tIns="91440" rIns="137160" bIns="91440" rtlCol="0" anchor="ctr">
             <a:normAutofit/>
           </a:bodyPr>
           <a:lstStyle/>
           <a:p>
-            <a:pPr marL="0" indent="0" algn="l">
+            <a:pPr marL="0" indent="0" algn="ctr">
               <a:lnSpc>
                 <a:spcPct val="104000"/>
               </a:lnSpc>
@@ -27594,7 +27552,7 @@
             </a:r>
           </a:p>
           <a:p>
-            <a:pPr marL="0" indent="0" algn="l">
+            <a:pPr marL="0" indent="0" algn="ctr">
               <a:lnSpc>
                 <a:spcPct val="104000"/>
               </a:lnSpc>
@@ -27615,7 +27573,7 @@
             </a:r>
           </a:p>
           <a:p>
-            <a:pPr marL="0" indent="0" algn="l">
+            <a:pPr marL="0" indent="0" algn="ctr">
               <a:lnSpc>
                 <a:spcPct val="104000"/>
               </a:lnSpc>
@@ -27636,7 +27594,7 @@
             </a:r>
           </a:p>
           <a:p>
-            <a:pPr marL="0" indent="0" algn="l">
+            <a:pPr marL="0" indent="0" algn="ctr">
               <a:lnSpc>
                 <a:spcPct val="104000"/>
               </a:lnSpc>
@@ -27723,12 +27681,12 @@
           </a:ln>
         </p:spPr>
         <p:txBody>
-          <a:bodyPr wrap="square" lIns="137160" tIns="91440" rIns="137160" bIns="91440" rtlCol="0" anchor="t">
+          <a:bodyPr wrap="square" lIns="137160" tIns="91440" rIns="137160" bIns="91440" rtlCol="0" anchor="ctr">
             <a:normAutofit/>
           </a:bodyPr>
           <a:lstStyle/>
           <a:p>
-            <a:pPr marL="0" indent="0" algn="l">
+            <a:pPr marL="0" indent="0" algn="ctr">
               <a:lnSpc>
                 <a:spcPct val="104000"/>
               </a:lnSpc>
@@ -27749,7 +27707,7 @@
             </a:r>
           </a:p>
           <a:p>
-            <a:pPr marL="0" indent="0" algn="l">
+            <a:pPr marL="0" indent="0" algn="ctr">
               <a:lnSpc>
                 <a:spcPct val="104000"/>
               </a:lnSpc>
@@ -27770,7 +27728,7 @@
             </a:r>
           </a:p>
           <a:p>
-            <a:pPr marL="0" indent="0" algn="l">
+            <a:pPr marL="0" indent="0" algn="ctr">
               <a:lnSpc>
                 <a:spcPct val="104000"/>
               </a:lnSpc>
@@ -27791,7 +27749,7 @@
             </a:r>
           </a:p>
           <a:p>
-            <a:pPr marL="0" indent="0" algn="l">
+            <a:pPr marL="0" indent="0" algn="ctr">
               <a:lnSpc>
                 <a:spcPct val="104000"/>
               </a:lnSpc>
@@ -27878,12 +27836,12 @@
           </a:ln>
         </p:spPr>
         <p:txBody>
-          <a:bodyPr wrap="square" lIns="137160" tIns="91440" rIns="137160" bIns="91440" rtlCol="0" anchor="t">
+          <a:bodyPr wrap="square" lIns="137160" tIns="91440" rIns="137160" bIns="91440" rtlCol="0" anchor="ctr">
             <a:normAutofit/>
           </a:bodyPr>
           <a:lstStyle/>
           <a:p>
-            <a:pPr marL="0" indent="0" algn="l">
+            <a:pPr marL="0" indent="0" algn="ctr">
               <a:lnSpc>
                 <a:spcPct val="104000"/>
               </a:lnSpc>
@@ -27904,7 +27862,7 @@
             </a:r>
           </a:p>
           <a:p>
-            <a:pPr marL="0" indent="0" algn="l">
+            <a:pPr marL="0" indent="0" algn="ctr">
               <a:lnSpc>
                 <a:spcPct val="104000"/>
               </a:lnSpc>
@@ -27925,7 +27883,7 @@
             </a:r>
           </a:p>
           <a:p>
-            <a:pPr marL="0" indent="0" algn="l">
+            <a:pPr marL="0" indent="0" algn="ctr">
               <a:lnSpc>
                 <a:spcPct val="104000"/>
               </a:lnSpc>
@@ -28265,12 +28223,12 @@
           </a:ln>
         </p:spPr>
         <p:txBody>
-          <a:bodyPr wrap="square" lIns="110000" tIns="91440" rIns="110000" bIns="91440" rtlCol="0" anchor="t">
+          <a:bodyPr wrap="square" lIns="110000" tIns="91440" rIns="110000" bIns="91440" rtlCol="0" anchor="ctr">
             <a:normAutofit/>
           </a:bodyPr>
           <a:lstStyle/>
           <a:p>
-            <a:pPr marL="0" indent="0" algn="l">
+            <a:pPr marL="0" indent="0" algn="ctr">
               <a:lnSpc>
                 <a:spcPct val="104000"/>
               </a:lnSpc>
@@ -28359,12 +28317,12 @@
           </a:ln>
         </p:spPr>
         <p:txBody>
-          <a:bodyPr wrap="square" lIns="110000" tIns="91440" rIns="110000" bIns="91440" rtlCol="0" anchor="t">
+          <a:bodyPr wrap="square" lIns="110000" tIns="91440" rIns="110000" bIns="91440" rtlCol="0" anchor="ctr">
             <a:normAutofit/>
           </a:bodyPr>
           <a:lstStyle/>
           <a:p>
-            <a:pPr marL="0" indent="0" algn="l">
+            <a:pPr marL="0" indent="0" algn="ctr">
               <a:lnSpc>
                 <a:spcPct val="104000"/>
               </a:lnSpc>
@@ -28453,12 +28411,12 @@
           </a:ln>
         </p:spPr>
         <p:txBody>
-          <a:bodyPr wrap="square" lIns="110000" tIns="91440" rIns="110000" bIns="91440" rtlCol="0" anchor="t">
+          <a:bodyPr wrap="square" lIns="110000" tIns="91440" rIns="110000" bIns="91440" rtlCol="0" anchor="ctr">
             <a:normAutofit/>
           </a:bodyPr>
           <a:lstStyle/>
           <a:p>
-            <a:pPr marL="0" indent="0" algn="l">
+            <a:pPr marL="0" indent="0" algn="ctr">
               <a:lnSpc>
                 <a:spcPct val="104000"/>
               </a:lnSpc>
@@ -28547,12 +28505,12 @@
           </a:ln>
         </p:spPr>
         <p:txBody>
-          <a:bodyPr wrap="square" lIns="110000" tIns="91440" rIns="110000" bIns="91440" rtlCol="0" anchor="t">
+          <a:bodyPr wrap="square" lIns="110000" tIns="91440" rIns="110000" bIns="91440" rtlCol="0" anchor="ctr">
             <a:normAutofit/>
           </a:bodyPr>
           <a:lstStyle/>
           <a:p>
-            <a:pPr marL="0" indent="0" algn="l">
+            <a:pPr marL="0" indent="0" algn="ctr">
               <a:lnSpc>
                 <a:spcPct val="104000"/>
               </a:lnSpc>
@@ -28641,12 +28599,12 @@
           </a:ln>
         </p:spPr>
         <p:txBody>
-          <a:bodyPr wrap="square" lIns="110000" tIns="91440" rIns="110000" bIns="91440" rtlCol="0" anchor="t">
+          <a:bodyPr wrap="square" lIns="110000" tIns="91440" rIns="110000" bIns="91440" rtlCol="0" anchor="ctr">
             <a:normAutofit/>
           </a:bodyPr>
           <a:lstStyle/>
           <a:p>
-            <a:pPr marL="0" indent="0" algn="l">
+            <a:pPr marL="0" indent="0" algn="ctr">
               <a:lnSpc>
                 <a:spcPct val="104000"/>
               </a:lnSpc>
@@ -29023,12 +28981,12 @@
           </a:ln>
         </p:spPr>
         <p:txBody>
-          <a:bodyPr wrap="square" lIns="137160" tIns="91440" rIns="137160" bIns="91440" rtlCol="0" anchor="t">
+          <a:bodyPr wrap="square" lIns="137160" tIns="91440" rIns="137160" bIns="91440" rtlCol="0" anchor="ctr">
             <a:normAutofit/>
           </a:bodyPr>
           <a:lstStyle/>
           <a:p>
-            <a:pPr marL="0" indent="0" algn="l">
+            <a:pPr marL="0" indent="0" algn="ctr">
               <a:lnSpc>
                 <a:spcPct val="104000"/>
               </a:lnSpc>
@@ -29049,7 +29007,7 @@
             </a:r>
           </a:p>
           <a:p>
-            <a:pPr marL="0" indent="0" algn="l">
+            <a:pPr marL="0" indent="0" algn="ctr">
               <a:lnSpc>
                 <a:spcPct val="104000"/>
               </a:lnSpc>
@@ -29070,7 +29028,7 @@
             </a:r>
           </a:p>
           <a:p>
-            <a:pPr marL="0" indent="0" algn="l">
+            <a:pPr marL="0" indent="0" algn="ctr">
               <a:lnSpc>
                 <a:spcPct val="104000"/>
               </a:lnSpc>
@@ -29157,12 +29115,12 @@
           </a:ln>
         </p:spPr>
         <p:txBody>
-          <a:bodyPr wrap="square" lIns="137160" tIns="91440" rIns="137160" bIns="91440" rtlCol="0" anchor="t">
+          <a:bodyPr wrap="square" lIns="137160" tIns="91440" rIns="137160" bIns="91440" rtlCol="0" anchor="ctr">
             <a:normAutofit/>
           </a:bodyPr>
           <a:lstStyle/>
           <a:p>
-            <a:pPr marL="0" indent="0" algn="l">
+            <a:pPr marL="0" indent="0" algn="ctr">
               <a:lnSpc>
                 <a:spcPct val="104000"/>
               </a:lnSpc>
@@ -29183,7 +29141,7 @@
             </a:r>
           </a:p>
           <a:p>
-            <a:pPr marL="0" indent="0" algn="l">
+            <a:pPr marL="0" indent="0" algn="ctr">
               <a:lnSpc>
                 <a:spcPct val="104000"/>
               </a:lnSpc>
@@ -29204,7 +29162,7 @@
             </a:r>
           </a:p>
           <a:p>
-            <a:pPr marL="0" indent="0" algn="l">
+            <a:pPr marL="0" indent="0" algn="ctr">
               <a:lnSpc>
                 <a:spcPct val="104000"/>
               </a:lnSpc>
@@ -29291,12 +29249,12 @@
           </a:ln>
         </p:spPr>
         <p:txBody>
-          <a:bodyPr wrap="square" lIns="137160" tIns="91440" rIns="137160" bIns="91440" rtlCol="0" anchor="t">
+          <a:bodyPr wrap="square" lIns="137160" tIns="91440" rIns="137160" bIns="91440" rtlCol="0" anchor="ctr">
             <a:normAutofit/>
           </a:bodyPr>
           <a:lstStyle/>
           <a:p>
-            <a:pPr marL="0" indent="0" algn="l">
+            <a:pPr marL="0" indent="0" algn="ctr">
               <a:lnSpc>
                 <a:spcPct val="104000"/>
               </a:lnSpc>
@@ -29317,7 +29275,7 @@
             </a:r>
           </a:p>
           <a:p>
-            <a:pPr marL="0" indent="0" algn="l">
+            <a:pPr marL="0" indent="0" algn="ctr">
               <a:lnSpc>
                 <a:spcPct val="104000"/>
               </a:lnSpc>
@@ -29338,7 +29296,7 @@
             </a:r>
           </a:p>
           <a:p>
-            <a:pPr marL="0" indent="0" algn="l">
+            <a:pPr marL="0" indent="0" algn="ctr">
               <a:lnSpc>
                 <a:spcPct val="104000"/>
               </a:lnSpc>
@@ -29685,7 +29643,7 @@
                 <a:latin typeface="Arial"/>
                 <a:cs typeface="Arial"/>
               </a:rPr>
-              <a:t>Poster là bảng quảng cáo: một thông điệp, một hình, đọc được từ 2 mét.</a:t>
+              <a:t>Poster: một thông điệp, một hình, đọc được từ 2 mét.</a:t>
             </a:r>
           </a:p>
         </p:txBody>
@@ -29951,12 +29909,12 @@
           </a:ln>
         </p:spPr>
         <p:txBody>
-          <a:bodyPr wrap="square" lIns="137160" tIns="91440" rIns="137160" bIns="91440" rtlCol="0" anchor="t">
+          <a:bodyPr wrap="square" lIns="137160" tIns="91440" rIns="137160" bIns="91440" rtlCol="0" anchor="ctr">
             <a:normAutofit/>
           </a:bodyPr>
           <a:lstStyle/>
           <a:p>
-            <a:pPr marL="0" indent="0" algn="l">
+            <a:pPr marL="0" indent="0" algn="ctr">
               <a:lnSpc>
                 <a:spcPct val="104000"/>
               </a:lnSpc>
@@ -29977,7 +29935,7 @@
             </a:r>
           </a:p>
           <a:p>
-            <a:pPr marL="0" indent="0" algn="l">
+            <a:pPr marL="0" indent="0" algn="ctr">
               <a:lnSpc>
                 <a:spcPct val="104000"/>
               </a:lnSpc>
@@ -30064,12 +30022,12 @@
           </a:ln>
         </p:spPr>
         <p:txBody>
-          <a:bodyPr wrap="square" lIns="137160" tIns="91440" rIns="137160" bIns="91440" rtlCol="0" anchor="t">
+          <a:bodyPr wrap="square" lIns="137160" tIns="91440" rIns="137160" bIns="91440" rtlCol="0" anchor="ctr">
             <a:normAutofit/>
           </a:bodyPr>
           <a:lstStyle/>
           <a:p>
-            <a:pPr marL="0" indent="0" algn="l">
+            <a:pPr marL="0" indent="0" algn="ctr">
               <a:lnSpc>
                 <a:spcPct val="104000"/>
               </a:lnSpc>
@@ -30090,7 +30048,7 @@
             </a:r>
           </a:p>
           <a:p>
-            <a:pPr marL="0" indent="0" algn="l">
+            <a:pPr marL="0" indent="0" algn="ctr">
               <a:lnSpc>
                 <a:spcPct val="104000"/>
               </a:lnSpc>
@@ -30111,7 +30069,7 @@
             </a:r>
           </a:p>
           <a:p>
-            <a:pPr marL="0" indent="0" algn="l">
+            <a:pPr marL="0" indent="0" algn="ctr">
               <a:lnSpc>
                 <a:spcPct val="104000"/>
               </a:lnSpc>
@@ -30198,12 +30156,12 @@
           </a:ln>
         </p:spPr>
         <p:txBody>
-          <a:bodyPr wrap="square" lIns="137160" tIns="91440" rIns="137160" bIns="91440" rtlCol="0" anchor="t">
+          <a:bodyPr wrap="square" lIns="137160" tIns="91440" rIns="137160" bIns="91440" rtlCol="0" anchor="ctr">
             <a:normAutofit/>
           </a:bodyPr>
           <a:lstStyle/>
           <a:p>
-            <a:pPr marL="0" indent="0" algn="l">
+            <a:pPr marL="0" indent="0" algn="ctr">
               <a:lnSpc>
                 <a:spcPct val="104000"/>
               </a:lnSpc>
@@ -30224,7 +30182,7 @@
             </a:r>
           </a:p>
           <a:p>
-            <a:pPr marL="0" indent="0" algn="l">
+            <a:pPr marL="0" indent="0" algn="ctr">
               <a:lnSpc>
                 <a:spcPct val="104000"/>
               </a:lnSpc>
@@ -30245,7 +30203,7 @@
             </a:r>
           </a:p>
           <a:p>
-            <a:pPr marL="0" indent="0" algn="l">
+            <a:pPr marL="0" indent="0" algn="ctr">
               <a:lnSpc>
                 <a:spcPct val="104000"/>
               </a:lnSpc>
@@ -30332,12 +30290,12 @@
           </a:ln>
         </p:spPr>
         <p:txBody>
-          <a:bodyPr wrap="square" lIns="137160" tIns="91440" rIns="137160" bIns="91440" rtlCol="0" anchor="t">
+          <a:bodyPr wrap="square" lIns="137160" tIns="91440" rIns="137160" bIns="91440" rtlCol="0" anchor="ctr">
             <a:normAutofit/>
           </a:bodyPr>
           <a:lstStyle/>
           <a:p>
-            <a:pPr marL="0" indent="0" algn="l">
+            <a:pPr marL="0" indent="0" algn="ctr">
               <a:lnSpc>
                 <a:spcPct val="104000"/>
               </a:lnSpc>
@@ -30358,7 +30316,7 @@
             </a:r>
           </a:p>
           <a:p>
-            <a:pPr marL="0" indent="0" algn="l">
+            <a:pPr marL="0" indent="0" algn="ctr">
               <a:lnSpc>
                 <a:spcPct val="104000"/>
               </a:lnSpc>
@@ -31055,7 +31013,7 @@
                 <a:latin typeface="Arial"/>
                 <a:cs typeface="Arial"/>
               </a:rPr>
-              <a:t>Cùng 24 câu hỏi như Buổi 1, trên biểu mẫu trực tuyến (đường dẫn trong khung chat)</a:t>
+              <a:t>Mở biểu mẫu: đường link có trong chat</a:t>
             </a:r>
           </a:p>
           <a:p>
@@ -31080,7 +31038,7 @@
                 <a:latin typeface="Arial"/>
                 <a:cs typeface="Arial"/>
               </a:rPr>
-              <a:t>Làm cá nhân, không thảo luận</a:t>
+              <a:t>Nhập họ và tên của bạn, như ở Buổi 1</a:t>
             </a:r>
           </a:p>
           <a:p>
@@ -31105,7 +31063,7 @@
                 <a:latin typeface="Arial"/>
                 <a:cs typeface="Arial"/>
               </a:rPr>
-              <a:t>Dùng cùng mã số học viên như Buổi 1</a:t>
+              <a:t>Cùng 24 câu hỏi như Buổi 1</a:t>
             </a:r>
           </a:p>
           <a:p>
@@ -31130,7 +31088,7 @@
                 <a:latin typeface="Arial"/>
                 <a:cs typeface="Arial"/>
               </a:rPr>
-              <a:t>Đáp án được gửi sau khóa học</a:t>
+              <a:t>Làm một mình. Đáp án được gửi sau khóa học</a:t>
             </a:r>
           </a:p>
         </p:txBody>
@@ -31187,7 +31145,7 @@
                 <a:latin typeface="Arial"/>
                 <a:cs typeface="Arial"/>
               </a:rPr>
-              <a:t>Đã nộp bài kiểm tra (chỉ ghi mã số học viên)</a:t>
+              <a:t>Đã gửi biểu mẫu</a:t>
             </a:r>
           </a:p>
         </p:txBody>
@@ -31455,12 +31413,12 @@
           </a:ln>
         </p:spPr>
         <p:txBody>
-          <a:bodyPr wrap="square" lIns="110000" tIns="91440" rIns="110000" bIns="91440" rtlCol="0" anchor="t">
+          <a:bodyPr wrap="square" lIns="110000" tIns="91440" rIns="110000" bIns="91440" rtlCol="0" anchor="ctr">
             <a:normAutofit/>
           </a:bodyPr>
           <a:lstStyle/>
           <a:p>
-            <a:pPr marL="0" indent="0" algn="l">
+            <a:pPr marL="0" indent="0" algn="ctr">
               <a:lnSpc>
                 <a:spcPct val="104000"/>
               </a:lnSpc>
@@ -31481,7 +31439,7 @@
             </a:r>
           </a:p>
           <a:p>
-            <a:pPr marL="0" indent="0" algn="l">
+            <a:pPr marL="0" indent="0" algn="ctr">
               <a:lnSpc>
                 <a:spcPct val="104000"/>
               </a:lnSpc>
@@ -31502,7 +31460,7 @@
             </a:r>
           </a:p>
           <a:p>
-            <a:pPr marL="0" indent="0" algn="l">
+            <a:pPr marL="0" indent="0" algn="ctr">
               <a:lnSpc>
                 <a:spcPct val="104000"/>
               </a:lnSpc>
@@ -31591,12 +31549,12 @@
           </a:ln>
         </p:spPr>
         <p:txBody>
-          <a:bodyPr wrap="square" lIns="110000" tIns="91440" rIns="110000" bIns="91440" rtlCol="0" anchor="t">
+          <a:bodyPr wrap="square" lIns="110000" tIns="91440" rIns="110000" bIns="91440" rtlCol="0" anchor="ctr">
             <a:normAutofit/>
           </a:bodyPr>
           <a:lstStyle/>
           <a:p>
-            <a:pPr marL="0" indent="0" algn="l">
+            <a:pPr marL="0" indent="0" algn="ctr">
               <a:lnSpc>
                 <a:spcPct val="104000"/>
               </a:lnSpc>
@@ -31617,7 +31575,7 @@
             </a:r>
           </a:p>
           <a:p>
-            <a:pPr marL="0" indent="0" algn="l">
+            <a:pPr marL="0" indent="0" algn="ctr">
               <a:lnSpc>
                 <a:spcPct val="104000"/>
               </a:lnSpc>
@@ -31638,7 +31596,7 @@
             </a:r>
           </a:p>
           <a:p>
-            <a:pPr marL="0" indent="0" algn="l">
+            <a:pPr marL="0" indent="0" algn="ctr">
               <a:lnSpc>
                 <a:spcPct val="104000"/>
               </a:lnSpc>
@@ -31727,12 +31685,12 @@
           </a:ln>
         </p:spPr>
         <p:txBody>
-          <a:bodyPr wrap="square" lIns="110000" tIns="91440" rIns="110000" bIns="91440" rtlCol="0" anchor="t">
+          <a:bodyPr wrap="square" lIns="110000" tIns="91440" rIns="110000" bIns="91440" rtlCol="0" anchor="ctr">
             <a:normAutofit/>
           </a:bodyPr>
           <a:lstStyle/>
           <a:p>
-            <a:pPr marL="0" indent="0" algn="l">
+            <a:pPr marL="0" indent="0" algn="ctr">
               <a:lnSpc>
                 <a:spcPct val="104000"/>
               </a:lnSpc>
@@ -31753,7 +31711,7 @@
             </a:r>
           </a:p>
           <a:p>
-            <a:pPr marL="0" indent="0" algn="l">
+            <a:pPr marL="0" indent="0" algn="ctr">
               <a:lnSpc>
                 <a:spcPct val="104000"/>
               </a:lnSpc>
@@ -31842,12 +31800,12 @@
           </a:ln>
         </p:spPr>
         <p:txBody>
-          <a:bodyPr wrap="square" lIns="110000" tIns="91440" rIns="110000" bIns="91440" rtlCol="0" anchor="t">
+          <a:bodyPr wrap="square" lIns="110000" tIns="91440" rIns="110000" bIns="91440" rtlCol="0" anchor="ctr">
             <a:normAutofit/>
           </a:bodyPr>
           <a:lstStyle/>
           <a:p>
-            <a:pPr marL="0" indent="0" algn="l">
+            <a:pPr marL="0" indent="0" algn="ctr">
               <a:lnSpc>
                 <a:spcPct val="104000"/>
               </a:lnSpc>
@@ -31868,7 +31826,7 @@
             </a:r>
           </a:p>
           <a:p>
-            <a:pPr marL="0" indent="0" algn="l">
+            <a:pPr marL="0" indent="0" algn="ctr">
               <a:lnSpc>
                 <a:spcPct val="104000"/>
               </a:lnSpc>
@@ -31957,12 +31915,12 @@
           </a:ln>
         </p:spPr>
         <p:txBody>
-          <a:bodyPr wrap="square" lIns="110000" tIns="91440" rIns="110000" bIns="91440" rtlCol="0" anchor="t">
+          <a:bodyPr wrap="square" lIns="110000" tIns="91440" rIns="110000" bIns="91440" rtlCol="0" anchor="ctr">
             <a:normAutofit/>
           </a:bodyPr>
           <a:lstStyle/>
           <a:p>
-            <a:pPr marL="0" indent="0" algn="l">
+            <a:pPr marL="0" indent="0" algn="ctr">
               <a:lnSpc>
                 <a:spcPct val="104000"/>
               </a:lnSpc>
@@ -31983,7 +31941,7 @@
             </a:r>
           </a:p>
           <a:p>
-            <a:pPr marL="0" indent="0" algn="l">
+            <a:pPr marL="0" indent="0" algn="ctr">
               <a:lnSpc>
                 <a:spcPct val="104000"/>
               </a:lnSpc>
@@ -32716,12 +32674,12 @@
           </a:ln>
         </p:spPr>
         <p:txBody>
-          <a:bodyPr wrap="square" lIns="137160" tIns="91440" rIns="137160" bIns="91440" rtlCol="0" anchor="t">
+          <a:bodyPr wrap="square" lIns="137160" tIns="91440" rIns="137160" bIns="91440" rtlCol="0" anchor="ctr">
             <a:normAutofit/>
           </a:bodyPr>
           <a:lstStyle/>
           <a:p>
-            <a:pPr marL="0" indent="0" algn="l">
+            <a:pPr marL="0" indent="0" algn="ctr">
               <a:lnSpc>
                 <a:spcPct val="104000"/>
               </a:lnSpc>
@@ -32742,7 +32700,7 @@
             </a:r>
           </a:p>
           <a:p>
-            <a:pPr marL="0" indent="0" algn="l">
+            <a:pPr marL="0" indent="0" algn="ctr">
               <a:lnSpc>
                 <a:spcPct val="104000"/>
               </a:lnSpc>
@@ -32829,12 +32787,12 @@
           </a:ln>
         </p:spPr>
         <p:txBody>
-          <a:bodyPr wrap="square" lIns="137160" tIns="91440" rIns="137160" bIns="91440" rtlCol="0" anchor="t">
+          <a:bodyPr wrap="square" lIns="137160" tIns="91440" rIns="137160" bIns="91440" rtlCol="0" anchor="ctr">
             <a:normAutofit/>
           </a:bodyPr>
           <a:lstStyle/>
           <a:p>
-            <a:pPr marL="0" indent="0" algn="l">
+            <a:pPr marL="0" indent="0" algn="ctr">
               <a:lnSpc>
                 <a:spcPct val="104000"/>
               </a:lnSpc>
@@ -32855,7 +32813,7 @@
             </a:r>
           </a:p>
           <a:p>
-            <a:pPr marL="0" indent="0" algn="l">
+            <a:pPr marL="0" indent="0" algn="ctr">
               <a:lnSpc>
                 <a:spcPct val="104000"/>
               </a:lnSpc>
@@ -32942,12 +32900,12 @@
           </a:ln>
         </p:spPr>
         <p:txBody>
-          <a:bodyPr wrap="square" lIns="137160" tIns="91440" rIns="137160" bIns="91440" rtlCol="0" anchor="t">
+          <a:bodyPr wrap="square" lIns="137160" tIns="91440" rIns="137160" bIns="91440" rtlCol="0" anchor="ctr">
             <a:normAutofit/>
           </a:bodyPr>
           <a:lstStyle/>
           <a:p>
-            <a:pPr marL="0" indent="0" algn="l">
+            <a:pPr marL="0" indent="0" algn="ctr">
               <a:lnSpc>
                 <a:spcPct val="104000"/>
               </a:lnSpc>
@@ -33287,12 +33245,12 @@
           </a:ln>
         </p:spPr>
         <p:txBody>
-          <a:bodyPr wrap="square" lIns="110000" tIns="91440" rIns="110000" bIns="91440" rtlCol="0" anchor="t">
+          <a:bodyPr wrap="square" lIns="110000" tIns="91440" rIns="110000" bIns="91440" rtlCol="0" anchor="ctr">
             <a:normAutofit/>
           </a:bodyPr>
           <a:lstStyle/>
           <a:p>
-            <a:pPr marL="0" indent="0" algn="l">
+            <a:pPr marL="0" indent="0" algn="ctr">
               <a:lnSpc>
                 <a:spcPct val="104000"/>
               </a:lnSpc>
@@ -33313,7 +33271,7 @@
             </a:r>
           </a:p>
           <a:p>
-            <a:pPr marL="0" indent="0" algn="l">
+            <a:pPr marL="0" indent="0" algn="ctr">
               <a:lnSpc>
                 <a:spcPct val="104000"/>
               </a:lnSpc>
@@ -33402,12 +33360,12 @@
           </a:ln>
         </p:spPr>
         <p:txBody>
-          <a:bodyPr wrap="square" lIns="110000" tIns="91440" rIns="110000" bIns="91440" rtlCol="0" anchor="t">
+          <a:bodyPr wrap="square" lIns="110000" tIns="91440" rIns="110000" bIns="91440" rtlCol="0" anchor="ctr">
             <a:normAutofit/>
           </a:bodyPr>
           <a:lstStyle/>
           <a:p>
-            <a:pPr marL="0" indent="0" algn="l">
+            <a:pPr marL="0" indent="0" algn="ctr">
               <a:lnSpc>
                 <a:spcPct val="104000"/>
               </a:lnSpc>
@@ -33496,12 +33454,12 @@
           </a:ln>
         </p:spPr>
         <p:txBody>
-          <a:bodyPr wrap="square" lIns="110000" tIns="91440" rIns="110000" bIns="91440" rtlCol="0" anchor="t">
+          <a:bodyPr wrap="square" lIns="110000" tIns="91440" rIns="110000" bIns="91440" rtlCol="0" anchor="ctr">
             <a:normAutofit/>
           </a:bodyPr>
           <a:lstStyle/>
           <a:p>
-            <a:pPr marL="0" indent="0" algn="l">
+            <a:pPr marL="0" indent="0" algn="ctr">
               <a:lnSpc>
                 <a:spcPct val="104000"/>
               </a:lnSpc>
@@ -33522,7 +33480,7 @@
             </a:r>
           </a:p>
           <a:p>
-            <a:pPr marL="0" indent="0" algn="l">
+            <a:pPr marL="0" indent="0" algn="ctr">
               <a:lnSpc>
                 <a:spcPct val="104000"/>
               </a:lnSpc>
@@ -33611,12 +33569,12 @@
           </a:ln>
         </p:spPr>
         <p:txBody>
-          <a:bodyPr wrap="square" lIns="110000" tIns="91440" rIns="110000" bIns="91440" rtlCol="0" anchor="t">
+          <a:bodyPr wrap="square" lIns="110000" tIns="91440" rIns="110000" bIns="91440" rtlCol="0" anchor="ctr">
             <a:normAutofit/>
           </a:bodyPr>
           <a:lstStyle/>
           <a:p>
-            <a:pPr marL="0" indent="0" algn="l">
+            <a:pPr marL="0" indent="0" algn="ctr">
               <a:lnSpc>
                 <a:spcPct val="104000"/>
               </a:lnSpc>
@@ -33637,7 +33595,7 @@
             </a:r>
           </a:p>
           <a:p>
-            <a:pPr marL="0" indent="0" algn="l">
+            <a:pPr marL="0" indent="0" algn="ctr">
               <a:lnSpc>
                 <a:spcPct val="104000"/>
               </a:lnSpc>
@@ -33709,7 +33667,7 @@
                 <a:latin typeface="Arial"/>
                 <a:cs typeface="Arial"/>
               </a:rPr>
-              <a:t>Bài về nhà cá nhân: mỗi người bình duyệt một bản nháp và nhận một bản bình duyệt (Course/Assignment/peer_review_instructions).</a:t>
+              <a:t>Bài về nhà cá nhân: mỗi người bình duyệt một bản nháp và nhận một bản bình duyệt.</a:t>
             </a:r>
           </a:p>
         </p:txBody>
@@ -33918,7 +33876,7 @@
         </p:nvSpPr>
         <p:spPr>
           <a:xfrm>
-            <a:off x="457200" y="1680740"/>
+            <a:off x="457200" y="1958552"/>
             <a:ext cx="3625866" cy="640000"/>
           </a:xfrm>
           <a:prstGeom prst="rect">
@@ -33961,8 +33919,8 @@
         </p:nvSpPr>
         <p:spPr>
           <a:xfrm>
-            <a:off x="457200" y="2320740"/>
-            <a:ext cx="3625866" cy="2707780"/>
+            <a:off x="457200" y="2598552"/>
+            <a:ext cx="3625866" cy="1874342"/>
           </a:xfrm>
           <a:prstGeom prst="rect">
             <a:avLst/>
@@ -33975,12 +33933,12 @@
           </a:ln>
         </p:spPr>
         <p:txBody>
-          <a:bodyPr wrap="square" lIns="137160" tIns="91440" rIns="137160" bIns="91440" rtlCol="0" anchor="t">
+          <a:bodyPr wrap="square" lIns="137160" tIns="91440" rIns="137160" bIns="91440" rtlCol="0" anchor="ctr">
             <a:normAutofit/>
           </a:bodyPr>
           <a:lstStyle/>
           <a:p>
-            <a:pPr marL="0" indent="0" algn="l">
+            <a:pPr marL="0" indent="0" algn="ctr">
               <a:lnSpc>
                 <a:spcPct val="104000"/>
               </a:lnSpc>
@@ -34001,7 +33959,7 @@
             </a:r>
           </a:p>
           <a:p>
-            <a:pPr marL="0" indent="0" algn="l">
+            <a:pPr marL="0" indent="0" algn="ctr">
               <a:lnSpc>
                 <a:spcPct val="104000"/>
               </a:lnSpc>
@@ -34022,7 +33980,7 @@
             </a:r>
           </a:p>
           <a:p>
-            <a:pPr marL="0" indent="0" algn="l">
+            <a:pPr marL="0" indent="0" algn="ctr">
               <a:lnSpc>
                 <a:spcPct val="104000"/>
               </a:lnSpc>
@@ -34052,7 +34010,7 @@
         </p:nvSpPr>
         <p:spPr>
           <a:xfrm>
-            <a:off x="4283066" y="1680740"/>
+            <a:off x="4283066" y="1958552"/>
             <a:ext cx="3625866" cy="640000"/>
           </a:xfrm>
           <a:prstGeom prst="rect">
@@ -34095,8 +34053,8 @@
         </p:nvSpPr>
         <p:spPr>
           <a:xfrm>
-            <a:off x="4283066" y="2320740"/>
-            <a:ext cx="3625866" cy="2707780"/>
+            <a:off x="4283066" y="2598552"/>
+            <a:ext cx="3625866" cy="1874342"/>
           </a:xfrm>
           <a:prstGeom prst="rect">
             <a:avLst/>
@@ -34109,12 +34067,12 @@
           </a:ln>
         </p:spPr>
         <p:txBody>
-          <a:bodyPr wrap="square" lIns="137160" tIns="91440" rIns="137160" bIns="91440" rtlCol="0" anchor="t">
+          <a:bodyPr wrap="square" lIns="137160" tIns="91440" rIns="137160" bIns="91440" rtlCol="0" anchor="ctr">
             <a:normAutofit/>
           </a:bodyPr>
           <a:lstStyle/>
           <a:p>
-            <a:pPr marL="0" indent="0" algn="l">
+            <a:pPr marL="0" indent="0" algn="ctr">
               <a:lnSpc>
                 <a:spcPct val="104000"/>
               </a:lnSpc>
@@ -34135,7 +34093,7 @@
             </a:r>
           </a:p>
           <a:p>
-            <a:pPr marL="0" indent="0" algn="l">
+            <a:pPr marL="0" indent="0" algn="ctr">
               <a:lnSpc>
                 <a:spcPct val="104000"/>
               </a:lnSpc>
@@ -34152,11 +34110,82 @@
                 <a:latin typeface="Arial"/>
                 <a:cs typeface="Arial"/>
               </a:rPr>
-              <a:t>Mẫu: đề cương, đề cương chi tiết, phiếu đồng ý tham gia, phiếu thu thập dữ liệu (CRF), kế hoạch phân tích</a:t>
-            </a:r>
-          </a:p>
-          <a:p>
-            <a:pPr marL="0" indent="0" algn="l">
+              <a:t>Mẫu cho mọi bước, từ đề cương đến thư trả lời phản biện</a:t>
+            </a:r>
+          </a:p>
+        </p:txBody>
+      </p:sp>
+      <p:sp>
+        <p:nvSpPr>
+          <p:cNvPr id="74" name="CardHead"/>
+          <p:cNvSpPr/>
+          <p:nvPr/>
+        </p:nvSpPr>
+        <p:spPr>
+          <a:xfrm>
+            <a:off x="8108932" y="1958552"/>
+            <a:ext cx="3625866" cy="640000"/>
+          </a:xfrm>
+          <a:prstGeom prst="rect">
+            <a:avLst/>
+          </a:prstGeom>
+          <a:solidFill>
+            <a:srgbClr val="5FA39B"/>
+          </a:solidFill>
+          <a:ln>
+            <a:noFill/>
+          </a:ln>
+        </p:spPr>
+        <p:txBody>
+          <a:bodyPr wrap="square" lIns="91440" tIns="45720" rIns="91440" bIns="45720" rtlCol="0" anchor="ctr">
+            <a:normAutofit/>
+          </a:bodyPr>
+          <a:lstStyle/>
+          <a:p>
+            <a:pPr marL="0" indent="0" algn="ctr">
+              <a:buNone/>
+            </a:pPr>
+            <a:r>
+              <a:rPr lang="en-US" sz="1900" b="1" dirty="0">
+                <a:solidFill>
+                  <a:srgbClr val="FFFFFF"/>
+                </a:solidFill>
+                <a:latin typeface="Arial"/>
+                <a:cs typeface="Arial"/>
+              </a:rPr>
+              <a:t>Tiếp tục</a:t>
+            </a:r>
+          </a:p>
+        </p:txBody>
+      </p:sp>
+      <p:sp>
+        <p:nvSpPr>
+          <p:cNvPr id="75" name="CardBody"/>
+          <p:cNvSpPr/>
+          <p:nvPr/>
+        </p:nvSpPr>
+        <p:spPr>
+          <a:xfrm>
+            <a:off x="8108932" y="2598552"/>
+            <a:ext cx="3625866" cy="1874342"/>
+          </a:xfrm>
+          <a:prstGeom prst="rect">
+            <a:avLst/>
+          </a:prstGeom>
+          <a:solidFill>
+            <a:srgbClr val="EAF2F5"/>
+          </a:solidFill>
+          <a:ln>
+            <a:noFill/>
+          </a:ln>
+        </p:spPr>
+        <p:txBody>
+          <a:bodyPr wrap="square" lIns="137160" tIns="91440" rIns="137160" bIns="91440" rtlCol="0" anchor="ctr">
+            <a:normAutofit/>
+          </a:bodyPr>
+          <a:lstStyle/>
+          <a:p>
+            <a:pPr marL="0" indent="0" algn="ctr">
               <a:lnSpc>
                 <a:spcPct val="104000"/>
               </a:lnSpc>
@@ -34173,82 +34202,11 @@
                 <a:latin typeface="Arial"/>
                 <a:cs typeface="Arial"/>
               </a:rPr>
-              <a:t>Mẫu: bản thảo, thư phản hồi ý kiến phản biện</a:t>
-            </a:r>
-          </a:p>
-        </p:txBody>
-      </p:sp>
-      <p:sp>
-        <p:nvSpPr>
-          <p:cNvPr id="74" name="CardHead"/>
-          <p:cNvSpPr/>
-          <p:nvPr/>
-        </p:nvSpPr>
-        <p:spPr>
-          <a:xfrm>
-            <a:off x="8108932" y="1680740"/>
-            <a:ext cx="3625866" cy="640000"/>
-          </a:xfrm>
-          <a:prstGeom prst="rect">
-            <a:avLst/>
-          </a:prstGeom>
-          <a:solidFill>
-            <a:srgbClr val="5FA39B"/>
-          </a:solidFill>
-          <a:ln>
-            <a:noFill/>
-          </a:ln>
-        </p:spPr>
-        <p:txBody>
-          <a:bodyPr wrap="square" lIns="91440" tIns="45720" rIns="91440" bIns="45720" rtlCol="0" anchor="ctr">
-            <a:normAutofit/>
-          </a:bodyPr>
-          <a:lstStyle/>
+              <a:t>Đưa đề cương đến hội đồng đạo đức</a:t>
+            </a:r>
+          </a:p>
           <a:p>
             <a:pPr marL="0" indent="0" algn="ctr">
-              <a:buNone/>
-            </a:pPr>
-            <a:r>
-              <a:rPr lang="en-US" sz="1900" b="1" dirty="0">
-                <a:solidFill>
-                  <a:srgbClr val="FFFFFF"/>
-                </a:solidFill>
-                <a:latin typeface="Arial"/>
-                <a:cs typeface="Arial"/>
-              </a:rPr>
-              <a:t>Tiếp tục</a:t>
-            </a:r>
-          </a:p>
-        </p:txBody>
-      </p:sp>
-      <p:sp>
-        <p:nvSpPr>
-          <p:cNvPr id="75" name="CardBody"/>
-          <p:cNvSpPr/>
-          <p:nvPr/>
-        </p:nvSpPr>
-        <p:spPr>
-          <a:xfrm>
-            <a:off x="8108932" y="2320740"/>
-            <a:ext cx="3625866" cy="2707780"/>
-          </a:xfrm>
-          <a:prstGeom prst="rect">
-            <a:avLst/>
-          </a:prstGeom>
-          <a:solidFill>
-            <a:srgbClr val="EAF2F5"/>
-          </a:solidFill>
-          <a:ln>
-            <a:noFill/>
-          </a:ln>
-        </p:spPr>
-        <p:txBody>
-          <a:bodyPr wrap="square" lIns="137160" tIns="91440" rIns="137160" bIns="91440" rtlCol="0" anchor="t">
-            <a:normAutofit/>
-          </a:bodyPr>
-          <a:lstStyle/>
-          <a:p>
-            <a:pPr marL="0" indent="0" algn="l">
               <a:lnSpc>
                 <a:spcPct val="104000"/>
               </a:lnSpc>
@@ -34265,32 +34223,11 @@
                 <a:latin typeface="Arial"/>
                 <a:cs typeface="Arial"/>
               </a:rPr>
-              <a:t>Đưa đề cương đến hội đồng đạo đức</a:t>
-            </a:r>
-          </a:p>
-          <a:p>
-            <a:pPr marL="0" indent="0" algn="l">
-              <a:lnSpc>
-                <a:spcPct val="104000"/>
-              </a:lnSpc>
-              <a:spcBef>
-                <a:spcPts val="400"/>
-              </a:spcBef>
-              <a:buNone/>
-            </a:pPr>
-            <a:r>
-              <a:rPr lang="en-US" sz="1750" dirty="0">
-                <a:solidFill>
-                  <a:srgbClr val="000000"/>
-                </a:solidFill>
-                <a:latin typeface="Arial"/>
-                <a:cs typeface="Arial"/>
-              </a:rPr>
-              <a:t>Cấp độ 2: mô hình thống kê bằng R</a:t>
-            </a:r>
-          </a:p>
-          <a:p>
-            <a:pPr marL="0" indent="0" algn="l">
+              <a:t>Cấp độ 2: thống kê với R</a:t>
+            </a:r>
+          </a:p>
+          <a:p>
+            <a:pPr marL="0" indent="0" algn="ctr">
               <a:lnSpc>
                 <a:spcPct val="104000"/>
               </a:lnSpc>
@@ -35040,12 +34977,12 @@
           </a:ln>
         </p:spPr>
         <p:txBody>
-          <a:bodyPr wrap="square" lIns="110000" tIns="91440" rIns="110000" bIns="91440" rtlCol="0" anchor="t">
+          <a:bodyPr wrap="square" lIns="110000" tIns="91440" rIns="110000" bIns="91440" rtlCol="0" anchor="ctr">
             <a:normAutofit/>
           </a:bodyPr>
           <a:lstStyle/>
           <a:p>
-            <a:pPr marL="0" indent="0" algn="l">
+            <a:pPr marL="0" indent="0" algn="ctr">
               <a:lnSpc>
                 <a:spcPct val="104000"/>
               </a:lnSpc>
@@ -35066,7 +35003,7 @@
             </a:r>
           </a:p>
           <a:p>
-            <a:pPr marL="0" indent="0" algn="l">
+            <a:pPr marL="0" indent="0" algn="ctr">
               <a:lnSpc>
                 <a:spcPct val="104000"/>
               </a:lnSpc>
@@ -35155,12 +35092,12 @@
           </a:ln>
         </p:spPr>
         <p:txBody>
-          <a:bodyPr wrap="square" lIns="110000" tIns="91440" rIns="110000" bIns="91440" rtlCol="0" anchor="t">
+          <a:bodyPr wrap="square" lIns="110000" tIns="91440" rIns="110000" bIns="91440" rtlCol="0" anchor="ctr">
             <a:normAutofit/>
           </a:bodyPr>
           <a:lstStyle/>
           <a:p>
-            <a:pPr marL="0" indent="0" algn="l">
+            <a:pPr marL="0" indent="0" algn="ctr">
               <a:lnSpc>
                 <a:spcPct val="104000"/>
               </a:lnSpc>
@@ -35181,7 +35118,7 @@
             </a:r>
           </a:p>
           <a:p>
-            <a:pPr marL="0" indent="0" algn="l">
+            <a:pPr marL="0" indent="0" algn="ctr">
               <a:lnSpc>
                 <a:spcPct val="104000"/>
               </a:lnSpc>
@@ -35270,12 +35207,12 @@
           </a:ln>
         </p:spPr>
         <p:txBody>
-          <a:bodyPr wrap="square" lIns="110000" tIns="91440" rIns="110000" bIns="91440" rtlCol="0" anchor="t">
+          <a:bodyPr wrap="square" lIns="110000" tIns="91440" rIns="110000" bIns="91440" rtlCol="0" anchor="ctr">
             <a:normAutofit/>
           </a:bodyPr>
           <a:lstStyle/>
           <a:p>
-            <a:pPr marL="0" indent="0" algn="l">
+            <a:pPr marL="0" indent="0" algn="ctr">
               <a:lnSpc>
                 <a:spcPct val="104000"/>
               </a:lnSpc>
@@ -35296,7 +35233,7 @@
             </a:r>
           </a:p>
           <a:p>
-            <a:pPr marL="0" indent="0" algn="l">
+            <a:pPr marL="0" indent="0" algn="ctr">
               <a:lnSpc>
                 <a:spcPct val="104000"/>
               </a:lnSpc>
@@ -35385,12 +35322,12 @@
           </a:ln>
         </p:spPr>
         <p:txBody>
-          <a:bodyPr wrap="square" lIns="110000" tIns="91440" rIns="110000" bIns="91440" rtlCol="0" anchor="t">
+          <a:bodyPr wrap="square" lIns="110000" tIns="91440" rIns="110000" bIns="91440" rtlCol="0" anchor="ctr">
             <a:normAutofit/>
           </a:bodyPr>
           <a:lstStyle/>
           <a:p>
-            <a:pPr marL="0" indent="0" algn="l">
+            <a:pPr marL="0" indent="0" algn="ctr">
               <a:lnSpc>
                 <a:spcPct val="104000"/>
               </a:lnSpc>
@@ -35411,7 +35348,7 @@
             </a:r>
           </a:p>
           <a:p>
-            <a:pPr marL="0" indent="0" algn="l">
+            <a:pPr marL="0" indent="0" algn="ctr">
               <a:lnSpc>
                 <a:spcPct val="104000"/>
               </a:lnSpc>
@@ -35500,12 +35437,12 @@
           </a:ln>
         </p:spPr>
         <p:txBody>
-          <a:bodyPr wrap="square" lIns="110000" tIns="91440" rIns="110000" bIns="91440" rtlCol="0" anchor="t">
+          <a:bodyPr wrap="square" lIns="110000" tIns="91440" rIns="110000" bIns="91440" rtlCol="0" anchor="ctr">
             <a:normAutofit/>
           </a:bodyPr>
           <a:lstStyle/>
           <a:p>
-            <a:pPr marL="0" indent="0" algn="l">
+            <a:pPr marL="0" indent="0" algn="ctr">
               <a:lnSpc>
                 <a:spcPct val="104000"/>
               </a:lnSpc>
@@ -35526,7 +35463,7 @@
             </a:r>
           </a:p>
           <a:p>
-            <a:pPr marL="0" indent="0" algn="l">
+            <a:pPr marL="0" indent="0" algn="ctr">
               <a:lnSpc>
                 <a:spcPct val="104000"/>
               </a:lnSpc>
@@ -35615,12 +35552,12 @@
           </a:ln>
         </p:spPr>
         <p:txBody>
-          <a:bodyPr wrap="square" lIns="110000" tIns="91440" rIns="110000" bIns="91440" rtlCol="0" anchor="t">
+          <a:bodyPr wrap="square" lIns="110000" tIns="91440" rIns="110000" bIns="91440" rtlCol="0" anchor="ctr">
             <a:normAutofit/>
           </a:bodyPr>
           <a:lstStyle/>
           <a:p>
-            <a:pPr marL="0" indent="0" algn="l">
+            <a:pPr marL="0" indent="0" algn="ctr">
               <a:lnSpc>
                 <a:spcPct val="104000"/>
               </a:lnSpc>
@@ -37111,7 +37048,7 @@
                 <a:latin typeface="Arial"/>
                 <a:cs typeface="Arial"/>
               </a:rPr>
-              <a:t>Chỉ leo thang đến mức thiết kế của bạn cho phép.</a:t>
+              <a:t>Chỉ dùng động từ mạnh đến mức thiết kế của bạn cho phép.</a:t>
             </a:r>
           </a:p>
         </p:txBody>

--- a/vi/files/slides/Session_8_VN.pptx
+++ b/vi/files/slides/Session_8_VN.pptx
@@ -26436,7 +26436,7 @@
                 <a:latin typeface="Arial"/>
                 <a:cs typeface="Arial"/>
               </a:rPr>
-              <a:t>Bảng thuật ngữ đầy đủ (Anh-Việt): Course/References/glossary_EN_VN (PDF trong thư mục khóa học)</a:t>
+              <a:t>Bảng thuật ngữ đầy đủ (Anh-Việt): tệp PDF gửi qua email</a:t>
             </a:r>
           </a:p>
         </p:txBody>

--- a/vi/files/slides/Session_8_VN.pptx
+++ b/vi/files/slides/Session_8_VN.pptx
@@ -741,19 +741,19 @@
           <a:p>
             <a:r>
               <a:rPr lang="en-US" sz="1400" b="0" dirty="0"/>
-              <a:t>Buổi 8 (19:30). Trực tuyến, 19:30-22:30, giải lao 15 phút lúc 20:50. Buổi cuối cùng. Hôm nay cả lớp hoàn thành phần viết bản thảo FLUID-ICU (cả lớp làm Q1, rồi mỗi học viên làm câu hỏi của mình), theo một bài báo từ lúc nộp đến khi nhận ý kiến phản biện, cả lớp luyện phản biện, và khoảng năm học viên tình nguyện trình bày đề cương của mình.</a:t>
+              <a:t>Buổi 8 (19:30-22:30, giải lao 20:50-21:05). Buổi cuối cùng.</a:t>
             </a:r>
           </a:p>
           <a:p>
             <a:r>
               <a:rPr lang="en-US" sz="1400" b="0" dirty="0"/>
-              <a:t/>
+              <a:t>Hôm nay: các phần không bắt buộc và tên bài, hoàn thiện bản nháp phần Kết quả, công bố, phản biện, và khoảng năm phần trình bày đề cương. Phần bế mạc (22:15) có slide riêng.</a:t>
             </a:r>
           </a:p>
           <a:p>
             <a:r>
               <a:rPr lang="en-US" sz="1400" b="0" dirty="0"/>
-              <a:t>Trước buổi học: gửi các tệp PDF (phiếu bài tập Buổi 8, Bài 1 và Bài 2 bản gốc, bản nháp Q1 của lớp từ Buổi 7). Nhận slide của người trình bày và mở sẵn trên máy của bạn. Cài sẵn các câu bình chọn.</a:t>
+              <a:t>Trước buổi học: gửi email phiếu bài tập, hai bài báo gốc và phần Kết quả Q1 của lớp từ Buổi 7. Thu và mở sẵn slide của người trình bày.</a:t>
             </a:r>
           </a:p>
         </p:txBody>
@@ -834,25 +834,13 @@
           <a:p>
             <a:r>
               <a:rPr lang="en-US" sz="1400" b="0" dirty="0"/>
-              <a:t>Kiểm tra (2 phút). Số liệu từ key_results.md (mô phỏng): Q1 OR hiệu chỉnh 1.62. Q2 OR hiệu chỉnh 1.27 mỗi 10 ml/kg. Q1 HR Cox hiệu chỉnh 1.46 (1.00 đến 2.13). Q4 OR hiệu chỉnh các trường hợp đầy đủ 1.39 mỗi mmol/L.</a:t>
+              <a:t>Kiểm tra (2 phút). Mỗi câu một thăm dò: 'được' hay 'sửa'. Mời một người nêu cách sửa.</a:t>
             </a:r>
           </a:p>
           <a:p>
             <a:r>
               <a:rPr lang="en-US" sz="1400" b="0" dirty="0"/>
-              <a:t>Mỗi câu một lượt bình chọn: 'ổn' hay 'cần sửa'. Mời một người nói câu sửa, bật micro.</a:t>
-            </a:r>
-          </a:p>
-          <a:p>
-            <a:r>
-              <a:rPr lang="en-US" sz="1400" b="0" dirty="0"/>
-              <a:t>Câu 3: không dùng 'xu hướng'. Nêu ước lượng và nói KTC chạm 1.</a:t>
-            </a:r>
-          </a:p>
-          <a:p>
-            <a:r>
-              <a:rPr lang="en-US" sz="1400" b="0" dirty="0"/>
-              <a:t>Câu 4: 'dự báo' chấp nhận được theo nghĩa tiên lượng. Nếu tác giả muốn nói nhân quả, 'có liên quan với' là động từ trung thực.</a:t>
+              <a:t>Câu 3: không dùng 'xu hướng', nêu ước lượng và nói KTC chạm 1. Câu 4: 'dự báo' dùng được khi nói về dự báo.</a:t>
             </a:r>
           </a:p>
         </p:txBody>
@@ -933,25 +921,19 @@
           <a:p>
             <a:r>
               <a:rPr lang="en-US" sz="1400" b="0" dirty="0"/>
-              <a:t>Ý chính: đa số tạp chí lâm sàng yêu cầu tóm tắt có cấu trúc (Đặt vấn đề, Phương pháp, Kết quả, Kết luận), khoảng 250-300 từ. Thử nghiệm thêm số đăng ký. Nhiều người đọc không đọc tiếp, nên tóm tắt phải đọc riêng vẫn hiểu được.</a:t>
+              <a:t>Tóm tắt có cấu trúc, 250-300 từ, phải tự đứng được.</a:t>
             </a:r>
           </a:p>
           <a:p>
             <a:r>
               <a:rPr lang="en-US" sz="1400" b="0" dirty="0"/>
-              <a:t>Thực hành tốt: tóm tắt Bài 2 nêu quần thể nguồn, bối cảnh và cỡ mẫu (chú giải #4) và mọi kết quả dạng HR với KTC 95% và giá trị P chính xác (#5). Kết luận của Bài 1 nêu thẳng kết quả âm tính, không 'tô vẽ' (#6), và số đăng ký có trong tóm tắt (#7).</a:t>
+              <a:t>Bài 2 nêu mọi kết quả dạng HR kèm KTC. Bài 1 nêu thẳng kết quả âm tính.</a:t>
             </a:r>
           </a:p>
           <a:p>
             <a:r>
               <a:rPr lang="en-US" sz="1400" b="0" dirty="0"/>
-              <a:t>Cần sửa (Bài 1, #4): báo cáo trung vị nhưng ước lượng gọi là 'chênh lệch trung bình', và p = 0.0506 với KTC chạm 0 được ghi tới bốn chữ số thập phân. Cách tóm tắt, ước lượng và kiểm định phải khớp nhau, và p sát ngưỡng không phải là 'gần có ý nghĩa'.</a:t>
-            </a:r>
-          </a:p>
-          <a:p>
-            <a:r>
-              <a:rPr lang="en-US" sz="1400" b="0" dirty="0"/>
-              <a:t>Viết tóm tắt sau cùng, và kiểm tra mỗi con số giống hệt nhau ở tóm tắt, văn bản và bảng.</a:t>
+              <a:t>Viết sau cùng và kiểm tra mọi con số khớp với văn bản và bảng.</a:t>
             </a:r>
           </a:p>
         </p:txBody>
@@ -1032,37 +1014,19 @@
           <a:p>
             <a:r>
               <a:rPr lang="en-US" sz="1400" b="0" dirty="0"/>
-              <a:t>Ví dụ mẫu (dữ liệu mô phỏng, khoảng 120 từ, còn tóm tắt đầy đủ tối đa 250).</a:t>
+              <a:t>Ví dụ mẫu (mô phỏng). Tên bài là bắt buộc với mọi người. Tóm tắt không bắt buộc.</a:t>
             </a:r>
           </a:p>
           <a:p>
             <a:r>
               <a:rPr lang="en-US" sz="1400" b="0" dirty="0"/>
-              <a:t>Tiêu đề: nêu phơi nhiễm, kết cục, đối tượng và thiết kế. Không 'tác động'.</a:t>
+              <a:t>Dòng Phương pháp phải nói dữ liệu là mô phỏng. Kết luận: 'có liên quan ở mức vừa phải', khớp với KTC 1.02 đến 2.59.</a:t>
             </a:r>
           </a:p>
           <a:p>
             <a:r>
               <a:rPr lang="en-US" sz="1400" b="0" dirty="0"/>
-              <a:t>Phương pháp: phải nói dữ liệu là mô phỏng (quy định của khóa học).</a:t>
-            </a:r>
-          </a:p>
-          <a:p>
-            <a:r>
-              <a:rPr lang="en-US" sz="1400" b="0" dirty="0"/>
-              <a:t>Kết quả: OR thô và hiệu chỉnh, như trong Kết quả. Số người bệnh (618 được phân tích, 373 cân bằng dương).</a:t>
-            </a:r>
-          </a:p>
-          <a:p>
-            <a:r>
-              <a:rPr lang="en-US" sz="1400" b="0" dirty="0"/>
-              <a:t>Kết luận: 'liên quan ở mức vừa phải', khớp với KTC hiệu chỉnh 1.02 đến 2.59.</a:t>
-            </a:r>
-          </a:p>
-          <a:p>
-            <a:r>
-              <a:rPr lang="en-US" sz="1400" b="0" dirty="0"/>
-              <a:t>Hỏi: câu nào trong tóm tắt sẽ thay đổi nếu KTC hiệu chỉnh là 0.95 đến 2.40? Đáp án: Kết quả và Kết luận, sẽ thành 'không có bằng chứng rõ về mối liên quan sau hiệu chỉnh'.</a:t>
+              <a:t>Hỏi: câu nào thay đổi nếu KTC là 0.95 đến 2.40? Kỳ vọng: Kết quả và Kết luận.</a:t>
             </a:r>
           </a:p>
         </p:txBody>
@@ -1143,31 +1107,25 @@
           <a:p>
             <a:r>
               <a:rPr lang="en-US" sz="1400" b="0" dirty="0"/>
-              <a:t>Ý chính: tiêu đề là câu được đọc nhiều nhất của bài. Xây dựng từ PICO: thiết kế, can thiệp hoặc phơi nhiễm so với nhóm chứng, đối tượng, kết cục. Khoảng 10-16 từ, nêu thiết kế. Tránh từ mang tính đánh giá ('impact', 'optimized', 'novel', 'first').</a:t>
+              <a:t>Đặt tên bài từ PICO: thiết kế, phơi nhiễm, đối tượng, kết cục, 10-16 từ. Không dùng 'tác động', 'mới', 'đầu tiên'.</a:t>
             </a:r>
           </a:p>
           <a:p>
             <a:r>
               <a:rPr lang="en-US" sz="1400" b="0" dirty="0"/>
-              <a:t>Bài 1 (chú giải #1): tiêu đề có nêu thiết kế (tốt), nhưng hơn 25 từ và có từ đánh giá. Phiên bản mô tả ngắn hơn có màu xanh lá.</a:t>
+              <a:t>'Impact' của Bài 2 là cách nói nhân quả cho một thuần tập.</a:t>
             </a:r>
           </a:p>
           <a:p>
             <a:r>
               <a:rPr lang="en-US" sz="1400" b="0" dirty="0"/>
-              <a:t>Bài 2 (chú giải #1): 'Impact' là từ nhân quả cho một nghiên cứu thuần tập quan sát. Người phản biện thường yêu cầu 'Association between ...'.</a:t>
+              <a:t>Từ khóa: 3-6 thuật ngữ MeSH chưa có trong tên bài.</a:t>
             </a:r>
           </a:p>
           <a:p>
             <a:r>
               <a:rPr lang="en-US" sz="1400" b="0" dirty="0"/>
-              <a:t>Từ khóa (Bài 1, chú giải #9): từ khóa lặp lại chữ đã có trong tiêu đề. Chọn 3-6 thuật ngữ MeSH (Medical Subject Headings) chưa có trong tiêu đề để bài được tìm thấy qua nhiều lượt tìm kiếm hơn.</a:t>
-            </a:r>
-          </a:p>
-          <a:p>
-            <a:r>
-              <a:rPr lang="en-US" sz="1400" b="0" dirty="0"/>
-              <a:t>Bạn sẽ viết tiêu đề của mình trong phần thực hành ngay sau đây.</a:t>
+              <a:t>Mỗi người viết tên bài dự kiến của mình trong phần thực hành tiếp theo.</a:t>
             </a:r>
           </a:p>
         </p:txBody>
@@ -1248,25 +1206,19 @@
           <a:p>
             <a:r>
               <a:rPr lang="en-US" sz="1400" b="0" dirty="0"/>
-              <a:t>Tài liệu tham khảo: dùng phần mềm quản lý tài liệu (Zotero, Mendeley, EndNote) và kiểm tra từng trích dẫn. Ở Bài 2, danh sách biến hiệu chỉnh dẫn tài liệu 26 (bài định nghĩa Sepsis-3), gần như chắc chắn sai số (chú giải #22). Không bao giờ trích dẫn tài liệu do AI gợi ý mà chưa đọc.</a:t>
+              <a:t>Tài liệu tham khảo: dùng phần mềm quản lý và kiểm tra từng trích dẫn. Không bao giờ trích một tài liệu AI gợi ý mà chưa đọc.</a:t>
             </a:r>
           </a:p>
           <a:p>
             <a:r>
               <a:rPr lang="en-US" sz="1400" b="0" dirty="0"/>
-              <a:t>Bảng kiểm báo cáo: điền CONSORT (thử nghiệm) hoặc STROBE (nghiên cứu quan sát) trong lúc viết, kèm số trang. Nhiều tạp chí yêu cầu khi nộp. Cả hai bài đều không nêu tên hướng dẫn (cả hai bản tóm tắt chú giải đều chỉ ra).</a:t>
+              <a:t>Bảng kiểm: điền trong khi viết.</a:t>
             </a:r>
           </a:p>
           <a:p>
             <a:r>
               <a:rPr lang="en-US" sz="1400" b="0" dirty="0"/>
-              <a:t>Đọc lần cuối: đối chiếu mọi con số trong văn bản với bảng (creatinine ở Bài 1, #25), mọi chỗ dẫn hình (Bài 1 dẫn Hình 1 trong khi ý là Hình 2A, #28), và cách viết số (một IQR có cận trên nhỏ hơn cận dưới, #35).</a:t>
-            </a:r>
-          </a:p>
-          <a:p>
-            <a:r>
-              <a:rPr lang="en-US" sz="1400" b="0" dirty="0"/>
-              <a:t>Thông điệp từ bản tóm tắt chú giải: gần như mọi lỗi của Bài 1 lẽ ra đã được phát hiện nếu một đồng tác giả đọc bảng đối chiếu với văn bản.</a:t>
+              <a:t>Đọc lần cuối: đối chiếu mọi con số trong văn bản với bảng. Phần lớn lỗi ở hai bài chỉ cần một đồng tác giả cẩn thận.</a:t>
             </a:r>
           </a:p>
         </p:txBody>
@@ -1347,25 +1299,19 @@
           <a:p>
             <a:r>
               <a:rPr lang="en-US" sz="1400" b="0" dirty="0"/>
-              <a:t>Thực hành bản thảo 2 (20:00-20:30). Bộ dữ liệu khóa học.</a:t>
+              <a:t>Thực hành bản thảo 2 (20:00-20:30).</a:t>
             </a:r>
           </a:p>
           <a:p>
             <a:r>
               <a:rPr lang="en-US" sz="1400" b="0" dirty="0"/>
-              <a:t>Phần 1 (20:00-20:22): giảng viên thêm Đặt vấn đề, Bàn luận, Tóm tắt và Tiêu đề vào bản nháp Q1 của lớp từ thứ Bảy tuần trước, ngay trên màn hình chia sẻ.</a:t>
+              <a:t>Phần 1: hoàn thiện trực tiếp phần Kết quả Q1 của lớp từ tuần trước, dùng bảng kiểm bình duyệt. Phần 2: mỗi học viên kiểm tra bản nháp của mình và viết tên bài dự kiến.</a:t>
             </a:r>
           </a:p>
           <a:p>
             <a:r>
               <a:rPr lang="en-US" sz="1400" b="0" dirty="0"/>
-              <a:t>Phần 2 (20:22-20:30): mỗi học viên viết câu mục tiêu và tiêu đề cho câu hỏi của mình, rồi hoàn thành bản nháp và nộp trước 23:59 tối nay (Course/Assignment/manuscript_brief.md).</a:t>
-            </a:r>
-          </a:p>
-          <a:p>
-            <a:r>
-              <a:rPr lang="en-US" sz="1400" b="0" dirty="0"/>
-              <a:t>Hướng dẫn: Course/Practicals/s8_exercises.md, Phần B. Đoạn văn mẫu cho Q1: Course/Solutions/s8_solutions.md.</a:t>
+              <a:t>Hướng dẫn: s8_exercises_VN Phần B. Văn bản mẫu: s8_solutions_VN Phần B.</a:t>
             </a:r>
           </a:p>
         </p:txBody>
@@ -1446,19 +1392,25 @@
           <a:p>
             <a:r>
               <a:rPr lang="en-US" sz="1400" b="0" dirty="0"/>
-              <a:t>Thực hành Phần 1 (20:00-20:22). Cả lớp. Mở bản nháp của lớp tuần trước và gõ tiếp vào đó. Nhắc từng giai đoạn.</a:t>
+              <a:t>Thực hành phần 1 (20:00-20:22). Mở bản nháp của lớp từ tuần trước và gõ trực tiếp. Báo từng bước.</a:t>
             </a:r>
           </a:p>
           <a:p>
             <a:r>
               <a:rPr lang="en-US" sz="1400" b="0" dirty="0"/>
-              <a:t>Câu gợi ý: 'Câu đầu Bàn luận của lớp có trả lời câu hỏi bằng con số không?' 'Có hạn chế nào kèm hướng sai lệch không?' 'Kết luận có dùng cùng động từ với mục tiêu không?' 'Mọi con số trong tóm tắt có giống hệt phần Kết quả không?'</a:t>
+              <a:t>Câu gợi ý: 'Mọi tỷ lệ phần trăm đã có mẫu số chưa?' 'Đọc Bảng 1 mà không cần văn bản được không?' 'Có câu nào đang giải thích thay vì báo cáo?'</a:t>
             </a:r>
           </a:p>
           <a:p>
             <a:r>
               <a:rPr lang="en-US" sz="1400" b="0" dirty="0"/>
-              <a:t>Gửi bản nháp hoàn chỉnh của lớp dạng PDF sau buổi học. Đây là mẫu cho bản thảo của mỗi người.</a:t>
+              <a:t>Trong 3 phút cuối, cho thấy Đặt vấn đề và Bàn luận sẽ nằm ở đâu và nói gì.</a:t>
+            </a:r>
+          </a:p>
+          <a:p>
+            <a:r>
+              <a:rPr lang="en-US" sz="1400" b="0" dirty="0"/>
+              <a:t>Gửi bản đã hoàn thiện dạng PDF sau buổi học.</a:t>
             </a:r>
           </a:p>
         </p:txBody>
@@ -1539,19 +1491,19 @@
           <a:p>
             <a:r>
               <a:rPr lang="en-US" sz="1400" b="0" dirty="0"/>
-              <a:t>Thực hành Phần 2 (20:22-20:30). Cá nhân.</a:t>
+              <a:t>Thực hành phần 2 (20:22-20:30). Cá nhân.</a:t>
             </a:r>
           </a:p>
           <a:p>
             <a:r>
               <a:rPr lang="en-US" sz="1400" b="0" dirty="0"/>
-              <a:t>Lưu ý riêng cho từng câu hỏi (gửi vào khung chat): Q2, AKI cũng có thể gây tích dịch (quan hệ nhân quả ngược). Q3, số ngày không thở máy tính tử vong là 0. Giải thích chỉ số này. Q4, so sánh ước lượng các trường hợp đầy đủ và quy gán, và nói giả định MAR (thiếu ngẫu nhiên) có ý nghĩa gì cho kết luận. Q5, chỉ người sống sót: nói rõ kết quả áp dụng cho ai.</a:t>
+              <a:t>Đăng trong khung chat: Q2, AKI cũng có thể gây tích dịch. Q3, số ngày không thở máy tính tử vong là 0. Q4, nêu cả ước lượng trường hợp đầy đủ và quy gán. Q5, chỉ người sống sót.</a:t>
             </a:r>
           </a:p>
           <a:p>
             <a:r>
               <a:rPr lang="en-US" sz="1400" b="0" dirty="0"/>
-              <a:t>Hạn nộp: bản nháp hoàn chỉnh trước 23:59 ngày học Buổi 8 (Course/Assignment/manuscript_brief.md). Sau đó bản nháp được dùng cho bài bình duyệt cá nhân (slide bế mạc).</a:t>
+              <a:t>Nhắc: bản nháp gửi email cho người bình duyệt và trưởng khóa học (myluong1710@gmail.com) trước 23:59.</a:t>
             </a:r>
           </a:p>
         </p:txBody>
@@ -1632,19 +1584,13 @@
           <a:p>
             <a:r>
               <a:rPr lang="en-US" sz="1400" b="0" dirty="0"/>
-              <a:t>Phần 8.2 (20:30-20:50). Sáu slide, 3 phút trình diễn trực tiếp lúc 20:36 và 2 phút kiểm tra lúc 20:48.</a:t>
+              <a:t>Phần 8.2 (20:30-20:50). Khoảng 2 phút mỗi slide, 3 phút trình diễn và 2 phút kiểm tra.</a:t>
             </a:r>
           </a:p>
           <a:p>
             <a:r>
               <a:rPr lang="en-US" sz="1400" b="0" dirty="0"/>
-              <a:t>Nhịp: khoảng 2 phút mỗi slide. Chỉ vào slide, nêu một ví dụ, đi tiếp.</a:t>
-            </a:r>
-          </a:p>
-          <a:p>
-            <a:r>
-              <a:rPr lang="en-US" sz="1400" b="0" dirty="0"/>
-              <a:t>Liên hệ bản thảo: một bài báo FLUID-ICU sẽ đi đúng con đường này: bảng kiểm STROBE, chọn tạp chí, bộ hồ sơ nộp bài, bình duyệt. Bản tiền ấn phẩm, giấy phép, các bước sau khi được chấp nhận và khi bị từ chối nằm trong phần Slide bổ sung.</a:t>
+              <a:t>Bản tiền in, giấy phép, sau khi được nhận và bị từ chối nằm ở slide bổ sung.</a:t>
             </a:r>
           </a:p>
         </p:txBody>
@@ -1725,37 +1671,19 @@
           <a:p>
             <a:r>
               <a:rPr lang="en-US" sz="1400" b="0" dirty="0"/>
-              <a:t>Ý chính: với mỗi thiết kế nghiên cứu có một bảng kiểm báo cáo được quốc tế thống nhất. Tất cả được tập hợp miễn phí tại Mạng lưới EQUATOR (Enhancing the QUAlity and Transparency Of health Research).</a:t>
+              <a:t>Mỗi thiết kế một hướng dẫn báo cáo, đều miễn phí trên EQUATOR Network. Nhiều tạp chí yêu cầu bảng kiểm kèm số trang.</a:t>
             </a:r>
           </a:p>
           <a:p>
             <a:r>
               <a:rPr lang="en-US" sz="1400" b="0" dirty="0"/>
-              <a:t>CONSORT cho thử nghiệm ngẫu nhiên (bản cập nhật CONSORT 2025), STROBE cho nghiên cứu quan sát (thuần tập, bệnh–chứng, cắt ngang), STARD cho độ chính xác chẩn đoán, PRISMA cho tổng quan hệ thống, SPIRIT cho đề cương thử nghiệm (SPIRIT 2025), CARE cho báo cáo ca bệnh.</a:t>
+              <a:t>Cả hai bài đều không nêu tên hướng dẫn của mình.</a:t>
             </a:r>
           </a:p>
           <a:p>
             <a:r>
               <a:rPr lang="en-US" sz="1400" b="0" dirty="0"/>
-              <a:t>Ví dụ xuyên suốt: Bài 1 là RCT (CONSORT). Bài 2 là nghiên cứu thuần tập (STROBE). Phát hiện thú vị từ bản chú giải: cả hai bài đều không ghi tên hướng dẫn. Bài 1 có sơ đồ CONSORT trong bài chính. Bài 2 để sơ đồ dòng người tham gia trong phụ lục.</a:t>
-            </a:r>
-          </a:p>
-          <a:p>
-            <a:r>
-              <a:rPr lang="en-US" sz="1400" b="0" dirty="0"/>
-              <a:t>Nhiều tạp chí yêu cầu nộp bảng kiểm đã điền, kèm số trang.</a:t>
-            </a:r>
-          </a:p>
-          <a:p>
-            <a:r>
-              <a:rPr lang="en-US" sz="1400" b="0" dirty="0"/>
-              <a:t>Quan niệm sai: 'hướng dẫn báo cáo chỉ cách làm nghiên cứu'. Chúng chỉ cần báo cáo gì, nhưng đọc chúng trước khi bắt đầu là bảng kiểm thiết kế tốt nhất.</a:t>
-            </a:r>
-          </a:p>
-          <a:p>
-            <a:r>
-              <a:rPr lang="en-US" sz="1400" b="0" dirty="0"/>
-              <a:t>Bình chọn: hướng dẫn nào phù hợp đề cương của bạn? Thường là thuần tập hoặc cắt ngang (STROBE). Một vài đề cương là thử nghiệm (CONSORT, và SPIRIT cho đề cương).</a:t>
+              <a:t>Thăm dò: hướng dẫn nào hợp với đề cương của bạn? Kỳ vọng: phần lớn là STROBE.</a:t>
             </a:r>
           </a:p>
         </p:txBody>
@@ -1836,13 +1764,13 @@
           <a:p>
             <a:r>
               <a:rPr lang="en-US" sz="1400" b="0" dirty="0"/>
-              <a:t>Ôn tập (19:30-19:35). Câu 1 là câu hỏi cuối buổi tuần trước: đọc hai ba câu trả lời đã nhận và sửa những chỗ hiểu sai. Câu 2 và 3 là bình chọn nhanh. Mở đáp án.</a:t>
+              <a:t>Ôn tập (19:30-19:35). Câu 1 là câu hỏi cuối Buổi 7: đọc hai hoặc ba câu trả lời. Câu 2 và 3 là thăm dò nhanh.</a:t>
             </a:r>
           </a:p>
           <a:p>
             <a:r>
               <a:rPr lang="en-US" sz="1400" b="0" dirty="0"/>
-              <a:t>Câu 3 dẫn vào 8.1: Bàn luận là nơi dành cho diễn giải.</a:t>
+              <a:t>Câu 3 dẫn vào 8.1: Bàn luận là nơi để diễn giải.</a:t>
             </a:r>
           </a:p>
         </p:txBody>
@@ -1923,31 +1851,25 @@
           <a:p>
             <a:r>
               <a:rPr lang="en-US" sz="1400" b="0" dirty="0"/>
-              <a:t>Ý chính: chọn tạp chí ngay từ đầu, vì Hướng dẫn tác giả quy định số chữ, cấu trúc, bảng kiểm và yêu cầu đăng ký.</a:t>
+              <a:t>Chọn tạp chí trước: Hướng dẫn cho tác giả đặt ra luật chơi.</a:t>
             </a:r>
           </a:p>
           <a:p>
             <a:r>
               <a:rPr lang="en-US" sz="1400" b="0" dirty="0"/>
-              <a:t>Phù hợp: những người cần câu trả lời của bạn (điều dưỡng ICU? bác sĩ hồi sức?) quyết định tạp chí. Tin cậy: được chỉ mục trong MEDLINE/PubMed, Danh mục Tạp chí Truy cập Mở (DOAJ), Scopus hoặc Web of Science, có chính sách bình duyệt và rút bài rõ ràng.</a:t>
+              <a:t>Đáng tin: có trong MEDLINE, DOAJ, Scopus hoặc Web of Science. Chi phí: phí xuất bản và miễn giảm.</a:t>
             </a:r>
           </a:p>
           <a:p>
             <a:r>
               <a:rPr lang="en-US" sz="1400" b="0" dirty="0"/>
-              <a:t>Chi phí: nhiều tạp chí truy cập mở thu phí xử lý bài báo (APC). Hỏi về miễn giảm và thỏa thuận của cơ sở. Giấy phép: Bài 1 là CC BY-NC-ND (được chia sẻ, không được chỉnh sửa hay dùng thương mại), Bài 2 là CC BY (được tái sử dụng nếu ghi nguồn). CC = Creative Commons.</a:t>
+              <a:t>Bài 1 mất 7 tuần để được nhận, Bài 2 mất 7 tháng.</a:t>
             </a:r>
           </a:p>
           <a:p>
             <a:r>
               <a:rPr lang="en-US" sz="1400" b="0" dirty="0"/>
-              <a:t>Tốc độ: Bài 1 từ lúc nộp đến khi được chấp nhận khoảng 7 tuần (10/9 đến 31/10/2024). Bài 2 khoảng 7 tháng (15/1 đến 24/8/2023). Tốc độ khác nhau và tự nó không nói lên chất lượng.</a:t>
-            </a:r>
-          </a:p>
-          <a:p>
-            <a:r>
-              <a:rPr lang="en-US" sz="1400" b="0" dirty="0"/>
-              <a:t>Hỏi (mời hai ba người trả lời, bật micro): kể tên một tạp chí khoa bạn thường đọc. Đó thường là lựa chọn đầu tiên hợp lý.</a:t>
+              <a:t>Hỏi: kể tên một tạp chí khoa bạn hay đọc.</a:t>
             </a:r>
           </a:p>
         </p:txBody>
@@ -2028,31 +1950,19 @@
           <a:p>
             <a:r>
               <a:rPr lang="en-US" sz="1400" b="0" dirty="0"/>
-              <a:t>Ý chính: tạp chí săn mồi thu phí đăng bài nhưng không bình duyệt, biên tập hay chỉ mục thực sự. Công trình của bạn biến mất vào một tạp chí không ai tin, và không thể nộp lại nơi khác.</a:t>
+              <a:t>Tạp chí săn mồi thu phí mà không có phản biện hay chỉ mục thật.</a:t>
             </a:r>
           </a:p>
           <a:p>
             <a:r>
               <a:rPr lang="en-US" sz="1400" b="0" dirty="0"/>
-              <a:t>Đi qua năm dấu hiệu trên email (hư cấu) này: email hàng loạt tâng bốc từ địa chỉ miễn phí. Phạm vi mơ hồ, quá rộng và tên nhái tạp chí thật. Phản biện nhanh không tưởng. Chỉ số 'impact' giả hoặc không rõ nguồn. Giấu phí đến sau khi chấp nhận. Dấu hiệu khác: ban biên tập không xác minh được, không có địa chỉ, nhiều lỗi chính tả.</a:t>
+              <a:t>Đi qua năm dấu hiệu trên email tưởng tượng. Kiểm tra: Think.Check.Submit, DOAJ, NLM Catalog, thủ thư bệnh viện.</a:t>
             </a:r>
           </a:p>
           <a:p>
             <a:r>
               <a:rPr lang="en-US" sz="1400" b="0" dirty="0"/>
-              <a:t>Kiểm tra: Think.Check.Submit (bảng kiểm miễn phí), DOAJ cho tạp chí truy cập mở, NLM Catalog (Thư viện Y khoa Quốc gia Hoa Kỳ) để xem tạp chí có thật sự trong MEDLINE. Hỏi thêm thủ thư bệnh viện.</a:t>
-            </a:r>
-          </a:p>
-          <a:p>
-            <a:r>
-              <a:rPr lang="en-US" sz="1400" b="0" dirty="0"/>
-              <a:t>Bình chọn: tháng vừa rồi bạn có nhận được email kiểu này không? Thường đa số trả lời có: ai đã từng đăng một bài đều nhận.</a:t>
-            </a:r>
-          </a:p>
-          <a:p>
-            <a:r>
-              <a:rPr lang="en-US" sz="1400" b="0" dirty="0"/>
-              <a:t>Phiếu bài tập Buổi 8 (Phần C) có bài tập ngắn 'nhận diện tạp chí săn mồi' để làm ở nhà.</a:t>
+              <a:t>Thăm dò: tháng trước bạn có nhận email như thế này không?</a:t>
             </a:r>
           </a:p>
         </p:txBody>
@@ -2133,19 +2043,13 @@
           <a:p>
             <a:r>
               <a:rPr lang="en-US" sz="1400" b="0" dirty="0"/>
-              <a:t>Trình diễn (20:36-20:39), trên màn hình chia sẻ. Kịch bản đầy đủ và phương án dự phòng khi mất mạng: Course/Demos/s8_demo.md.</a:t>
+              <a:t>Trình diễn (20:36-20:39). Kịch bản và phương án ngoại tuyến: s8_demo_VN.md.</a:t>
             </a:r>
           </a:p>
           <a:p>
             <a:r>
               <a:rPr lang="en-US" sz="1400" b="0" dirty="0"/>
-              <a:t>Giữ trong 3 phút: trang chủ EQUATOR, ô tìm kiếm, trang CONSORT 2025, bảng kiểm và sơ đồ. Rồi STROBE. Sau đó tìm tên một tạp chí trên DOAJ, và trên NLM Catalog với bộ lọc 'currently indexed in MEDLINE'. Kết thúc bằng bảng kiểm Think.Check.Submit. Dán bốn địa chỉ trang web vào khung chat.</a:t>
-            </a:r>
-          </a:p>
-          <a:p>
-            <a:r>
-              <a:rPr lang="en-US" sz="1400" b="0" dirty="0"/>
-              <a:t>Nếu mạng của bạn bị mất, dùng các ảnh chụp màn hình mô tả trong kịch bản.</a:t>
+              <a:t>EQUATOR: CONSORT, rồi STROBE. DOAJ, rồi NLM Catalog ('currently indexed in MEDLINE'). Kết thúc với Think.Check.Submit. Dán bốn địa chỉ vào khung chat.</a:t>
             </a:r>
           </a:p>
         </p:txBody>
@@ -2226,25 +2130,25 @@
           <a:p>
             <a:r>
               <a:rPr lang="en-US" sz="1400" b="0" dirty="0"/>
-              <a:t>Ý chính: tạp chí kiểm tra bộ hồ sơ trước mọi đánh giá khoa học. Thiếu thành phần là bản thảo bị trả về ngay.</a:t>
+              <a:t>Tạp chí kiểm tra bộ hồ sơ trước khi phản biện khoa học. Thiếu mục nào thì bài bị trả lại.</a:t>
             </a:r>
           </a:p>
           <a:p>
             <a:r>
               <a:rPr lang="en-US" sz="1400" b="0" dirty="0"/>
-              <a:t>Thư gửi ban biên tập: một trang, nêu vì sao chọn tạp chí này, điểm mới, bài chưa được nộp nơi khác, và bản tiền ấn phẩm nếu có. Trang tiêu đề: tất cả tác giả, đơn vị, mã ORCID (mã định danh nhà nghiên cứu miễn phí, cố định mà mọi học viên có thể đăng ký tại orcid.org), tác giả liên hệ, số từ. Bản thảo theo định dạng của tạp chí (ẩn danh nếu tạp chí bình duyệt kín hai chiều). Các cam kết: số phê duyệt đạo đức, sự đồng ý, xung đột lợi ích, tài trợ, khả năng cung cấp dữ liệu, đóng góp tác giả (CRediT) và việc dùng AI. Gợi ý người phản biện: chuyên gia không xung đột. Biên tập viên quyết định có dùng hay không.</a:t>
+              <a:t>ORCID iD: miễn phí, đăng ký tại orcid.org.</a:t>
             </a:r>
           </a:p>
           <a:p>
             <a:r>
               <a:rPr lang="en-US" sz="1400" b="0" dirty="0"/>
-              <a:t>Ví dụ xuyên suốt: Bài 1 có phần cam kết đầy đủ, đúng những gì hệ thống nộp bài hỏi, từng mục một (chú giải #48). Mẫu: Course/Templates/Cover_Letter_Template.</a:t>
+              <a:t>Bài 1 có phần khai báo đầy đủ. Mẫu: Cover_Letter_Template_VN.</a:t>
             </a:r>
           </a:p>
           <a:p>
             <a:r>
               <a:rPr lang="en-US" sz="1400" b="0" dirty="0"/>
-              <a:t>Hỏi: ai đã có mã ORCID? Khuyến khích mọi người đăng ký trong tuần này.</a:t>
+              <a:t>Hỏi: ai đã có ORCID iD?</a:t>
             </a:r>
           </a:p>
         </p:txBody>
@@ -2325,25 +2229,19 @@
           <a:p>
             <a:r>
               <a:rPr lang="en-US" sz="1400" b="0" dirty="0"/>
-              <a:t>Đi qua sáu bước. Nộp bài (kèm thư gửi ban biên tập, bảng kiểm báo cáo và các cam kết). Biên tập viên sàng lọc, nhiều bài bị từ chối ngay mà không qua phản biện ('desk rejection') vì không phù hợp hoặc báo cáo kém. Hai ba người phản biện nhận xét. Biên tập quyết định: chấp nhận, sửa chữa nhỏ, sửa chữa lớn hoặc từ chối. Bạn sửa và trả lời từng ý. Được chấp nhận, rồi đọc bản in thử (thật cẩn thận!) và xuất bản.</a:t>
+              <a:t>Nộp, biên tập viên sàng lọc (từ chối ngay từ đầu là thường gặp), 2 hoặc 3 người phản biện, quyết định, sửa bài, được nhận.</a:t>
             </a:r>
           </a:p>
           <a:p>
             <a:r>
               <a:rPr lang="en-US" sz="1400" b="0" dirty="0"/>
-              <a:t>Ví dụ xuyên suốt: người chú giải đánh giá Bài 1 'sửa chữa nhỏ' và Bài 2 'sửa chữa lớn'. Cả hai đã được đăng, và cả hai vẫn còn lỗi mà một người phản biện cẩn thận sẽ phát hiện. Bài 1 mất khoảng 7 tuần từ lúc nộp đến khi được nhận. Bài 2 khoảng 7 tháng.</a:t>
+              <a:t>Mỗi lần chỉ gửi một tạp chí. Bị từ chối thì sửa bài rồi gửi nơi khác.</a:t>
             </a:r>
           </a:p>
           <a:p>
             <a:r>
               <a:rPr lang="en-US" sz="1400" b="0" dirty="0"/>
-              <a:t>Quy tắc: mỗi lần chỉ nộp một tạp chí. Nếu bị từ chối, sửa bài theo góp ý rồi mới nộp nơi khác.</a:t>
-            </a:r>
-          </a:p>
-          <a:p>
-            <a:r>
-              <a:rPr lang="en-US" sz="1400" b="0" dirty="0"/>
-              <a:t>Hỏi: người phản biện hiểu sai một điểm. Bạn làm gì? Đáp án: cảm ơn, giải thích lịch sự có bằng chứng, và làm rõ câu chữ để người đọc sau không hiểu lầm.</a:t>
+              <a:t>Hỏi: người phản biện sai. Bạn làm gì? Kỳ vọng: cảm ơn, giải thích có bằng chứng, làm rõ văn bản.</a:t>
             </a:r>
           </a:p>
         </p:txBody>
@@ -2424,31 +2322,25 @@
           <a:p>
             <a:r>
               <a:rPr lang="en-US" sz="1400" b="0" dirty="0"/>
-              <a:t>Ý chính: thư phản hồi là một bảng: mỗi nhận xét của người phản biện, câu trả lời của bạn, và chính xác chỗ bản thảo đã thay đổi (trang và dòng). Đánh số các nhận xét (R1.1, R1.2, R2.1 ...).</a:t>
+              <a:t>Thư phản hồi là một bảng: nhận xét, phản hồi, và bài đã sửa ở đâu.</a:t>
             </a:r>
           </a:p>
           <a:p>
             <a:r>
               <a:rPr lang="en-US" sz="1400" b="0" dirty="0"/>
-              <a:t>Giọng văn: cảm ơn người phản biện, đồng ý khi có thể, không bỏ sót ý nào, không tranh luận cảm tính. Khi không đồng ý (phản hồi), giải thích lịch sự kèm bằng chứng và, nếu được, vẫn làm rõ câu chữ để người đọc sau không hiểu lầm.</a:t>
+              <a:t>Ba dòng ví dụ: đồng ý, làm rõ, và phản bác lịch sự với dữ liệu chưa từng thu thập.</a:t>
             </a:r>
           </a:p>
           <a:p>
             <a:r>
               <a:rPr lang="en-US" sz="1400" b="0" dirty="0"/>
-              <a:t>Ba dòng là những gì người chú giải cho rằng người phản biện sẽ hỏi Bài 1: bỏ 'xu hướng không có ý nghĩa' (chấp nhận). Giải thích khối cỡ 2 (làm rõ và thêm hạn chế). Yêu cầu một kết cục chưa từng thu thập (phản hồi lịch sự: không thể thêm dữ liệu không tồn tại, nhưng có thể nêu thành hạn chế).</a:t>
+              <a:t>Lỗi thường gặp: 'đã sửa' không nói rõ, sửa mà không ghi vị trí.</a:t>
             </a:r>
           </a:p>
           <a:p>
             <a:r>
               <a:rPr lang="en-US" sz="1400" b="0" dirty="0"/>
-              <a:t>Lỗi thường gặp: sửa bản thảo mà không nói sửa ở đâu. Trả lời 'đã sửa' không có chi tiết. Chấp nhận một yêu cầu làm bài sai đi chỉ để chiều lòng người phản biện.</a:t>
-            </a:r>
-          </a:p>
-          <a:p>
-            <a:r>
-              <a:rPr lang="en-US" sz="1400" b="0" dirty="0"/>
-              <a:t>Mẫu: Course/Templates/Response_to_Reviewers_Template. Học viên dùng đúng định dạng này khi trả lời người bình duyệt bản thảo của mình sau khóa học.</a:t>
+              <a:t>Học viên dùng Response_to_Reviewers_Template_VN sau khi nhận bản bình duyệt.</a:t>
             </a:r>
           </a:p>
         </p:txBody>
@@ -2529,19 +2421,13 @@
           <a:p>
             <a:r>
               <a:rPr lang="en-US" sz="1400" b="0" dirty="0"/>
-              <a:t>Kiểm tra (20:48-20:50). Mỗi câu một lượt bình chọn đúng/sai. Mở đáp án.</a:t>
+              <a:t>Kiểm tra (20:48-20:50). Mỗi câu một thăm dò đúng/sai.</a:t>
             </a:r>
           </a:p>
           <a:p>
             <a:r>
               <a:rPr lang="en-US" sz="1400" b="0" dirty="0"/>
-              <a:t>Câu 1 'thường đúng' chứ không phải luôn đúng. Tạp chí thật cũng mời viết bài, nhưng email tâng bốc gửi hàng loạt từ tạp chí lạ cần được kiểm tra năm dấu hiệu.</a:t>
-            </a:r>
-          </a:p>
-          <a:p>
-            <a:r>
-              <a:rPr lang="en-US" sz="1400" b="0" dirty="0"/>
-              <a:t>Câu 3: bản tiền ấn phẩm (preprint) là bản thảo đăng công khai (VD trên medRxiv) trước khi bình duyệt (Slide bổ sung).</a:t>
+              <a:t>Câu 1 là 'thường đúng'. Câu 3: bản tiền in được đăng trước khi phản biện.</a:t>
             </a:r>
           </a:p>
         </p:txBody>
@@ -2622,25 +2508,13 @@
           <a:p>
             <a:r>
               <a:rPr lang="en-US" sz="1400" b="0" dirty="0"/>
-              <a:t>Slide chỉ có hình, có chủ ý. Trước giờ giải lao, nói: lớp quay lại lúc 21:05 với phần 8.3, làm người phản biện (25 phút), rồi trình bày đề cương (45 phút) và bế mạc (15 phút). Trong giờ giải lao, mở Bài 1 và Bài 2 (bản PDF gốc) và phiếu bài tập Buổi 8, Phần D (phiếu trả lời). Người trình bày: kiểm tra giảng viên đã nhận slide của bạn.</a:t>
+              <a:t>Giải lao (20:50-21:05). Nói: 21:05 bắt đầu lại với 8.3, rồi trình bày và bế mạc. Mở Bài 1, Bài 2 và Phần D của phiếu bài tập.</a:t>
             </a:r>
           </a:p>
           <a:p>
             <a:r>
               <a:rPr lang="en-US" sz="1400" b="0" dirty="0"/>
-              <a:t>Giải lao (20:50-21:05).</a:t>
-            </a:r>
-          </a:p>
-          <a:p>
-            <a:r>
-              <a:rPr lang="en-US" sz="1400" b="0" dirty="0"/>
-              <a:t>Mở slide của những người trình bày trên máy của bạn và thử chia sẻ từng tệp. Xác nhận thứ tự trình bày với người tình nguyện qua khung chat.</a:t>
-            </a:r>
-          </a:p>
-          <a:p>
-            <a:r>
-              <a:rPr lang="en-US" sz="1400" b="0" dirty="0"/>
-              <a:t>Chuẩn bị màn hình cho 8.3: Bài 1 và Bài 2 (bản PDF gốc, không chú giải) ở hai thẻ.</a:t>
+              <a:t>Kiểm tra bạn chia sẻ được slide của từng người trình bày.</a:t>
             </a:r>
           </a:p>
         </p:txBody>
@@ -2721,25 +2595,19 @@
           <a:p>
             <a:r>
               <a:rPr lang="en-US" sz="1400" b="0" dirty="0"/>
-              <a:t>Phần 8.3 (21:05-21:30). Hướng dẫn đầy đủ cho giảng viên: Course/Resources/appraisal_instructor_guide.md (đáp án mẫu, câu gợi ý, thông điệp chính).</a:t>
+              <a:t>Phần 8.3 (21:05-21:30). Hướng dẫn có đáp án mẫu: appraisal_instructor_guide.md.</a:t>
             </a:r>
           </a:p>
           <a:p>
             <a:r>
               <a:rPr lang="en-US" sz="1400" b="0" dirty="0"/>
-              <a:t>Cấu trúc: 3 phút giới thiệu (hai bài báo, 10 câu hỏi), 15 phút cả lớp thẩm định bằng bình chọn, 7 phút về điều mỗi thiết kế được phép kết luận.</a:t>
+              <a:t>3 phút giới thiệu, 15 phút thẩm định có thăm dò, 7 phút về những gì mỗi thiết kế được kết luận.</a:t>
             </a:r>
           </a:p>
           <a:p>
             <a:r>
               <a:rPr lang="en-US" sz="1400" b="0" dirty="0"/>
-              <a:t>Vì sao lúc này: sau khóa học mỗi học viên bình duyệt bản nháp FLUID-ICU của một bạn khác bằng chính 10 câu hỏi này. Đây là buổi tập dượt.</a:t>
-            </a:r>
-          </a:p>
-          <a:p>
-            <a:r>
-              <a:rPr lang="en-US" sz="1400" b="0" dirty="0"/>
-              <a:t>Trấn an: 'Không rõ' là câu trả lời hợp lệ nếu bài báo không nói.</a:t>
+              <a:t>Kỹ năng phản biện này dùng lại khi bình duyệt phần Kết quả, với bảng kiểm trong Peer_Review_Instructions_VN.</a:t>
             </a:r>
           </a:p>
         </p:txBody>
@@ -2820,19 +2688,13 @@
           <a:p>
             <a:r>
               <a:rPr lang="en-US" sz="1400" b="0" dirty="0"/>
-              <a:t>Giải thích trong một phút. Cả hai bài cùng trả lời câu hỏi xuyên suốt của khóa (dịch truyền trong sốc nhiễm khuẩn) bằng hai thiết kế khác nhau. Cả lớp thẩm định cả hai bài, với cùng 10 câu hỏi (hai slide tiếp theo).</a:t>
+              <a:t>Giới thiệu (1 phút): cùng câu hỏi lâm sàng, hai thiết kế, cùng 10 câu hỏi.</a:t>
             </a:r>
           </a:p>
           <a:p>
             <a:r>
               <a:rPr lang="en-US" sz="1400" b="0" dirty="0"/>
-              <a:t>Mỗi học viên giữ một bản phiếu trả lời của mình (phiếu bài tập Buổi 8, Phần D) và điền trong lúc làm: Có / Không / Không rõ, kèm số trang.</a:t>
-            </a:r>
-          </a:p>
-          <a:p>
-            <a:r>
-              <a:rPr lang="en-US" sz="1400" b="0" dirty="0"/>
-              <a:t>Liên hệ Buổi 4: 10 câu hỏi là phiên bản đơn giản của các công cụ đánh giá nguy cơ sai lệch chính thức: RoB 2 cho Bài 1, Newcastle-Ottawa (hoặc ROBINS-E mới hơn) cho Bài 2. Hôm nay không dùng các công cụ chính thức.</a:t>
+              <a:t>Mỗi học viên điền bảng trả lời của mình (Phần D): Có, Không hoặc Không rõ, kèm trang.</a:t>
             </a:r>
           </a:p>
         </p:txBody>
@@ -2913,19 +2775,13 @@
           <a:p>
             <a:r>
               <a:rPr lang="en-US" sz="1400" b="0" dirty="0"/>
-              <a:t>Phần 8.1 (19:35-20:00). Mười slide với ba ví dụ mẫu từ FLUID-ICU Q1 và 2 phút kiểm tra.</a:t>
+              <a:t>Phần 8.1 (19:35-20:00). Khoảng 2 phút mỗi slide.</a:t>
             </a:r>
           </a:p>
           <a:p>
             <a:r>
               <a:rPr lang="en-US" sz="1400" b="0" dirty="0"/>
-              <a:t>Thứ tự theo thứ tự viết đã học thứ Bảy tuần trước: Đặt vấn đề, Bàn luận, rồi Tóm tắt và Tiêu đề sau cùng.</a:t>
-            </a:r>
-          </a:p>
-          <a:p>
-            <a:r>
-              <a:rPr lang="en-US" sz="1400" b="0" dirty="0"/>
-              <a:t>Nhịp: khoảng 2 phút mỗi slide. Chậm lại ở ví dụ Bàn luận.</a:t>
+              <a:t>Đặt vấn đề, Bàn luận và Tóm tắt không bắt buộc trong bản thảo. Tên bài là bắt buộc. Đi chậm ở ví dụ Bàn luận.</a:t>
             </a:r>
           </a:p>
         </p:txBody>
@@ -3006,19 +2862,13 @@
           <a:p>
             <a:r>
               <a:rPr lang="en-US" sz="1400" b="0" dirty="0"/>
-              <a:t>Bảng kiểm, phần 1. Đọc to mỗi câu một lần. Không giải thích đáp án.</a:t>
+              <a:t>Đọc mỗi câu một lần. Không nêu đáp án.</a:t>
             </a:r>
           </a:p>
           <a:p>
             <a:r>
               <a:rPr lang="en-US" sz="1400" b="0" dirty="0"/>
-              <a:t>Câu 1-2 về câu hỏi và thiết kế (Buổi 1-4). Câu 3 về đối tượng nghiên cứu, tức giá trị ngoại suy: người bệnh của bạn có nằm trong nghiên cứu này không? Câu 4 về tính tương đồng ban đầu (xem Bảng 1). Câu 5 về làm mù.</a:t>
-            </a:r>
-          </a:p>
-          <a:p>
-            <a:r>
-              <a:rPr lang="en-US" sz="1400" b="0" dirty="0"/>
-              <a:t>Trả lời Có / Không / Không rõ, kèm số trang.</a:t>
+              <a:t>Câu 3 là giá trị ngoại suy: người bệnh của bạn có được đưa vào nghiên cứu này không? Câu 4: nhìn Bảng 1.</a:t>
             </a:r>
           </a:p>
         </p:txBody>
@@ -3099,25 +2949,7 @@
           <a:p>
             <a:r>
               <a:rPr lang="en-US" sz="1400" b="0" dirty="0"/>
-              <a:t>Bảng kiểm, phần 2. Câu 6 và 7 dùng kiến thức Buổi 6: một kết cục chính, một số đo tác động kèm khoảng tin cậy 95%.</a:t>
-            </a:r>
-          </a:p>
-          <a:p>
-            <a:r>
-              <a:rPr lang="en-US" sz="1400" b="0" dirty="0"/>
-              <a:t>Câu 8 là trọng tâm của bài tập hôm nay: lời văn trong tiêu đề, tóm tắt và bàn luận có mạnh vượt quá mức thiết kế cho phép không? 'Gây ra' hay 'tác động' cần phân nhóm ngẫu nhiên. Nghiên cứu quan sát nói 'có liên quan'. Và p = 0.42 không bao giờ là 'xu hướng'.</a:t>
-            </a:r>
-          </a:p>
-          <a:p>
-            <a:r>
-              <a:rPr lang="en-US" sz="1400" b="0" dirty="0"/>
-              <a:t>Câu 9: phần hạn chế của tác giả, cộng một hạn chế họ bỏ sót. Mỗi bài có một hạn chế rõ (xem hướng dẫn giảng viên).</a:t>
-            </a:r>
-          </a:p>
-          <a:p>
-            <a:r>
-              <a:rPr lang="en-US" sz="1400" b="0" dirty="0"/>
-              <a:t>Câu 10: nhận định lâm sàng. Không có đáp án duy nhất, nhưng cần nêu lý do.</a:t>
+              <a:t>Câu 6 và 7 dùng kiến thức Buổi 6. Câu 8 là trọng tâm hôm nay: từ ngữ có mạnh hơn thiết kế cho phép không? Câu 9: một hạn chế tác giả bỏ sót. Câu 10: cần nêu lý do.</a:t>
             </a:r>
           </a:p>
         </p:txBody>
@@ -3198,19 +3030,19 @@
           <a:p>
             <a:r>
               <a:rPr lang="en-US" sz="1400" b="0" dirty="0"/>
-              <a:t>Cả lớp thẩm định (21:08-21:23). Khoảng 1.5 phút mỗi câu. Đọc câu hỏi, chiếu trang, chạy bình chọn, rồi mời một người nêu bằng chứng, bật micro. Gõ câu trả lời của lớp vào phiếu trên màn hình chia sẻ.</a:t>
+              <a:t>Thẩm định (21:08-21:23), khoảng 1.5 phút mỗi câu: đọc, chiếu trang, thăm dò, một người nêu bằng chứng.</a:t>
             </a:r>
           </a:p>
           <a:p>
             <a:r>
               <a:rPr lang="en-US" sz="1400" b="0" dirty="0"/>
-              <a:t>Các câu gợi ý hữu ích nhất (xem thêm trong hướng dẫn giảng viên): Bài 1: 'Ai không được làm mù, và ai quyết định lượng dịch truyền?' (bác sĩ không bị làm mù và chính họ kê dịch tạo nên kết cục). 'Tìm p = 0.42 trong phần Bàn luận. Tác giả dùng từ gì?' (trang 10, 'xu hướng không có ý nghĩa thống kê'). Bài 2: 'Ai quyết định người bệnh nào được truyền nhiều dịch hơn?' (bác sĩ, và người bệnh nặng hơn được truyền nhiều hơn: nhiễu do chỉ định). 'Người bệnh phải nằm ICU ít nhất 3 ngày. Ai bị thiếu?' (tử vong sớm và chuyển khoa sớm: sai lệch người sống sót).</a:t>
+              <a:t>Câu gợi ý chính: Bài 1, ai không bị làm mù và ai kê dịch? Bài 2, ai bị thiếu khi người bệnh phải nằm đủ 3 ngày?</a:t>
             </a:r>
           </a:p>
           <a:p>
             <a:r>
               <a:rPr lang="en-US" sz="1400" b="0" dirty="0"/>
-              <a:t>Các câu còn lại (1-3, 6 và 10) là bài về nhà trên phiếu trả lời: luyện tập tốt cho việc bình duyệt sau khóa học.</a:t>
+              <a:t>Câu 1-3, 6 và 10 làm ở nhà.</a:t>
             </a:r>
           </a:p>
         </p:txBody>
@@ -3291,25 +3123,25 @@
           <a:p>
             <a:r>
               <a:rPr lang="en-US" sz="1400" b="0" dirty="0"/>
-              <a:t>Thảo luận chung (21:23-21:30), cùng với bảng tiếp theo.</a:t>
+              <a:t>Thảo luận chung (21:23-21:30).</a:t>
             </a:r>
           </a:p>
           <a:p>
             <a:r>
               <a:rPr lang="en-US" sz="1400" b="0" dirty="0"/>
-              <a:t>Bài 1: may rủi quyết định ai nhận chiến lược hạn chế dịch, nên các yếu tố đã biết và chưa biết cân bằng về trung bình, nên thử nghiệm ngẫu nhiên được phép kết luận nhân quả. Kết luận của bài là âm tính: chiến lược không làm giảm cân bằng dịch ngày 5 (chênh 13.2 ml/kg, KTC 95% -15.2 đến 41.6, p = 0.42). Nhưng với 48 người bệnh, KTC rất rộng: đây là 'không có bằng chứng về tác dụng', không phải 'bằng chứng không có tác dụng', và chắc chắn không phải 'xu hướng'.</a:t>
+              <a:t>Bài 1: ngẫu nhiên, được nói 'không làm giảm', nhưng chỉ 48 người: không có bằng chứng có tác động, không phải bằng chứng không có tác động, và không 'xu hướng'.</a:t>
             </a:r>
           </a:p>
           <a:p>
             <a:r>
               <a:rPr lang="en-US" sz="1400" b="0" dirty="0"/>
-              <a:t>Bài 2: bác sĩ quyết định lượng dịch cho từng người bệnh. Ghép cặp theo điểm xu hướng chỉ cân bằng được các yếu tố đã đo. Người bệnh nặng hơn được truyền nhiều hơn (nhiễu do chỉ định, Buổi 4) và mức độ nặng không bao giờ đo được đầy đủ. Vì vậy bài chỉ được nói cân bằng dịch dương ngày 2 'có liên quan với' tử vong 28 ngày cao hơn (HR, tỷ số nguy cơ tức thời, 2.13, KTC 95% 1.48 đến 3.06), không phải 'tác động' hay 'chứng tỏ' quan hệ nhân quả, dù tiêu đề dùng chữ 'Impact'.</a:t>
+              <a:t>Bài 2: bác sĩ quyết định lượng dịch, nên 'có liên quan với', không phải 'tác động'.</a:t>
             </a:r>
           </a:p>
           <a:p>
             <a:r>
               <a:rPr lang="en-US" sz="1400" b="0" dirty="0"/>
-              <a:t>Bình chọn: nếu phải đổi thực hành ICU ngày mai, bài nào là bằng chứng nhân quả mạnh hơn, bài nào cho biết nhiều hơn về nguy cơ ngoài thực tế? Đáp án: RCT cho nhân quả (nhưng chỉ là thử nghiệm thí điểm nhỏ). Nghiên cứu thuần tập cho một mối liên quan lớn, thực tế, cần thử nghiệm để khẳng định.</a:t>
+              <a:t>Thăm dò: bài nào mạnh hơn về nhân quả, bài nào về nguy cơ ngoài đời thực?</a:t>
             </a:r>
           </a:p>
         </p:txBody>
@@ -3390,31 +3222,19 @@
           <a:p>
             <a:r>
               <a:rPr lang="en-US" sz="1400" b="0" dirty="0"/>
-              <a:t>Chỉ chiếu bảng này ở cuối phần thảo luận chung để tổng kết, sau khi cả lớp đã nêu câu trả lời của mình, không chiếu trước.</a:t>
+              <a:t>Chỉ mở bảng này sau khi lớp đã trả lời.</a:t>
             </a:r>
           </a:p>
           <a:p>
             <a:r>
               <a:rPr lang="en-US" sz="1400" b="0" dirty="0"/>
-              <a:t>Từng dòng: các nhóm được làm tương đồng thế nào. Ai biết phân nhóm. Tác dụng chính với KTC. Hạn chế tác giả bỏ sót (Bài 1: khối hoán vị cỡ 2 khiến lần phân nhóm tiếp theo đoán được khi bác sĩ không bị làm mù, trang 3. Bài 2: yêu cầu nằm ICU ít nhất 3 ngày loại bỏ người bệnh tử vong hoặc rời ICU sớm (sai lệch người sống sót), trang 2). Lỗi lời văn (Bài 1 trang 10, Bài 2 tiêu đề và trang 4). Và kết luận mà mỗi thiết kế cho phép.</a:t>
+              <a:t>Bốn thông điệp: thiết kế quyết định động từ, KTC rộng nghĩa là 'chưa biết', đã công bố không có nghĩa là đúng, nêu tên hướng dẫn báo cáo.</a:t>
             </a:r>
           </a:p>
           <a:p>
             <a:r>
               <a:rPr lang="en-US" sz="1400" b="0" dirty="0"/>
-              <a:t>Cả hai đều là bài tốt, đăng trên tạp chí Q1, và cả hai đều có lỗi sửa được. Đó là trạng thái bình thường của các bài đã công bố, và vì thế thẩm định phê bình là một kỹ năng lâm sàng.</a:t>
-            </a:r>
-          </a:p>
-          <a:p>
-            <a:r>
-              <a:rPr lang="en-US" sz="1400" b="0" dirty="0"/>
-              <a:t>Chốt bốn thông điệp: thiết kế quyết định động từ. KTC rộng nghĩa là 'chưa biết'. Đã đăng không có nghĩa là đúng. Ghi tên hướng dẫn báo cáo.</a:t>
-            </a:r>
-          </a:p>
-          <a:p>
-            <a:r>
-              <a:rPr lang="en-US" sz="1400" b="0" dirty="0"/>
-              <a:t>Chuyển tiếp: 'Giờ là lúc nghe một số đề cương của chính các bạn.'</a:t>
+              <a:t>Chuyển ý: 'Giờ đến một số đề cương của các bạn.'</a:t>
             </a:r>
           </a:p>
         </p:txBody>
@@ -3495,25 +3315,19 @@
           <a:p>
             <a:r>
               <a:rPr lang="en-US" sz="1400" b="0" dirty="0"/>
-              <a:t>Trình bày (21:30-22:15). Khoảng năm học viên tình nguyện trình bày đề cương của mình (người tình nguyện đã báo trưởng khóa học trước thứ Tư tuần đó): 5 x (6 phút + 2 phút góp ý) = 40 phút, rồi 5 phút tổng kết, trong đó bạn nêu những điểm mạnh và vấn đề chung trong các đề cương đã nộp và nhắc lại các hạn nộp. Chiếu slide này và slide chấm điểm trong phút đầu tiên.</a:t>
+              <a:t>Trình bày (21:30-22:15): khoảng năm người tình nguyện, 6 phút cộng 2 phút nhận xét, rồi 5 phút tổng kết.</a:t>
             </a:r>
           </a:p>
           <a:p>
             <a:r>
               <a:rPr lang="en-US" sz="1400" b="0" dirty="0"/>
-              <a:t>Mọi người, dù trình bày hay không, đều nộp slide và đề cương viết trước 19:30 hôm nay (Course/Assignment/proposal_brief.md).</a:t>
+              <a:t>Mọi người nộp slide và đề cương viết qua email cho trưởng khóa học (myluong1710@gmail.com) trước 19:30 hôm nay.</a:t>
             </a:r>
           </a:p>
           <a:p>
             <a:r>
               <a:rPr lang="en-US" sz="1400" b="0" dirty="0"/>
-              <a:t>Trợ giảng bấm giờ và gửi vào khung chat '2 phút' lúc 4:00, '1 phút' lúc 5:00 và 'Hết giờ' lúc 6:00. Chủ tọa dừng bài lúc 6:30.</a:t>
-            </a:r>
-          </a:p>
-          <a:p>
-            <a:r>
-              <a:rPr lang="en-US" sz="1400" b="0" dirty="0"/>
-              <a:t>Nhắc lớp: kỹ năng phản biện vừa dùng nay áp dụng cho đề cương của chính các bạn, nhưng góp ý theo cách mà bạn muốn được nhận.</a:t>
+              <a:t>Trợ giảng ghi '2 phút', '1 phút' và 'Hết giờ' trong khung chat. Dừng phần trình bày ở 6:30.</a:t>
             </a:r>
           </a:p>
         </p:txBody>
@@ -3594,25 +3408,19 @@
           <a:p>
             <a:r>
               <a:rPr lang="en-US" sz="1400" b="0" dirty="0"/>
-              <a:t>Chấm điểm: đề cương viết (tiêu chí 1-11 trong Course/Assignment/proposal_rubric.md, 70 điểm) được chấm cho mọi học viên, sau khóa học. Tiêu chí 12-16 (mỗi tiêu chí 6/4/2/0 điểm, tổng 30 điểm) chấm phần trình bày, và chỉ cho người trình bày. Người không trình bày: điểm đề cương viết được quy đổi ra thang 100 (quy tắc ở đầu thang chấm). Việc trình bày không bao giờ làm giảm điểm của ai.</a:t>
+              <a:t>Đề cương viết được chấm cho mọi người sau khóa học. Tiêu chí 12-16 chấm phần trình bày, chỉ cho người trình bày. Trình bày không bao giờ làm giảm điểm.</a:t>
             </a:r>
           </a:p>
           <a:p>
             <a:r>
               <a:rPr lang="en-US" sz="1400" b="0" dirty="0"/>
-              <a:t>Ai chấm phần trình bày: giảng viên. Hai ba người góp ý, bật micro (hai điểm mạnh và một đề xuất cải thiện).</a:t>
+              <a:t>Nhận xét trong 2 phút: hai người nêu hai ngôi sao và một mong muốn, rồi giảng viên, rồi người trình bày nói cảm ơn.</a:t>
             </a:r>
           </a:p>
           <a:p>
             <a:r>
               <a:rPr lang="en-US" sz="1400" b="0" dirty="0"/>
-              <a:t>Góp ý trong 2 phút (Course/Assignment/presentation_guide.md): mời hai người nói hai điểm mạnh và một đề xuất cải thiện, bật micro (45 giây). Giảng viên 1 phút (một điểm mạnh, cải thiện quan trọng nhất, một câu hỏi). Người trình bày 15 giây ('cảm ơn', không biện hộ). Điền phiếu góp ý ở cuối thang chấm và gửi email kèm khung chat đã lưu sau buổi học.</a:t>
-            </a:r>
-          </a:p>
-          <a:p>
-            <a:r>
-              <a:rPr lang="en-US" sz="1400" b="0" dirty="0"/>
-              <a:t>Điểm là góp ý để mỗi học viên hoàn thiện đề cương trước khi nộp hội đồng đạo đức.</a:t>
+              <a:t/>
             </a:r>
           </a:p>
         </p:txBody>
@@ -3693,31 +3501,19 @@
           <a:p>
             <a:r>
               <a:rPr lang="en-US" sz="1400" b="0" dirty="0"/>
-              <a:t>Trình bày (21:30-22:15). Chia sẻ slide của từng người từ máy của bạn, hoặc để người trình bày tự chia sẻ màn hình. Để slide này giữa các lượt trình bày.</a:t>
+              <a:t>Chia sẻ slide của từng người. Để slide này giữa các phần trình bày.</a:t>
             </a:r>
           </a:p>
           <a:p>
             <a:r>
               <a:rPr lang="en-US" sz="1400" b="0" dirty="0"/>
-              <a:t>Góp ý của giảng viên: bắt đầu bằng một điểm mạnh thật sự. Nêu cải thiện quan trọng nhất cho đề cương viết hoặc kế hoạch công bố (thường về thiết kế, định nghĩa kết cục, tính khả thi hoặc chọn tạp chí và hướng dẫn báo cáo). Một câu hỏi nếu còn thời gian.</a:t>
+              <a:t>Nhận xét: một điểm mạnh thật sự, điều cần cải thiện nhất, một câu hỏi nếu còn thời gian. Kiểm tra slide 6: tạp chí, hướng dẫn báo cáo, tên bài chừng mực, vai trò tác giả.</a:t>
             </a:r>
           </a:p>
           <a:p>
             <a:r>
               <a:rPr lang="en-US" sz="1400" b="0" dirty="0"/>
-              <a:t>Kiểm tra slide 6 của từng người: tạp chí dự kiến và đúng hướng dẫn (STROBE cho thuần tập, CONSORT cho thử nghiệm), tiêu đề tạm với ngôn ngữ chừng mực, vai trò tác giả, một dòng khung tóm tắt.</a:t>
-            </a:r>
-          </a:p>
-          <a:p>
-            <a:r>
-              <a:rPr lang="en-US" sz="1400" b="0" dirty="0"/>
-              <a:t>Vấn đề thường gặp: kết cục không đo được từ dữ liệu thường quy. Dự định kết luận nhân quả từ thiết kế quan sát (liên hệ lại phần thẩm định!). Không có kế hoạch xin sự đồng ý cho người bệnh an thần. Tuyển chọn không thực tế.</a:t>
-            </a:r>
-          </a:p>
-          <a:p>
-            <a:r>
-              <a:rPr lang="en-US" sz="1400" b="0" dirty="0"/>
-              <a:t>Nếu bị trễ, rút ngắn phần tổng kết, không bao giờ rút ngắn bài của những người trình bày cuối.</a:t>
+              <a:t>Nếu trễ, rút ngắn phần tổng kết, không cắt người trình bày cuối. 22:15 chuyển sang bế mạc.</a:t>
             </a:r>
           </a:p>
         </p:txBody>
@@ -3798,7 +3594,7 @@
           <a:p>
             <a:r>
               <a:rPr lang="en-US" sz="1400" b="0" dirty="0"/>
-              <a:t>Extra: các slide sau mục này là tùy chọn. Dùng khi còn thời gian hoặc giới thiệu cho học viên tự học.</a:t>
+              <a:t>Slide bổ sung: không bắt buộc, dùng khi lớp đi nhanh hoặc để tự học.</a:t>
             </a:r>
           </a:p>
         </p:txBody>
@@ -3879,7 +3675,7 @@
           <a:p>
             <a:r>
               <a:rPr lang="en-US" sz="1400" b="0" dirty="0"/>
-              <a:t>Extra: từ khóa của Buổi 8, để tự học. Chúng cũng có trong bài kiểm tra cuối khóa.</a:t>
+              <a:t>Bổ sung: từ khóa của Buổi 8, để tự học và cho bài kiểm tra cuối khóa.</a:t>
             </a:r>
           </a:p>
         </p:txBody>
@@ -3960,31 +3756,19 @@
           <a:p>
             <a:r>
               <a:rPr lang="en-US" sz="1400" b="0" dirty="0"/>
-              <a:t>Ý chính: phần đặt vấn đề là một cái phễu, không phải bài tổng quan tài liệu. Đoạn 1: điều đã biết (gánh nặng, cơ chế, thực hành hiện nay). Đoạn 2: điều chưa biết: khoảng trống, tốt nhất có dẫn chứng mâu thuẫn của cả hai phía. Đoạn 3: 'Vì vậy chúng tôi nhằm ...', một câu mục tiêu khớp với kết cục chính trong phần Phương pháp.</a:t>
+              <a:t>Đặt vấn đề là hình phễu: đã biết, chưa biết, mục tiêu. Mục tiêu khớp với kết cục chính.</a:t>
             </a:r>
           </a:p>
           <a:p>
             <a:r>
               <a:rPr lang="en-US" sz="1400" b="0" dirty="0"/>
-              <a:t>Bài 1 (Boulet 2024, thử nghiệm) là mẫu (chú giải #10-#12): đã biết (cân bằng dịch dương liên quan tử vong, dịch 'ẩn' chiếm phần lớn lượng dịch vào), chưa biết (các thử nghiệm trước chỉ nhắm dịch hồi sức), mục tiêu (mục tiêu chính = cân bằng dịch sau 5 ngày), tất cả dưới 500 từ (trang 2-3).</a:t>
+              <a:t>Bài 1 làm điều này trong chưa đến 500 từ. Bài 2 dẫn cả hai phía của một mâu thuẫn ở đoạn 2.</a:t>
             </a:r>
           </a:p>
           <a:p>
             <a:r>
               <a:rPr lang="en-US" sz="1400" b="0" dirty="0"/>
-              <a:t>Bài 2 (Hyun 2023, nghiên cứu thuần tập) xác định khoảng trống ở đoạn 2 bằng cách dẫn cả hai phía mâu thuẫn (#9). Nên làm theo. Nhưng phần đặt vấn đề dài khoảng 550 từ và câu mục tiêu lặp lại từ nhân quả 'impact' (#3, #10).</a:t>
-            </a:r>
-          </a:p>
-          <a:p>
-            <a:r>
-              <a:rPr lang="en-US" sz="1400" b="0" dirty="0"/>
-              <a:t>Liên hệ Buổi 1-2: phần nêu vấn đề và PICO trong đề cương của bạn đã cho bạn cái phễu này.</a:t>
-            </a:r>
-          </a:p>
-          <a:p>
-            <a:r>
-              <a:rPr lang="en-US" sz="1400" b="0" dirty="0"/>
-              <a:t>Hỏi (mời hai ba người trả lời, bật micro): trong một câu, điều gì chưa biết về câu hỏi bạn đã chọn? Câu đó là đoạn 2 của bạn.</a:t>
+              <a:t>Hỏi: trong một câu, điều gì chưa biết về câu hỏi của bạn? Đó là đoạn 2.</a:t>
             </a:r>
           </a:p>
         </p:txBody>
@@ -4065,25 +3849,19 @@
           <a:p>
             <a:r>
               <a:rPr lang="en-US" sz="1400" b="0" dirty="0"/>
-              <a:t>Extra: bài luyện viết 6 phút tùy chọn trên hai bài báo (dùng làm bài về nhà). Phiếu bài tập: Course/Practicals/s8_exercises.md, Phần A.</a:t>
+              <a:t>Bài luyện viết bổ sung (làm ở nhà). Phiếu: s8_exercises_VN Phần A.</a:t>
             </a:r>
           </a:p>
           <a:p>
             <a:r>
               <a:rPr lang="en-US" sz="1400" b="0" dirty="0"/>
-              <a:t>Câu 'tô vẽ' (Bài 1, trang 10): tác giả dựa vào 'xu hướng không có ý nghĩa' của việc giảm cân bằng dịch để đề xuất thử nghiệm lớn hơn. Câu viết lại mẫu: 'Ước lượng điểm nghiêng về chiến lược hạn chế, nhưng KTC 95% rộng (-15.2 đến 41.6 ml/kg) và bao gồm cả không có tác dụng. Cần một thử nghiệm lớn hơn để phát hiện chênh lệch nhỏ hơn.'</a:t>
+              <a:t>Viết lại câu 'xu hướng' của Bài 1: 'Ước lượng điểm nghiêng về chiến lược hạn chế, nhưng KTC 95% rộng (-15.2 đến 41.6 ml/kg) và chứa giá trị không tác động.'</a:t>
             </a:r>
           </a:p>
           <a:p>
             <a:r>
               <a:rPr lang="en-US" sz="1400" b="0" dirty="0"/>
-              <a:t>Tiêu đề (Bài 2): 'Cân bằng dịch dương tích lũy trong ba ngày đầu ở ICU và tử vong 28 ngày ở người bệnh nhiễm khuẩn huyết: nghiên cứu thuần tập ghép cặp theo điểm xu hướng'. Dùng 'liên quan', không dùng 'tác động'.</a:t>
-            </a:r>
-          </a:p>
-          <a:p>
-            <a:r>
-              <a:rPr lang="en-US" sz="1400" b="0" dirty="0"/>
-              <a:t>Tiêu đề của bạn: kiểm tra 10-16 từ, nêu thiết kế, không có từ đánh giá. Khung tóm tắt: Kết quả là kết quả dự kiến, nên viết dạng trình bày, VD 'tử vong 28 ngày, RR (KTC 95%)'.</a:t>
+              <a:t>Tên bài của Bài 2: 'mối liên quan', không phải 'tác động'.</a:t>
             </a:r>
           </a:p>
         </p:txBody>
@@ -4164,19 +3942,7 @@
           <a:p>
             <a:r>
               <a:rPr lang="en-US" sz="1400" b="0" dirty="0"/>
-              <a:t>Extra. Bản tiền ấn phẩm (preprint): bản thảo đăng trên máy chủ công khai (với nghiên cứu y tế, nổi tiếng nhất là medRxiv) trước hoặc trong khi bình duyệt. Lợi ích: nhanh, có dấu thời gian công khai, nhận góp ý sớm. Rủi ro: chưa qua bình duyệt, báo chí hoặc đồng nghiệp có thể coi như đã được khẳng định. Đa số tạp chí chấp nhận bài đã đăng bản tiền ấn phẩm. Kiểm tra chính sách trước.</a:t>
-            </a:r>
-          </a:p>
-          <a:p>
-            <a:r>
-              <a:rPr lang="en-US" sz="1400" b="0" dirty="0"/>
-              <a:t>Truy cập mở: gold OA là tạp chí cho đọc miễn phí và thường thu phí xử lý bài báo (APC). Cả hai bài ví dụ đều là gold OA. Green OA là tự lưu bản thảo được chấp nhận vào kho lưu trữ, thường sau một thời gian cấm.</a:t>
-            </a:r>
-          </a:p>
-          <a:p>
-            <a:r>
-              <a:rPr lang="en-US" sz="1400" b="0" dirty="0"/>
-              <a:t>Giấy phép (CC = Creative Commons): Bài 2 là CC BY (ai cũng được tái sử dụng và chỉnh sửa nếu ghi nguồn). Bài 1 là CC BY-NC-ND (được chia sẻ, không được chỉnh sửa hay dùng thương mại). Điều này cũng quan trọng khi muốn dùng lại hình trong giảng dạy.</a:t>
+              <a:t>Bổ sung. Bản tiền in được đăng trước khi phản biện: phải nói rõ. Truy cập mở vàng thường có phí, xanh là bản lưu ở kho. Bài 2 là CC BY, Bài 1 là CC BY-NC-ND.</a:t>
             </a:r>
           </a:p>
         </p:txBody>
@@ -4257,25 +4023,7 @@
           <a:p>
             <a:r>
               <a:rPr lang="en-US" sz="1400" b="0" dirty="0"/>
-              <a:t>Extra. Ý chính: sau khi được chấp nhận, nhà xuất bản gửi bản in thử, thường với hạn rất ngắn (vài ngày). Đọc chậm: từng con số, từng tên và đơn vị công tác, từng bảng và hình. Đây là cơ hội cuối cùng.</a:t>
-            </a:r>
-          </a:p>
-          <a:p>
-            <a:r>
-              <a:rPr lang="en-US" sz="1400" b="0" dirty="0"/>
-              <a:t>Ví dụ xuyên suốt: Bài 1 in toàn bộ đoạn 'Study protocol' hai lần: trong Phương pháp (trang 4) và lại sau phần Kết luận (trang 11). Đây là lỗi trùng lặp lẽ ra phải được phát hiện ở bước in thử (chú giải #45). Đơn vị công tác ở Bài 2 viết hoa không thống nhất (#42).</a:t>
-            </a:r>
-          </a:p>
-          <a:p>
-            <a:r>
-              <a:rPr lang="en-US" sz="1400" b="0" dirty="0"/>
-              <a:t>Chia sẻ: đăng bài theo giấy phép và chính sách của tạp chí (Bài 2 là CC BY, cho tái sử dụng. Bài 1 là CC BY-NC-ND, không cho chỉnh sửa): kho lưu trữ của cơ sở, bản tóm tắt dễ hiểu cho người bệnh và đồng nghiệp, một buổi trình bày ngắn tại khoa.</a:t>
-            </a:r>
-          </a:p>
-          <a:p>
-            <a:r>
-              <a:rPr lang="en-US" sz="1400" b="0" dirty="0"/>
-              <a:t>Đính chính: nếu phát hiện lỗi sau khi đăng, liên hệ tạp chí. Đính chính là trung thực. Rút bài dành cho lỗi nghiêm trọng hoặc hành vi sai trái.</a:t>
+              <a:t>Bổ sung. Đọc bản in thử cẩn thận như đọc dữ liệu: Bài 1 in đoạn đề cương hai lần. Chia sẻ theo giấy phép cho phép. Sửa lỗi công khai.</a:t>
             </a:r>
           </a:p>
         </p:txBody>
@@ -4356,31 +4104,7 @@
           <a:p>
             <a:r>
               <a:rPr lang="en-US" sz="1400" b="0" dirty="0"/>
-              <a:t>Extra: Ý chính: bị từ chối là một phần của việc công bố, không phải lời phán xét về bạn. Nhiều bài tốt bị từ chối một hai lần trước khi được nhận.</a:t>
-            </a:r>
-          </a:p>
-          <a:p>
-            <a:r>
-              <a:rPr lang="en-US" sz="1400" b="0" dirty="0"/>
-              <a:t>Từ chối ngay (desk rejection): biên tập từ chối không qua phản biện, thường vì chủ đề không hợp tạp chí hoặc báo cáo kém. Chọn lại: tạp chí mà người đọc cần kết quả của bạn.</a:t>
-            </a:r>
-          </a:p>
-          <a:p>
-            <a:r>
-              <a:rPr lang="en-US" sz="1400" b="0" dirty="0"/>
-              <a:t>Sau bình duyệt: đọc nhận xét, chờ một ngày trước khi phản ứng, rồi sửa những gì họ phát hiện. Tạp chí tiếp theo trong cùng lĩnh vực thường mời lại chính những người phản biện đó. Bản thảo không sửa sẽ làm họ khó chịu.</a:t>
-            </a:r>
-          </a:p>
-          <a:p>
-            <a:r>
-              <a:rPr lang="en-US" sz="1400" b="0" dirty="0"/>
-              <a:t>Tạp chí tiếp theo: định dạng lại theo Hướng dẫn tác giả mới. Một số nhà xuất bản đề nghị chuyển bản thảo và nhận xét sang tạp chí khác cùng nhà xuất bản, việc này có thể tiết kiệm hàng tháng. Chỉ khiếu nại khi quyết định có lỗi sai rõ ràng về sự kiện.</a:t>
-            </a:r>
-          </a:p>
-          <a:p>
-            <a:r>
-              <a:rPr lang="en-US" sz="1400" b="0" dirty="0"/>
-              <a:t>Không bao giờ nộp cho hai tạp chí cùng lúc (nộp trùng lặp là hành vi sai trái).</a:t>
+              <a:t>Bổ sung. Bị từ chối là bình thường. Từ chối ngay từ đầu: đổi tạp chí. Sau phản biện: sửa những gì người phản biện chỉ ra trước khi gửi lại. Không bao giờ gửi hai tạp chí cùng lúc.</a:t>
             </a:r>
           </a:p>
         </p:txBody>
@@ -4461,25 +4185,7 @@
           <a:p>
             <a:r>
               <a:rPr lang="en-US" sz="1400" b="0" dirty="0"/>
-              <a:t>Extra: Ý chính: tóm tắt hội nghị thường là sản phẩm đầu tiên của một nghiên cứu. Nó theo cùng logic IMRaD như tóm tắt bài báo, thường 250-300 từ, với số liệu thật và khoảng tin cậy. Tóm tắt chỉ ghi 'kết quả sẽ được trình bày' thường bị loại. Tuân theo mẫu và hạn nộp của hội nghị.</a:t>
-            </a:r>
-          </a:p>
-          <a:p>
-            <a:r>
-              <a:rPr lang="en-US" sz="1400" b="0" dirty="0"/>
-              <a:t>Poster không phải bài báo dán lên tường. Tiêu đề ngắn nêu phát hiện, vài chữ về đặt vấn đề và phương pháp (một sơ đồ), một hình lớn, thông điệp mang về trong một câu, và mã QR dẫn tới chi tiết. Phải đọc được từ khoảng cách 2 mét.</a:t>
-            </a:r>
-          </a:p>
-          <a:p>
-            <a:r>
-              <a:rPr lang="en-US" sz="1400" b="0" dirty="0"/>
-              <a:t>Trình bày tóm tắt hội nghị thường không cản trở việc đăng bài đầy đủ, nhưng hãy kiểm tra chính sách của tạp chí. Hãy viết bài đầy đủ: nhiều tóm tắt không bao giờ trở thành bài báo.</a:t>
-            </a:r>
-          </a:p>
-          <a:p>
-            <a:r>
-              <a:rPr lang="en-US" sz="1400" b="0" dirty="0"/>
-              <a:t>Có mẫu tóm tắt hội nghị trong Course/Templates/Conference_Abstract_Template.</a:t>
+              <a:t>Bổ sung. Tóm tắt hội nghị có số liệu thật kèm KTC, không bao giờ ghi 'kết quả sẽ được trình bày'. Poster là bảng quảng cáo: một thông điệp, một hình, đọc được từ 2 mét. Mẫu: Conference_Abstract_Template_VN.</a:t>
             </a:r>
           </a:p>
         </p:txBody>
@@ -4560,7 +4266,7 @@
           <a:p>
             <a:r>
               <a:rPr lang="en-US" sz="1400" b="0" dirty="0"/>
-              <a:t>Extra: tóm tắt Buổi 7-8 trong một slide để tự học. Các slide bế mạc nói về những gì cả khóa học đã xây dựng.</a:t>
+              <a:t>Bổ sung: tóm tắt Buổi 7-8 trong một slide để tự học.</a:t>
             </a:r>
           </a:p>
         </p:txBody>
@@ -4641,19 +4347,13 @@
           <a:p>
             <a:r>
               <a:rPr lang="en-US" sz="1400" b="0" dirty="0"/>
-              <a:t>Bế mạc (22:15-22:30), 15 phút cuối của Buổi 8. Giữ nhịp nhanh và tích cực.</a:t>
+              <a:t>Bế mạc 22:15-22:30. Giữ nhịp nhanh. Cảm ơn người trình bày và mọi người đã nộp bài.</a:t>
             </a:r>
           </a:p>
           <a:p>
             <a:r>
               <a:rPr lang="en-US" sz="1400" b="0" dirty="0"/>
-              <a:t>Cảm ơn những người tình nguyện đã trình bày, và mọi người đã nộp slide, trước khi bắt đầu bài kiểm tra.</a:t>
-            </a:r>
-          </a:p>
-          <a:p>
-            <a:r>
-              <a:rPr lang="en-US" sz="1400" b="0" dirty="0"/>
-              <a:t>Dán đường dẫn bài kiểm tra cuối khóa và phiếu đánh giá vào khung chat.</a:t>
+              <a:t>Dán link bài kiểm tra cuối khóa và phiếu đánh giá vào chat.</a:t>
             </a:r>
           </a:p>
         </p:txBody>
@@ -4734,19 +4434,13 @@
           <a:p>
             <a:r>
               <a:rPr lang="en-US" sz="1400" b="0" dirty="0"/>
-              <a:t>Bài kiểm tra cuối khóa (22:15-22:23), cùng Google Form như Buổi 1. Họ và tên dùng để ghép hai lần làm bài.</a:t>
+              <a:t>Cùng Google Form như Buổi 1. Họ và tên dùng để ghép hai lần làm bài. Học viên không thấy điểm.</a:t>
             </a:r>
           </a:p>
           <a:p>
             <a:r>
               <a:rPr lang="en-US" sz="1400" b="0" dirty="0"/>
-              <a:t>Giảng viên xem kết quả ngay trong thẻ Câu trả lời (Responses) và bảng kết quả liên kết. Học viên không thấy điểm.</a:t>
-            </a:r>
-          </a:p>
-          <a:p>
-            <a:r>
-              <a:rPr lang="en-US" sz="1400" b="0" dirty="0"/>
-              <a:t>Sau đó: báo cáo mức thay đổi điểm trung bình trước/sau trong báo cáo khóa học (đáp án: Course/Assessment).</a:t>
+              <a:t>Thời gian: 8 phút.</a:t>
             </a:r>
           </a:p>
         </p:txBody>
@@ -4827,13 +4521,13 @@
           <a:p>
             <a:r>
               <a:rPr lang="en-US" sz="1400" b="0" dirty="0"/>
-              <a:t>Những gì đã xây dựng (1 phút). Mỗi học viên có một đề cương có thể nộp hội đồng đạo đức và một bản thảo bài báo. CRF = phiếu thu thập dữ liệu.</a:t>
+              <a:t>Hỏi hai ba người: bước tiếp theo với đề cương của bạn là gì?</a:t>
             </a:r>
           </a:p>
           <a:p>
             <a:r>
               <a:rPr lang="en-US" sz="1400" b="0" dirty="0"/>
-              <a:t>Hỏi hai ba người: bước tiếp theo với đề cương của bạn là gì?</a:t>
+              <a:t>Thời gian: 1 phút.</a:t>
             </a:r>
           </a:p>
         </p:txBody>
@@ -4914,7 +4608,13 @@
           <a:p>
             <a:r>
               <a:rPr lang="en-US" sz="1400" b="0" dirty="0"/>
-              <a:t>Đánh giá (2 phút). Phiếu trực tuyến ngắn, ẩn danh, đường link trong chat. Câu hỏi về tốc độ học là quan trọng nhất.</a:t>
+              <a:t>Phiếu ẩn danh, link trong chat. Câu hỏi về tốc độ học là quan trọng nhất.</a:t>
+            </a:r>
+          </a:p>
+          <a:p>
+            <a:r>
+              <a:rPr lang="en-US" sz="1400" b="0" dirty="0"/>
+              <a:t>Thời gian: 2 phút.</a:t>
             </a:r>
           </a:p>
         </p:txBody>
@@ -4995,37 +4695,25 @@
           <a:p>
             <a:r>
               <a:rPr lang="en-US" sz="1400" b="1" dirty="0"/>
-              <a:t>Ví dụ mẫu. Câu mở đầu mẫu (điều chỉnh, không chép nguyên):</a:t>
+              <a:t>Ví dụ mẫu cho Q1. Câu mẫu (điều chỉnh, không chép):</a:t>
             </a:r>
           </a:p>
           <a:p>
             <a:r>
               <a:rPr lang="en-US" sz="1400" b="0" dirty="0"/>
-              <a:t>Đoạn 1: 'Dịch truyền tĩnh mạch là nền tảng điều trị sớm nhiễm khuẩn huyết, nhưng cân bằng dịch dương tích lũy có liên quan với tử vong cao hơn trong nhiều nghiên cứu quan sát [TLTK].'</a:t>
+              <a:t>Đoạn 2: 'Vì người bệnh nặng hơn được truyền nhiều dịch hơn, vẫn chưa rõ mối liên quan này còn tồn tại sau khi hiệu chỉnh theo mức độ nặng hay không.'</a:t>
             </a:r>
           </a:p>
           <a:p>
             <a:r>
               <a:rPr lang="en-US" sz="1400" b="0" dirty="0"/>
-              <a:t>Đoạn 2: 'Vì người bệnh nặng hơn được truyền nhiều dịch hơn, chưa rõ mối liên quan này còn tồn tại sau khi hiệu chỉnh theo mức độ nặng hay không [TLTK].'</a:t>
+              <a:t>Đoạn 3: 'Do đó, chúng tôi đánh giá liệu cân bằng dịch dương đến ngày 3 có liên quan với tử vong 28 ngày hay không.'</a:t>
             </a:r>
           </a:p>
           <a:p>
             <a:r>
               <a:rPr lang="en-US" sz="1400" b="0" dirty="0"/>
-              <a:t>Đoạn 3: 'Vì vậy chúng tôi đánh giá liệu cân bằng dịch dương tích lũy đến ngày ICU thứ 3 có liên quan với tử vong 28 ngày ở người lớn nhiễm khuẩn huyết, trước và sau khi hiệu chỉnh theo mức độ nặng.'</a:t>
-            </a:r>
-          </a:p>
-          <a:p>
-            <a:r>
-              <a:rPr lang="en-US" sz="1400" b="0" dirty="0"/>
-              <a:t>Tài liệu: học viên dùng tài liệu đã tìm ở Buổi 1-2 cùng Bài 1 và 2.</a:t>
-            </a:r>
-          </a:p>
-          <a:p>
-            <a:r>
-              <a:rPr lang="en-US" sz="1400" b="0" dirty="0"/>
-              <a:t>Lưu ý: nhiễu do chỉ định (Buổi 4) chính là khoảng trống. Đó là lý do nghiên cứu đáng làm.</a:t>
+              <a:t>Khoảng trống chính là nhiễu do chỉ định ở Buổi 4.</a:t>
             </a:r>
           </a:p>
         </p:txBody>
@@ -5106,13 +4794,25 @@
           <a:p>
             <a:r>
               <a:rPr lang="en-US" sz="1400" b="0" dirty="0"/>
-              <a:t>Bình duyệt (2 phút). Đây là bài về nhà cá nhân. Hạn nộp bản nháp là 23:59 tối nay. Trong vòng 2 ngày, trưởng khóa học gửi cho mỗi học viên bản nháp của một bạn để bình duyệt (theo một danh sách đơn giản để mỗi bản nháp được bình duyệt đúng một lần, nếu được thì khác câu hỏi), qua email hoặc thư mục khóa học. Báo cáo bình duyệt nộp trong vòng 1 tuần. Bản sửa và thư phản hồi trong vòng 2 tuần.</a:t>
+              <a:t>Mỗi bản nháp được bình duyệt một lần. Người bình duyệt được phân công ngẫu nhiên và công bố ở Buổi 7.</a:t>
             </a:r>
           </a:p>
           <a:p>
             <a:r>
               <a:rPr lang="en-US" sz="1400" b="0" dirty="0"/>
-              <a:t>Bình duyệt theo Course/Assignment/peer_review_instructions.md và bảng kiểm 10 câu hỏi ở 8.3. Tác giả trả lời bằng Course/Templates/Response_to_Reviewers_Template.</a:t>
+              <a:t>Nộp bài qua email tới myluong1710@gmail.com. Báo cáo bình duyệt nộp sau Buổi 8 hai tuần. Bản sửa phần Kết quả và thư phản hồi nộp sau khi nhận bình duyệt bốn tuần.</a:t>
+            </a:r>
+          </a:p>
+          <a:p>
+            <a:r>
+              <a:rPr lang="en-US" sz="1400" b="0" dirty="0"/>
+              <a:t>Tài liệu: Peer_Review_Instructions_VN và Response_to_Reviewers_Template_VN.</a:t>
+            </a:r>
+          </a:p>
+          <a:p>
+            <a:r>
+              <a:rPr lang="en-US" sz="1400" b="0" dirty="0"/>
+              <a:t>Thời gian: 2 phút.</a:t>
             </a:r>
           </a:p>
         </p:txBody>
@@ -5199,13 +4899,13 @@
           <a:p>
             <a:r>
               <a:rPr lang="en-US" sz="1400" b="0" dirty="0"/>
-              <a:t>Cấp độ 2: mô hình thống kê bằng R (tuyến tính, logistic, mô hình đếm và Cox) kèm một dự án phân tích cá nhân. Cấp độ 3: phương pháp nâng cao, theo yêu cầu. Chi tiết trong Course_Levels/.</a:t>
+              <a:t>Gửi thông tin liên hệ của giảng viên vào chat.</a:t>
             </a:r>
           </a:p>
           <a:p>
             <a:r>
               <a:rPr lang="en-US" sz="1400" b="0" dirty="0"/>
-              <a:t>Gửi thông tin liên hệ của giảng viên vào chat.</a:t>
+              <a:t>Thời gian: 2 phút.</a:t>
             </a:r>
           </a:p>
         </p:txBody>
@@ -5286,7 +4986,7 @@
           <a:p>
             <a:r>
               <a:rPr lang="en-US" sz="1400" b="0" dirty="0"/>
-              <a:t>Cảm ơn lãnh đạo khoa, ban tổ chức và các học viên. Nếu mọi người đồng ý, chụp ảnh màn hình cả lớp khi bật camera.</a:t>
+              <a:t>Cảm ơn lãnh đạo, ban tổ chức và học viên. Nếu mọi người đồng ý, chụp ảnh màn hình cả lớp khi bật camera.</a:t>
             </a:r>
           </a:p>
         </p:txBody>
@@ -5367,7 +5067,7 @@
           <a:p>
             <a:r>
               <a:rPr lang="en-US" sz="1400" b="0" dirty="0"/>
-              <a:t>Slide bản quyền. Để trên màn hình khi học viên rời phòng họp.</a:t>
+              <a:t>Để trên màn hình khi học viên rời phòng họp.</a:t>
             </a:r>
           </a:p>
         </p:txBody>
@@ -5448,25 +5148,19 @@
           <a:p>
             <a:r>
               <a:rPr lang="en-US" sz="1400" b="0" dirty="0"/>
-              <a:t>Ý chính: phần bàn luận tốt đi qua sáu bước theo thứ tự: trả lời câu hỏi. So sánh với nghiên cứu khác và giải thích vì sao khác. Giải thích cơ chế ngắn gọn. Nêu hạn chế cụ thể, kèm hướng sai lệch và cách khắc phục. Nêu hàm ý cho thực hành và nghiên cứu, có ghi rõ. Kết luận cùng thông điệp với tóm tắt và tiêu đề.</a:t>
+              <a:t>Sáu bước theo thứ tự: trả lời, so sánh, giải thích, hạn chế kèm chiều hướng ảnh hưởng, ý nghĩa, kết luận.</a:t>
             </a:r>
           </a:p>
           <a:p>
             <a:r>
               <a:rPr lang="en-US" sz="1400" b="0" dirty="0"/>
-              <a:t>Bài 1 làm tốt phần lớn: câu đầu trả lời câu hỏi chính (chú giải #36). So sánh với các thử nghiệm CLASSIC và POINCARE-2 giải thích vì sao kết quả khác (#37). Hạn chế cụ thể, có cơ chế và cách khắc phục (#38, #39). Kết luận khớp với tóm tắt (#44). Điểm yếu: 'có lẽ sẽ có lợi' là suy đoán không có dữ liệu (#46).</a:t>
+              <a:t>Bài 1 trả lời ngay câu đầu. Bài 2 bỏ sót sai lệch người sống sót trong phần hạn chế.</a:t>
             </a:r>
           </a:p>
           <a:p>
             <a:r>
               <a:rPr lang="en-US" sz="1400" b="0" dirty="0"/>
-              <a:t>Bài 2: cơ chế trong một đoạn với mô hình bốn giai đoạn dịch (#34). Phần so sánh khép lại vòng với các nghiên cứu mâu thuẫn từ phần đặt vấn đề (#35). Nhưng phần hạn chế bỏ sót sai lệch người sống sót, mất cân bằng lactat còn lại và nhiễu do chỉ định (#36).</a:t>
-            </a:r>
-          </a:p>
-          <a:p>
-            <a:r>
-              <a:rPr lang="en-US" sz="1400" b="0" dirty="0"/>
-              <a:t>Bình chọn: người viết lần đầu thường bỏ qua bước nào? Đáp án: hướng của hạn chế, tức là nói rõ sai lệch làm tác động trông lớn hơn hay nhỏ hơn.</a:t>
+              <a:t>Thăm dò: người mới viết hay bỏ bước nào? Kỳ vọng: chiều hướng ảnh hưởng của từng hạn chế.</a:t>
             </a:r>
           </a:p>
         </p:txBody>
@@ -5547,19 +5241,19 @@
           <a:p>
             <a:r>
               <a:rPr lang="en-US" sz="1400" b="0" dirty="0"/>
-              <a:t>Ví dụ mẫu (sáu bước, mỗi bước một câu, số liệu từ key_results.md, dữ liệu mô phỏng). OR = tỷ số chênh. HR = tỷ số nguy cơ tức thời. KTC = khoảng tin cậy.</a:t>
+              <a:t>Sáu bước, mỗi bước một câu, số liệu từ gói kết quả Q1 (mô phỏng).</a:t>
             </a:r>
           </a:p>
           <a:p>
             <a:r>
               <a:rPr lang="en-US" sz="1400" b="0" dirty="0"/>
-              <a:t>1 Trả lời: OR hiệu chỉnh 1.62 (KTC 95% 1.02 đến 2.59). 2 So sánh: Bài 2 có HR ngày 2 là 2.13 (1.48 đến 3.06). 3 Giải thích: OR thô 2.49 giảm còn 1.62 sau hiệu chỉnh (nhiễu do chỉ định). 4 Hạn chế: nhiễu còn sót, quan hệ nhân quả ngược (người bệnh đang xấu đi tích dịch), người bệnh tử vong trước ngày 3. HR Cox hiệu chỉnh 1.46 có KTC chạm 1.00. 5 Hàm ý: không có cơ sở hạn chế dịch. Cần thử nghiệm như Bài 1. 6 Kết luận: 'có liên quan với'.</a:t>
+              <a:t>Tương tác với suy tim (OR 4.39 so với 1.29) là giả thuyết, không phải phát hiện.</a:t>
             </a:r>
           </a:p>
           <a:p>
             <a:r>
               <a:rPr lang="en-US" sz="1400" b="0" dirty="0"/>
-              <a:t>Ý tùy chọn cho người chọn Q1: mối liên quan có vẻ mạnh hơn ở người bệnh suy tim (OR hiệu chỉnh 4.39 so với 1.29, p tương tác 0.031, chỉ 90 người bệnh). Đây là giả thuyết, không phải phát hiện.</a:t>
+              <a:t>Kết luận dùng cùng động từ với mục tiêu và tên bài: 'có liên quan với'.</a:t>
             </a:r>
           </a:p>
         </p:txBody>
@@ -5640,25 +5334,19 @@
           <a:p>
             <a:r>
               <a:rPr lang="en-US" sz="1400" b="0" dirty="0"/>
-              <a:t>Hình cho thấy ba ước lượng từ gói kết quả Q1 (Bảng 6): thô (n = 618), hiệu chỉnh các trường hợp đầy đủ (n = 527) và hiệu chỉnh sau quy gán đa bội (n = 620).</a:t>
+              <a:t>Thô 2.49, hiệu chỉnh 1.62, quy gán 1.70. Mức giảm là bài học của Buổi 4 hiện ra trước mắt.</a:t>
             </a:r>
           </a:p>
           <a:p>
             <a:r>
               <a:rPr lang="en-US" sz="1400" b="0" dirty="0"/>
-              <a:t>Ý chính: việc giảm từ 2.49 xuống 1.62 là bài học Buổi 4 hiện ra trước mắt: người bệnh nặng hơn được truyền nhiều dịch hơn và tử vong nhiều hơn. Ước lượng quy gán gần với ước lượng các trường hợp đầy đủ, nên lactat bị thiếu không làm đổi kết luận.</a:t>
+              <a:t>KTC đã hiệu chỉnh bắt đầu từ 1.02: 'vẫn còn một mối liên quan vừa phải'.</a:t>
             </a:r>
           </a:p>
           <a:p>
             <a:r>
               <a:rPr lang="en-US" sz="1400" b="0" dirty="0"/>
-              <a:t>KTC hiệu chỉnh bắt đầu từ 1.02, vừa trên 1. Câu chừng mực: 'vẫn còn mối liên quan ở mức vừa phải'.</a:t>
-            </a:r>
-          </a:p>
-          <a:p>
-            <a:r>
-              <a:rPr lang="en-US" sz="1400" b="0" dirty="0"/>
-              <a:t>Hỏi: nếu KTC hiệu chỉnh vượt qua 1 thì viết gì? Đáp án: 'không có bằng chứng rõ về mối liên quan sau hiệu chỉnh', không phải 'không có tác dụng'.</a:t>
+              <a:t>Hỏi: nếu KTC đã hiệu chỉnh cắt qua 1 thì sao? Kỳ vọng: 'không có bằng chứng rõ về mối liên quan sau hiệu chỉnh', không phải 'không có tác động'.</a:t>
             </a:r>
           </a:p>
         </p:txBody>
@@ -5739,25 +5427,25 @@
           <a:p>
             <a:r>
               <a:rPr lang="en-US" sz="1400" b="0" dirty="0"/>
-              <a:t>Ý chính: độ mạnh của động từ là một khẳng định. Diễn giải quá mức (kết luận vượt quá dữ liệu) là một trong những lý do bị từ chối thường gặp nhất.</a:t>
+              <a:t>Độ mạnh của động từ là một khẳng định. Đọc thang từ dưới lên.</a:t>
             </a:r>
           </a:p>
           <a:p>
             <a:r>
               <a:rPr lang="en-US" sz="1400" b="0" dirty="0"/>
-              <a:t>Đọc thang từ dưới lên: nghiên cứu mô tả 'ghi nhận'. Nghiên cứu thuần tập và bệnh–chứng thấy một yếu tố 'có liên quan với' kết cục. Bằng chứng quan sát mạnh cộng lập luận nhân quả có thể nói 'có thể góp phần'. Thử nghiệm ngẫu nhiên được nói 'làm giảm' hoặc 'không làm giảm'. 'Gây ra' hay 'chứng minh' cần nhiều thử nghiệm lớn thống nhất.</a:t>
+              <a:t>Không bao giờ: 'xu hướng' cho p = 0.42 (Bài 1), 'tác động' trong thuần tập (Bài 2), 'đầu tiên' hay 'mới' khi chưa kiểm tra.</a:t>
             </a:r>
           </a:p>
           <a:p>
             <a:r>
               <a:rPr lang="en-US" sz="1400" b="0" dirty="0"/>
-              <a:t>Không bao giờ: 'xu hướng không có ý nghĩa' với p = 0.42 (Bài 1, trang 10, chú giải #41). 'Không khác biệt' khi nghiên cứu quá nhỏ (hãy nói 'không có bằng chứng về khác biệt', #29). 'Đầu tiên', 'chưa từng', 'mới' khi chưa kiểm chứng ('cân bằng dịch thấp nhất từng được công bố', #40). 'Tác động', 'không tác động', 'chứng tỏ' trong nghiên cứu quan sát (Bài 2, #1, #27, #28). 'So sánh đáng tin cậy nhất' (#32). Xếp hạng HR từ các nghiên cứu thuần tập khác nhau thành 'nguy cơ cao nhất' mà không có kiểm định (#37).</a:t>
+              <a:t>Các từ này cũng quan trọng trong phần Kết quả.</a:t>
             </a:r>
           </a:p>
           <a:p>
             <a:r>
               <a:rPr lang="en-US" sz="1400" b="0" dirty="0"/>
-              <a:t>Hỏi (mời hai ba người trả lời, bật micro): viết lại câu 'cân bằng dịch dương làm tăng tử vong' cho Bài 2. Đáp án: 'cân bằng dịch dương vào ngày ICU thứ 2 có liên quan với tử vong 28 ngày cao hơn'.</a:t>
+              <a:t>Hỏi: viết lại câu 'cân bằng dịch dương làm tăng tử vong' cho Bài 2.</a:t>
             </a:r>
           </a:p>
         </p:txBody>
@@ -8838,7 +8526,7 @@
                 <a:latin typeface="Arial"/>
                 <a:cs typeface="Arial"/>
               </a:rPr>
-              <a:t>Buổi 8 · Công bố: hoàn thiện bài báo, gửi đăng, trình bày</a:t>
+              <a:t>Buổi 8 · Công bố: hoàn thiện phần Kết quả, gửi đăng, trình bày</a:t>
             </a:r>
           </a:p>
         </p:txBody>
@@ -8950,7 +8638,7 @@
                 <a:latin typeface="Arial"/>
                 <a:cs typeface="Arial"/>
               </a:rPr>
-              <a:t>19:35  8.1  Viết bài báo (II): Đặt vấn đề, Bàn luận, Tóm tắt, Tiêu đề</a:t>
+              <a:t>19:35  8.1  Viết bài báo (II): các phần không bắt buộc và tên bài</a:t>
             </a:r>
           </a:p>
           <a:p>
@@ -8969,7 +8657,7 @@
                 <a:latin typeface="Arial"/>
                 <a:cs typeface="Arial"/>
               </a:rPr>
-              <a:t>20:00  Thực hành bản thảo 2: cả lớp làm Q1, rồi mỗi người tự viết</a:t>
+              <a:t>20:00  Thực hành bản thảo 2: hoàn thiện phần Kết quả</a:t>
             </a:r>
           </a:p>
           <a:p>
@@ -11951,7 +11639,7 @@
                 <a:latin typeface="Arial"/>
                 <a:cs typeface="Arial"/>
               </a:rPr>
-              <a:t>Hoàn thiện bản nháp: cả lớp cùng viết, rồi mỗi người tự viết</a:t>
+              <a:t>Hoàn thiện phần Kết quả: cả lớp cùng làm, rồi mỗi người tự làm</a:t>
             </a:r>
           </a:p>
           <a:p>
@@ -11969,7 +11657,7 @@
                 <a:latin typeface="Arial"/>
                 <a:cs typeface="Arial"/>
               </a:rPr>
-              <a:t>22 phút cả lớp cùng soạn Q1, rồi 8 phút cho mục tiêu và tiêu đề của riêng bạn</a:t>
+              <a:t>22 phút cho bản nháp Q1 của lớp, rồi 8 phút cho bản nháp và tên bài của riêng bạn</a:t>
             </a:r>
           </a:p>
         </p:txBody>
@@ -12130,14 +11818,14 @@
               <a:buNone/>
             </a:pPr>
             <a:r>
-              <a:rPr lang="en-US" sz="2800" b="1" dirty="0">
+              <a:rPr lang="en-US" sz="2400" b="1" dirty="0">
                 <a:solidFill>
                   <a:srgbClr val="0D7377"/>
                 </a:solidFill>
                 <a:latin typeface="Arial"/>
                 <a:cs typeface="Arial"/>
               </a:rPr>
-              <a:t>Thực hành bản thảo 2, phần 1: cả lớp hoàn thiện Q1</a:t>
+              <a:t>Thực hành bản thảo 2, phần 1: cả lớp hoàn thiện phần Kết quả Q1</a:t>
             </a:r>
           </a:p>
         </p:txBody>
@@ -12257,7 +11945,7 @@
                 <a:latin typeface="Arial"/>
                 <a:cs typeface="Arial"/>
               </a:rPr>
-              <a:t>Đặt vấn đề (6 phút): ba đoạn. Khi được mời, bạn nói câu mình đề xuất</a:t>
+              <a:t>Kiểm số (6 phút): đối chiếu mọi con số với gói kết quả Q1</a:t>
             </a:r>
           </a:p>
           <a:p>
@@ -12282,7 +11970,7 @@
                 <a:latin typeface="Arial"/>
                 <a:cs typeface="Arial"/>
               </a:rPr>
-              <a:t>Bàn luận (9 phút): sáu bước, mỗi bước một hai câu</a:t>
+              <a:t>Bảng và hình (5 phút): có tự đọc hiểu được không?</a:t>
             </a:r>
           </a:p>
           <a:p>
@@ -12307,7 +11995,7 @@
                 <a:latin typeface="Arial"/>
                 <a:cs typeface="Arial"/>
               </a:rPr>
-              <a:t>Tóm tắt (5 phút): chép số liệu từ phần Kết quả của lớp</a:t>
+              <a:t>Từ ngữ (5 phút): không bình luận, không 'xu hướng', không động từ nhân quả</a:t>
             </a:r>
           </a:p>
           <a:p>
@@ -12332,7 +12020,32 @@
                 <a:latin typeface="Arial"/>
                 <a:cs typeface="Arial"/>
               </a:rPr>
-              <a:t>Tiêu đề và kiểm tra động từ (2 phút): mọi 'gây ra' hay 'tác động' đổi thành 'có liên quan với'</a:t>
+              <a:t>Tên bài dự kiến (3 phút): nêu thiết kế, dùng 'có liên quan'</a:t>
+            </a:r>
+          </a:p>
+          <a:p>
+            <a:pPr marL="380000" indent="-380000" algn="l">
+              <a:lnSpc>
+                <a:spcPct val="104000"/>
+              </a:lnSpc>
+              <a:spcBef>
+                <a:spcPts val="450"/>
+              </a:spcBef>
+              <a:buClr>
+                <a:srgbClr val="0D7377"/>
+              </a:buClr>
+              <a:buFont typeface="Arial"/>
+              <a:buChar char="•"/>
+            </a:pPr>
+            <a:r>
+              <a:rPr lang="en-US" sz="1650" dirty="0">
+                <a:solidFill>
+                  <a:srgbClr val="000000"/>
+                </a:solidFill>
+                <a:latin typeface="Arial"/>
+                <a:cs typeface="Arial"/>
+              </a:rPr>
+              <a:t>Các phần không bắt buộc (3 phút): mỗi phần sẽ bổ sung gì</a:t>
             </a:r>
           </a:p>
         </p:txBody>
@@ -12346,7 +12059,7 @@
         <p:spPr>
           <a:xfrm>
             <a:off x="7423760" y="1720000"/>
-            <a:ext cx="4311040" cy="1453655"/>
+            <a:ext cx="4311040" cy="1691780"/>
           </a:xfrm>
           <a:prstGeom prst="roundRect">
             <a:avLst>
@@ -12398,7 +12111,7 @@
                 <a:latin typeface="Arial"/>
                 <a:cs typeface="Arial"/>
               </a:rPr>
-              <a:t>Bản nháp Q1 của lớp từ Buổi 7 (PDF)</a:t>
+              <a:t>Phần Kết quả Q1 của lớp từ Buổi 7 (PDF)</a:t>
             </a:r>
           </a:p>
           <a:p>
@@ -12440,7 +12153,7 @@
                 <a:latin typeface="Arial"/>
                 <a:cs typeface="Arial"/>
               </a:rPr>
-              <a:t>Các ví dụ mẫu (slide)</a:t>
+              <a:t>Bảng kiểm trong Peer_Review_Instructions_VN</a:t>
             </a:r>
           </a:p>
         </p:txBody>
@@ -12497,7 +12210,7 @@
                 <a:latin typeface="Arial"/>
                 <a:cs typeface="Arial"/>
               </a:rPr>
-              <a:t>Bản nháp Q1 hoàn chỉnh của lớp, gửi dạng PDF sau buổi học</a:t>
+              <a:t>Phần Kết quả Q1 của lớp đã hoàn thiện, gửi dạng PDF sau buổi học</a:t>
             </a:r>
           </a:p>
         </p:txBody>
@@ -12665,7 +12378,7 @@
                 <a:latin typeface="Arial"/>
                 <a:cs typeface="Arial"/>
               </a:rPr>
-              <a:t>Thực hành bản thảo 2, phần 2: mục tiêu và tiêu đề của bạn</a:t>
+              <a:t>Thực hành bản thảo 2, phần 2: phần Kết quả và tên bài của bạn</a:t>
             </a:r>
           </a:p>
         </p:txBody>
@@ -12785,7 +12498,7 @@
                 <a:latin typeface="Arial"/>
                 <a:cs typeface="Arial"/>
               </a:rPr>
-              <a:t>Viết câu mục tiêu cho câu hỏi của bạn (Q1 đến Q5)</a:t>
+              <a:t>Áp dụng các bước kiểm tra trên cho bản nháp phần Kết quả của bạn</a:t>
             </a:r>
           </a:p>
           <a:p>
@@ -12810,7 +12523,7 @@
                 <a:latin typeface="Arial"/>
                 <a:cs typeface="Arial"/>
               </a:rPr>
-              <a:t>Viết tiêu đề: nêu thiết kế, 10-16 từ, dùng 'có liên quan'</a:t>
+              <a:t>Viết tên bài dự kiến: nêu thiết kế, 10-16 từ, dùng 'có liên quan'</a:t>
             </a:r>
           </a:p>
           <a:p>
@@ -12835,7 +12548,7 @@
                 <a:latin typeface="Arial"/>
                 <a:cs typeface="Arial"/>
               </a:rPr>
-              <a:t>Hai bạn tình nguyện đọc to tiêu đề. Giảng viên nhận xét hai tiêu đề</a:t>
+              <a:t>Hai bạn tình nguyện đọc to tên bài. Giảng viên nhận xét</a:t>
             </a:r>
           </a:p>
           <a:p>
@@ -12860,7 +12573,7 @@
                 <a:latin typeface="Arial"/>
                 <a:cs typeface="Arial"/>
               </a:rPr>
-              <a:t>Tối nay: thêm Đặt vấn đề, Bàn luận và Tóm tắt. Nộp trước 23:59</a:t>
+              <a:t>Tối nay: kiểm tra lần cuối, rồi gửi email trước 23:59</a:t>
             </a:r>
           </a:p>
         </p:txBody>
@@ -12874,7 +12587,7 @@
         <p:spPr>
           <a:xfrm>
             <a:off x="7423760" y="1720000"/>
-            <a:ext cx="4311040" cy="1968005"/>
+            <a:ext cx="4311040" cy="2206130"/>
           </a:xfrm>
           <a:prstGeom prst="roundRect">
             <a:avLst>
@@ -12926,7 +12639,7 @@
                 <a:latin typeface="Arial"/>
                 <a:cs typeface="Arial"/>
               </a:rPr>
-              <a:t>Bản nháp hoàn chỉnh, khoảng 2000 từ</a:t>
+              <a:t>Phần Kết quả, tên bài dự kiến, Bảng 1, một bảng hoặc hình chính</a:t>
             </a:r>
           </a:p>
           <a:p>
@@ -12968,7 +12681,7 @@
                 <a:latin typeface="Arial"/>
                 <a:cs typeface="Arial"/>
               </a:rPr>
-              <a:t>Thư mục khóa học hoặc email cho trưởng khóa học</a:t>
+              <a:t>Gửi email cho người bình duyệt và trưởng khóa học</a:t>
             </a:r>
           </a:p>
           <a:p>
@@ -12989,7 +12702,7 @@
                 <a:latin typeface="Arial"/>
                 <a:cs typeface="Arial"/>
               </a:rPr>
-              <a:t>Sau đó là bình duyệt (slide bế mạc)</a:t>
+              <a:t>Các phần không bắt buộc trong cùng tệp</a:t>
             </a:r>
           </a:p>
         </p:txBody>
@@ -13046,7 +12759,7 @@
                 <a:latin typeface="Arial"/>
                 <a:cs typeface="Arial"/>
               </a:rPr>
-              <a:t>Câu mục tiêu và tiêu đề tạm của bạn. Bản nháp hoàn chỉnh nộp trước 23:59 tối nay</a:t>
+              <a:t>Tên bài dự kiến của bạn. Phần Kết quả gửi email trước 23:59 tối nay</a:t>
             </a:r>
           </a:p>
         </p:txBody>
@@ -20023,7 +19736,7 @@
                 <a:latin typeface="Arial"/>
                 <a:cs typeface="Arial"/>
               </a:rPr>
-              <a:t>Cùng câu hỏi lâm sàng (dịch truyền trong sốc nhiễm khuẩn), hai thiết kế. Cả hai tệp PDF: Course/Papers.</a:t>
+              <a:t>Cùng câu hỏi lâm sàng (dịch truyền trong sốc nhiễm khuẩn), hai thiết kế. Cả hai tệp PDF đã được gửi qua email.</a:t>
             </a:r>
           </a:p>
         </p:txBody>
@@ -20626,7 +20339,7 @@
                 <a:latin typeface="Arial"/>
                 <a:cs typeface="Arial"/>
               </a:rPr>
-              <a:t>Viết bài báo (II)</a:t>
+              <a:t>Viết bài báo (II): các phần không bắt buộc</a:t>
             </a:r>
           </a:p>
           <a:p>
@@ -20644,7 +20357,7 @@
                 <a:latin typeface="Arial"/>
                 <a:cs typeface="Arial"/>
               </a:rPr>
-              <a:t>Đặt vấn đề, Bàn luận, Tóm tắt và Tiêu đề, theo thứ tự đó</a:t>
+              <a:t>Đặt vấn đề, Bàn luận, Tóm tắt, và tên bài bạn cần có</a:t>
             </a:r>
           </a:p>
         </p:txBody>
@@ -23995,7 +23708,7 @@
                 <a:latin typeface="Arial"/>
                 <a:cs typeface="Arial"/>
               </a:rPr>
-              <a:t>RCT = thử nghiệm ngẫu nhiên có đối chứng. Số trang và chi tiết: Course/Resources/appraisal_instructor_guide.md</a:t>
+              <a:t>RCT = thử nghiệm ngẫu nhiên có đối chứng. Số trang và chi tiết: hướng dẫn thẩm định của giảng viên</a:t>
             </a:r>
           </a:p>
         </p:txBody>
@@ -24955,7 +24668,7 @@
                 <a:latin typeface="Arial"/>
                 <a:cs typeface="Arial"/>
               </a:rPr>
-              <a:t>Đề cương viết (tiêu chí 1-11, /70): mọi người. Tiêu chí 12-16 (/30): chỉ người trình bày. Thang chấm: Course/Assignment/proposal_rubric.md</a:t>
+              <a:t>Đề cương viết (tiêu chí 1-11, /70): mọi người. Tiêu chí 12-16 (/30): chỉ người trình bày. Thang chấm: Proposal_Rubric_VN (gửi qua email cùng hướng dẫn đề cương)</a:t>
             </a:r>
           </a:p>
         </p:txBody>
@@ -30388,7 +30101,7 @@
                 <a:latin typeface="Arial"/>
                 <a:cs typeface="Arial"/>
               </a:rPr>
-              <a:t>Tiếp theo: nộp đề cương và bản thảo, rồi bình duyệt bản nháp của một bạn.</a:t>
+              <a:t>Tiếp theo: nộp đề cương và phần Kết quả, rồi bình duyệt bản nháp của một bạn.</a:t>
             </a:r>
           </a:p>
         </p:txBody>
@@ -30706,7 +30419,7 @@
                 <a:latin typeface="Arial"/>
                 <a:cs typeface="Arial"/>
               </a:rPr>
-              <a:t>Sau khóa học: nộp bài, rồi bình duyệt bản thảo của một bạn</a:t>
+              <a:t>Sau khóa học: nộp bài, rồi bình duyệt phần Kết quả của một bạn</a:t>
             </a:r>
           </a:p>
           <a:p>
@@ -31822,7 +31535,7 @@
                 <a:latin typeface="Arial"/>
                 <a:cs typeface="Arial"/>
               </a:rPr>
-              <a:t>Phương pháp, Kết quả</a:t>
+              <a:t>Phần Kết quả</a:t>
             </a:r>
           </a:p>
           <a:p>
@@ -31843,7 +31556,7 @@
                 <a:latin typeface="Arial"/>
                 <a:cs typeface="Arial"/>
               </a:rPr>
-              <a:t>Đặt vấn đề, Bàn luận, Tóm tắt</a:t>
+              <a:t>Không bắt buộc: Phương pháp, Đặt vấn đề, Bàn luận, Tóm tắt</a:t>
             </a:r>
           </a:p>
         </p:txBody>
@@ -31958,7 +31671,7 @@
                 <a:latin typeface="Arial"/>
                 <a:cs typeface="Arial"/>
               </a:rPr>
-              <a:t>Bản thảo bài báo của chính bạn</a:t>
+              <a:t>Phần Kết quả của chính bạn</a:t>
             </a:r>
           </a:p>
         </p:txBody>
@@ -32013,7 +31726,7 @@
                 <a:latin typeface="Arial"/>
                 <a:cs typeface="Arial"/>
               </a:rPr>
-              <a:t>Mỗi bạn ra về với một đề cương nghiên cứu và một bản thảo bài báo.</a:t>
+              <a:t>Mỗi bạn ra về với một đề cương nghiên cứu và một phần Kết quả sẵn sàng để nộp.</a:t>
             </a:r>
           </a:p>
         </p:txBody>
@@ -33218,7 +32931,7 @@
                 <a:latin typeface="Arial"/>
                 <a:cs typeface="Arial"/>
               </a:rPr>
-              <a:t>Tối nay</a:t>
+              <a:t>Buổi 7</a:t>
             </a:r>
           </a:p>
         </p:txBody>
@@ -33267,9 +32980,82 @@
                 <a:latin typeface="Arial"/>
                 <a:cs typeface="Arial"/>
               </a:rPr>
-              <a:t>Nộp bản nháp hoàn chỉnh trước 23:59</a:t>
-            </a:r>
-          </a:p>
+              <a:t>Người bình duyệt được phân ngẫu nhiên</a:t>
+            </a:r>
+          </a:p>
+        </p:txBody>
+      </p:sp>
+      <p:sp>
+        <p:nvSpPr>
+          <p:cNvPr id="82" name="Step"/>
+          <p:cNvSpPr/>
+          <p:nvPr/>
+        </p:nvSpPr>
+        <p:spPr>
+          <a:xfrm>
+            <a:off x="3261600" y="1220000"/>
+            <a:ext cx="2864400" cy="760000"/>
+          </a:xfrm>
+          <a:prstGeom prst="chevron">
+            <a:avLst>
+              <a:gd name="adj" fmla="val 28000"/>
+            </a:avLst>
+          </a:prstGeom>
+          <a:solidFill>
+            <a:srgbClr val="0B376C"/>
+          </a:solidFill>
+          <a:ln>
+            <a:noFill/>
+          </a:ln>
+        </p:spPr>
+        <p:txBody>
+          <a:bodyPr wrap="square" lIns="200000" tIns="45720" rIns="200000" bIns="45720" rtlCol="0" anchor="ctr">
+            <a:normAutofit/>
+          </a:bodyPr>
+          <a:lstStyle/>
+          <a:p>
+            <a:pPr marL="0" indent="0" algn="ctr">
+              <a:buNone/>
+            </a:pPr>
+            <a:r>
+              <a:rPr lang="en-US" sz="1600" b="1" dirty="0">
+                <a:solidFill>
+                  <a:srgbClr val="FFFFFF"/>
+                </a:solidFill>
+                <a:latin typeface="Arial"/>
+                <a:cs typeface="Arial"/>
+              </a:rPr>
+              <a:t>Tối nay</a:t>
+            </a:r>
+          </a:p>
+        </p:txBody>
+      </p:sp>
+      <p:sp>
+        <p:nvSpPr>
+          <p:cNvPr id="83" name="StepText"/>
+          <p:cNvSpPr/>
+          <p:nvPr/>
+        </p:nvSpPr>
+        <p:spPr>
+          <a:xfrm>
+            <a:off x="3301600" y="2140000"/>
+            <a:ext cx="2724400" cy="1336180"/>
+          </a:xfrm>
+          <a:prstGeom prst="rect">
+            <a:avLst/>
+          </a:prstGeom>
+          <a:solidFill>
+            <a:srgbClr val="EAF2F5"/>
+          </a:solidFill>
+          <a:ln>
+            <a:noFill/>
+          </a:ln>
+        </p:spPr>
+        <p:txBody>
+          <a:bodyPr wrap="square" lIns="110000" tIns="91440" rIns="110000" bIns="91440" rtlCol="0" anchor="ctr">
+            <a:normAutofit/>
+          </a:bodyPr>
+          <a:lstStyle/>
           <a:p>
             <a:pPr marL="0" indent="0" algn="ctr">
               <a:lnSpc>
@@ -33288,82 +33074,9 @@
                 <a:latin typeface="Arial"/>
                 <a:cs typeface="Arial"/>
               </a:rPr>
-              <a:t>Thư mục khóa học hoặc email</a:t>
-            </a:r>
-          </a:p>
-        </p:txBody>
-      </p:sp>
-      <p:sp>
-        <p:nvSpPr>
-          <p:cNvPr id="82" name="Step"/>
-          <p:cNvSpPr/>
-          <p:nvPr/>
-        </p:nvSpPr>
-        <p:spPr>
-          <a:xfrm>
-            <a:off x="3261600" y="1220000"/>
-            <a:ext cx="2864400" cy="760000"/>
-          </a:xfrm>
-          <a:prstGeom prst="chevron">
-            <a:avLst>
-              <a:gd name="adj" fmla="val 28000"/>
-            </a:avLst>
-          </a:prstGeom>
-          <a:solidFill>
-            <a:srgbClr val="0B376C"/>
-          </a:solidFill>
-          <a:ln>
-            <a:noFill/>
-          </a:ln>
-        </p:spPr>
-        <p:txBody>
-          <a:bodyPr wrap="square" lIns="200000" tIns="45720" rIns="200000" bIns="45720" rtlCol="0" anchor="ctr">
-            <a:normAutofit/>
-          </a:bodyPr>
-          <a:lstStyle/>
-          <a:p>
-            <a:pPr marL="0" indent="0" algn="ctr">
-              <a:buNone/>
-            </a:pPr>
-            <a:r>
-              <a:rPr lang="en-US" sz="1600" b="1" dirty="0">
-                <a:solidFill>
-                  <a:srgbClr val="FFFFFF"/>
-                </a:solidFill>
-                <a:latin typeface="Arial"/>
-                <a:cs typeface="Arial"/>
-              </a:rPr>
-              <a:t>2 ngày</a:t>
-            </a:r>
-          </a:p>
-        </p:txBody>
-      </p:sp>
-      <p:sp>
-        <p:nvSpPr>
-          <p:cNvPr id="83" name="StepText"/>
-          <p:cNvSpPr/>
-          <p:nvPr/>
-        </p:nvSpPr>
-        <p:spPr>
-          <a:xfrm>
-            <a:off x="3301600" y="2140000"/>
-            <a:ext cx="2724400" cy="1336180"/>
-          </a:xfrm>
-          <a:prstGeom prst="rect">
-            <a:avLst/>
-          </a:prstGeom>
-          <a:solidFill>
-            <a:srgbClr val="EAF2F5"/>
-          </a:solidFill>
-          <a:ln>
-            <a:noFill/>
-          </a:ln>
-        </p:spPr>
-        <p:txBody>
-          <a:bodyPr wrap="square" lIns="110000" tIns="91440" rIns="110000" bIns="91440" rtlCol="0" anchor="ctr">
-            <a:normAutofit/>
-          </a:bodyPr>
-          <a:lstStyle/>
+              <a:t>Email bản nháp phần Kết quả trước 23:59</a:t>
+            </a:r>
+          </a:p>
           <a:p>
             <a:pPr marL="0" indent="0" algn="ctr">
               <a:lnSpc>
@@ -33382,7 +33095,7 @@
                 <a:latin typeface="Arial"/>
                 <a:cs typeface="Arial"/>
               </a:rPr>
-              <a:t>Trưởng khóa học gửi cho bạn bản nháp của một bạn để bình duyệt</a:t>
+              <a:t>Gửi người bình duyệt và trưởng khóa học</a:t>
             </a:r>
           </a:p>
         </p:txBody>
@@ -33427,7 +33140,7 @@
                 <a:latin typeface="Arial"/>
                 <a:cs typeface="Arial"/>
               </a:rPr>
-              <a:t>Tuần 1</a:t>
+              <a:t>2 tuần</a:t>
             </a:r>
           </a:p>
         </p:txBody>
@@ -33497,7 +33210,7 @@
                 <a:latin typeface="Arial"/>
                 <a:cs typeface="Arial"/>
               </a:rPr>
-              <a:t>Dùng bảng kiểm 10 câu hỏi</a:t>
+              <a:t>Dùng bảng kiểm phần Kết quả</a:t>
             </a:r>
           </a:p>
         </p:txBody>
@@ -33542,7 +33255,7 @@
                 <a:latin typeface="Arial"/>
                 <a:cs typeface="Arial"/>
               </a:rPr>
-              <a:t>Tuần 2</a:t>
+              <a:t>4 tuần sau</a:t>
             </a:r>
           </a:p>
         </p:txBody>
@@ -33591,7 +33304,7 @@
                 <a:latin typeface="Arial"/>
                 <a:cs typeface="Arial"/>
               </a:rPr>
-              <a:t>Bản sửa và thư phản hồi</a:t>
+              <a:t>Bản sửa phần Kết quả</a:t>
             </a:r>
           </a:p>
           <a:p>
@@ -33612,7 +33325,7 @@
                 <a:latin typeface="Arial"/>
                 <a:cs typeface="Arial"/>
               </a:rPr>
-              <a:t>Dùng mẫu thư phản hồi ý kiến phản biện</a:t>
+              <a:t>Thư phản hồi ý kiến bình duyệt</a:t>
             </a:r>
           </a:p>
         </p:txBody>
@@ -33667,7 +33380,7 @@
                 <a:latin typeface="Arial"/>
                 <a:cs typeface="Arial"/>
               </a:rPr>
-              <a:t>Bài về nhà cá nhân: mỗi người bình duyệt một bản nháp và nhận một bản bình duyệt.</a:t>
+              <a:t>Mỗi người bình duyệt một bản nháp phần Kết quả và nhận một bản bình duyệt.</a:t>
             </a:r>
           </a:p>
         </p:txBody>
@@ -33997,7 +33710,7 @@
                 <a:latin typeface="Arial"/>
                 <a:cs typeface="Arial"/>
               </a:rPr>
-              <a:t>Đã nộp bản thảo</a:t>
+              <a:t>Đã nộp phần Kết quả</a:t>
             </a:r>
           </a:p>
         </p:txBody>

--- a/vi/files/slides/Session_8_VN.pptx
+++ b/vi/files/slides/Session_8_VN.pptx
@@ -34879,7 +34879,7 @@
         </p:nvSpPr>
         <p:spPr>
           <a:xfrm>
-            <a:off x="457200" y="1958552"/>
+            <a:off x="457200" y="1849015"/>
             <a:ext cx="3625866" cy="640000"/>
           </a:xfrm>
           <a:prstGeom prst="rect">
@@ -34922,8 +34922,8 @@
         </p:nvSpPr>
         <p:spPr>
           <a:xfrm>
-            <a:off x="457200" y="2598552"/>
-            <a:ext cx="3625866" cy="1874342"/>
+            <a:off x="457200" y="2489015"/>
+            <a:ext cx="3625866" cy="2202954"/>
           </a:xfrm>
           <a:prstGeom prst="rect">
             <a:avLst/>
@@ -35003,77 +35003,6 @@
               <a:t>Nộp bản nháp phần Kết quả trước 23:59 Chủ nhật 20/12</a:t>
             </a:r>
           </a:p>
-        </p:txBody>
-      </p:sp>
-      <p:sp>
-        <p:nvSpPr>
-          <p:cNvPr id="72" name="CardHead"/>
-          <p:cNvSpPr/>
-          <p:nvPr/>
-        </p:nvSpPr>
-        <p:spPr>
-          <a:xfrm>
-            <a:off x="4283066" y="1958552"/>
-            <a:ext cx="3625866" cy="640000"/>
-          </a:xfrm>
-          <a:prstGeom prst="rect">
-            <a:avLst/>
-          </a:prstGeom>
-          <a:solidFill>
-            <a:srgbClr val="0B376C"/>
-          </a:solidFill>
-          <a:ln>
-            <a:noFill/>
-          </a:ln>
-        </p:spPr>
-        <p:txBody>
-          <a:bodyPr wrap="square" lIns="91440" tIns="45720" rIns="91440" bIns="45720" rtlCol="0" anchor="ctr">
-            <a:normAutofit/>
-          </a:bodyPr>
-          <a:lstStyle/>
-          <a:p>
-            <a:pPr marL="0" indent="0" algn="ctr">
-              <a:buNone/>
-            </a:pPr>
-            <a:r>
-              <a:rPr lang="en-US" sz="1900" b="1" dirty="0">
-                <a:solidFill>
-                  <a:srgbClr val="FFFFFF"/>
-                </a:solidFill>
-                <a:latin typeface="Arial"/>
-                <a:cs typeface="Arial"/>
-              </a:rPr>
-              <a:t>Bộ công cụ của bạn</a:t>
-            </a:r>
-          </a:p>
-        </p:txBody>
-      </p:sp>
-      <p:sp>
-        <p:nvSpPr>
-          <p:cNvPr id="73" name="CardBody"/>
-          <p:cNvSpPr/>
-          <p:nvPr/>
-        </p:nvSpPr>
-        <p:spPr>
-          <a:xfrm>
-            <a:off x="4283066" y="2598552"/>
-            <a:ext cx="3625866" cy="1874342"/>
-          </a:xfrm>
-          <a:prstGeom prst="rect">
-            <a:avLst/>
-          </a:prstGeom>
-          <a:solidFill>
-            <a:srgbClr val="EAF2F5"/>
-          </a:solidFill>
-          <a:ln>
-            <a:noFill/>
-          </a:ln>
-        </p:spPr>
-        <p:txBody>
-          <a:bodyPr wrap="square" lIns="137160" tIns="91440" rIns="137160" bIns="91440" rtlCol="0" anchor="ctr">
-            <a:normAutofit/>
-          </a:bodyPr>
-          <a:lstStyle/>
           <a:p>
             <a:pPr marL="0" indent="0" algn="ctr">
               <a:lnSpc>
@@ -35092,9 +35021,80 @@
                 <a:latin typeface="Arial"/>
                 <a:cs typeface="Arial"/>
               </a:rPr>
-              <a:t>Slide, tài liệu, bảng thuật ngữ</a:t>
-            </a:r>
-          </a:p>
+              <a:t>Bình duyệt trước 30/12, bản sửa trước 9/1</a:t>
+            </a:r>
+          </a:p>
+        </p:txBody>
+      </p:sp>
+      <p:sp>
+        <p:nvSpPr>
+          <p:cNvPr id="72" name="CardHead"/>
+          <p:cNvSpPr/>
+          <p:nvPr/>
+        </p:nvSpPr>
+        <p:spPr>
+          <a:xfrm>
+            <a:off x="4283066" y="1849015"/>
+            <a:ext cx="3625866" cy="640000"/>
+          </a:xfrm>
+          <a:prstGeom prst="rect">
+            <a:avLst/>
+          </a:prstGeom>
+          <a:solidFill>
+            <a:srgbClr val="0B376C"/>
+          </a:solidFill>
+          <a:ln>
+            <a:noFill/>
+          </a:ln>
+        </p:spPr>
+        <p:txBody>
+          <a:bodyPr wrap="square" lIns="91440" tIns="45720" rIns="91440" bIns="45720" rtlCol="0" anchor="ctr">
+            <a:normAutofit/>
+          </a:bodyPr>
+          <a:lstStyle/>
+          <a:p>
+            <a:pPr marL="0" indent="0" algn="ctr">
+              <a:buNone/>
+            </a:pPr>
+            <a:r>
+              <a:rPr lang="en-US" sz="1900" b="1" dirty="0">
+                <a:solidFill>
+                  <a:srgbClr val="FFFFFF"/>
+                </a:solidFill>
+                <a:latin typeface="Arial"/>
+                <a:cs typeface="Arial"/>
+              </a:rPr>
+              <a:t>Bộ công cụ của bạn</a:t>
+            </a:r>
+          </a:p>
+        </p:txBody>
+      </p:sp>
+      <p:sp>
+        <p:nvSpPr>
+          <p:cNvPr id="73" name="CardBody"/>
+          <p:cNvSpPr/>
+          <p:nvPr/>
+        </p:nvSpPr>
+        <p:spPr>
+          <a:xfrm>
+            <a:off x="4283066" y="2489015"/>
+            <a:ext cx="3625866" cy="2202954"/>
+          </a:xfrm>
+          <a:prstGeom prst="rect">
+            <a:avLst/>
+          </a:prstGeom>
+          <a:solidFill>
+            <a:srgbClr val="EAF2F5"/>
+          </a:solidFill>
+          <a:ln>
+            <a:noFill/>
+          </a:ln>
+        </p:spPr>
+        <p:txBody>
+          <a:bodyPr wrap="square" lIns="137160" tIns="91440" rIns="137160" bIns="91440" rtlCol="0" anchor="ctr">
+            <a:normAutofit/>
+          </a:bodyPr>
+          <a:lstStyle/>
           <a:p>
             <a:pPr marL="0" indent="0" algn="ctr">
               <a:lnSpc>
@@ -35113,6 +35113,27 @@
                 <a:latin typeface="Arial"/>
                 <a:cs typeface="Arial"/>
               </a:rPr>
+              <a:t>Slide, tài liệu, bảng thuật ngữ</a:t>
+            </a:r>
+          </a:p>
+          <a:p>
+            <a:pPr marL="0" indent="0" algn="ctr">
+              <a:lnSpc>
+                <a:spcPct val="104000"/>
+              </a:lnSpc>
+              <a:spcBef>
+                <a:spcPts val="400"/>
+              </a:spcBef>
+              <a:buNone/>
+            </a:pPr>
+            <a:r>
+              <a:rPr lang="en-US" sz="1750" dirty="0">
+                <a:solidFill>
+                  <a:srgbClr val="000000"/>
+                </a:solidFill>
+                <a:latin typeface="Arial"/>
+                <a:cs typeface="Arial"/>
+              </a:rPr>
               <a:t>Mẫu cho mọi bước, từ đề cương đến thư trả lời phản biện</a:t>
             </a:r>
           </a:p>
@@ -35126,7 +35147,7 @@
         </p:nvSpPr>
         <p:spPr>
           <a:xfrm>
-            <a:off x="8108932" y="1958552"/>
+            <a:off x="8108932" y="1849015"/>
             <a:ext cx="3625866" cy="640000"/>
           </a:xfrm>
           <a:prstGeom prst="rect">
@@ -35169,8 +35190,8 @@
         </p:nvSpPr>
         <p:spPr>
           <a:xfrm>
-            <a:off x="8108932" y="2598552"/>
-            <a:ext cx="3625866" cy="1874342"/>
+            <a:off x="8108932" y="2489015"/>
+            <a:ext cx="3625866" cy="2202954"/>
           </a:xfrm>
           <a:prstGeom prst="rect">
             <a:avLst/>
